--- a/CostVision-Executive-Presentation.pptx
+++ b/CostVision-Executive-Presentation.pptx
@@ -21,6 +21,7 @@
     <p:sldId id="269" r:id="rId21"/>
     <p:sldId id="270" r:id="rId22"/>
     <p:sldId id="271" r:id="rId23"/>
+    <p:sldId id="272" r:id="rId24"/>
   </p:sldIdLst>
   <p:sldSz cx="12191695" cy="6858000" type="screen4x3"/>
   <p:notesSz cx="6858000" cy="9144000"/>
@@ -727,7 +728,7 @@
           <a:lstStyle/>
           <a:p>
             <a:r>
-              <a:t>This is the slide I most want to talk you through, because it's what's new this year and it's the honest answer to 'can I trust the number?' Earlier versions of this tool were confident and sometimes wrong. So I built a self-audit — a deterministic layer that re-checks every estimate against a list of mistakes I've actually seen it make. Did it treat a hollow part as a solid casting? Is the machining time longer than it would physically take to finish the part? Does the weight disagree with the CAD? When it finds one of those, it applies a bounded correction and shows its working. Crucially, the AI is never allowed to overrule the measured geometry — the geometry wins. Alongside that, the tool now learns. You can bulk-import your real supplier quotes, and it builds per-segment correction factors and a confidence band, so the estimate gets tighter as your own history grows. And the machine-sizing that used to be hard-coded for a couple of processes is now universal — it picks the right press or tonnage for the part across commodities. The right-hand side is the proof, and I'm deliberately showing you the failures. Five real automotive CAD parts, every one mis-costed on the first pass. A fuel tank that came out at two hundred and seventeen pounds because it was treated as a casting — the audit spotted it's a thin hollow part, re-routed it to blow moulding, and it dropped to twenty-five. A servo horn that priced from a solid billet at three hundred and thirty-three pounds, corrected to six forty on a net shape. A stub axle that was mis-classified until the audit forced it to forged steel. And a seat cross-member that used to crash the engine outright and now runs clean at a pound eleven. Underneath all of it: just over a thousand automated tests, the self-audit on every estimate, and the CAD engine shipping in a container we build-test in CI. That's what lets me stand here and say the number is defensible — it's checked, it's proven, and it's honest about what it got wrong.</a:t>
+              <a:t>This is the slide to slow down on if the room is new to the word 'agentic', because there are really two levels and people run them together. On the left is agentic AI in the everyday sense: the AI takes actions and uses tools, but you started the task and you stay in the loop. You describe a part and it builds the cost model; you upload a CAD file and it reads the geometry and picks the process; you open a part and it drafts the negotiation argument; you ask a question and it answers from our own rate data, with citations. Genuinely useful — but it's waiting for you to ask. On the right is the step that surprises people: autonomous agentic AI, where nobody is at the keyboard. A monitor runs on our server on a schedule, compares what we pay against what things should cost, and opens findings on its own — that's the half a million pounds a year it surfaced unattended in the demo. The self-audit re-checks every estimate for known mistakes and corrects them without being asked; the calibration keeps learning from logged quotes and watching for drift; the agent even re-prioritises its own queue toward the findings that actually convert to cash. The line at the bottom is the one I'd underline: the difference between the two columns is only who starts the action — in both, the human sets the boundaries and every action stays glass-box and auditable. Autonomy here never means the AI quietly sets a price; it means it does the watching for us, and shows its working the moment it finds something worth acting on.</a:t>
             </a:r>
           </a:p>
         </p:txBody>
@@ -797,7 +798,7 @@
           <a:lstStyle/>
           <a:p>
             <a:r>
-              <a:t>To make the last slide concrete, here's a spread of real outputs across the commodities on a luxury-SUV programme — every figure came out of the engine, not off a rate card. I won't read the table; I'd rather you notice the pattern in the two right-hand columns. Each part comes with an AI insight that points at the biggest lever and a DFM flag that tells you whether it's clean or needs attention. The machined bracket says process is forty-four percent, go near-net-shape and save eight pounds. The wiring harness says labour is over half, so it's an automation candidate. The sheet-metal door flags that blank nesting is under sixty-five percent. That's the whole pitch in one table: not just a price, but a costed price with a reason and a next action attached to it — consistently, across ten very different processes.</a:t>
+              <a:t>This is the slide I most want to talk you through, because it's what's new this year and it's the honest answer to 'can I trust the number?' Earlier versions of this tool were confident and sometimes wrong. So I built a self-audit — a deterministic layer that re-checks every estimate against a list of mistakes I've actually seen it make. Did it treat a hollow part as a solid casting? Is the machining time longer than it would physically take to finish the part? Does the weight disagree with the CAD? When it finds one of those, it applies a bounded correction and shows its working. Crucially, the AI is never allowed to overrule the measured geometry — the geometry wins. Alongside that, the tool now learns. You can bulk-import your real supplier quotes, and it builds per-segment correction factors and a confidence band, so the estimate gets tighter as your own history grows. And the machine-sizing that used to be hard-coded for a couple of processes is now universal — it picks the right press or tonnage for the part across commodities. The right-hand side is the proof, and I'm deliberately showing you the failures. Five real automotive CAD parts, every one mis-costed on the first pass. A fuel tank that came out at two hundred and seventeen pounds because it was treated as a casting — the audit spotted it's a thin hollow part, re-routed it to blow moulding, and it dropped to twenty-five. A servo horn that priced from a solid billet at three hundred and thirty-three pounds, corrected to six forty on a net shape. A stub axle that was mis-classified until the audit forced it to forged steel. And a seat cross-member that used to crash the engine outright and now runs clean at a pound eleven. Underneath all of it: just over a thousand automated tests, the self-audit on every estimate, and the CAD engine shipping in a container we build-test in CI. That's what lets me stand here and say the number is defensible — it's checked, it's proven, and it's honest about what it got wrong.</a:t>
             </a:r>
           </a:p>
         </p:txBody>
@@ -867,7 +868,7 @@
           <a:lstStyle/>
           <a:p>
             <a:r>
-              <a:t>A cost number that lives in one engineer's head isn't worth much, so this slide is about getting it out and shared. The Excel export is six sheets — not just the total, but the full build-up: material, every operation, the rate library snapshot, and a traceability sheet that records the assumptions and the AI notes with a version and date. That last sheet is what makes an estimate auditable months later. The PDF is the boardroom version, cover photo to DFM recommendations. And it's genuinely multi-user — scenarios live in a database with proper authentication, so the whole team works off one baseline instead of emailing spreadsheets around and losing track of which version is current. It scales from one engineer to a global team without changing how it works.</a:t>
+              <a:t>To make the last slide concrete, here's a spread of real outputs across the commodities on a luxury-SUV programme — every figure came out of the engine, not off a rate card. I won't read the table; I'd rather you notice the pattern in the two right-hand columns. Each part comes with an AI insight that points at the biggest lever and a DFM flag that tells you whether it's clean or needs attention. The machined bracket says process is forty-four percent, go near-net-shape and save eight pounds. The wiring harness says labour is over half, so it's an automation candidate. The sheet-metal door flags that blank nesting is under sixty-five percent. That's the whole pitch in one table: not just a price, but a costed price with a reason and a next action attached to it — consistently, across ten very different processes.</a:t>
             </a:r>
           </a:p>
         </p:txBody>
@@ -937,7 +938,7 @@
           <a:lstStyle/>
           <a:p>
             <a:r>
-              <a:t>Let me translate all of that into the numbers a manager actually cares about. Speed first: what took two to four weeks now takes minutes. That's the seventy-to-ninety percent time reduction, and it means engineers spend their day on decisions instead of spreadsheets. On accuracy, the models are calibrated to real shop-floor data and now corrected by the self-audit — which is exactly what tightens that plus-or-minus-eight-percent band over time. But the line that pays for the whole thing is negotiation power. When you walk into a supplier meeting with a defensible floor price, a fifteen-to-twenty-five percent reduction is a realistic ask — and the far-right stat makes it concrete: on five hundred million of spend, a three percent improvement is fifteen million pounds. This tool doesn't need to be perfect to pay for itself many times over; it needs to be defensible and fast, and it is both.</a:t>
+              <a:t>A cost number that lives in one engineer's head isn't worth much, so this slide is about getting it out and shared. The Excel export is six sheets — not just the total, but the full build-up: material, every operation, the rate library snapshot, and a traceability sheet that records the assumptions and the AI notes with a version and date. That last sheet is what makes an estimate auditable months later. The PDF is the boardroom version, cover photo to DFM recommendations. And it's genuinely multi-user — scenarios live in a database with proper authentication, so the whole team works off one baseline instead of emailing spreadsheets around and losing track of which version is current. It scales from one engineer to a global team without changing how it works.</a:t>
             </a:r>
           </a:p>
         </p:txBody>
@@ -963,6 +964,76 @@
 </file>
 
 <file path=ppt/notesSlides/notesSlide16.xml><?xml version="1.0" encoding="utf-8"?>
+<p:notes xmlns:a="http://schemas.openxmlformats.org/drawingml/2006/main" xmlns:p="http://schemas.openxmlformats.org/presentationml/2006/main" xmlns:r="http://schemas.openxmlformats.org/officeDocument/2006/relationships">
+  <p:cSld>
+    <p:spTree>
+      <p:nvGrpSpPr>
+        <p:cNvPr id="1" name=""/>
+        <p:cNvGrpSpPr/>
+        <p:nvPr/>
+      </p:nvGrpSpPr>
+      <p:grpSpPr>
+        <a:xfrm>
+          <a:off x="0" y="0"/>
+          <a:ext cx="0" cy="0"/>
+          <a:chOff x="0" y="0"/>
+          <a:chExt cx="0" cy="0"/>
+        </a:xfrm>
+      </p:grpSpPr>
+      <p:sp>
+        <p:nvSpPr>
+          <p:cNvPr id="2" name="Slide Image Placeholder 1"/>
+          <p:cNvSpPr>
+            <a:spLocks noGrp="1"/>
+          </p:cNvSpPr>
+          <p:nvPr>
+            <p:ph type="sldImg" idx="2"/>
+          </p:nvPr>
+        </p:nvSpPr>
+        <p:spPr/>
+      </p:sp>
+      <p:sp>
+        <p:nvSpPr>
+          <p:cNvPr id="3" name="Notes Placeholder 2"/>
+          <p:cNvSpPr>
+            <a:spLocks noGrp="1"/>
+          </p:cNvSpPr>
+          <p:nvPr>
+            <p:ph type="body" idx="3" sz="quarter"/>
+          </p:nvPr>
+        </p:nvSpPr>
+        <p:spPr/>
+        <p:txBody>
+          <a:bodyPr/>
+          <a:lstStyle/>
+          <a:p>
+            <a:r>
+              <a:t>Let me translate all of that into the numbers a manager actually cares about. Speed first: what took two to four weeks now takes minutes. That's the seventy-to-ninety percent time reduction, and it means engineers spend their day on decisions instead of spreadsheets. On accuracy, the models are calibrated to real shop-floor data and now corrected by the self-audit — which is exactly what tightens that plus-or-minus-eight-percent band over time. But the line that pays for the whole thing is negotiation power. When you walk into a supplier meeting with a defensible floor price, a fifteen-to-twenty-five percent reduction is a realistic ask — and the far-right stat makes it concrete: on five hundred million of spend, a three percent improvement is fifteen million pounds. This tool doesn't need to be perfect to pay for itself many times over; it needs to be defensible and fast, and it is both.</a:t>
+            </a:r>
+          </a:p>
+        </p:txBody>
+      </p:sp>
+      <p:sp>
+        <p:nvSpPr>
+          <p:cNvPr id="4" name="Slide Number Placeholder 3"/>
+          <p:cNvSpPr>
+            <a:spLocks noGrp="1"/>
+          </p:cNvSpPr>
+          <p:nvPr>
+            <p:ph type="sldNum" idx="5" sz="quarter"/>
+          </p:nvPr>
+        </p:nvSpPr>
+        <p:spPr/>
+      </p:sp>
+    </p:spTree>
+  </p:cSld>
+  <p:clrMapOvr>
+    <a:masterClrMapping/>
+  </p:clrMapOvr>
+</p:notes>
+</file>
+
+<file path=ppt/notesSlides/notesSlide17.xml><?xml version="1.0" encoding="utf-8"?>
 <p:notes xmlns:a="http://schemas.openxmlformats.org/drawingml/2006/main" xmlns:p="http://schemas.openxmlformats.org/presentationml/2006/main" xmlns:r="http://schemas.openxmlformats.org/officeDocument/2006/relationships">
   <p:cSld>
     <p:spTree>
@@ -5775,7 +5846,7 @@
                   <a:srgbClr val="5A6380"/>
                 </a:solidFill>
               </a:rPr>
-              <a:t>SLIDE 10 / 16</a:t>
+              <a:t>SLIDE 10 / 17</a:t>
             </a:r>
           </a:p>
         </p:txBody>
@@ -7056,7 +7127,7 @@
                   <a:srgbClr val="5A6380"/>
                 </a:solidFill>
               </a:rPr>
-              <a:t>SLIDE 11 / 16</a:t>
+              <a:t>SLIDE 11 / 17</a:t>
             </a:r>
           </a:p>
         </p:txBody>
@@ -9316,7 +9387,2005 @@
                   <a:srgbClr val="5A6380"/>
                 </a:solidFill>
               </a:rPr>
-              <a:t>SLIDE 12 / 16</a:t>
+              <a:t>SLIDE 12 / 17</a:t>
+            </a:r>
+          </a:p>
+        </p:txBody>
+      </p:sp>
+      <p:sp>
+        <p:nvSpPr>
+          <p:cNvPr id="4" name="TextBox 3"/>
+          <p:cNvSpPr txBox="1"/>
+          <p:nvPr/>
+        </p:nvSpPr>
+        <p:spPr>
+          <a:xfrm>
+            <a:off x="10454335" y="91440"/>
+            <a:ext cx="1463040" cy="320040"/>
+          </a:xfrm>
+          <a:prstGeom prst="rect">
+            <a:avLst/>
+          </a:prstGeom>
+          <a:noFill/>
+        </p:spPr>
+        <p:txBody>
+          <a:bodyPr wrap="square">
+            <a:spAutoFit/>
+          </a:bodyPr>
+          <a:lstStyle/>
+          <a:p>
+            <a:pPr algn="r"/>
+            <a:r>
+              <a:rPr sz="1100" b="1" i="0">
+                <a:solidFill>
+                  <a:srgbClr val="4F8EF7"/>
+                </a:solidFill>
+              </a:rPr>
+              <a:t>CostVision</a:t>
+            </a:r>
+          </a:p>
+        </p:txBody>
+      </p:sp>
+      <p:sp>
+        <p:nvSpPr>
+          <p:cNvPr id="5" name="Rectangle 4"/>
+          <p:cNvSpPr/>
+          <p:nvPr/>
+        </p:nvSpPr>
+        <p:spPr>
+          <a:xfrm>
+            <a:off x="0" y="475488"/>
+            <a:ext cx="12191695" cy="7315"/>
+          </a:xfrm>
+          <a:prstGeom prst="rect">
+            <a:avLst/>
+          </a:prstGeom>
+          <a:solidFill>
+            <a:srgbClr val="2A3045"/>
+          </a:solidFill>
+          <a:ln>
+            <a:noFill/>
+          </a:ln>
+        </p:spPr>
+        <p:style>
+          <a:lnRef idx="1">
+            <a:schemeClr val="accent1"/>
+          </a:lnRef>
+          <a:fillRef idx="3">
+            <a:schemeClr val="accent1"/>
+          </a:fillRef>
+          <a:effectRef idx="2">
+            <a:schemeClr val="accent1"/>
+          </a:effectRef>
+          <a:fontRef idx="minor">
+            <a:schemeClr val="lt1"/>
+          </a:fontRef>
+        </p:style>
+        <p:txBody>
+          <a:bodyPr rtlCol="0" anchor="ctr"/>
+          <a:lstStyle/>
+          <a:p>
+            <a:pPr algn="ctr"/>
+          </a:p>
+        </p:txBody>
+      </p:sp>
+      <p:sp>
+        <p:nvSpPr>
+          <p:cNvPr id="6" name="TextBox 5"/>
+          <p:cNvSpPr txBox="1"/>
+          <p:nvPr/>
+        </p:nvSpPr>
+        <p:spPr>
+          <a:xfrm>
+            <a:off x="457200" y="621792"/>
+            <a:ext cx="7315200" cy="256032"/>
+          </a:xfrm>
+          <a:prstGeom prst="rect">
+            <a:avLst/>
+          </a:prstGeom>
+          <a:noFill/>
+        </p:spPr>
+        <p:txBody>
+          <a:bodyPr wrap="square">
+            <a:spAutoFit/>
+          </a:bodyPr>
+          <a:lstStyle/>
+          <a:p>
+            <a:pPr algn="l"/>
+            <a:r>
+              <a:rPr sz="800" b="1" i="0">
+                <a:solidFill>
+                  <a:srgbClr val="4F8EF7"/>
+                </a:solidFill>
+              </a:rPr>
+              <a:t>THE CONCEPT · EXPLAINED</a:t>
+            </a:r>
+          </a:p>
+        </p:txBody>
+      </p:sp>
+      <p:sp>
+        <p:nvSpPr>
+          <p:cNvPr id="7" name="TextBox 6"/>
+          <p:cNvSpPr txBox="1"/>
+          <p:nvPr/>
+        </p:nvSpPr>
+        <p:spPr>
+          <a:xfrm>
+            <a:off x="457200" y="822960"/>
+            <a:ext cx="10972800" cy="548640"/>
+          </a:xfrm>
+          <a:prstGeom prst="rect">
+            <a:avLst/>
+          </a:prstGeom>
+          <a:noFill/>
+        </p:spPr>
+        <p:txBody>
+          <a:bodyPr wrap="square">
+            <a:spAutoFit/>
+          </a:bodyPr>
+          <a:lstStyle/>
+          <a:p>
+            <a:pPr algn="l"/>
+            <a:r>
+              <a:rPr sz="2600" b="1" i="0">
+                <a:solidFill>
+                  <a:srgbClr val="F0F2F8"/>
+                </a:solidFill>
+              </a:rPr>
+              <a:t>Agentic vs Autonomous Agentic AI — With Examples</a:t>
+            </a:r>
+          </a:p>
+        </p:txBody>
+      </p:sp>
+      <p:sp>
+        <p:nvSpPr>
+          <p:cNvPr id="8" name="TextBox 7"/>
+          <p:cNvSpPr txBox="1"/>
+          <p:nvPr/>
+        </p:nvSpPr>
+        <p:spPr>
+          <a:xfrm>
+            <a:off x="457200" y="1325880"/>
+            <a:ext cx="10972800" cy="347472"/>
+          </a:xfrm>
+          <a:prstGeom prst="rect">
+            <a:avLst/>
+          </a:prstGeom>
+          <a:noFill/>
+        </p:spPr>
+        <p:txBody>
+          <a:bodyPr wrap="square">
+            <a:spAutoFit/>
+          </a:bodyPr>
+          <a:lstStyle/>
+          <a:p>
+            <a:pPr algn="l"/>
+            <a:r>
+              <a:rPr sz="1200" b="0" i="0">
+                <a:solidFill>
+                  <a:srgbClr val="9AA3B8"/>
+                </a:solidFill>
+              </a:rPr>
+              <a:t>Two levels of "agentic": on the left the AI acts because you asked; on the right it acts on its own, unattended.</a:t>
+            </a:r>
+          </a:p>
+        </p:txBody>
+      </p:sp>
+      <p:sp>
+        <p:nvSpPr>
+          <p:cNvPr id="9" name="Rectangle 8"/>
+          <p:cNvSpPr/>
+          <p:nvPr/>
+        </p:nvSpPr>
+        <p:spPr>
+          <a:xfrm>
+            <a:off x="0" y="6446520"/>
+            <a:ext cx="12191695" cy="7315"/>
+          </a:xfrm>
+          <a:prstGeom prst="rect">
+            <a:avLst/>
+          </a:prstGeom>
+          <a:solidFill>
+            <a:srgbClr val="2A3045"/>
+          </a:solidFill>
+          <a:ln>
+            <a:noFill/>
+          </a:ln>
+        </p:spPr>
+        <p:style>
+          <a:lnRef idx="1">
+            <a:schemeClr val="accent1"/>
+          </a:lnRef>
+          <a:fillRef idx="3">
+            <a:schemeClr val="accent1"/>
+          </a:fillRef>
+          <a:effectRef idx="2">
+            <a:schemeClr val="accent1"/>
+          </a:effectRef>
+          <a:fontRef idx="minor">
+            <a:schemeClr val="lt1"/>
+          </a:fontRef>
+        </p:style>
+        <p:txBody>
+          <a:bodyPr rtlCol="0" anchor="ctr"/>
+          <a:lstStyle/>
+          <a:p>
+            <a:pPr algn="ctr"/>
+          </a:p>
+        </p:txBody>
+      </p:sp>
+      <p:sp>
+        <p:nvSpPr>
+          <p:cNvPr id="10" name="TextBox 9"/>
+          <p:cNvSpPr txBox="1"/>
+          <p:nvPr/>
+        </p:nvSpPr>
+        <p:spPr>
+          <a:xfrm>
+            <a:off x="365760" y="6492240"/>
+            <a:ext cx="11460175" cy="320040"/>
+          </a:xfrm>
+          <a:prstGeom prst="rect">
+            <a:avLst/>
+          </a:prstGeom>
+          <a:noFill/>
+        </p:spPr>
+        <p:txBody>
+          <a:bodyPr wrap="square">
+            <a:spAutoFit/>
+          </a:bodyPr>
+          <a:lstStyle/>
+          <a:p>
+            <a:pPr algn="ctr"/>
+            <a:r>
+              <a:rPr sz="750" b="0" i="0">
+                <a:solidFill>
+                  <a:srgbClr val="5A6380"/>
+                </a:solidFill>
+              </a:rPr>
+              <a:t>CostVision — AI-Powered Should-Cost Intelligence  |  Avinash Bhosale  |  Confidential</a:t>
+            </a:r>
+          </a:p>
+        </p:txBody>
+      </p:sp>
+      <p:sp>
+        <p:nvSpPr>
+          <p:cNvPr id="11" name="Rectangle 10"/>
+          <p:cNvSpPr/>
+          <p:nvPr/>
+        </p:nvSpPr>
+        <p:spPr>
+          <a:xfrm>
+            <a:off x="411480" y="1828800"/>
+            <a:ext cx="5532120" cy="4023360"/>
+          </a:xfrm>
+          <a:prstGeom prst="rect">
+            <a:avLst/>
+          </a:prstGeom>
+          <a:solidFill>
+            <a:srgbClr val="1E2330"/>
+          </a:solidFill>
+          <a:ln w="6350">
+            <a:solidFill>
+              <a:srgbClr val="2A3045"/>
+            </a:solidFill>
+          </a:ln>
+        </p:spPr>
+        <p:style>
+          <a:lnRef idx="1">
+            <a:schemeClr val="accent1"/>
+          </a:lnRef>
+          <a:fillRef idx="3">
+            <a:schemeClr val="accent1"/>
+          </a:fillRef>
+          <a:effectRef idx="2">
+            <a:schemeClr val="accent1"/>
+          </a:effectRef>
+          <a:fontRef idx="minor">
+            <a:schemeClr val="lt1"/>
+          </a:fontRef>
+        </p:style>
+        <p:txBody>
+          <a:bodyPr rtlCol="0" anchor="ctr"/>
+          <a:lstStyle/>
+          <a:p>
+            <a:pPr algn="ctr"/>
+          </a:p>
+        </p:txBody>
+      </p:sp>
+      <p:sp>
+        <p:nvSpPr>
+          <p:cNvPr id="12" name="Rectangle 11"/>
+          <p:cNvSpPr/>
+          <p:nvPr/>
+        </p:nvSpPr>
+        <p:spPr>
+          <a:xfrm>
+            <a:off x="411480" y="1828800"/>
+            <a:ext cx="54864" cy="4023360"/>
+          </a:xfrm>
+          <a:prstGeom prst="rect">
+            <a:avLst/>
+          </a:prstGeom>
+          <a:solidFill>
+            <a:srgbClr val="4F8EF7"/>
+          </a:solidFill>
+          <a:ln>
+            <a:noFill/>
+          </a:ln>
+        </p:spPr>
+        <p:style>
+          <a:lnRef idx="1">
+            <a:schemeClr val="accent1"/>
+          </a:lnRef>
+          <a:fillRef idx="3">
+            <a:schemeClr val="accent1"/>
+          </a:fillRef>
+          <a:effectRef idx="2">
+            <a:schemeClr val="accent1"/>
+          </a:effectRef>
+          <a:fontRef idx="minor">
+            <a:schemeClr val="lt1"/>
+          </a:fontRef>
+        </p:style>
+        <p:txBody>
+          <a:bodyPr rtlCol="0" anchor="ctr"/>
+          <a:lstStyle/>
+          <a:p>
+            <a:pPr algn="ctr"/>
+          </a:p>
+        </p:txBody>
+      </p:sp>
+      <p:sp>
+        <p:nvSpPr>
+          <p:cNvPr id="13" name="TextBox 12"/>
+          <p:cNvSpPr txBox="1"/>
+          <p:nvPr/>
+        </p:nvSpPr>
+        <p:spPr>
+          <a:xfrm>
+            <a:off x="594360" y="1938528"/>
+            <a:ext cx="5212080" cy="310896"/>
+          </a:xfrm>
+          <a:prstGeom prst="rect">
+            <a:avLst/>
+          </a:prstGeom>
+          <a:noFill/>
+        </p:spPr>
+        <p:txBody>
+          <a:bodyPr wrap="square">
+            <a:spAutoFit/>
+          </a:bodyPr>
+          <a:lstStyle/>
+          <a:p>
+            <a:pPr algn="l"/>
+            <a:r>
+              <a:rPr sz="1400" b="1" i="0">
+                <a:solidFill>
+                  <a:srgbClr val="4F8EF7"/>
+                </a:solidFill>
+              </a:rPr>
+              <a:t>Agentic AI</a:t>
+            </a:r>
+          </a:p>
+        </p:txBody>
+      </p:sp>
+      <p:sp>
+        <p:nvSpPr>
+          <p:cNvPr id="14" name="TextBox 13"/>
+          <p:cNvSpPr txBox="1"/>
+          <p:nvPr/>
+        </p:nvSpPr>
+        <p:spPr>
+          <a:xfrm>
+            <a:off x="594360" y="2286000"/>
+            <a:ext cx="5212080" cy="274320"/>
+          </a:xfrm>
+          <a:prstGeom prst="rect">
+            <a:avLst/>
+          </a:prstGeom>
+          <a:noFill/>
+        </p:spPr>
+        <p:txBody>
+          <a:bodyPr wrap="square">
+            <a:spAutoFit/>
+          </a:bodyPr>
+          <a:lstStyle/>
+          <a:p>
+            <a:pPr algn="l"/>
+            <a:r>
+              <a:rPr sz="850" b="0" i="1">
+                <a:solidFill>
+                  <a:srgbClr val="9AA3B8"/>
+                </a:solidFill>
+              </a:rPr>
+              <a:t>Assisted — you trigger it and stay in the loop; a human approves</a:t>
+            </a:r>
+          </a:p>
+        </p:txBody>
+      </p:sp>
+      <p:sp>
+        <p:nvSpPr>
+          <p:cNvPr id="15" name="Rectangle 14"/>
+          <p:cNvSpPr/>
+          <p:nvPr/>
+        </p:nvSpPr>
+        <p:spPr>
+          <a:xfrm>
+            <a:off x="576072" y="2651760"/>
+            <a:ext cx="5202936" cy="676656"/>
+          </a:xfrm>
+          <a:prstGeom prst="rect">
+            <a:avLst/>
+          </a:prstGeom>
+          <a:solidFill>
+            <a:srgbClr val="161923"/>
+          </a:solidFill>
+          <a:ln w="3810">
+            <a:solidFill>
+              <a:srgbClr val="2A3045"/>
+            </a:solidFill>
+          </a:ln>
+        </p:spPr>
+        <p:style>
+          <a:lnRef idx="1">
+            <a:schemeClr val="accent1"/>
+          </a:lnRef>
+          <a:fillRef idx="3">
+            <a:schemeClr val="accent1"/>
+          </a:fillRef>
+          <a:effectRef idx="2">
+            <a:schemeClr val="accent1"/>
+          </a:effectRef>
+          <a:fontRef idx="minor">
+            <a:schemeClr val="lt1"/>
+          </a:fontRef>
+        </p:style>
+        <p:txBody>
+          <a:bodyPr rtlCol="0" anchor="ctr"/>
+          <a:lstStyle/>
+          <a:p>
+            <a:pPr algn="ctr"/>
+          </a:p>
+        </p:txBody>
+      </p:sp>
+      <p:sp>
+        <p:nvSpPr>
+          <p:cNvPr id="16" name="Rectangle 15"/>
+          <p:cNvSpPr/>
+          <p:nvPr/>
+        </p:nvSpPr>
+        <p:spPr>
+          <a:xfrm>
+            <a:off x="576072" y="2651760"/>
+            <a:ext cx="45720" cy="676656"/>
+          </a:xfrm>
+          <a:prstGeom prst="rect">
+            <a:avLst/>
+          </a:prstGeom>
+          <a:solidFill>
+            <a:srgbClr val="4F8EF7"/>
+          </a:solidFill>
+          <a:ln>
+            <a:noFill/>
+          </a:ln>
+        </p:spPr>
+        <p:style>
+          <a:lnRef idx="1">
+            <a:schemeClr val="accent1"/>
+          </a:lnRef>
+          <a:fillRef idx="3">
+            <a:schemeClr val="accent1"/>
+          </a:fillRef>
+          <a:effectRef idx="2">
+            <a:schemeClr val="accent1"/>
+          </a:effectRef>
+          <a:fontRef idx="minor">
+            <a:schemeClr val="lt1"/>
+          </a:fontRef>
+        </p:style>
+        <p:txBody>
+          <a:bodyPr rtlCol="0" anchor="ctr"/>
+          <a:lstStyle/>
+          <a:p>
+            <a:pPr algn="ctr"/>
+          </a:p>
+        </p:txBody>
+      </p:sp>
+      <p:sp>
+        <p:nvSpPr>
+          <p:cNvPr id="17" name="TextBox 16"/>
+          <p:cNvSpPr txBox="1"/>
+          <p:nvPr/>
+        </p:nvSpPr>
+        <p:spPr>
+          <a:xfrm>
+            <a:off x="722376" y="2715768"/>
+            <a:ext cx="5056632" cy="219456"/>
+          </a:xfrm>
+          <a:prstGeom prst="rect">
+            <a:avLst/>
+          </a:prstGeom>
+          <a:noFill/>
+        </p:spPr>
+        <p:txBody>
+          <a:bodyPr wrap="square">
+            <a:spAutoFit/>
+          </a:bodyPr>
+          <a:lstStyle/>
+          <a:p>
+            <a:pPr algn="l"/>
+            <a:r>
+              <a:rPr sz="1000" b="1" i="0">
+                <a:solidFill>
+                  <a:srgbClr val="F0F2F8"/>
+                </a:solidFill>
+              </a:rPr>
+              <a:t>AI Agent</a:t>
+            </a:r>
+          </a:p>
+        </p:txBody>
+      </p:sp>
+      <p:sp>
+        <p:nvSpPr>
+          <p:cNvPr id="18" name="TextBox 17"/>
+          <p:cNvSpPr txBox="1"/>
+          <p:nvPr/>
+        </p:nvSpPr>
+        <p:spPr>
+          <a:xfrm>
+            <a:off x="722376" y="2935224"/>
+            <a:ext cx="5056632" cy="347472"/>
+          </a:xfrm>
+          <a:prstGeom prst="rect">
+            <a:avLst/>
+          </a:prstGeom>
+          <a:noFill/>
+        </p:spPr>
+        <p:txBody>
+          <a:bodyPr wrap="square">
+            <a:spAutoFit/>
+          </a:bodyPr>
+          <a:lstStyle/>
+          <a:p>
+            <a:pPr algn="l"/>
+            <a:r>
+              <a:rPr sz="800" b="0" i="0">
+                <a:solidFill>
+                  <a:srgbClr val="9AA3B8"/>
+                </a:solidFill>
+              </a:rPr>
+              <a:t>Describe a part in plain English — it builds the full cost model for you.</a:t>
+            </a:r>
+          </a:p>
+        </p:txBody>
+      </p:sp>
+      <p:sp>
+        <p:nvSpPr>
+          <p:cNvPr id="19" name="Rectangle 18"/>
+          <p:cNvSpPr/>
+          <p:nvPr/>
+        </p:nvSpPr>
+        <p:spPr>
+          <a:xfrm>
+            <a:off x="576072" y="3419856"/>
+            <a:ext cx="5202936" cy="676656"/>
+          </a:xfrm>
+          <a:prstGeom prst="rect">
+            <a:avLst/>
+          </a:prstGeom>
+          <a:solidFill>
+            <a:srgbClr val="161923"/>
+          </a:solidFill>
+          <a:ln w="3810">
+            <a:solidFill>
+              <a:srgbClr val="2A3045"/>
+            </a:solidFill>
+          </a:ln>
+        </p:spPr>
+        <p:style>
+          <a:lnRef idx="1">
+            <a:schemeClr val="accent1"/>
+          </a:lnRef>
+          <a:fillRef idx="3">
+            <a:schemeClr val="accent1"/>
+          </a:fillRef>
+          <a:effectRef idx="2">
+            <a:schemeClr val="accent1"/>
+          </a:effectRef>
+          <a:fontRef idx="minor">
+            <a:schemeClr val="lt1"/>
+          </a:fontRef>
+        </p:style>
+        <p:txBody>
+          <a:bodyPr rtlCol="0" anchor="ctr"/>
+          <a:lstStyle/>
+          <a:p>
+            <a:pPr algn="ctr"/>
+          </a:p>
+        </p:txBody>
+      </p:sp>
+      <p:sp>
+        <p:nvSpPr>
+          <p:cNvPr id="20" name="Rectangle 19"/>
+          <p:cNvSpPr/>
+          <p:nvPr/>
+        </p:nvSpPr>
+        <p:spPr>
+          <a:xfrm>
+            <a:off x="576072" y="3419856"/>
+            <a:ext cx="45720" cy="676656"/>
+          </a:xfrm>
+          <a:prstGeom prst="rect">
+            <a:avLst/>
+          </a:prstGeom>
+          <a:solidFill>
+            <a:srgbClr val="4F8EF7"/>
+          </a:solidFill>
+          <a:ln>
+            <a:noFill/>
+          </a:ln>
+        </p:spPr>
+        <p:style>
+          <a:lnRef idx="1">
+            <a:schemeClr val="accent1"/>
+          </a:lnRef>
+          <a:fillRef idx="3">
+            <a:schemeClr val="accent1"/>
+          </a:fillRef>
+          <a:effectRef idx="2">
+            <a:schemeClr val="accent1"/>
+          </a:effectRef>
+          <a:fontRef idx="minor">
+            <a:schemeClr val="lt1"/>
+          </a:fontRef>
+        </p:style>
+        <p:txBody>
+          <a:bodyPr rtlCol="0" anchor="ctr"/>
+          <a:lstStyle/>
+          <a:p>
+            <a:pPr algn="ctr"/>
+          </a:p>
+        </p:txBody>
+      </p:sp>
+      <p:sp>
+        <p:nvSpPr>
+          <p:cNvPr id="21" name="TextBox 20"/>
+          <p:cNvSpPr txBox="1"/>
+          <p:nvPr/>
+        </p:nvSpPr>
+        <p:spPr>
+          <a:xfrm>
+            <a:off x="722376" y="3483864"/>
+            <a:ext cx="5056632" cy="219456"/>
+          </a:xfrm>
+          <a:prstGeom prst="rect">
+            <a:avLst/>
+          </a:prstGeom>
+          <a:noFill/>
+        </p:spPr>
+        <p:txBody>
+          <a:bodyPr wrap="square">
+            <a:spAutoFit/>
+          </a:bodyPr>
+          <a:lstStyle/>
+          <a:p>
+            <a:pPr algn="l"/>
+            <a:r>
+              <a:rPr sz="1000" b="1" i="0">
+                <a:solidFill>
+                  <a:srgbClr val="F0F2F8"/>
+                </a:solidFill>
+              </a:rPr>
+              <a:t>CAD / photo → cost</a:t>
+            </a:r>
+          </a:p>
+        </p:txBody>
+      </p:sp>
+      <p:sp>
+        <p:nvSpPr>
+          <p:cNvPr id="22" name="TextBox 21"/>
+          <p:cNvSpPr txBox="1"/>
+          <p:nvPr/>
+        </p:nvSpPr>
+        <p:spPr>
+          <a:xfrm>
+            <a:off x="722376" y="3703320"/>
+            <a:ext cx="5056632" cy="347472"/>
+          </a:xfrm>
+          <a:prstGeom prst="rect">
+            <a:avLst/>
+          </a:prstGeom>
+          <a:noFill/>
+        </p:spPr>
+        <p:txBody>
+          <a:bodyPr wrap="square">
+            <a:spAutoFit/>
+          </a:bodyPr>
+          <a:lstStyle/>
+          <a:p>
+            <a:pPr algn="l"/>
+            <a:r>
+              <a:rPr sz="800" b="0" i="0">
+                <a:solidFill>
+                  <a:srgbClr val="9AA3B8"/>
+                </a:solidFill>
+              </a:rPr>
+              <a:t>Upload a STEP file — it measures geometry and infers material &amp; process.</a:t>
+            </a:r>
+          </a:p>
+        </p:txBody>
+      </p:sp>
+      <p:sp>
+        <p:nvSpPr>
+          <p:cNvPr id="23" name="Rectangle 22"/>
+          <p:cNvSpPr/>
+          <p:nvPr/>
+        </p:nvSpPr>
+        <p:spPr>
+          <a:xfrm>
+            <a:off x="576072" y="4187952"/>
+            <a:ext cx="5202936" cy="676656"/>
+          </a:xfrm>
+          <a:prstGeom prst="rect">
+            <a:avLst/>
+          </a:prstGeom>
+          <a:solidFill>
+            <a:srgbClr val="161923"/>
+          </a:solidFill>
+          <a:ln w="3810">
+            <a:solidFill>
+              <a:srgbClr val="2A3045"/>
+            </a:solidFill>
+          </a:ln>
+        </p:spPr>
+        <p:style>
+          <a:lnRef idx="1">
+            <a:schemeClr val="accent1"/>
+          </a:lnRef>
+          <a:fillRef idx="3">
+            <a:schemeClr val="accent1"/>
+          </a:fillRef>
+          <a:effectRef idx="2">
+            <a:schemeClr val="accent1"/>
+          </a:effectRef>
+          <a:fontRef idx="minor">
+            <a:schemeClr val="lt1"/>
+          </a:fontRef>
+        </p:style>
+        <p:txBody>
+          <a:bodyPr rtlCol="0" anchor="ctr"/>
+          <a:lstStyle/>
+          <a:p>
+            <a:pPr algn="ctr"/>
+          </a:p>
+        </p:txBody>
+      </p:sp>
+      <p:sp>
+        <p:nvSpPr>
+          <p:cNvPr id="24" name="Rectangle 23"/>
+          <p:cNvSpPr/>
+          <p:nvPr/>
+        </p:nvSpPr>
+        <p:spPr>
+          <a:xfrm>
+            <a:off x="576072" y="4187952"/>
+            <a:ext cx="45720" cy="676656"/>
+          </a:xfrm>
+          <a:prstGeom prst="rect">
+            <a:avLst/>
+          </a:prstGeom>
+          <a:solidFill>
+            <a:srgbClr val="4F8EF7"/>
+          </a:solidFill>
+          <a:ln>
+            <a:noFill/>
+          </a:ln>
+        </p:spPr>
+        <p:style>
+          <a:lnRef idx="1">
+            <a:schemeClr val="accent1"/>
+          </a:lnRef>
+          <a:fillRef idx="3">
+            <a:schemeClr val="accent1"/>
+          </a:fillRef>
+          <a:effectRef idx="2">
+            <a:schemeClr val="accent1"/>
+          </a:effectRef>
+          <a:fontRef idx="minor">
+            <a:schemeClr val="lt1"/>
+          </a:fontRef>
+        </p:style>
+        <p:txBody>
+          <a:bodyPr rtlCol="0" anchor="ctr"/>
+          <a:lstStyle/>
+          <a:p>
+            <a:pPr algn="ctr"/>
+          </a:p>
+        </p:txBody>
+      </p:sp>
+      <p:sp>
+        <p:nvSpPr>
+          <p:cNvPr id="25" name="TextBox 24"/>
+          <p:cNvSpPr txBox="1"/>
+          <p:nvPr/>
+        </p:nvSpPr>
+        <p:spPr>
+          <a:xfrm>
+            <a:off x="722376" y="4251960"/>
+            <a:ext cx="5056632" cy="219456"/>
+          </a:xfrm>
+          <a:prstGeom prst="rect">
+            <a:avLst/>
+          </a:prstGeom>
+          <a:noFill/>
+        </p:spPr>
+        <p:txBody>
+          <a:bodyPr wrap="square">
+            <a:spAutoFit/>
+          </a:bodyPr>
+          <a:lstStyle/>
+          <a:p>
+            <a:pPr algn="l"/>
+            <a:r>
+              <a:rPr sz="1000" b="1" i="0">
+                <a:solidFill>
+                  <a:srgbClr val="F0F2F8"/>
+                </a:solidFill>
+              </a:rPr>
+              <a:t>Negotiation coach</a:t>
+            </a:r>
+          </a:p>
+        </p:txBody>
+      </p:sp>
+      <p:sp>
+        <p:nvSpPr>
+          <p:cNvPr id="26" name="TextBox 25"/>
+          <p:cNvSpPr txBox="1"/>
+          <p:nvPr/>
+        </p:nvSpPr>
+        <p:spPr>
+          <a:xfrm>
+            <a:off x="722376" y="4471416"/>
+            <a:ext cx="5056632" cy="347472"/>
+          </a:xfrm>
+          <a:prstGeom prst="rect">
+            <a:avLst/>
+          </a:prstGeom>
+          <a:noFill/>
+        </p:spPr>
+        <p:txBody>
+          <a:bodyPr wrap="square">
+            <a:spAutoFit/>
+          </a:bodyPr>
+          <a:lstStyle/>
+          <a:p>
+            <a:pPr algn="l"/>
+            <a:r>
+              <a:rPr sz="800" b="0" i="0">
+                <a:solidFill>
+                  <a:srgbClr val="9AA3B8"/>
+                </a:solidFill>
+              </a:rPr>
+              <a:t>Open a part — it drafts the buyer's counter-argument and target price.</a:t>
+            </a:r>
+          </a:p>
+        </p:txBody>
+      </p:sp>
+      <p:sp>
+        <p:nvSpPr>
+          <p:cNvPr id="27" name="Rectangle 26"/>
+          <p:cNvSpPr/>
+          <p:nvPr/>
+        </p:nvSpPr>
+        <p:spPr>
+          <a:xfrm>
+            <a:off x="576072" y="4956048"/>
+            <a:ext cx="5202936" cy="676656"/>
+          </a:xfrm>
+          <a:prstGeom prst="rect">
+            <a:avLst/>
+          </a:prstGeom>
+          <a:solidFill>
+            <a:srgbClr val="161923"/>
+          </a:solidFill>
+          <a:ln w="3810">
+            <a:solidFill>
+              <a:srgbClr val="2A3045"/>
+            </a:solidFill>
+          </a:ln>
+        </p:spPr>
+        <p:style>
+          <a:lnRef idx="1">
+            <a:schemeClr val="accent1"/>
+          </a:lnRef>
+          <a:fillRef idx="3">
+            <a:schemeClr val="accent1"/>
+          </a:fillRef>
+          <a:effectRef idx="2">
+            <a:schemeClr val="accent1"/>
+          </a:effectRef>
+          <a:fontRef idx="minor">
+            <a:schemeClr val="lt1"/>
+          </a:fontRef>
+        </p:style>
+        <p:txBody>
+          <a:bodyPr rtlCol="0" anchor="ctr"/>
+          <a:lstStyle/>
+          <a:p>
+            <a:pPr algn="ctr"/>
+          </a:p>
+        </p:txBody>
+      </p:sp>
+      <p:sp>
+        <p:nvSpPr>
+          <p:cNvPr id="28" name="Rectangle 27"/>
+          <p:cNvSpPr/>
+          <p:nvPr/>
+        </p:nvSpPr>
+        <p:spPr>
+          <a:xfrm>
+            <a:off x="576072" y="4956048"/>
+            <a:ext cx="45720" cy="676656"/>
+          </a:xfrm>
+          <a:prstGeom prst="rect">
+            <a:avLst/>
+          </a:prstGeom>
+          <a:solidFill>
+            <a:srgbClr val="4F8EF7"/>
+          </a:solidFill>
+          <a:ln>
+            <a:noFill/>
+          </a:ln>
+        </p:spPr>
+        <p:style>
+          <a:lnRef idx="1">
+            <a:schemeClr val="accent1"/>
+          </a:lnRef>
+          <a:fillRef idx="3">
+            <a:schemeClr val="accent1"/>
+          </a:fillRef>
+          <a:effectRef idx="2">
+            <a:schemeClr val="accent1"/>
+          </a:effectRef>
+          <a:fontRef idx="minor">
+            <a:schemeClr val="lt1"/>
+          </a:fontRef>
+        </p:style>
+        <p:txBody>
+          <a:bodyPr rtlCol="0" anchor="ctr"/>
+          <a:lstStyle/>
+          <a:p>
+            <a:pPr algn="ctr"/>
+          </a:p>
+        </p:txBody>
+      </p:sp>
+      <p:sp>
+        <p:nvSpPr>
+          <p:cNvPr id="29" name="TextBox 28"/>
+          <p:cNvSpPr txBox="1"/>
+          <p:nvPr/>
+        </p:nvSpPr>
+        <p:spPr>
+          <a:xfrm>
+            <a:off x="722376" y="5020056"/>
+            <a:ext cx="5056632" cy="219456"/>
+          </a:xfrm>
+          <a:prstGeom prst="rect">
+            <a:avLst/>
+          </a:prstGeom>
+          <a:noFill/>
+        </p:spPr>
+        <p:txBody>
+          <a:bodyPr wrap="square">
+            <a:spAutoFit/>
+          </a:bodyPr>
+          <a:lstStyle/>
+          <a:p>
+            <a:pPr algn="l"/>
+            <a:r>
+              <a:rPr sz="1000" b="1" i="0">
+                <a:solidFill>
+                  <a:srgbClr val="F0F2F8"/>
+                </a:solidFill>
+              </a:rPr>
+              <a:t>Rate-data assistant</a:t>
+            </a:r>
+          </a:p>
+        </p:txBody>
+      </p:sp>
+      <p:sp>
+        <p:nvSpPr>
+          <p:cNvPr id="30" name="TextBox 29"/>
+          <p:cNvSpPr txBox="1"/>
+          <p:nvPr/>
+        </p:nvSpPr>
+        <p:spPr>
+          <a:xfrm>
+            <a:off x="722376" y="5239512"/>
+            <a:ext cx="5056632" cy="347472"/>
+          </a:xfrm>
+          <a:prstGeom prst="rect">
+            <a:avLst/>
+          </a:prstGeom>
+          <a:noFill/>
+        </p:spPr>
+        <p:txBody>
+          <a:bodyPr wrap="square">
+            <a:spAutoFit/>
+          </a:bodyPr>
+          <a:lstStyle/>
+          <a:p>
+            <a:pPr algn="l"/>
+            <a:r>
+              <a:rPr sz="800" b="0" i="0">
+                <a:solidFill>
+                  <a:srgbClr val="9AA3B8"/>
+                </a:solidFill>
+              </a:rPr>
+              <a:t>Ask a costing question — it answers from your own rates, with citations.</a:t>
+            </a:r>
+          </a:p>
+        </p:txBody>
+      </p:sp>
+      <p:sp>
+        <p:nvSpPr>
+          <p:cNvPr id="31" name="Rectangle 30"/>
+          <p:cNvSpPr/>
+          <p:nvPr/>
+        </p:nvSpPr>
+        <p:spPr>
+          <a:xfrm>
+            <a:off x="6245352" y="1828800"/>
+            <a:ext cx="5532120" cy="4023360"/>
+          </a:xfrm>
+          <a:prstGeom prst="rect">
+            <a:avLst/>
+          </a:prstGeom>
+          <a:solidFill>
+            <a:srgbClr val="1E2330"/>
+          </a:solidFill>
+          <a:ln w="6350">
+            <a:solidFill>
+              <a:srgbClr val="2A3045"/>
+            </a:solidFill>
+          </a:ln>
+        </p:spPr>
+        <p:style>
+          <a:lnRef idx="1">
+            <a:schemeClr val="accent1"/>
+          </a:lnRef>
+          <a:fillRef idx="3">
+            <a:schemeClr val="accent1"/>
+          </a:fillRef>
+          <a:effectRef idx="2">
+            <a:schemeClr val="accent1"/>
+          </a:effectRef>
+          <a:fontRef idx="minor">
+            <a:schemeClr val="lt1"/>
+          </a:fontRef>
+        </p:style>
+        <p:txBody>
+          <a:bodyPr rtlCol="0" anchor="ctr"/>
+          <a:lstStyle/>
+          <a:p>
+            <a:pPr algn="ctr"/>
+          </a:p>
+        </p:txBody>
+      </p:sp>
+      <p:sp>
+        <p:nvSpPr>
+          <p:cNvPr id="32" name="Rectangle 31"/>
+          <p:cNvSpPr/>
+          <p:nvPr/>
+        </p:nvSpPr>
+        <p:spPr>
+          <a:xfrm>
+            <a:off x="6245352" y="1828800"/>
+            <a:ext cx="54864" cy="4023360"/>
+          </a:xfrm>
+          <a:prstGeom prst="rect">
+            <a:avLst/>
+          </a:prstGeom>
+          <a:solidFill>
+            <a:srgbClr val="7C3AED"/>
+          </a:solidFill>
+          <a:ln>
+            <a:noFill/>
+          </a:ln>
+        </p:spPr>
+        <p:style>
+          <a:lnRef idx="1">
+            <a:schemeClr val="accent1"/>
+          </a:lnRef>
+          <a:fillRef idx="3">
+            <a:schemeClr val="accent1"/>
+          </a:fillRef>
+          <a:effectRef idx="2">
+            <a:schemeClr val="accent1"/>
+          </a:effectRef>
+          <a:fontRef idx="minor">
+            <a:schemeClr val="lt1"/>
+          </a:fontRef>
+        </p:style>
+        <p:txBody>
+          <a:bodyPr rtlCol="0" anchor="ctr"/>
+          <a:lstStyle/>
+          <a:p>
+            <a:pPr algn="ctr"/>
+          </a:p>
+        </p:txBody>
+      </p:sp>
+      <p:sp>
+        <p:nvSpPr>
+          <p:cNvPr id="33" name="TextBox 32"/>
+          <p:cNvSpPr txBox="1"/>
+          <p:nvPr/>
+        </p:nvSpPr>
+        <p:spPr>
+          <a:xfrm>
+            <a:off x="6428232" y="1938528"/>
+            <a:ext cx="5212080" cy="310896"/>
+          </a:xfrm>
+          <a:prstGeom prst="rect">
+            <a:avLst/>
+          </a:prstGeom>
+          <a:noFill/>
+        </p:spPr>
+        <p:txBody>
+          <a:bodyPr wrap="square">
+            <a:spAutoFit/>
+          </a:bodyPr>
+          <a:lstStyle/>
+          <a:p>
+            <a:pPr algn="l"/>
+            <a:r>
+              <a:rPr sz="1400" b="1" i="0">
+                <a:solidFill>
+                  <a:srgbClr val="7C3AED"/>
+                </a:solidFill>
+              </a:rPr>
+              <a:t>Autonomous Agentic AI</a:t>
+            </a:r>
+          </a:p>
+        </p:txBody>
+      </p:sp>
+      <p:sp>
+        <p:nvSpPr>
+          <p:cNvPr id="34" name="TextBox 33"/>
+          <p:cNvSpPr txBox="1"/>
+          <p:nvPr/>
+        </p:nvSpPr>
+        <p:spPr>
+          <a:xfrm>
+            <a:off x="6428232" y="2286000"/>
+            <a:ext cx="5212080" cy="274320"/>
+          </a:xfrm>
+          <a:prstGeom prst="rect">
+            <a:avLst/>
+          </a:prstGeom>
+          <a:noFill/>
+        </p:spPr>
+        <p:txBody>
+          <a:bodyPr wrap="square">
+            <a:spAutoFit/>
+          </a:bodyPr>
+          <a:lstStyle/>
+          <a:p>
+            <a:pPr algn="l"/>
+            <a:r>
+              <a:rPr sz="850" b="0" i="1">
+                <a:solidFill>
+                  <a:srgbClr val="9AA3B8"/>
+                </a:solidFill>
+              </a:rPr>
+              <a:t>Self-directed — runs unattended on a schedule, within limits you set</a:t>
+            </a:r>
+          </a:p>
+        </p:txBody>
+      </p:sp>
+      <p:sp>
+        <p:nvSpPr>
+          <p:cNvPr id="35" name="Rectangle 34"/>
+          <p:cNvSpPr/>
+          <p:nvPr/>
+        </p:nvSpPr>
+        <p:spPr>
+          <a:xfrm>
+            <a:off x="6409944" y="2651760"/>
+            <a:ext cx="5202936" cy="676656"/>
+          </a:xfrm>
+          <a:prstGeom prst="rect">
+            <a:avLst/>
+          </a:prstGeom>
+          <a:solidFill>
+            <a:srgbClr val="161923"/>
+          </a:solidFill>
+          <a:ln w="3810">
+            <a:solidFill>
+              <a:srgbClr val="2A3045"/>
+            </a:solidFill>
+          </a:ln>
+        </p:spPr>
+        <p:style>
+          <a:lnRef idx="1">
+            <a:schemeClr val="accent1"/>
+          </a:lnRef>
+          <a:fillRef idx="3">
+            <a:schemeClr val="accent1"/>
+          </a:fillRef>
+          <a:effectRef idx="2">
+            <a:schemeClr val="accent1"/>
+          </a:effectRef>
+          <a:fontRef idx="minor">
+            <a:schemeClr val="lt1"/>
+          </a:fontRef>
+        </p:style>
+        <p:txBody>
+          <a:bodyPr rtlCol="0" anchor="ctr"/>
+          <a:lstStyle/>
+          <a:p>
+            <a:pPr algn="ctr"/>
+          </a:p>
+        </p:txBody>
+      </p:sp>
+      <p:sp>
+        <p:nvSpPr>
+          <p:cNvPr id="36" name="Rectangle 35"/>
+          <p:cNvSpPr/>
+          <p:nvPr/>
+        </p:nvSpPr>
+        <p:spPr>
+          <a:xfrm>
+            <a:off x="6409944" y="2651760"/>
+            <a:ext cx="45720" cy="676656"/>
+          </a:xfrm>
+          <a:prstGeom prst="rect">
+            <a:avLst/>
+          </a:prstGeom>
+          <a:solidFill>
+            <a:srgbClr val="7C3AED"/>
+          </a:solidFill>
+          <a:ln>
+            <a:noFill/>
+          </a:ln>
+        </p:spPr>
+        <p:style>
+          <a:lnRef idx="1">
+            <a:schemeClr val="accent1"/>
+          </a:lnRef>
+          <a:fillRef idx="3">
+            <a:schemeClr val="accent1"/>
+          </a:fillRef>
+          <a:effectRef idx="2">
+            <a:schemeClr val="accent1"/>
+          </a:effectRef>
+          <a:fontRef idx="minor">
+            <a:schemeClr val="lt1"/>
+          </a:fontRef>
+        </p:style>
+        <p:txBody>
+          <a:bodyPr rtlCol="0" anchor="ctr"/>
+          <a:lstStyle/>
+          <a:p>
+            <a:pPr algn="ctr"/>
+          </a:p>
+        </p:txBody>
+      </p:sp>
+      <p:sp>
+        <p:nvSpPr>
+          <p:cNvPr id="37" name="TextBox 36"/>
+          <p:cNvSpPr txBox="1"/>
+          <p:nvPr/>
+        </p:nvSpPr>
+        <p:spPr>
+          <a:xfrm>
+            <a:off x="6556248" y="2715768"/>
+            <a:ext cx="5056632" cy="219456"/>
+          </a:xfrm>
+          <a:prstGeom prst="rect">
+            <a:avLst/>
+          </a:prstGeom>
+          <a:noFill/>
+        </p:spPr>
+        <p:txBody>
+          <a:bodyPr wrap="square">
+            <a:spAutoFit/>
+          </a:bodyPr>
+          <a:lstStyle/>
+          <a:p>
+            <a:pPr algn="l"/>
+            <a:r>
+              <a:rPr sz="1000" b="1" i="0">
+                <a:solidFill>
+                  <a:srgbClr val="F0F2F8"/>
+                </a:solidFill>
+              </a:rPr>
+              <a:t>Savings monitor</a:t>
+            </a:r>
+          </a:p>
+        </p:txBody>
+      </p:sp>
+      <p:sp>
+        <p:nvSpPr>
+          <p:cNvPr id="38" name="TextBox 37"/>
+          <p:cNvSpPr txBox="1"/>
+          <p:nvPr/>
+        </p:nvSpPr>
+        <p:spPr>
+          <a:xfrm>
+            <a:off x="6556248" y="2935224"/>
+            <a:ext cx="5056632" cy="347472"/>
+          </a:xfrm>
+          <a:prstGeom prst="rect">
+            <a:avLst/>
+          </a:prstGeom>
+          <a:noFill/>
+        </p:spPr>
+        <p:txBody>
+          <a:bodyPr wrap="square">
+            <a:spAutoFit/>
+          </a:bodyPr>
+          <a:lstStyle/>
+          <a:p>
+            <a:pPr algn="l"/>
+            <a:r>
+              <a:rPr sz="800" b="0" i="0">
+                <a:solidFill>
+                  <a:srgbClr val="9AA3B8"/>
+                </a:solidFill>
+              </a:rPr>
+              <a:t>Runs on the server, compares paid vs should-cost, opens findings itself — £0.5M/yr unattended.</a:t>
+            </a:r>
+          </a:p>
+        </p:txBody>
+      </p:sp>
+      <p:sp>
+        <p:nvSpPr>
+          <p:cNvPr id="39" name="Rectangle 38"/>
+          <p:cNvSpPr/>
+          <p:nvPr/>
+        </p:nvSpPr>
+        <p:spPr>
+          <a:xfrm>
+            <a:off x="6409944" y="3419856"/>
+            <a:ext cx="5202936" cy="676656"/>
+          </a:xfrm>
+          <a:prstGeom prst="rect">
+            <a:avLst/>
+          </a:prstGeom>
+          <a:solidFill>
+            <a:srgbClr val="161923"/>
+          </a:solidFill>
+          <a:ln w="3810">
+            <a:solidFill>
+              <a:srgbClr val="2A3045"/>
+            </a:solidFill>
+          </a:ln>
+        </p:spPr>
+        <p:style>
+          <a:lnRef idx="1">
+            <a:schemeClr val="accent1"/>
+          </a:lnRef>
+          <a:fillRef idx="3">
+            <a:schemeClr val="accent1"/>
+          </a:fillRef>
+          <a:effectRef idx="2">
+            <a:schemeClr val="accent1"/>
+          </a:effectRef>
+          <a:fontRef idx="minor">
+            <a:schemeClr val="lt1"/>
+          </a:fontRef>
+        </p:style>
+        <p:txBody>
+          <a:bodyPr rtlCol="0" anchor="ctr"/>
+          <a:lstStyle/>
+          <a:p>
+            <a:pPr algn="ctr"/>
+          </a:p>
+        </p:txBody>
+      </p:sp>
+      <p:sp>
+        <p:nvSpPr>
+          <p:cNvPr id="40" name="Rectangle 39"/>
+          <p:cNvSpPr/>
+          <p:nvPr/>
+        </p:nvSpPr>
+        <p:spPr>
+          <a:xfrm>
+            <a:off x="6409944" y="3419856"/>
+            <a:ext cx="45720" cy="676656"/>
+          </a:xfrm>
+          <a:prstGeom prst="rect">
+            <a:avLst/>
+          </a:prstGeom>
+          <a:solidFill>
+            <a:srgbClr val="7C3AED"/>
+          </a:solidFill>
+          <a:ln>
+            <a:noFill/>
+          </a:ln>
+        </p:spPr>
+        <p:style>
+          <a:lnRef idx="1">
+            <a:schemeClr val="accent1"/>
+          </a:lnRef>
+          <a:fillRef idx="3">
+            <a:schemeClr val="accent1"/>
+          </a:fillRef>
+          <a:effectRef idx="2">
+            <a:schemeClr val="accent1"/>
+          </a:effectRef>
+          <a:fontRef idx="minor">
+            <a:schemeClr val="lt1"/>
+          </a:fontRef>
+        </p:style>
+        <p:txBody>
+          <a:bodyPr rtlCol="0" anchor="ctr"/>
+          <a:lstStyle/>
+          <a:p>
+            <a:pPr algn="ctr"/>
+          </a:p>
+        </p:txBody>
+      </p:sp>
+      <p:sp>
+        <p:nvSpPr>
+          <p:cNvPr id="41" name="TextBox 40"/>
+          <p:cNvSpPr txBox="1"/>
+          <p:nvPr/>
+        </p:nvSpPr>
+        <p:spPr>
+          <a:xfrm>
+            <a:off x="6556248" y="3483864"/>
+            <a:ext cx="5056632" cy="219456"/>
+          </a:xfrm>
+          <a:prstGeom prst="rect">
+            <a:avLst/>
+          </a:prstGeom>
+          <a:noFill/>
+        </p:spPr>
+        <p:txBody>
+          <a:bodyPr wrap="square">
+            <a:spAutoFit/>
+          </a:bodyPr>
+          <a:lstStyle/>
+          <a:p>
+            <a:pPr algn="l"/>
+            <a:r>
+              <a:rPr sz="1000" b="1" i="0">
+                <a:solidFill>
+                  <a:srgbClr val="F0F2F8"/>
+                </a:solidFill>
+              </a:rPr>
+              <a:t>Self-audit</a:t>
+            </a:r>
+          </a:p>
+        </p:txBody>
+      </p:sp>
+      <p:sp>
+        <p:nvSpPr>
+          <p:cNvPr id="42" name="TextBox 41"/>
+          <p:cNvSpPr txBox="1"/>
+          <p:nvPr/>
+        </p:nvSpPr>
+        <p:spPr>
+          <a:xfrm>
+            <a:off x="6556248" y="3703320"/>
+            <a:ext cx="5056632" cy="347472"/>
+          </a:xfrm>
+          <a:prstGeom prst="rect">
+            <a:avLst/>
+          </a:prstGeom>
+          <a:noFill/>
+        </p:spPr>
+        <p:txBody>
+          <a:bodyPr wrap="square">
+            <a:spAutoFit/>
+          </a:bodyPr>
+          <a:lstStyle/>
+          <a:p>
+            <a:pPr algn="l"/>
+            <a:r>
+              <a:rPr sz="800" b="0" i="0">
+                <a:solidFill>
+                  <a:srgbClr val="9AA3B8"/>
+                </a:solidFill>
+              </a:rPr>
+              <a:t>Re-checks every estimate for known errors and corrects within bounds — unasked.</a:t>
+            </a:r>
+          </a:p>
+        </p:txBody>
+      </p:sp>
+      <p:sp>
+        <p:nvSpPr>
+          <p:cNvPr id="43" name="Rectangle 42"/>
+          <p:cNvSpPr/>
+          <p:nvPr/>
+        </p:nvSpPr>
+        <p:spPr>
+          <a:xfrm>
+            <a:off x="6409944" y="4187952"/>
+            <a:ext cx="5202936" cy="676656"/>
+          </a:xfrm>
+          <a:prstGeom prst="rect">
+            <a:avLst/>
+          </a:prstGeom>
+          <a:solidFill>
+            <a:srgbClr val="161923"/>
+          </a:solidFill>
+          <a:ln w="3810">
+            <a:solidFill>
+              <a:srgbClr val="2A3045"/>
+            </a:solidFill>
+          </a:ln>
+        </p:spPr>
+        <p:style>
+          <a:lnRef idx="1">
+            <a:schemeClr val="accent1"/>
+          </a:lnRef>
+          <a:fillRef idx="3">
+            <a:schemeClr val="accent1"/>
+          </a:fillRef>
+          <a:effectRef idx="2">
+            <a:schemeClr val="accent1"/>
+          </a:effectRef>
+          <a:fontRef idx="minor">
+            <a:schemeClr val="lt1"/>
+          </a:fontRef>
+        </p:style>
+        <p:txBody>
+          <a:bodyPr rtlCol="0" anchor="ctr"/>
+          <a:lstStyle/>
+          <a:p>
+            <a:pPr algn="ctr"/>
+          </a:p>
+        </p:txBody>
+      </p:sp>
+      <p:sp>
+        <p:nvSpPr>
+          <p:cNvPr id="44" name="Rectangle 43"/>
+          <p:cNvSpPr/>
+          <p:nvPr/>
+        </p:nvSpPr>
+        <p:spPr>
+          <a:xfrm>
+            <a:off x="6409944" y="4187952"/>
+            <a:ext cx="45720" cy="676656"/>
+          </a:xfrm>
+          <a:prstGeom prst="rect">
+            <a:avLst/>
+          </a:prstGeom>
+          <a:solidFill>
+            <a:srgbClr val="7C3AED"/>
+          </a:solidFill>
+          <a:ln>
+            <a:noFill/>
+          </a:ln>
+        </p:spPr>
+        <p:style>
+          <a:lnRef idx="1">
+            <a:schemeClr val="accent1"/>
+          </a:lnRef>
+          <a:fillRef idx="3">
+            <a:schemeClr val="accent1"/>
+          </a:fillRef>
+          <a:effectRef idx="2">
+            <a:schemeClr val="accent1"/>
+          </a:effectRef>
+          <a:fontRef idx="minor">
+            <a:schemeClr val="lt1"/>
+          </a:fontRef>
+        </p:style>
+        <p:txBody>
+          <a:bodyPr rtlCol="0" anchor="ctr"/>
+          <a:lstStyle/>
+          <a:p>
+            <a:pPr algn="ctr"/>
+          </a:p>
+        </p:txBody>
+      </p:sp>
+      <p:sp>
+        <p:nvSpPr>
+          <p:cNvPr id="45" name="TextBox 44"/>
+          <p:cNvSpPr txBox="1"/>
+          <p:nvPr/>
+        </p:nvSpPr>
+        <p:spPr>
+          <a:xfrm>
+            <a:off x="6556248" y="4251960"/>
+            <a:ext cx="5056632" cy="219456"/>
+          </a:xfrm>
+          <a:prstGeom prst="rect">
+            <a:avLst/>
+          </a:prstGeom>
+          <a:noFill/>
+        </p:spPr>
+        <p:txBody>
+          <a:bodyPr wrap="square">
+            <a:spAutoFit/>
+          </a:bodyPr>
+          <a:lstStyle/>
+          <a:p>
+            <a:pPr algn="l"/>
+            <a:r>
+              <a:rPr sz="1000" b="1" i="0">
+                <a:solidFill>
+                  <a:srgbClr val="F0F2F8"/>
+                </a:solidFill>
+              </a:rPr>
+              <a:t>Calibration &amp; drift</a:t>
+            </a:r>
+          </a:p>
+        </p:txBody>
+      </p:sp>
+      <p:sp>
+        <p:nvSpPr>
+          <p:cNvPr id="46" name="TextBox 45"/>
+          <p:cNvSpPr txBox="1"/>
+          <p:nvPr/>
+        </p:nvSpPr>
+        <p:spPr>
+          <a:xfrm>
+            <a:off x="6556248" y="4471416"/>
+            <a:ext cx="5056632" cy="347472"/>
+          </a:xfrm>
+          <a:prstGeom prst="rect">
+            <a:avLst/>
+          </a:prstGeom>
+          <a:noFill/>
+        </p:spPr>
+        <p:txBody>
+          <a:bodyPr wrap="square">
+            <a:spAutoFit/>
+          </a:bodyPr>
+          <a:lstStyle/>
+          <a:p>
+            <a:pPr algn="l"/>
+            <a:r>
+              <a:rPr sz="800" b="0" i="0">
+                <a:solidFill>
+                  <a:srgbClr val="9AA3B8"/>
+                </a:solidFill>
+              </a:rPr>
+              <a:t>Learns from logged quotes, re-derives factors, watches for drift continuously.</a:t>
+            </a:r>
+          </a:p>
+        </p:txBody>
+      </p:sp>
+      <p:sp>
+        <p:nvSpPr>
+          <p:cNvPr id="47" name="Rectangle 46"/>
+          <p:cNvSpPr/>
+          <p:nvPr/>
+        </p:nvSpPr>
+        <p:spPr>
+          <a:xfrm>
+            <a:off x="6409944" y="4956048"/>
+            <a:ext cx="5202936" cy="676656"/>
+          </a:xfrm>
+          <a:prstGeom prst="rect">
+            <a:avLst/>
+          </a:prstGeom>
+          <a:solidFill>
+            <a:srgbClr val="161923"/>
+          </a:solidFill>
+          <a:ln w="3810">
+            <a:solidFill>
+              <a:srgbClr val="2A3045"/>
+            </a:solidFill>
+          </a:ln>
+        </p:spPr>
+        <p:style>
+          <a:lnRef idx="1">
+            <a:schemeClr val="accent1"/>
+          </a:lnRef>
+          <a:fillRef idx="3">
+            <a:schemeClr val="accent1"/>
+          </a:fillRef>
+          <a:effectRef idx="2">
+            <a:schemeClr val="accent1"/>
+          </a:effectRef>
+          <a:fontRef idx="minor">
+            <a:schemeClr val="lt1"/>
+          </a:fontRef>
+        </p:style>
+        <p:txBody>
+          <a:bodyPr rtlCol="0" anchor="ctr"/>
+          <a:lstStyle/>
+          <a:p>
+            <a:pPr algn="ctr"/>
+          </a:p>
+        </p:txBody>
+      </p:sp>
+      <p:sp>
+        <p:nvSpPr>
+          <p:cNvPr id="48" name="Rectangle 47"/>
+          <p:cNvSpPr/>
+          <p:nvPr/>
+        </p:nvSpPr>
+        <p:spPr>
+          <a:xfrm>
+            <a:off x="6409944" y="4956048"/>
+            <a:ext cx="45720" cy="676656"/>
+          </a:xfrm>
+          <a:prstGeom prst="rect">
+            <a:avLst/>
+          </a:prstGeom>
+          <a:solidFill>
+            <a:srgbClr val="7C3AED"/>
+          </a:solidFill>
+          <a:ln>
+            <a:noFill/>
+          </a:ln>
+        </p:spPr>
+        <p:style>
+          <a:lnRef idx="1">
+            <a:schemeClr val="accent1"/>
+          </a:lnRef>
+          <a:fillRef idx="3">
+            <a:schemeClr val="accent1"/>
+          </a:fillRef>
+          <a:effectRef idx="2">
+            <a:schemeClr val="accent1"/>
+          </a:effectRef>
+          <a:fontRef idx="minor">
+            <a:schemeClr val="lt1"/>
+          </a:fontRef>
+        </p:style>
+        <p:txBody>
+          <a:bodyPr rtlCol="0" anchor="ctr"/>
+          <a:lstStyle/>
+          <a:p>
+            <a:pPr algn="ctr"/>
+          </a:p>
+        </p:txBody>
+      </p:sp>
+      <p:sp>
+        <p:nvSpPr>
+          <p:cNvPr id="49" name="TextBox 48"/>
+          <p:cNvSpPr txBox="1"/>
+          <p:nvPr/>
+        </p:nvSpPr>
+        <p:spPr>
+          <a:xfrm>
+            <a:off x="6556248" y="5020056"/>
+            <a:ext cx="5056632" cy="219456"/>
+          </a:xfrm>
+          <a:prstGeom prst="rect">
+            <a:avLst/>
+          </a:prstGeom>
+          <a:noFill/>
+        </p:spPr>
+        <p:txBody>
+          <a:bodyPr wrap="square">
+            <a:spAutoFit/>
+          </a:bodyPr>
+          <a:lstStyle/>
+          <a:p>
+            <a:pPr algn="l"/>
+            <a:r>
+              <a:rPr sz="1000" b="1" i="0">
+                <a:solidFill>
+                  <a:srgbClr val="F0F2F8"/>
+                </a:solidFill>
+              </a:rPr>
+              <a:t>Outcome-weighted ranking</a:t>
+            </a:r>
+          </a:p>
+        </p:txBody>
+      </p:sp>
+      <p:sp>
+        <p:nvSpPr>
+          <p:cNvPr id="50" name="TextBox 49"/>
+          <p:cNvSpPr txBox="1"/>
+          <p:nvPr/>
+        </p:nvSpPr>
+        <p:spPr>
+          <a:xfrm>
+            <a:off x="6556248" y="5239512"/>
+            <a:ext cx="5056632" cy="347472"/>
+          </a:xfrm>
+          <a:prstGeom prst="rect">
+            <a:avLst/>
+          </a:prstGeom>
+          <a:noFill/>
+        </p:spPr>
+        <p:txBody>
+          <a:bodyPr wrap="square">
+            <a:spAutoFit/>
+          </a:bodyPr>
+          <a:lstStyle/>
+          <a:p>
+            <a:pPr algn="l"/>
+            <a:r>
+              <a:rPr sz="800" b="0" i="0">
+                <a:solidFill>
+                  <a:srgbClr val="9AA3B8"/>
+                </a:solidFill>
+              </a:rPr>
+              <a:t>Learns which findings actually convert and re-prioritises its own queue.</a:t>
+            </a:r>
+          </a:p>
+        </p:txBody>
+      </p:sp>
+      <p:sp>
+        <p:nvSpPr>
+          <p:cNvPr id="51" name="Rectangle 50"/>
+          <p:cNvSpPr/>
+          <p:nvPr/>
+        </p:nvSpPr>
+        <p:spPr>
+          <a:xfrm>
+            <a:off x="411480" y="5943600"/>
+            <a:ext cx="11384280" cy="457200"/>
+          </a:xfrm>
+          <a:prstGeom prst="rect">
+            <a:avLst/>
+          </a:prstGeom>
+          <a:solidFill>
+            <a:srgbClr val="1E2330"/>
+          </a:solidFill>
+          <a:ln w="7620">
+            <a:solidFill>
+              <a:srgbClr val="10B981"/>
+            </a:solidFill>
+          </a:ln>
+        </p:spPr>
+        <p:style>
+          <a:lnRef idx="1">
+            <a:schemeClr val="accent1"/>
+          </a:lnRef>
+          <a:fillRef idx="3">
+            <a:schemeClr val="accent1"/>
+          </a:fillRef>
+          <a:effectRef idx="2">
+            <a:schemeClr val="accent1"/>
+          </a:effectRef>
+          <a:fontRef idx="minor">
+            <a:schemeClr val="lt1"/>
+          </a:fontRef>
+        </p:style>
+        <p:txBody>
+          <a:bodyPr rtlCol="0" anchor="ctr"/>
+          <a:lstStyle/>
+          <a:p>
+            <a:pPr algn="ctr"/>
+          </a:p>
+        </p:txBody>
+      </p:sp>
+      <p:sp>
+        <p:nvSpPr>
+          <p:cNvPr id="52" name="TextBox 51"/>
+          <p:cNvSpPr txBox="1"/>
+          <p:nvPr/>
+        </p:nvSpPr>
+        <p:spPr>
+          <a:xfrm>
+            <a:off x="658368" y="6035040"/>
+            <a:ext cx="10972800" cy="292608"/>
+          </a:xfrm>
+          <a:prstGeom prst="rect">
+            <a:avLst/>
+          </a:prstGeom>
+          <a:noFill/>
+        </p:spPr>
+        <p:txBody>
+          <a:bodyPr wrap="square">
+            <a:spAutoFit/>
+          </a:bodyPr>
+          <a:lstStyle/>
+          <a:p>
+            <a:pPr algn="l"/>
+            <a:r>
+              <a:rPr sz="950" b="0" i="0">
+                <a:solidFill>
+                  <a:srgbClr val="9AA3B8"/>
+                </a:solidFill>
+              </a:rPr>
+              <a:t>The common thread:  you set the boundaries and every action stays glass-box and auditable — autonomy never means the AI sets a price in secret.</a:t>
+            </a:r>
+          </a:p>
+        </p:txBody>
+      </p:sp>
+    </p:spTree>
+  </p:cSld>
+  <p:clrMapOvr>
+    <a:masterClrMapping/>
+  </p:clrMapOvr>
+</p:sld>
+</file>
+
+<file path=ppt/slides/slide13.xml><?xml version="1.0" encoding="utf-8"?>
+<p:sld xmlns:a="http://schemas.openxmlformats.org/drawingml/2006/main" xmlns:p="http://schemas.openxmlformats.org/presentationml/2006/main" xmlns:r="http://schemas.openxmlformats.org/officeDocument/2006/relationships">
+  <p:cSld>
+    <p:bg>
+      <p:bgPr>
+        <a:solidFill>
+          <a:srgbClr val="0D0F14"/>
+        </a:solidFill>
+        <a:effectLst/>
+      </p:bgPr>
+    </p:bg>
+    <p:spTree>
+      <p:nvGrpSpPr>
+        <p:cNvPr id="1" name=""/>
+        <p:cNvGrpSpPr/>
+        <p:nvPr/>
+      </p:nvGrpSpPr>
+      <p:grpSpPr/>
+      <p:sp>
+        <p:nvSpPr>
+          <p:cNvPr id="2" name="Rectangle 1"/>
+          <p:cNvSpPr/>
+          <p:nvPr/>
+        </p:nvSpPr>
+        <p:spPr>
+          <a:xfrm>
+            <a:off x="0" y="0"/>
+            <a:ext cx="12191695" cy="54864"/>
+          </a:xfrm>
+          <a:prstGeom prst="rect">
+            <a:avLst/>
+          </a:prstGeom>
+          <a:solidFill>
+            <a:srgbClr val="4F8EF7"/>
+          </a:solidFill>
+          <a:ln>
+            <a:noFill/>
+          </a:ln>
+        </p:spPr>
+        <p:style>
+          <a:lnRef idx="1">
+            <a:schemeClr val="accent1"/>
+          </a:lnRef>
+          <a:fillRef idx="3">
+            <a:schemeClr val="accent1"/>
+          </a:fillRef>
+          <a:effectRef idx="2">
+            <a:schemeClr val="accent1"/>
+          </a:effectRef>
+          <a:fontRef idx="minor">
+            <a:schemeClr val="lt1"/>
+          </a:fontRef>
+        </p:style>
+        <p:txBody>
+          <a:bodyPr rtlCol="0" anchor="ctr"/>
+          <a:lstStyle/>
+          <a:p>
+            <a:pPr algn="ctr"/>
+          </a:p>
+        </p:txBody>
+      </p:sp>
+      <p:sp>
+        <p:nvSpPr>
+          <p:cNvPr id="3" name="TextBox 2"/>
+          <p:cNvSpPr txBox="1"/>
+          <p:nvPr/>
+        </p:nvSpPr>
+        <p:spPr>
+          <a:xfrm>
+            <a:off x="320040" y="109728"/>
+            <a:ext cx="1828800" cy="320040"/>
+          </a:xfrm>
+          <a:prstGeom prst="rect">
+            <a:avLst/>
+          </a:prstGeom>
+          <a:noFill/>
+        </p:spPr>
+        <p:txBody>
+          <a:bodyPr wrap="square">
+            <a:spAutoFit/>
+          </a:bodyPr>
+          <a:lstStyle/>
+          <a:p>
+            <a:pPr algn="l"/>
+            <a:r>
+              <a:rPr sz="700" b="1" i="0">
+                <a:solidFill>
+                  <a:srgbClr val="5A6380"/>
+                </a:solidFill>
+              </a:rPr>
+              <a:t>SLIDE 13 / 17</a:t>
             </a:r>
           </a:p>
         </p:txBody>
@@ -11085,7 +13154,7 @@
 </p:sld>
 </file>
 
-<file path=ppt/slides/slide13.xml><?xml version="1.0" encoding="utf-8"?>
+<file path=ppt/slides/slide14.xml><?xml version="1.0" encoding="utf-8"?>
 <p:sld xmlns:a="http://schemas.openxmlformats.org/drawingml/2006/main" xmlns:p="http://schemas.openxmlformats.org/presentationml/2006/main" xmlns:r="http://schemas.openxmlformats.org/officeDocument/2006/relationships">
   <p:cSld>
     <p:bg>
@@ -11175,7 +13244,7 @@
                   <a:srgbClr val="5A6380"/>
                 </a:solidFill>
               </a:rPr>
-              <a:t>SLIDE 13 / 16</a:t>
+              <a:t>SLIDE 14 / 17</a:t>
             </a:r>
           </a:p>
         </p:txBody>
@@ -13027,1324 +15096,6 @@
 </p:sld>
 </file>
 
-<file path=ppt/slides/slide14.xml><?xml version="1.0" encoding="utf-8"?>
-<p:sld xmlns:a="http://schemas.openxmlformats.org/drawingml/2006/main" xmlns:p="http://schemas.openxmlformats.org/presentationml/2006/main" xmlns:r="http://schemas.openxmlformats.org/officeDocument/2006/relationships">
-  <p:cSld>
-    <p:bg>
-      <p:bgPr>
-        <a:solidFill>
-          <a:srgbClr val="0D0F14"/>
-        </a:solidFill>
-        <a:effectLst/>
-      </p:bgPr>
-    </p:bg>
-    <p:spTree>
-      <p:nvGrpSpPr>
-        <p:cNvPr id="1" name=""/>
-        <p:cNvGrpSpPr/>
-        <p:nvPr/>
-      </p:nvGrpSpPr>
-      <p:grpSpPr/>
-      <p:sp>
-        <p:nvSpPr>
-          <p:cNvPr id="2" name="Rectangle 1"/>
-          <p:cNvSpPr/>
-          <p:nvPr/>
-        </p:nvSpPr>
-        <p:spPr>
-          <a:xfrm>
-            <a:off x="0" y="0"/>
-            <a:ext cx="12191695" cy="54864"/>
-          </a:xfrm>
-          <a:prstGeom prst="rect">
-            <a:avLst/>
-          </a:prstGeom>
-          <a:solidFill>
-            <a:srgbClr val="4F8EF7"/>
-          </a:solidFill>
-          <a:ln>
-            <a:noFill/>
-          </a:ln>
-        </p:spPr>
-        <p:style>
-          <a:lnRef idx="1">
-            <a:schemeClr val="accent1"/>
-          </a:lnRef>
-          <a:fillRef idx="3">
-            <a:schemeClr val="accent1"/>
-          </a:fillRef>
-          <a:effectRef idx="2">
-            <a:schemeClr val="accent1"/>
-          </a:effectRef>
-          <a:fontRef idx="minor">
-            <a:schemeClr val="lt1"/>
-          </a:fontRef>
-        </p:style>
-        <p:txBody>
-          <a:bodyPr rtlCol="0" anchor="ctr"/>
-          <a:lstStyle/>
-          <a:p>
-            <a:pPr algn="ctr"/>
-          </a:p>
-        </p:txBody>
-      </p:sp>
-      <p:sp>
-        <p:nvSpPr>
-          <p:cNvPr id="3" name="TextBox 2"/>
-          <p:cNvSpPr txBox="1"/>
-          <p:nvPr/>
-        </p:nvSpPr>
-        <p:spPr>
-          <a:xfrm>
-            <a:off x="320040" y="109728"/>
-            <a:ext cx="1828800" cy="320040"/>
-          </a:xfrm>
-          <a:prstGeom prst="rect">
-            <a:avLst/>
-          </a:prstGeom>
-          <a:noFill/>
-        </p:spPr>
-        <p:txBody>
-          <a:bodyPr wrap="square">
-            <a:spAutoFit/>
-          </a:bodyPr>
-          <a:lstStyle/>
-          <a:p>
-            <a:pPr algn="l"/>
-            <a:r>
-              <a:rPr sz="700" b="1" i="0">
-                <a:solidFill>
-                  <a:srgbClr val="5A6380"/>
-                </a:solidFill>
-              </a:rPr>
-              <a:t>SLIDE 14 / 16</a:t>
-            </a:r>
-          </a:p>
-        </p:txBody>
-      </p:sp>
-      <p:sp>
-        <p:nvSpPr>
-          <p:cNvPr id="4" name="TextBox 3"/>
-          <p:cNvSpPr txBox="1"/>
-          <p:nvPr/>
-        </p:nvSpPr>
-        <p:spPr>
-          <a:xfrm>
-            <a:off x="10454335" y="91440"/>
-            <a:ext cx="1463040" cy="320040"/>
-          </a:xfrm>
-          <a:prstGeom prst="rect">
-            <a:avLst/>
-          </a:prstGeom>
-          <a:noFill/>
-        </p:spPr>
-        <p:txBody>
-          <a:bodyPr wrap="square">
-            <a:spAutoFit/>
-          </a:bodyPr>
-          <a:lstStyle/>
-          <a:p>
-            <a:pPr algn="r"/>
-            <a:r>
-              <a:rPr sz="1100" b="1" i="0">
-                <a:solidFill>
-                  <a:srgbClr val="4F8EF7"/>
-                </a:solidFill>
-              </a:rPr>
-              <a:t>CostVision</a:t>
-            </a:r>
-          </a:p>
-        </p:txBody>
-      </p:sp>
-      <p:sp>
-        <p:nvSpPr>
-          <p:cNvPr id="5" name="Rectangle 4"/>
-          <p:cNvSpPr/>
-          <p:nvPr/>
-        </p:nvSpPr>
-        <p:spPr>
-          <a:xfrm>
-            <a:off x="0" y="475488"/>
-            <a:ext cx="12191695" cy="7315"/>
-          </a:xfrm>
-          <a:prstGeom prst="rect">
-            <a:avLst/>
-          </a:prstGeom>
-          <a:solidFill>
-            <a:srgbClr val="2A3045"/>
-          </a:solidFill>
-          <a:ln>
-            <a:noFill/>
-          </a:ln>
-        </p:spPr>
-        <p:style>
-          <a:lnRef idx="1">
-            <a:schemeClr val="accent1"/>
-          </a:lnRef>
-          <a:fillRef idx="3">
-            <a:schemeClr val="accent1"/>
-          </a:fillRef>
-          <a:effectRef idx="2">
-            <a:schemeClr val="accent1"/>
-          </a:effectRef>
-          <a:fontRef idx="minor">
-            <a:schemeClr val="lt1"/>
-          </a:fontRef>
-        </p:style>
-        <p:txBody>
-          <a:bodyPr rtlCol="0" anchor="ctr"/>
-          <a:lstStyle/>
-          <a:p>
-            <a:pPr algn="ctr"/>
-          </a:p>
-        </p:txBody>
-      </p:sp>
-      <p:sp>
-        <p:nvSpPr>
-          <p:cNvPr id="6" name="TextBox 5"/>
-          <p:cNvSpPr txBox="1"/>
-          <p:nvPr/>
-        </p:nvSpPr>
-        <p:spPr>
-          <a:xfrm>
-            <a:off x="457200" y="621792"/>
-            <a:ext cx="7315200" cy="256032"/>
-          </a:xfrm>
-          <a:prstGeom prst="rect">
-            <a:avLst/>
-          </a:prstGeom>
-          <a:noFill/>
-        </p:spPr>
-        <p:txBody>
-          <a:bodyPr wrap="square">
-            <a:spAutoFit/>
-          </a:bodyPr>
-          <a:lstStyle/>
-          <a:p>
-            <a:pPr algn="l"/>
-            <a:r>
-              <a:rPr sz="800" b="1" i="0">
-                <a:solidFill>
-                  <a:srgbClr val="4F8EF7"/>
-                </a:solidFill>
-              </a:rPr>
-              <a:t>REPORTING &amp; COLLABORATION</a:t>
-            </a:r>
-          </a:p>
-        </p:txBody>
-      </p:sp>
-      <p:sp>
-        <p:nvSpPr>
-          <p:cNvPr id="7" name="TextBox 6"/>
-          <p:cNvSpPr txBox="1"/>
-          <p:nvPr/>
-        </p:nvSpPr>
-        <p:spPr>
-          <a:xfrm>
-            <a:off x="457200" y="822960"/>
-            <a:ext cx="10972800" cy="548640"/>
-          </a:xfrm>
-          <a:prstGeom prst="rect">
-            <a:avLst/>
-          </a:prstGeom>
-          <a:noFill/>
-        </p:spPr>
-        <p:txBody>
-          <a:bodyPr wrap="square">
-            <a:spAutoFit/>
-          </a:bodyPr>
-          <a:lstStyle/>
-          <a:p>
-            <a:pPr algn="l"/>
-            <a:r>
-              <a:rPr sz="2600" b="1" i="0">
-                <a:solidFill>
-                  <a:srgbClr val="F0F2F8"/>
-                </a:solidFill>
-              </a:rPr>
-              <a:t>Export, Share &amp; Collaborate — Enterprise Ready</a:t>
-            </a:r>
-          </a:p>
-        </p:txBody>
-      </p:sp>
-      <p:sp>
-        <p:nvSpPr>
-          <p:cNvPr id="8" name="TextBox 7"/>
-          <p:cNvSpPr txBox="1"/>
-          <p:nvPr/>
-        </p:nvSpPr>
-        <p:spPr>
-          <a:xfrm>
-            <a:off x="457200" y="1325880"/>
-            <a:ext cx="10972800" cy="347472"/>
-          </a:xfrm>
-          <a:prstGeom prst="rect">
-            <a:avLst/>
-          </a:prstGeom>
-          <a:noFill/>
-        </p:spPr>
-        <p:txBody>
-          <a:bodyPr wrap="square">
-            <a:spAutoFit/>
-          </a:bodyPr>
-          <a:lstStyle/>
-          <a:p>
-            <a:pPr algn="l"/>
-            <a:r>
-              <a:rPr sz="1200" b="0" i="0">
-                <a:solidFill>
-                  <a:srgbClr val="9AA3B8"/>
-                </a:solidFill>
-              </a:rPr>
-              <a:t>From individual engineer to global team — CostVision scales to any organisation size.</a:t>
-            </a:r>
-          </a:p>
-        </p:txBody>
-      </p:sp>
-      <p:sp>
-        <p:nvSpPr>
-          <p:cNvPr id="9" name="Rectangle 8"/>
-          <p:cNvSpPr/>
-          <p:nvPr/>
-        </p:nvSpPr>
-        <p:spPr>
-          <a:xfrm>
-            <a:off x="0" y="6446520"/>
-            <a:ext cx="12191695" cy="7315"/>
-          </a:xfrm>
-          <a:prstGeom prst="rect">
-            <a:avLst/>
-          </a:prstGeom>
-          <a:solidFill>
-            <a:srgbClr val="2A3045"/>
-          </a:solidFill>
-          <a:ln>
-            <a:noFill/>
-          </a:ln>
-        </p:spPr>
-        <p:style>
-          <a:lnRef idx="1">
-            <a:schemeClr val="accent1"/>
-          </a:lnRef>
-          <a:fillRef idx="3">
-            <a:schemeClr val="accent1"/>
-          </a:fillRef>
-          <a:effectRef idx="2">
-            <a:schemeClr val="accent1"/>
-          </a:effectRef>
-          <a:fontRef idx="minor">
-            <a:schemeClr val="lt1"/>
-          </a:fontRef>
-        </p:style>
-        <p:txBody>
-          <a:bodyPr rtlCol="0" anchor="ctr"/>
-          <a:lstStyle/>
-          <a:p>
-            <a:pPr algn="ctr"/>
-          </a:p>
-        </p:txBody>
-      </p:sp>
-      <p:sp>
-        <p:nvSpPr>
-          <p:cNvPr id="10" name="TextBox 9"/>
-          <p:cNvSpPr txBox="1"/>
-          <p:nvPr/>
-        </p:nvSpPr>
-        <p:spPr>
-          <a:xfrm>
-            <a:off x="365760" y="6492240"/>
-            <a:ext cx="11460175" cy="320040"/>
-          </a:xfrm>
-          <a:prstGeom prst="rect">
-            <a:avLst/>
-          </a:prstGeom>
-          <a:noFill/>
-        </p:spPr>
-        <p:txBody>
-          <a:bodyPr wrap="square">
-            <a:spAutoFit/>
-          </a:bodyPr>
-          <a:lstStyle/>
-          <a:p>
-            <a:pPr algn="ctr"/>
-            <a:r>
-              <a:rPr sz="750" b="0" i="0">
-                <a:solidFill>
-                  <a:srgbClr val="5A6380"/>
-                </a:solidFill>
-              </a:rPr>
-              <a:t>CostVision — AI-Powered Should-Cost Intelligence  |  Avinash Bhosale  |  Confidential</a:t>
-            </a:r>
-          </a:p>
-        </p:txBody>
-      </p:sp>
-      <p:sp>
-        <p:nvSpPr>
-          <p:cNvPr id="11" name="Rectangle 10"/>
-          <p:cNvSpPr/>
-          <p:nvPr/>
-        </p:nvSpPr>
-        <p:spPr>
-          <a:xfrm>
-            <a:off x="411480" y="1810512"/>
-            <a:ext cx="3749039" cy="1965960"/>
-          </a:xfrm>
-          <a:prstGeom prst="rect">
-            <a:avLst/>
-          </a:prstGeom>
-          <a:solidFill>
-            <a:srgbClr val="1E2330"/>
-          </a:solidFill>
-          <a:ln w="6350">
-            <a:solidFill>
-              <a:srgbClr val="2A3045"/>
-            </a:solidFill>
-          </a:ln>
-        </p:spPr>
-        <p:style>
-          <a:lnRef idx="1">
-            <a:schemeClr val="accent1"/>
-          </a:lnRef>
-          <a:fillRef idx="3">
-            <a:schemeClr val="accent1"/>
-          </a:fillRef>
-          <a:effectRef idx="2">
-            <a:schemeClr val="accent1"/>
-          </a:effectRef>
-          <a:fontRef idx="minor">
-            <a:schemeClr val="lt1"/>
-          </a:fontRef>
-        </p:style>
-        <p:txBody>
-          <a:bodyPr rtlCol="0" anchor="ctr"/>
-          <a:lstStyle/>
-          <a:p>
-            <a:pPr algn="ctr"/>
-          </a:p>
-        </p:txBody>
-      </p:sp>
-      <p:sp>
-        <p:nvSpPr>
-          <p:cNvPr id="12" name="Rectangle 11"/>
-          <p:cNvSpPr/>
-          <p:nvPr/>
-        </p:nvSpPr>
-        <p:spPr>
-          <a:xfrm>
-            <a:off x="411480" y="1810512"/>
-            <a:ext cx="54864" cy="1965960"/>
-          </a:xfrm>
-          <a:prstGeom prst="rect">
-            <a:avLst/>
-          </a:prstGeom>
-          <a:solidFill>
-            <a:srgbClr val="10B981"/>
-          </a:solidFill>
-          <a:ln>
-            <a:noFill/>
-          </a:ln>
-        </p:spPr>
-        <p:style>
-          <a:lnRef idx="1">
-            <a:schemeClr val="accent1"/>
-          </a:lnRef>
-          <a:fillRef idx="3">
-            <a:schemeClr val="accent1"/>
-          </a:fillRef>
-          <a:effectRef idx="2">
-            <a:schemeClr val="accent1"/>
-          </a:effectRef>
-          <a:fontRef idx="minor">
-            <a:schemeClr val="lt1"/>
-          </a:fontRef>
-        </p:style>
-        <p:txBody>
-          <a:bodyPr rtlCol="0" anchor="ctr"/>
-          <a:lstStyle/>
-          <a:p>
-            <a:pPr algn="ctr"/>
-          </a:p>
-        </p:txBody>
-      </p:sp>
-      <p:sp>
-        <p:nvSpPr>
-          <p:cNvPr id="13" name="TextBox 12"/>
-          <p:cNvSpPr txBox="1"/>
-          <p:nvPr/>
-        </p:nvSpPr>
-        <p:spPr>
-          <a:xfrm>
-            <a:off x="539496" y="1901952"/>
-            <a:ext cx="3566159" cy="292608"/>
-          </a:xfrm>
-          <a:prstGeom prst="rect">
-            <a:avLst/>
-          </a:prstGeom>
-          <a:noFill/>
-        </p:spPr>
-        <p:txBody>
-          <a:bodyPr wrap="square">
-            <a:spAutoFit/>
-          </a:bodyPr>
-          <a:lstStyle/>
-          <a:p>
-            <a:pPr algn="l"/>
-            <a:r>
-              <a:rPr sz="950" b="1" i="0">
-                <a:solidFill>
-                  <a:srgbClr val="F0F2F8"/>
-                </a:solidFill>
-              </a:rPr>
-              <a:t>📊 6-Sheet Excel Export</a:t>
-            </a:r>
-          </a:p>
-        </p:txBody>
-      </p:sp>
-      <p:sp>
-        <p:nvSpPr>
-          <p:cNvPr id="14" name="TextBox 13"/>
-          <p:cNvSpPr txBox="1"/>
-          <p:nvPr/>
-        </p:nvSpPr>
-        <p:spPr>
-          <a:xfrm>
-            <a:off x="539496" y="2157984"/>
-            <a:ext cx="3566159" cy="1508760"/>
-          </a:xfrm>
-          <a:prstGeom prst="rect">
-            <a:avLst/>
-          </a:prstGeom>
-          <a:noFill/>
-        </p:spPr>
-        <p:txBody>
-          <a:bodyPr wrap="square">
-            <a:spAutoFit/>
-          </a:bodyPr>
-          <a:lstStyle/>
-          <a:p>
-            <a:pPr algn="l"/>
-            <a:r>
-              <a:rPr sz="850" b="0" i="0">
-                <a:solidFill>
-                  <a:srgbClr val="9AA3B8"/>
-                </a:solidFill>
-              </a:rPr>
-              <a:t>Sheet 1: Summary (total cost, breakdown %, region, commodity)
-Sheet 2: Material (alloy, weight, utilisation, price)
-Sheet 3: Operations (machine, labour, cycle time, OEE per step)
-Sheet 4: Machine Rates (rate library snapshot)
-Sheet 5: Labour Rates (regional labour tiers)
-Sheet 6: Traceability (assumptions, AI notes, version, date)</a:t>
-            </a:r>
-          </a:p>
-        </p:txBody>
-      </p:sp>
-      <p:sp>
-        <p:nvSpPr>
-          <p:cNvPr id="15" name="Rectangle 14"/>
-          <p:cNvSpPr/>
-          <p:nvPr/>
-        </p:nvSpPr>
-        <p:spPr>
-          <a:xfrm>
-            <a:off x="4270247" y="1810512"/>
-            <a:ext cx="3749039" cy="1965960"/>
-          </a:xfrm>
-          <a:prstGeom prst="rect">
-            <a:avLst/>
-          </a:prstGeom>
-          <a:solidFill>
-            <a:srgbClr val="1E2330"/>
-          </a:solidFill>
-          <a:ln w="6350">
-            <a:solidFill>
-              <a:srgbClr val="2A3045"/>
-            </a:solidFill>
-          </a:ln>
-        </p:spPr>
-        <p:style>
-          <a:lnRef idx="1">
-            <a:schemeClr val="accent1"/>
-          </a:lnRef>
-          <a:fillRef idx="3">
-            <a:schemeClr val="accent1"/>
-          </a:fillRef>
-          <a:effectRef idx="2">
-            <a:schemeClr val="accent1"/>
-          </a:effectRef>
-          <a:fontRef idx="minor">
-            <a:schemeClr val="lt1"/>
-          </a:fontRef>
-        </p:style>
-        <p:txBody>
-          <a:bodyPr rtlCol="0" anchor="ctr"/>
-          <a:lstStyle/>
-          <a:p>
-            <a:pPr algn="ctr"/>
-          </a:p>
-        </p:txBody>
-      </p:sp>
-      <p:sp>
-        <p:nvSpPr>
-          <p:cNvPr id="16" name="Rectangle 15"/>
-          <p:cNvSpPr/>
-          <p:nvPr/>
-        </p:nvSpPr>
-        <p:spPr>
-          <a:xfrm>
-            <a:off x="4270247" y="1810512"/>
-            <a:ext cx="54864" cy="1965960"/>
-          </a:xfrm>
-          <a:prstGeom prst="rect">
-            <a:avLst/>
-          </a:prstGeom>
-          <a:solidFill>
-            <a:srgbClr val="4F8EF7"/>
-          </a:solidFill>
-          <a:ln>
-            <a:noFill/>
-          </a:ln>
-        </p:spPr>
-        <p:style>
-          <a:lnRef idx="1">
-            <a:schemeClr val="accent1"/>
-          </a:lnRef>
-          <a:fillRef idx="3">
-            <a:schemeClr val="accent1"/>
-          </a:fillRef>
-          <a:effectRef idx="2">
-            <a:schemeClr val="accent1"/>
-          </a:effectRef>
-          <a:fontRef idx="minor">
-            <a:schemeClr val="lt1"/>
-          </a:fontRef>
-        </p:style>
-        <p:txBody>
-          <a:bodyPr rtlCol="0" anchor="ctr"/>
-          <a:lstStyle/>
-          <a:p>
-            <a:pPr algn="ctr"/>
-          </a:p>
-        </p:txBody>
-      </p:sp>
-      <p:sp>
-        <p:nvSpPr>
-          <p:cNvPr id="17" name="TextBox 16"/>
-          <p:cNvSpPr txBox="1"/>
-          <p:nvPr/>
-        </p:nvSpPr>
-        <p:spPr>
-          <a:xfrm>
-            <a:off x="4398263" y="1901952"/>
-            <a:ext cx="3566159" cy="292608"/>
-          </a:xfrm>
-          <a:prstGeom prst="rect">
-            <a:avLst/>
-          </a:prstGeom>
-          <a:noFill/>
-        </p:spPr>
-        <p:txBody>
-          <a:bodyPr wrap="square">
-            <a:spAutoFit/>
-          </a:bodyPr>
-          <a:lstStyle/>
-          <a:p>
-            <a:pPr algn="l"/>
-            <a:r>
-              <a:rPr sz="950" b="1" i="0">
-                <a:solidFill>
-                  <a:srgbClr val="F0F2F8"/>
-                </a:solidFill>
-              </a:rPr>
-              <a:t>📄 Professional PDF Report</a:t>
-            </a:r>
-          </a:p>
-        </p:txBody>
-      </p:sp>
-      <p:sp>
-        <p:nvSpPr>
-          <p:cNvPr id="18" name="TextBox 17"/>
-          <p:cNvSpPr txBox="1"/>
-          <p:nvPr/>
-        </p:nvSpPr>
-        <p:spPr>
-          <a:xfrm>
-            <a:off x="4398263" y="2157984"/>
-            <a:ext cx="3566159" cy="1508760"/>
-          </a:xfrm>
-          <a:prstGeom prst="rect">
-            <a:avLst/>
-          </a:prstGeom>
-          <a:noFill/>
-        </p:spPr>
-        <p:txBody>
-          <a:bodyPr wrap="square">
-            <a:spAutoFit/>
-          </a:bodyPr>
-          <a:lstStyle/>
-          <a:p>
-            <a:pPr algn="l"/>
-            <a:r>
-              <a:rPr sz="850" b="0" i="0">
-                <a:solidFill>
-                  <a:srgbClr val="9AA3B8"/>
-                </a:solidFill>
-              </a:rPr>
-              <a:t>Section 1: Cover page with part photo &amp; programme details
-Section 2: Cost summary and 8-bucket breakdown chart
-Section 3: Detailed operation-by-operation cost build
-Section 4: Machine and labour rate build-up table
-Section 5: AI insights and saving opportunities
-Section 6: DFM/DFA scores, issues and recommendations</a:t>
-            </a:r>
-          </a:p>
-        </p:txBody>
-      </p:sp>
-      <p:sp>
-        <p:nvSpPr>
-          <p:cNvPr id="19" name="Rectangle 18"/>
-          <p:cNvSpPr/>
-          <p:nvPr/>
-        </p:nvSpPr>
-        <p:spPr>
-          <a:xfrm>
-            <a:off x="8129014" y="1810512"/>
-            <a:ext cx="3749039" cy="1965960"/>
-          </a:xfrm>
-          <a:prstGeom prst="rect">
-            <a:avLst/>
-          </a:prstGeom>
-          <a:solidFill>
-            <a:srgbClr val="1E2330"/>
-          </a:solidFill>
-          <a:ln w="6350">
-            <a:solidFill>
-              <a:srgbClr val="2A3045"/>
-            </a:solidFill>
-          </a:ln>
-        </p:spPr>
-        <p:style>
-          <a:lnRef idx="1">
-            <a:schemeClr val="accent1"/>
-          </a:lnRef>
-          <a:fillRef idx="3">
-            <a:schemeClr val="accent1"/>
-          </a:fillRef>
-          <a:effectRef idx="2">
-            <a:schemeClr val="accent1"/>
-          </a:effectRef>
-          <a:fontRef idx="minor">
-            <a:schemeClr val="lt1"/>
-          </a:fontRef>
-        </p:style>
-        <p:txBody>
-          <a:bodyPr rtlCol="0" anchor="ctr"/>
-          <a:lstStyle/>
-          <a:p>
-            <a:pPr algn="ctr"/>
-          </a:p>
-        </p:txBody>
-      </p:sp>
-      <p:sp>
-        <p:nvSpPr>
-          <p:cNvPr id="20" name="Rectangle 19"/>
-          <p:cNvSpPr/>
-          <p:nvPr/>
-        </p:nvSpPr>
-        <p:spPr>
-          <a:xfrm>
-            <a:off x="8129014" y="1810512"/>
-            <a:ext cx="54864" cy="1965960"/>
-          </a:xfrm>
-          <a:prstGeom prst="rect">
-            <a:avLst/>
-          </a:prstGeom>
-          <a:solidFill>
-            <a:srgbClr val="7C3AED"/>
-          </a:solidFill>
-          <a:ln>
-            <a:noFill/>
-          </a:ln>
-        </p:spPr>
-        <p:style>
-          <a:lnRef idx="1">
-            <a:schemeClr val="accent1"/>
-          </a:lnRef>
-          <a:fillRef idx="3">
-            <a:schemeClr val="accent1"/>
-          </a:fillRef>
-          <a:effectRef idx="2">
-            <a:schemeClr val="accent1"/>
-          </a:effectRef>
-          <a:fontRef idx="minor">
-            <a:schemeClr val="lt1"/>
-          </a:fontRef>
-        </p:style>
-        <p:txBody>
-          <a:bodyPr rtlCol="0" anchor="ctr"/>
-          <a:lstStyle/>
-          <a:p>
-            <a:pPr algn="ctr"/>
-          </a:p>
-        </p:txBody>
-      </p:sp>
-      <p:sp>
-        <p:nvSpPr>
-          <p:cNvPr id="21" name="TextBox 20"/>
-          <p:cNvSpPr txBox="1"/>
-          <p:nvPr/>
-        </p:nvSpPr>
-        <p:spPr>
-          <a:xfrm>
-            <a:off x="8257030" y="1901952"/>
-            <a:ext cx="3566159" cy="292608"/>
-          </a:xfrm>
-          <a:prstGeom prst="rect">
-            <a:avLst/>
-          </a:prstGeom>
-          <a:noFill/>
-        </p:spPr>
-        <p:txBody>
-          <a:bodyPr wrap="square">
-            <a:spAutoFit/>
-          </a:bodyPr>
-          <a:lstStyle/>
-          <a:p>
-            <a:pPr algn="l"/>
-            <a:r>
-              <a:rPr sz="950" b="1" i="0">
-                <a:solidFill>
-                  <a:srgbClr val="F0F2F8"/>
-                </a:solidFill>
-              </a:rPr>
-              <a:t>☁️ Cloud Team Sync</a:t>
-            </a:r>
-          </a:p>
-        </p:txBody>
-      </p:sp>
-      <p:sp>
-        <p:nvSpPr>
-          <p:cNvPr id="22" name="TextBox 21"/>
-          <p:cNvSpPr txBox="1"/>
-          <p:nvPr/>
-        </p:nvSpPr>
-        <p:spPr>
-          <a:xfrm>
-            <a:off x="8257030" y="2157984"/>
-            <a:ext cx="3566159" cy="1508760"/>
-          </a:xfrm>
-          <a:prstGeom prst="rect">
-            <a:avLst/>
-          </a:prstGeom>
-          <a:noFill/>
-        </p:spPr>
-        <p:txBody>
-          <a:bodyPr wrap="square">
-            <a:spAutoFit/>
-          </a:bodyPr>
-          <a:lstStyle/>
-          <a:p>
-            <a:pPr algn="l"/>
-            <a:r>
-              <a:rPr sz="850" b="0" i="0">
-                <a:solidFill>
-                  <a:srgbClr val="9AA3B8"/>
-                </a:solidFill>
-              </a:rPr>
-              <a:t>Scenarios saved to cloud database (SQLite / PostgreSQL)
-All team members see the same cost baseline
-Secure JWT authentication + OTP email verification
-Full multi-user access — no spreadsheet version conflicts
-Import/export scenarios as JSON for offline sharing</a:t>
-            </a:r>
-          </a:p>
-        </p:txBody>
-      </p:sp>
-      <p:sp>
-        <p:nvSpPr>
-          <p:cNvPr id="23" name="Rectangle 22"/>
-          <p:cNvSpPr/>
-          <p:nvPr/>
-        </p:nvSpPr>
-        <p:spPr>
-          <a:xfrm>
-            <a:off x="411480" y="3886200"/>
-            <a:ext cx="3749039" cy="1965960"/>
-          </a:xfrm>
-          <a:prstGeom prst="rect">
-            <a:avLst/>
-          </a:prstGeom>
-          <a:solidFill>
-            <a:srgbClr val="1E2330"/>
-          </a:solidFill>
-          <a:ln w="6350">
-            <a:solidFill>
-              <a:srgbClr val="2A3045"/>
-            </a:solidFill>
-          </a:ln>
-        </p:spPr>
-        <p:style>
-          <a:lnRef idx="1">
-            <a:schemeClr val="accent1"/>
-          </a:lnRef>
-          <a:fillRef idx="3">
-            <a:schemeClr val="accent1"/>
-          </a:fillRef>
-          <a:effectRef idx="2">
-            <a:schemeClr val="accent1"/>
-          </a:effectRef>
-          <a:fontRef idx="minor">
-            <a:schemeClr val="lt1"/>
-          </a:fontRef>
-        </p:style>
-        <p:txBody>
-          <a:bodyPr rtlCol="0" anchor="ctr"/>
-          <a:lstStyle/>
-          <a:p>
-            <a:pPr algn="ctr"/>
-          </a:p>
-        </p:txBody>
-      </p:sp>
-      <p:sp>
-        <p:nvSpPr>
-          <p:cNvPr id="24" name="Rectangle 23"/>
-          <p:cNvSpPr/>
-          <p:nvPr/>
-        </p:nvSpPr>
-        <p:spPr>
-          <a:xfrm>
-            <a:off x="411480" y="3886200"/>
-            <a:ext cx="54864" cy="1965960"/>
-          </a:xfrm>
-          <a:prstGeom prst="rect">
-            <a:avLst/>
-          </a:prstGeom>
-          <a:solidFill>
-            <a:srgbClr val="F59E0B"/>
-          </a:solidFill>
-          <a:ln>
-            <a:noFill/>
-          </a:ln>
-        </p:spPr>
-        <p:style>
-          <a:lnRef idx="1">
-            <a:schemeClr val="accent1"/>
-          </a:lnRef>
-          <a:fillRef idx="3">
-            <a:schemeClr val="accent1"/>
-          </a:fillRef>
-          <a:effectRef idx="2">
-            <a:schemeClr val="accent1"/>
-          </a:effectRef>
-          <a:fontRef idx="minor">
-            <a:schemeClr val="lt1"/>
-          </a:fontRef>
-        </p:style>
-        <p:txBody>
-          <a:bodyPr rtlCol="0" anchor="ctr"/>
-          <a:lstStyle/>
-          <a:p>
-            <a:pPr algn="ctr"/>
-          </a:p>
-        </p:txBody>
-      </p:sp>
-      <p:sp>
-        <p:nvSpPr>
-          <p:cNvPr id="25" name="TextBox 24"/>
-          <p:cNvSpPr txBox="1"/>
-          <p:nvPr/>
-        </p:nvSpPr>
-        <p:spPr>
-          <a:xfrm>
-            <a:off x="539496" y="3977640"/>
-            <a:ext cx="3566159" cy="292608"/>
-          </a:xfrm>
-          <a:prstGeom prst="rect">
-            <a:avLst/>
-          </a:prstGeom>
-          <a:noFill/>
-        </p:spPr>
-        <p:txBody>
-          <a:bodyPr wrap="square">
-            <a:spAutoFit/>
-          </a:bodyPr>
-          <a:lstStyle/>
-          <a:p>
-            <a:pPr algn="l"/>
-            <a:r>
-              <a:rPr sz="950" b="1" i="0">
-                <a:solidFill>
-                  <a:srgbClr val="F0F2F8"/>
-                </a:solidFill>
-              </a:rPr>
-              <a:t>📸 Part Photo &amp; Visual Docs</a:t>
-            </a:r>
-          </a:p>
-        </p:txBody>
-      </p:sp>
-      <p:sp>
-        <p:nvSpPr>
-          <p:cNvPr id="26" name="TextBox 25"/>
-          <p:cNvSpPr txBox="1"/>
-          <p:nvPr/>
-        </p:nvSpPr>
-        <p:spPr>
-          <a:xfrm>
-            <a:off x="539496" y="4233672"/>
-            <a:ext cx="3566159" cy="1508760"/>
-          </a:xfrm>
-          <a:prstGeom prst="rect">
-            <a:avLst/>
-          </a:prstGeom>
-          <a:noFill/>
-        </p:spPr>
-        <p:txBody>
-          <a:bodyPr wrap="square">
-            <a:spAutoFit/>
-          </a:bodyPr>
-          <a:lstStyle/>
-          <a:p>
-            <a:pPr algn="l"/>
-            <a:r>
-              <a:rPr sz="850" b="0" i="0">
-                <a:solidFill>
-                  <a:srgbClr val="9AA3B8"/>
-                </a:solidFill>
-              </a:rPr>
-              <a:t>Upload part photo (JPG / PNG / HEIC) with any calculation
-Photo appears on the PDF report cover page
-AI Agent accepts photos as input for visual cost estimation
-Drag-and-drop or file picker supported</a:t>
-            </a:r>
-          </a:p>
-        </p:txBody>
-      </p:sp>
-      <p:sp>
-        <p:nvSpPr>
-          <p:cNvPr id="27" name="Rectangle 26"/>
-          <p:cNvSpPr/>
-          <p:nvPr/>
-        </p:nvSpPr>
-        <p:spPr>
-          <a:xfrm>
-            <a:off x="4270247" y="3886200"/>
-            <a:ext cx="3749039" cy="1965960"/>
-          </a:xfrm>
-          <a:prstGeom prst="rect">
-            <a:avLst/>
-          </a:prstGeom>
-          <a:solidFill>
-            <a:srgbClr val="1E2330"/>
-          </a:solidFill>
-          <a:ln w="6350">
-            <a:solidFill>
-              <a:srgbClr val="2A3045"/>
-            </a:solidFill>
-          </a:ln>
-        </p:spPr>
-        <p:style>
-          <a:lnRef idx="1">
-            <a:schemeClr val="accent1"/>
-          </a:lnRef>
-          <a:fillRef idx="3">
-            <a:schemeClr val="accent1"/>
-          </a:fillRef>
-          <a:effectRef idx="2">
-            <a:schemeClr val="accent1"/>
-          </a:effectRef>
-          <a:fontRef idx="minor">
-            <a:schemeClr val="lt1"/>
-          </a:fontRef>
-        </p:style>
-        <p:txBody>
-          <a:bodyPr rtlCol="0" anchor="ctr"/>
-          <a:lstStyle/>
-          <a:p>
-            <a:pPr algn="ctr"/>
-          </a:p>
-        </p:txBody>
-      </p:sp>
-      <p:sp>
-        <p:nvSpPr>
-          <p:cNvPr id="28" name="Rectangle 27"/>
-          <p:cNvSpPr/>
-          <p:nvPr/>
-        </p:nvSpPr>
-        <p:spPr>
-          <a:xfrm>
-            <a:off x="4270247" y="3886200"/>
-            <a:ext cx="54864" cy="1965960"/>
-          </a:xfrm>
-          <a:prstGeom prst="rect">
-            <a:avLst/>
-          </a:prstGeom>
-          <a:solidFill>
-            <a:srgbClr val="10B981"/>
-          </a:solidFill>
-          <a:ln>
-            <a:noFill/>
-          </a:ln>
-        </p:spPr>
-        <p:style>
-          <a:lnRef idx="1">
-            <a:schemeClr val="accent1"/>
-          </a:lnRef>
-          <a:fillRef idx="3">
-            <a:schemeClr val="accent1"/>
-          </a:fillRef>
-          <a:effectRef idx="2">
-            <a:schemeClr val="accent1"/>
-          </a:effectRef>
-          <a:fontRef idx="minor">
-            <a:schemeClr val="lt1"/>
-          </a:fontRef>
-        </p:style>
-        <p:txBody>
-          <a:bodyPr rtlCol="0" anchor="ctr"/>
-          <a:lstStyle/>
-          <a:p>
-            <a:pPr algn="ctr"/>
-          </a:p>
-        </p:txBody>
-      </p:sp>
-      <p:sp>
-        <p:nvSpPr>
-          <p:cNvPr id="29" name="TextBox 28"/>
-          <p:cNvSpPr txBox="1"/>
-          <p:nvPr/>
-        </p:nvSpPr>
-        <p:spPr>
-          <a:xfrm>
-            <a:off x="4398263" y="3977640"/>
-            <a:ext cx="3566159" cy="292608"/>
-          </a:xfrm>
-          <a:prstGeom prst="rect">
-            <a:avLst/>
-          </a:prstGeom>
-          <a:noFill/>
-        </p:spPr>
-        <p:txBody>
-          <a:bodyPr wrap="square">
-            <a:spAutoFit/>
-          </a:bodyPr>
-          <a:lstStyle/>
-          <a:p>
-            <a:pPr algn="l"/>
-            <a:r>
-              <a:rPr sz="950" b="1" i="0">
-                <a:solidFill>
-                  <a:srgbClr val="F0F2F8"/>
-                </a:solidFill>
-              </a:rPr>
-              <a:t>🔑 Enterprise Authentication</a:t>
-            </a:r>
-          </a:p>
-        </p:txBody>
-      </p:sp>
-      <p:sp>
-        <p:nvSpPr>
-          <p:cNvPr id="30" name="TextBox 29"/>
-          <p:cNvSpPr txBox="1"/>
-          <p:nvPr/>
-        </p:nvSpPr>
-        <p:spPr>
-          <a:xfrm>
-            <a:off x="4398263" y="4233672"/>
-            <a:ext cx="3566159" cy="1508760"/>
-          </a:xfrm>
-          <a:prstGeom prst="rect">
-            <a:avLst/>
-          </a:prstGeom>
-          <a:noFill/>
-        </p:spPr>
-        <p:txBody>
-          <a:bodyPr wrap="square">
-            <a:spAutoFit/>
-          </a:bodyPr>
-          <a:lstStyle/>
-          <a:p>
-            <a:pPr algn="l"/>
-            <a:r>
-              <a:rPr sz="850" b="0" i="0">
-                <a:solidFill>
-                  <a:srgbClr val="9AA3B8"/>
-                </a:solidFill>
-              </a:rPr>
-              <a:t>JWT token-based authentication with 24hr expiry
-OTP email verification for account security
-Password reset flow with secure email delivery
-Rate limiting: 10 sign-in attempts / 15 min window</a:t>
-            </a:r>
-          </a:p>
-        </p:txBody>
-      </p:sp>
-      <p:sp>
-        <p:nvSpPr>
-          <p:cNvPr id="31" name="Rectangle 30"/>
-          <p:cNvSpPr/>
-          <p:nvPr/>
-        </p:nvSpPr>
-        <p:spPr>
-          <a:xfrm>
-            <a:off x="8129014" y="3886200"/>
-            <a:ext cx="3749039" cy="1965960"/>
-          </a:xfrm>
-          <a:prstGeom prst="rect">
-            <a:avLst/>
-          </a:prstGeom>
-          <a:solidFill>
-            <a:srgbClr val="1E2330"/>
-          </a:solidFill>
-          <a:ln w="6350">
-            <a:solidFill>
-              <a:srgbClr val="2A3045"/>
-            </a:solidFill>
-          </a:ln>
-        </p:spPr>
-        <p:style>
-          <a:lnRef idx="1">
-            <a:schemeClr val="accent1"/>
-          </a:lnRef>
-          <a:fillRef idx="3">
-            <a:schemeClr val="accent1"/>
-          </a:fillRef>
-          <a:effectRef idx="2">
-            <a:schemeClr val="accent1"/>
-          </a:effectRef>
-          <a:fontRef idx="minor">
-            <a:schemeClr val="lt1"/>
-          </a:fontRef>
-        </p:style>
-        <p:txBody>
-          <a:bodyPr rtlCol="0" anchor="ctr"/>
-          <a:lstStyle/>
-          <a:p>
-            <a:pPr algn="ctr"/>
-          </a:p>
-        </p:txBody>
-      </p:sp>
-      <p:sp>
-        <p:nvSpPr>
-          <p:cNvPr id="32" name="Rectangle 31"/>
-          <p:cNvSpPr/>
-          <p:nvPr/>
-        </p:nvSpPr>
-        <p:spPr>
-          <a:xfrm>
-            <a:off x="8129014" y="3886200"/>
-            <a:ext cx="54864" cy="1965960"/>
-          </a:xfrm>
-          <a:prstGeom prst="rect">
-            <a:avLst/>
-          </a:prstGeom>
-          <a:solidFill>
-            <a:srgbClr val="4F8EF7"/>
-          </a:solidFill>
-          <a:ln>
-            <a:noFill/>
-          </a:ln>
-        </p:spPr>
-        <p:style>
-          <a:lnRef idx="1">
-            <a:schemeClr val="accent1"/>
-          </a:lnRef>
-          <a:fillRef idx="3">
-            <a:schemeClr val="accent1"/>
-          </a:fillRef>
-          <a:effectRef idx="2">
-            <a:schemeClr val="accent1"/>
-          </a:effectRef>
-          <a:fontRef idx="minor">
-            <a:schemeClr val="lt1"/>
-          </a:fontRef>
-        </p:style>
-        <p:txBody>
-          <a:bodyPr rtlCol="0" anchor="ctr"/>
-          <a:lstStyle/>
-          <a:p>
-            <a:pPr algn="ctr"/>
-          </a:p>
-        </p:txBody>
-      </p:sp>
-      <p:sp>
-        <p:nvSpPr>
-          <p:cNvPr id="33" name="TextBox 32"/>
-          <p:cNvSpPr txBox="1"/>
-          <p:nvPr/>
-        </p:nvSpPr>
-        <p:spPr>
-          <a:xfrm>
-            <a:off x="8257030" y="3977640"/>
-            <a:ext cx="3566159" cy="292608"/>
-          </a:xfrm>
-          <a:prstGeom prst="rect">
-            <a:avLst/>
-          </a:prstGeom>
-          <a:noFill/>
-        </p:spPr>
-        <p:txBody>
-          <a:bodyPr wrap="square">
-            <a:spAutoFit/>
-          </a:bodyPr>
-          <a:lstStyle/>
-          <a:p>
-            <a:pPr algn="l"/>
-            <a:r>
-              <a:rPr sz="950" b="1" i="0">
-                <a:solidFill>
-                  <a:srgbClr val="F0F2F8"/>
-                </a:solidFill>
-              </a:rPr>
-              <a:t>❓ Help Centre &amp; Support</a:t>
-            </a:r>
-          </a:p>
-        </p:txBody>
-      </p:sp>
-      <p:sp>
-        <p:nvSpPr>
-          <p:cNvPr id="34" name="TextBox 33"/>
-          <p:cNvSpPr txBox="1"/>
-          <p:nvPr/>
-        </p:nvSpPr>
-        <p:spPr>
-          <a:xfrm>
-            <a:off x="8257030" y="4233672"/>
-            <a:ext cx="3566159" cy="1508760"/>
-          </a:xfrm>
-          <a:prstGeom prst="rect">
-            <a:avLst/>
-          </a:prstGeom>
-          <a:noFill/>
-        </p:spPr>
-        <p:txBody>
-          <a:bodyPr wrap="square">
-            <a:spAutoFit/>
-          </a:bodyPr>
-          <a:lstStyle/>
-          <a:p>
-            <a:pPr algn="l"/>
-            <a:r>
-              <a:rPr sz="850" b="0" i="0">
-                <a:solidFill>
-                  <a:srgbClr val="9AA3B8"/>
-                </a:solidFill>
-              </a:rPr>
-              <a:t>7-tab Help Centre: Getting Started, AI Agent, CAD &amp; Photo,
-Commodities, FAQ (6 items), Glossary (12 terms),
-Troubleshooting (5 common issues)
-Contact support form built-in to the application</a:t>
-            </a:r>
-          </a:p>
-        </p:txBody>
-      </p:sp>
-    </p:spTree>
-  </p:cSld>
-  <p:clrMapOvr>
-    <a:masterClrMapping/>
-  </p:clrMapOvr>
-</p:sld>
-</file>
-
 <file path=ppt/slides/slide15.xml><?xml version="1.0" encoding="utf-8"?>
 <p:sld xmlns:a="http://schemas.openxmlformats.org/drawingml/2006/main" xmlns:p="http://schemas.openxmlformats.org/presentationml/2006/main" xmlns:r="http://schemas.openxmlformats.org/officeDocument/2006/relationships">
   <p:cSld>
@@ -14435,7 +15186,7 @@
                   <a:srgbClr val="5A6380"/>
                 </a:solidFill>
               </a:rPr>
-              <a:t>SLIDE 15 / 16</a:t>
+              <a:t>SLIDE 15 / 17</a:t>
             </a:r>
           </a:p>
         </p:txBody>
@@ -14546,7 +15297,7 @@
                   <a:srgbClr val="4F8EF7"/>
                 </a:solidFill>
               </a:rPr>
-              <a:t>VALUE DELIVERED</a:t>
+              <a:t>REPORTING &amp; COLLABORATION</a:t>
             </a:r>
           </a:p>
         </p:txBody>
@@ -14580,7 +15331,7 @@
                   <a:srgbClr val="F0F2F8"/>
                 </a:solidFill>
               </a:rPr>
-              <a:t>Business Impact &amp; Measurable ROI</a:t>
+              <a:t>Export, Share &amp; Collaborate — Enterprise Ready</a:t>
             </a:r>
           </a:p>
         </p:txBody>
@@ -14614,7 +15365,7 @@
                   <a:srgbClr val="9AA3B8"/>
                 </a:solidFill>
               </a:rPr>
-              <a:t>Quantified improvements across speed, accuracy, and cost reduction that directly impact the bottom line.</a:t>
+              <a:t>From individual engineer to global team — CostVision scales to any organisation size.</a:t>
             </a:r>
           </a:p>
         </p:txBody>
@@ -14705,7 +15456,7 @@
         <p:spPr>
           <a:xfrm>
             <a:off x="411480" y="1810512"/>
-            <a:ext cx="2194560" cy="1005840"/>
+            <a:ext cx="3749039" cy="1965960"/>
           </a:xfrm>
           <a:prstGeom prst="rect">
             <a:avLst/>
@@ -14743,35 +15494,44 @@
       </p:sp>
       <p:sp>
         <p:nvSpPr>
-          <p:cNvPr id="12" name="TextBox 11"/>
-          <p:cNvSpPr txBox="1"/>
-          <p:nvPr/>
-        </p:nvSpPr>
-        <p:spPr>
-          <a:xfrm>
-            <a:off x="411480" y="1901952"/>
-            <a:ext cx="2194560" cy="502920"/>
-          </a:xfrm>
-          <a:prstGeom prst="rect">
-            <a:avLst/>
-          </a:prstGeom>
-          <a:noFill/>
-        </p:spPr>
-        <p:txBody>
-          <a:bodyPr wrap="square">
-            <a:spAutoFit/>
-          </a:bodyPr>
-          <a:lstStyle/>
-          <a:p>
-            <a:pPr algn="ctr"/>
-            <a:r>
-              <a:rPr sz="2800" b="1" i="0">
-                <a:solidFill>
-                  <a:srgbClr val="4F8EF7"/>
-                </a:solidFill>
-              </a:rPr>
-              <a:t>70–90%</a:t>
-            </a:r>
+          <p:cNvPr id="12" name="Rectangle 11"/>
+          <p:cNvSpPr/>
+          <p:nvPr/>
+        </p:nvSpPr>
+        <p:spPr>
+          <a:xfrm>
+            <a:off x="411480" y="1810512"/>
+            <a:ext cx="54864" cy="1965960"/>
+          </a:xfrm>
+          <a:prstGeom prst="rect">
+            <a:avLst/>
+          </a:prstGeom>
+          <a:solidFill>
+            <a:srgbClr val="10B981"/>
+          </a:solidFill>
+          <a:ln>
+            <a:noFill/>
+          </a:ln>
+        </p:spPr>
+        <p:style>
+          <a:lnRef idx="1">
+            <a:schemeClr val="accent1"/>
+          </a:lnRef>
+          <a:fillRef idx="3">
+            <a:schemeClr val="accent1"/>
+          </a:fillRef>
+          <a:effectRef idx="2">
+            <a:schemeClr val="accent1"/>
+          </a:effectRef>
+          <a:fontRef idx="minor">
+            <a:schemeClr val="lt1"/>
+          </a:fontRef>
+        </p:style>
+        <p:txBody>
+          <a:bodyPr rtlCol="0" anchor="ctr"/>
+          <a:lstStyle/>
+          <a:p>
+            <a:pPr algn="ctr"/>
           </a:p>
         </p:txBody>
       </p:sp>
@@ -14783,42 +15543,81 @@
         </p:nvSpPr>
         <p:spPr>
           <a:xfrm>
-            <a:off x="411480" y="2377440"/>
-            <a:ext cx="2194560" cy="347472"/>
-          </a:xfrm>
-          <a:prstGeom prst="rect">
-            <a:avLst/>
-          </a:prstGeom>
-          <a:noFill/>
-        </p:spPr>
-        <p:txBody>
-          <a:bodyPr wrap="square">
-            <a:spAutoFit/>
-          </a:bodyPr>
-          <a:lstStyle/>
-          <a:p>
-            <a:pPr algn="ctr"/>
-            <a:r>
-              <a:rPr sz="800" b="0" i="0">
+            <a:off x="539496" y="1901952"/>
+            <a:ext cx="3566159" cy="292608"/>
+          </a:xfrm>
+          <a:prstGeom prst="rect">
+            <a:avLst/>
+          </a:prstGeom>
+          <a:noFill/>
+        </p:spPr>
+        <p:txBody>
+          <a:bodyPr wrap="square">
+            <a:spAutoFit/>
+          </a:bodyPr>
+          <a:lstStyle/>
+          <a:p>
+            <a:pPr algn="l"/>
+            <a:r>
+              <a:rPr sz="950" b="1" i="0">
+                <a:solidFill>
+                  <a:srgbClr val="F0F2F8"/>
+                </a:solidFill>
+              </a:rPr>
+              <a:t>📊 6-Sheet Excel Export</a:t>
+            </a:r>
+          </a:p>
+        </p:txBody>
+      </p:sp>
+      <p:sp>
+        <p:nvSpPr>
+          <p:cNvPr id="14" name="TextBox 13"/>
+          <p:cNvSpPr txBox="1"/>
+          <p:nvPr/>
+        </p:nvSpPr>
+        <p:spPr>
+          <a:xfrm>
+            <a:off x="539496" y="2157984"/>
+            <a:ext cx="3566159" cy="1508760"/>
+          </a:xfrm>
+          <a:prstGeom prst="rect">
+            <a:avLst/>
+          </a:prstGeom>
+          <a:noFill/>
+        </p:spPr>
+        <p:txBody>
+          <a:bodyPr wrap="square">
+            <a:spAutoFit/>
+          </a:bodyPr>
+          <a:lstStyle/>
+          <a:p>
+            <a:pPr algn="l"/>
+            <a:r>
+              <a:rPr sz="850" b="0" i="0">
                 <a:solidFill>
                   <a:srgbClr val="9AA3B8"/>
                 </a:solidFill>
               </a:rPr>
-              <a:t>Reduction in costing time</a:t>
-            </a:r>
-          </a:p>
-        </p:txBody>
-      </p:sp>
-      <p:sp>
-        <p:nvSpPr>
-          <p:cNvPr id="14" name="Rectangle 13"/>
+              <a:t>Sheet 1: Summary (total cost, breakdown %, region, commodity)
+Sheet 2: Material (alloy, weight, utilisation, price)
+Sheet 3: Operations (machine, labour, cycle time, OEE per step)
+Sheet 4: Machine Rates (rate library snapshot)
+Sheet 5: Labour Rates (regional labour tiers)
+Sheet 6: Traceability (assumptions, AI notes, version, date)</a:t>
+            </a:r>
+          </a:p>
+        </p:txBody>
+      </p:sp>
+      <p:sp>
+        <p:nvSpPr>
+          <p:cNvPr id="15" name="Rectangle 14"/>
           <p:cNvSpPr/>
           <p:nvPr/>
         </p:nvSpPr>
         <p:spPr>
           <a:xfrm>
-            <a:off x="2697480" y="1810512"/>
-            <a:ext cx="2194560" cy="1005840"/>
+            <a:off x="4270247" y="1810512"/>
+            <a:ext cx="3749039" cy="1965960"/>
           </a:xfrm>
           <a:prstGeom prst="rect">
             <a:avLst/>
@@ -14856,82 +15655,130 @@
       </p:sp>
       <p:sp>
         <p:nvSpPr>
-          <p:cNvPr id="15" name="TextBox 14"/>
-          <p:cNvSpPr txBox="1"/>
-          <p:nvPr/>
-        </p:nvSpPr>
-        <p:spPr>
-          <a:xfrm>
-            <a:off x="2697480" y="1901952"/>
-            <a:ext cx="2194560" cy="502920"/>
-          </a:xfrm>
-          <a:prstGeom prst="rect">
-            <a:avLst/>
-          </a:prstGeom>
-          <a:noFill/>
-        </p:spPr>
-        <p:txBody>
-          <a:bodyPr wrap="square">
-            <a:spAutoFit/>
-          </a:bodyPr>
-          <a:lstStyle/>
-          <a:p>
-            <a:pPr algn="ctr"/>
-            <a:r>
-              <a:rPr sz="2800" b="1" i="0">
-                <a:solidFill>
-                  <a:srgbClr val="10B981"/>
-                </a:solidFill>
-              </a:rPr>
-              <a:t>±8%</a:t>
-            </a:r>
-          </a:p>
-        </p:txBody>
-      </p:sp>
-      <p:sp>
-        <p:nvSpPr>
-          <p:cNvPr id="16" name="TextBox 15"/>
-          <p:cNvSpPr txBox="1"/>
-          <p:nvPr/>
-        </p:nvSpPr>
-        <p:spPr>
-          <a:xfrm>
-            <a:off x="2697480" y="2377440"/>
-            <a:ext cx="2194560" cy="347472"/>
-          </a:xfrm>
-          <a:prstGeom prst="rect">
-            <a:avLst/>
-          </a:prstGeom>
-          <a:noFill/>
-        </p:spPr>
-        <p:txBody>
-          <a:bodyPr wrap="square">
-            <a:spAutoFit/>
-          </a:bodyPr>
-          <a:lstStyle/>
-          <a:p>
-            <a:pPr algn="ctr"/>
-            <a:r>
-              <a:rPr sz="800" b="0" i="0">
+          <p:cNvPr id="16" name="Rectangle 15"/>
+          <p:cNvSpPr/>
+          <p:nvPr/>
+        </p:nvSpPr>
+        <p:spPr>
+          <a:xfrm>
+            <a:off x="4270247" y="1810512"/>
+            <a:ext cx="54864" cy="1965960"/>
+          </a:xfrm>
+          <a:prstGeom prst="rect">
+            <a:avLst/>
+          </a:prstGeom>
+          <a:solidFill>
+            <a:srgbClr val="4F8EF7"/>
+          </a:solidFill>
+          <a:ln>
+            <a:noFill/>
+          </a:ln>
+        </p:spPr>
+        <p:style>
+          <a:lnRef idx="1">
+            <a:schemeClr val="accent1"/>
+          </a:lnRef>
+          <a:fillRef idx="3">
+            <a:schemeClr val="accent1"/>
+          </a:fillRef>
+          <a:effectRef idx="2">
+            <a:schemeClr val="accent1"/>
+          </a:effectRef>
+          <a:fontRef idx="minor">
+            <a:schemeClr val="lt1"/>
+          </a:fontRef>
+        </p:style>
+        <p:txBody>
+          <a:bodyPr rtlCol="0" anchor="ctr"/>
+          <a:lstStyle/>
+          <a:p>
+            <a:pPr algn="ctr"/>
+          </a:p>
+        </p:txBody>
+      </p:sp>
+      <p:sp>
+        <p:nvSpPr>
+          <p:cNvPr id="17" name="TextBox 16"/>
+          <p:cNvSpPr txBox="1"/>
+          <p:nvPr/>
+        </p:nvSpPr>
+        <p:spPr>
+          <a:xfrm>
+            <a:off x="4398263" y="1901952"/>
+            <a:ext cx="3566159" cy="292608"/>
+          </a:xfrm>
+          <a:prstGeom prst="rect">
+            <a:avLst/>
+          </a:prstGeom>
+          <a:noFill/>
+        </p:spPr>
+        <p:txBody>
+          <a:bodyPr wrap="square">
+            <a:spAutoFit/>
+          </a:bodyPr>
+          <a:lstStyle/>
+          <a:p>
+            <a:pPr algn="l"/>
+            <a:r>
+              <a:rPr sz="950" b="1" i="0">
+                <a:solidFill>
+                  <a:srgbClr val="F0F2F8"/>
+                </a:solidFill>
+              </a:rPr>
+              <a:t>📄 Professional PDF Report</a:t>
+            </a:r>
+          </a:p>
+        </p:txBody>
+      </p:sp>
+      <p:sp>
+        <p:nvSpPr>
+          <p:cNvPr id="18" name="TextBox 17"/>
+          <p:cNvSpPr txBox="1"/>
+          <p:nvPr/>
+        </p:nvSpPr>
+        <p:spPr>
+          <a:xfrm>
+            <a:off x="4398263" y="2157984"/>
+            <a:ext cx="3566159" cy="1508760"/>
+          </a:xfrm>
+          <a:prstGeom prst="rect">
+            <a:avLst/>
+          </a:prstGeom>
+          <a:noFill/>
+        </p:spPr>
+        <p:txBody>
+          <a:bodyPr wrap="square">
+            <a:spAutoFit/>
+          </a:bodyPr>
+          <a:lstStyle/>
+          <a:p>
+            <a:pPr algn="l"/>
+            <a:r>
+              <a:rPr sz="850" b="0" i="0">
                 <a:solidFill>
                   <a:srgbClr val="9AA3B8"/>
                 </a:solidFill>
               </a:rPr>
-              <a:t>Typical cost model accuracy</a:t>
-            </a:r>
-          </a:p>
-        </p:txBody>
-      </p:sp>
-      <p:sp>
-        <p:nvSpPr>
-          <p:cNvPr id="17" name="Rectangle 16"/>
+              <a:t>Section 1: Cover page with part photo &amp; programme details
+Section 2: Cost summary and 8-bucket breakdown chart
+Section 3: Detailed operation-by-operation cost build
+Section 4: Machine and labour rate build-up table
+Section 5: AI insights and saving opportunities
+Section 6: DFM/DFA scores, issues and recommendations</a:t>
+            </a:r>
+          </a:p>
+        </p:txBody>
+      </p:sp>
+      <p:sp>
+        <p:nvSpPr>
+          <p:cNvPr id="19" name="Rectangle 18"/>
           <p:cNvSpPr/>
           <p:nvPr/>
         </p:nvSpPr>
         <p:spPr>
           <a:xfrm>
-            <a:off x="4983480" y="1810512"/>
-            <a:ext cx="2194560" cy="1005840"/>
+            <a:off x="8129014" y="1810512"/>
+            <a:ext cx="3749039" cy="1965960"/>
           </a:xfrm>
           <a:prstGeom prst="rect">
             <a:avLst/>
@@ -14969,82 +15816,129 @@
       </p:sp>
       <p:sp>
         <p:nvSpPr>
-          <p:cNvPr id="18" name="TextBox 17"/>
-          <p:cNvSpPr txBox="1"/>
-          <p:nvPr/>
-        </p:nvSpPr>
-        <p:spPr>
-          <a:xfrm>
-            <a:off x="4983480" y="1901952"/>
-            <a:ext cx="2194560" cy="502920"/>
-          </a:xfrm>
-          <a:prstGeom prst="rect">
-            <a:avLst/>
-          </a:prstGeom>
-          <a:noFill/>
-        </p:spPr>
-        <p:txBody>
-          <a:bodyPr wrap="square">
-            <a:spAutoFit/>
-          </a:bodyPr>
-          <a:lstStyle/>
-          <a:p>
-            <a:pPr algn="ctr"/>
-            <a:r>
-              <a:rPr sz="2800" b="1" i="0">
-                <a:solidFill>
-                  <a:srgbClr val="F59E0B"/>
-                </a:solidFill>
-              </a:rPr>
-              <a:t>15–25%</a:t>
-            </a:r>
-          </a:p>
-        </p:txBody>
-      </p:sp>
-      <p:sp>
-        <p:nvSpPr>
-          <p:cNvPr id="19" name="TextBox 18"/>
-          <p:cNvSpPr txBox="1"/>
-          <p:nvPr/>
-        </p:nvSpPr>
-        <p:spPr>
-          <a:xfrm>
-            <a:off x="4983480" y="2377440"/>
-            <a:ext cx="2194560" cy="347472"/>
-          </a:xfrm>
-          <a:prstGeom prst="rect">
-            <a:avLst/>
-          </a:prstGeom>
-          <a:noFill/>
-        </p:spPr>
-        <p:txBody>
-          <a:bodyPr wrap="square">
-            <a:spAutoFit/>
-          </a:bodyPr>
-          <a:lstStyle/>
-          <a:p>
-            <a:pPr algn="ctr"/>
-            <a:r>
-              <a:rPr sz="800" b="0" i="0">
-                <a:solidFill>
-                  <a:srgbClr val="9AA3B8"/>
-                </a:solidFill>
-              </a:rPr>
-              <a:t>Supplier price reduction via should-cost intel</a:t>
-            </a:r>
-          </a:p>
-        </p:txBody>
-      </p:sp>
-      <p:sp>
-        <p:nvSpPr>
           <p:cNvPr id="20" name="Rectangle 19"/>
           <p:cNvSpPr/>
           <p:nvPr/>
         </p:nvSpPr>
         <p:spPr>
           <a:xfrm>
-            <a:off x="7269480" y="1810512"/>
-            <a:ext cx="2194560" cy="1005840"/>
+            <a:off x="8129014" y="1810512"/>
+            <a:ext cx="54864" cy="1965960"/>
+          </a:xfrm>
+          <a:prstGeom prst="rect">
+            <a:avLst/>
+          </a:prstGeom>
+          <a:solidFill>
+            <a:srgbClr val="7C3AED"/>
+          </a:solidFill>
+          <a:ln>
+            <a:noFill/>
+          </a:ln>
+        </p:spPr>
+        <p:style>
+          <a:lnRef idx="1">
+            <a:schemeClr val="accent1"/>
+          </a:lnRef>
+          <a:fillRef idx="3">
+            <a:schemeClr val="accent1"/>
+          </a:fillRef>
+          <a:effectRef idx="2">
+            <a:schemeClr val="accent1"/>
+          </a:effectRef>
+          <a:fontRef idx="minor">
+            <a:schemeClr val="lt1"/>
+          </a:fontRef>
+        </p:style>
+        <p:txBody>
+          <a:bodyPr rtlCol="0" anchor="ctr"/>
+          <a:lstStyle/>
+          <a:p>
+            <a:pPr algn="ctr"/>
+          </a:p>
+        </p:txBody>
+      </p:sp>
+      <p:sp>
+        <p:nvSpPr>
+          <p:cNvPr id="21" name="TextBox 20"/>
+          <p:cNvSpPr txBox="1"/>
+          <p:nvPr/>
+        </p:nvSpPr>
+        <p:spPr>
+          <a:xfrm>
+            <a:off x="8257030" y="1901952"/>
+            <a:ext cx="3566159" cy="292608"/>
+          </a:xfrm>
+          <a:prstGeom prst="rect">
+            <a:avLst/>
+          </a:prstGeom>
+          <a:noFill/>
+        </p:spPr>
+        <p:txBody>
+          <a:bodyPr wrap="square">
+            <a:spAutoFit/>
+          </a:bodyPr>
+          <a:lstStyle/>
+          <a:p>
+            <a:pPr algn="l"/>
+            <a:r>
+              <a:rPr sz="950" b="1" i="0">
+                <a:solidFill>
+                  <a:srgbClr val="F0F2F8"/>
+                </a:solidFill>
+              </a:rPr>
+              <a:t>☁️ Cloud Team Sync</a:t>
+            </a:r>
+          </a:p>
+        </p:txBody>
+      </p:sp>
+      <p:sp>
+        <p:nvSpPr>
+          <p:cNvPr id="22" name="TextBox 21"/>
+          <p:cNvSpPr txBox="1"/>
+          <p:nvPr/>
+        </p:nvSpPr>
+        <p:spPr>
+          <a:xfrm>
+            <a:off x="8257030" y="2157984"/>
+            <a:ext cx="3566159" cy="1508760"/>
+          </a:xfrm>
+          <a:prstGeom prst="rect">
+            <a:avLst/>
+          </a:prstGeom>
+          <a:noFill/>
+        </p:spPr>
+        <p:txBody>
+          <a:bodyPr wrap="square">
+            <a:spAutoFit/>
+          </a:bodyPr>
+          <a:lstStyle/>
+          <a:p>
+            <a:pPr algn="l"/>
+            <a:r>
+              <a:rPr sz="850" b="0" i="0">
+                <a:solidFill>
+                  <a:srgbClr val="9AA3B8"/>
+                </a:solidFill>
+              </a:rPr>
+              <a:t>Scenarios saved to cloud database (SQLite / PostgreSQL)
+All team members see the same cost baseline
+Secure JWT authentication + OTP email verification
+Full multi-user access — no spreadsheet version conflicts
+Import/export scenarios as JSON for offline sharing</a:t>
+            </a:r>
+          </a:p>
+        </p:txBody>
+      </p:sp>
+      <p:sp>
+        <p:nvSpPr>
+          <p:cNvPr id="23" name="Rectangle 22"/>
+          <p:cNvSpPr/>
+          <p:nvPr/>
+        </p:nvSpPr>
+        <p:spPr>
+          <a:xfrm>
+            <a:off x="411480" y="3886200"/>
+            <a:ext cx="3749039" cy="1965960"/>
           </a:xfrm>
           <a:prstGeom prst="rect">
             <a:avLst/>
@@ -15082,82 +15976,128 @@
       </p:sp>
       <p:sp>
         <p:nvSpPr>
-          <p:cNvPr id="21" name="TextBox 20"/>
-          <p:cNvSpPr txBox="1"/>
-          <p:nvPr/>
-        </p:nvSpPr>
-        <p:spPr>
-          <a:xfrm>
-            <a:off x="7269480" y="1901952"/>
-            <a:ext cx="2194560" cy="502920"/>
-          </a:xfrm>
-          <a:prstGeom prst="rect">
-            <a:avLst/>
-          </a:prstGeom>
-          <a:noFill/>
-        </p:spPr>
-        <p:txBody>
-          <a:bodyPr wrap="square">
-            <a:spAutoFit/>
-          </a:bodyPr>
-          <a:lstStyle/>
-          <a:p>
-            <a:pPr algn="ctr"/>
-            <a:r>
-              <a:rPr sz="2800" b="1" i="0">
-                <a:solidFill>
-                  <a:srgbClr val="7C3AED"/>
-                </a:solidFill>
-              </a:rPr>
-              <a:t>3×</a:t>
-            </a:r>
-          </a:p>
-        </p:txBody>
-      </p:sp>
-      <p:sp>
-        <p:nvSpPr>
-          <p:cNvPr id="22" name="TextBox 21"/>
-          <p:cNvSpPr txBox="1"/>
-          <p:nvPr/>
-        </p:nvSpPr>
-        <p:spPr>
-          <a:xfrm>
-            <a:off x="7269480" y="2377440"/>
-            <a:ext cx="2194560" cy="347472"/>
-          </a:xfrm>
-          <a:prstGeom prst="rect">
-            <a:avLst/>
-          </a:prstGeom>
-          <a:noFill/>
-        </p:spPr>
-        <p:txBody>
-          <a:bodyPr wrap="square">
-            <a:spAutoFit/>
-          </a:bodyPr>
-          <a:lstStyle/>
-          <a:p>
-            <a:pPr algn="ctr"/>
-            <a:r>
-              <a:rPr sz="800" b="0" i="0">
+          <p:cNvPr id="24" name="Rectangle 23"/>
+          <p:cNvSpPr/>
+          <p:nvPr/>
+        </p:nvSpPr>
+        <p:spPr>
+          <a:xfrm>
+            <a:off x="411480" y="3886200"/>
+            <a:ext cx="54864" cy="1965960"/>
+          </a:xfrm>
+          <a:prstGeom prst="rect">
+            <a:avLst/>
+          </a:prstGeom>
+          <a:solidFill>
+            <a:srgbClr val="F59E0B"/>
+          </a:solidFill>
+          <a:ln>
+            <a:noFill/>
+          </a:ln>
+        </p:spPr>
+        <p:style>
+          <a:lnRef idx="1">
+            <a:schemeClr val="accent1"/>
+          </a:lnRef>
+          <a:fillRef idx="3">
+            <a:schemeClr val="accent1"/>
+          </a:fillRef>
+          <a:effectRef idx="2">
+            <a:schemeClr val="accent1"/>
+          </a:effectRef>
+          <a:fontRef idx="minor">
+            <a:schemeClr val="lt1"/>
+          </a:fontRef>
+        </p:style>
+        <p:txBody>
+          <a:bodyPr rtlCol="0" anchor="ctr"/>
+          <a:lstStyle/>
+          <a:p>
+            <a:pPr algn="ctr"/>
+          </a:p>
+        </p:txBody>
+      </p:sp>
+      <p:sp>
+        <p:nvSpPr>
+          <p:cNvPr id="25" name="TextBox 24"/>
+          <p:cNvSpPr txBox="1"/>
+          <p:nvPr/>
+        </p:nvSpPr>
+        <p:spPr>
+          <a:xfrm>
+            <a:off x="539496" y="3977640"/>
+            <a:ext cx="3566159" cy="292608"/>
+          </a:xfrm>
+          <a:prstGeom prst="rect">
+            <a:avLst/>
+          </a:prstGeom>
+          <a:noFill/>
+        </p:spPr>
+        <p:txBody>
+          <a:bodyPr wrap="square">
+            <a:spAutoFit/>
+          </a:bodyPr>
+          <a:lstStyle/>
+          <a:p>
+            <a:pPr algn="l"/>
+            <a:r>
+              <a:rPr sz="950" b="1" i="0">
+                <a:solidFill>
+                  <a:srgbClr val="F0F2F8"/>
+                </a:solidFill>
+              </a:rPr>
+              <a:t>📸 Part Photo &amp; Visual Docs</a:t>
+            </a:r>
+          </a:p>
+        </p:txBody>
+      </p:sp>
+      <p:sp>
+        <p:nvSpPr>
+          <p:cNvPr id="26" name="TextBox 25"/>
+          <p:cNvSpPr txBox="1"/>
+          <p:nvPr/>
+        </p:nvSpPr>
+        <p:spPr>
+          <a:xfrm>
+            <a:off x="539496" y="4233672"/>
+            <a:ext cx="3566159" cy="1508760"/>
+          </a:xfrm>
+          <a:prstGeom prst="rect">
+            <a:avLst/>
+          </a:prstGeom>
+          <a:noFill/>
+        </p:spPr>
+        <p:txBody>
+          <a:bodyPr wrap="square">
+            <a:spAutoFit/>
+          </a:bodyPr>
+          <a:lstStyle/>
+          <a:p>
+            <a:pPr algn="l"/>
+            <a:r>
+              <a:rPr sz="850" b="0" i="0">
                 <a:solidFill>
                   <a:srgbClr val="9AA3B8"/>
                 </a:solidFill>
               </a:rPr>
-              <a:t>Faster sourcing decisions</a:t>
-            </a:r>
-          </a:p>
-        </p:txBody>
-      </p:sp>
-      <p:sp>
-        <p:nvSpPr>
-          <p:cNvPr id="23" name="Rectangle 22"/>
+              <a:t>Upload part photo (JPG / PNG / HEIC) with any calculation
+Photo appears on the PDF report cover page
+AI Agent accepts photos as input for visual cost estimation
+Drag-and-drop or file picker supported</a:t>
+            </a:r>
+          </a:p>
+        </p:txBody>
+      </p:sp>
+      <p:sp>
+        <p:nvSpPr>
+          <p:cNvPr id="27" name="Rectangle 26"/>
           <p:cNvSpPr/>
           <p:nvPr/>
         </p:nvSpPr>
         <p:spPr>
           <a:xfrm>
-            <a:off x="9555480" y="1810512"/>
-            <a:ext cx="2194560" cy="1005840"/>
+            <a:off x="4270247" y="3886200"/>
+            <a:ext cx="3749039" cy="1965960"/>
           </a:xfrm>
           <a:prstGeom prst="rect">
             <a:avLst/>
@@ -15195,82 +16135,128 @@
       </p:sp>
       <p:sp>
         <p:nvSpPr>
-          <p:cNvPr id="24" name="TextBox 23"/>
-          <p:cNvSpPr txBox="1"/>
-          <p:nvPr/>
-        </p:nvSpPr>
-        <p:spPr>
-          <a:xfrm>
-            <a:off x="9555480" y="1901952"/>
-            <a:ext cx="2194560" cy="502920"/>
-          </a:xfrm>
-          <a:prstGeom prst="rect">
-            <a:avLst/>
-          </a:prstGeom>
-          <a:noFill/>
-        </p:spPr>
-        <p:txBody>
-          <a:bodyPr wrap="square">
-            <a:spAutoFit/>
-          </a:bodyPr>
-          <a:lstStyle/>
-          <a:p>
-            <a:pPr algn="ctr"/>
-            <a:r>
-              <a:rPr sz="2800" b="1" i="0">
-                <a:solidFill>
-                  <a:srgbClr val="10B981"/>
-                </a:solidFill>
-              </a:rPr>
-              <a:t>£15M</a:t>
-            </a:r>
-          </a:p>
-        </p:txBody>
-      </p:sp>
-      <p:sp>
-        <p:nvSpPr>
-          <p:cNvPr id="25" name="TextBox 24"/>
-          <p:cNvSpPr txBox="1"/>
-          <p:nvPr/>
-        </p:nvSpPr>
-        <p:spPr>
-          <a:xfrm>
-            <a:off x="9555480" y="2377440"/>
-            <a:ext cx="2194560" cy="347472"/>
-          </a:xfrm>
-          <a:prstGeom prst="rect">
-            <a:avLst/>
-          </a:prstGeom>
-          <a:noFill/>
-        </p:spPr>
-        <p:txBody>
-          <a:bodyPr wrap="square">
-            <a:spAutoFit/>
-          </a:bodyPr>
-          <a:lstStyle/>
-          <a:p>
-            <a:pPr algn="ctr"/>
-            <a:r>
-              <a:rPr sz="800" b="0" i="0">
+          <p:cNvPr id="28" name="Rectangle 27"/>
+          <p:cNvSpPr/>
+          <p:nvPr/>
+        </p:nvSpPr>
+        <p:spPr>
+          <a:xfrm>
+            <a:off x="4270247" y="3886200"/>
+            <a:ext cx="54864" cy="1965960"/>
+          </a:xfrm>
+          <a:prstGeom prst="rect">
+            <a:avLst/>
+          </a:prstGeom>
+          <a:solidFill>
+            <a:srgbClr val="10B981"/>
+          </a:solidFill>
+          <a:ln>
+            <a:noFill/>
+          </a:ln>
+        </p:spPr>
+        <p:style>
+          <a:lnRef idx="1">
+            <a:schemeClr val="accent1"/>
+          </a:lnRef>
+          <a:fillRef idx="3">
+            <a:schemeClr val="accent1"/>
+          </a:fillRef>
+          <a:effectRef idx="2">
+            <a:schemeClr val="accent1"/>
+          </a:effectRef>
+          <a:fontRef idx="minor">
+            <a:schemeClr val="lt1"/>
+          </a:fontRef>
+        </p:style>
+        <p:txBody>
+          <a:bodyPr rtlCol="0" anchor="ctr"/>
+          <a:lstStyle/>
+          <a:p>
+            <a:pPr algn="ctr"/>
+          </a:p>
+        </p:txBody>
+      </p:sp>
+      <p:sp>
+        <p:nvSpPr>
+          <p:cNvPr id="29" name="TextBox 28"/>
+          <p:cNvSpPr txBox="1"/>
+          <p:nvPr/>
+        </p:nvSpPr>
+        <p:spPr>
+          <a:xfrm>
+            <a:off x="4398263" y="3977640"/>
+            <a:ext cx="3566159" cy="292608"/>
+          </a:xfrm>
+          <a:prstGeom prst="rect">
+            <a:avLst/>
+          </a:prstGeom>
+          <a:noFill/>
+        </p:spPr>
+        <p:txBody>
+          <a:bodyPr wrap="square">
+            <a:spAutoFit/>
+          </a:bodyPr>
+          <a:lstStyle/>
+          <a:p>
+            <a:pPr algn="l"/>
+            <a:r>
+              <a:rPr sz="950" b="1" i="0">
+                <a:solidFill>
+                  <a:srgbClr val="F0F2F8"/>
+                </a:solidFill>
+              </a:rPr>
+              <a:t>🔑 Enterprise Authentication</a:t>
+            </a:r>
+          </a:p>
+        </p:txBody>
+      </p:sp>
+      <p:sp>
+        <p:nvSpPr>
+          <p:cNvPr id="30" name="TextBox 29"/>
+          <p:cNvSpPr txBox="1"/>
+          <p:nvPr/>
+        </p:nvSpPr>
+        <p:spPr>
+          <a:xfrm>
+            <a:off x="4398263" y="4233672"/>
+            <a:ext cx="3566159" cy="1508760"/>
+          </a:xfrm>
+          <a:prstGeom prst="rect">
+            <a:avLst/>
+          </a:prstGeom>
+          <a:noFill/>
+        </p:spPr>
+        <p:txBody>
+          <a:bodyPr wrap="square">
+            <a:spAutoFit/>
+          </a:bodyPr>
+          <a:lstStyle/>
+          <a:p>
+            <a:pPr algn="l"/>
+            <a:r>
+              <a:rPr sz="850" b="0" i="0">
                 <a:solidFill>
                   <a:srgbClr val="9AA3B8"/>
                 </a:solidFill>
               </a:rPr>
-              <a:t>Saving on £500M spend at 3% improvement</a:t>
-            </a:r>
-          </a:p>
-        </p:txBody>
-      </p:sp>
-      <p:sp>
-        <p:nvSpPr>
-          <p:cNvPr id="26" name="Rectangle 25"/>
+              <a:t>JWT token-based authentication with 24hr expiry
+OTP email verification for account security
+Password reset flow with secure email delivery
+Rate limiting: 10 sign-in attempts / 15 min window</a:t>
+            </a:r>
+          </a:p>
+        </p:txBody>
+      </p:sp>
+      <p:sp>
+        <p:nvSpPr>
+          <p:cNvPr id="31" name="Rectangle 30"/>
           <p:cNvSpPr/>
           <p:nvPr/>
         </p:nvSpPr>
         <p:spPr>
           <a:xfrm>
-            <a:off x="411480" y="2971800"/>
-            <a:ext cx="2743200" cy="1188720"/>
+            <a:off x="8129014" y="3886200"/>
+            <a:ext cx="3749039" cy="1965960"/>
           </a:xfrm>
           <a:prstGeom prst="rect">
             <a:avLst/>
@@ -15308,14 +16294,14 @@
       </p:sp>
       <p:sp>
         <p:nvSpPr>
-          <p:cNvPr id="27" name="Rectangle 26"/>
+          <p:cNvPr id="32" name="Rectangle 31"/>
           <p:cNvSpPr/>
           <p:nvPr/>
         </p:nvSpPr>
         <p:spPr>
           <a:xfrm>
-            <a:off x="411480" y="2971800"/>
-            <a:ext cx="54864" cy="1188720"/>
+            <a:off x="8129014" y="3886200"/>
+            <a:ext cx="54864" cy="1965960"/>
           </a:xfrm>
           <a:prstGeom prst="rect">
             <a:avLst/>
@@ -15351,14 +16337,14 @@
       </p:sp>
       <p:sp>
         <p:nvSpPr>
-          <p:cNvPr id="28" name="TextBox 27"/>
-          <p:cNvSpPr txBox="1"/>
-          <p:nvPr/>
-        </p:nvSpPr>
-        <p:spPr>
-          <a:xfrm>
-            <a:off x="539496" y="3063240"/>
-            <a:ext cx="2560320" cy="292608"/>
+          <p:cNvPr id="33" name="TextBox 32"/>
+          <p:cNvSpPr txBox="1"/>
+          <p:nvPr/>
+        </p:nvSpPr>
+        <p:spPr>
+          <a:xfrm>
+            <a:off x="8257030" y="3977640"/>
+            <a:ext cx="3566159" cy="292608"/>
           </a:xfrm>
           <a:prstGeom prst="rect">
             <a:avLst/>
@@ -15378,21 +16364,21 @@
                   <a:srgbClr val="F0F2F8"/>
                 </a:solidFill>
               </a:rPr>
-              <a:t>⚡ Speed — 10× Faster</a:t>
-            </a:r>
-          </a:p>
-        </p:txBody>
-      </p:sp>
-      <p:sp>
-        <p:nvSpPr>
-          <p:cNvPr id="29" name="TextBox 28"/>
-          <p:cNvSpPr txBox="1"/>
-          <p:nvPr/>
-        </p:nvSpPr>
-        <p:spPr>
-          <a:xfrm>
-            <a:off x="539496" y="3319272"/>
-            <a:ext cx="2560320" cy="731520"/>
+              <a:t>❓ Help Centre &amp; Support</a:t>
+            </a:r>
+          </a:p>
+        </p:txBody>
+      </p:sp>
+      <p:sp>
+        <p:nvSpPr>
+          <p:cNvPr id="34" name="TextBox 33"/>
+          <p:cNvSpPr txBox="1"/>
+          <p:nvPr/>
+        </p:nvSpPr>
+        <p:spPr>
+          <a:xfrm>
+            <a:off x="8257030" y="4233672"/>
+            <a:ext cx="3566159" cy="1508760"/>
           </a:xfrm>
           <a:prstGeom prst="rect">
             <a:avLst/>
@@ -15412,1099 +16398,10 @@
                   <a:srgbClr val="9AA3B8"/>
                 </a:solidFill>
               </a:rPr>
-              <a:t>What took 2–4 weeks now takes 5–10 minutes. Engineers spend time on decisions, not spreadsheets. Faster RFQ responses, faster programme decisions.</a:t>
-            </a:r>
-          </a:p>
-        </p:txBody>
-      </p:sp>
-      <p:sp>
-        <p:nvSpPr>
-          <p:cNvPr id="30" name="Rectangle 29"/>
-          <p:cNvSpPr/>
-          <p:nvPr/>
-        </p:nvSpPr>
-        <p:spPr>
-          <a:xfrm>
-            <a:off x="3246120" y="2971800"/>
-            <a:ext cx="2743200" cy="1188720"/>
-          </a:xfrm>
-          <a:prstGeom prst="rect">
-            <a:avLst/>
-          </a:prstGeom>
-          <a:solidFill>
-            <a:srgbClr val="1E2330"/>
-          </a:solidFill>
-          <a:ln w="6350">
-            <a:solidFill>
-              <a:srgbClr val="2A3045"/>
-            </a:solidFill>
-          </a:ln>
-        </p:spPr>
-        <p:style>
-          <a:lnRef idx="1">
-            <a:schemeClr val="accent1"/>
-          </a:lnRef>
-          <a:fillRef idx="3">
-            <a:schemeClr val="accent1"/>
-          </a:fillRef>
-          <a:effectRef idx="2">
-            <a:schemeClr val="accent1"/>
-          </a:effectRef>
-          <a:fontRef idx="minor">
-            <a:schemeClr val="lt1"/>
-          </a:fontRef>
-        </p:style>
-        <p:txBody>
-          <a:bodyPr rtlCol="0" anchor="ctr"/>
-          <a:lstStyle/>
-          <a:p>
-            <a:pPr algn="ctr"/>
-          </a:p>
-        </p:txBody>
-      </p:sp>
-      <p:sp>
-        <p:nvSpPr>
-          <p:cNvPr id="31" name="Rectangle 30"/>
-          <p:cNvSpPr/>
-          <p:nvPr/>
-        </p:nvSpPr>
-        <p:spPr>
-          <a:xfrm>
-            <a:off x="3246120" y="2971800"/>
-            <a:ext cx="54864" cy="1188720"/>
-          </a:xfrm>
-          <a:prstGeom prst="rect">
-            <a:avLst/>
-          </a:prstGeom>
-          <a:solidFill>
-            <a:srgbClr val="10B981"/>
-          </a:solidFill>
-          <a:ln>
-            <a:noFill/>
-          </a:ln>
-        </p:spPr>
-        <p:style>
-          <a:lnRef idx="1">
-            <a:schemeClr val="accent1"/>
-          </a:lnRef>
-          <a:fillRef idx="3">
-            <a:schemeClr val="accent1"/>
-          </a:fillRef>
-          <a:effectRef idx="2">
-            <a:schemeClr val="accent1"/>
-          </a:effectRef>
-          <a:fontRef idx="minor">
-            <a:schemeClr val="lt1"/>
-          </a:fontRef>
-        </p:style>
-        <p:txBody>
-          <a:bodyPr rtlCol="0" anchor="ctr"/>
-          <a:lstStyle/>
-          <a:p>
-            <a:pPr algn="ctr"/>
-          </a:p>
-        </p:txBody>
-      </p:sp>
-      <p:sp>
-        <p:nvSpPr>
-          <p:cNvPr id="32" name="TextBox 31"/>
-          <p:cNvSpPr txBox="1"/>
-          <p:nvPr/>
-        </p:nvSpPr>
-        <p:spPr>
-          <a:xfrm>
-            <a:off x="3374136" y="3063240"/>
-            <a:ext cx="2560320" cy="292608"/>
-          </a:xfrm>
-          <a:prstGeom prst="rect">
-            <a:avLst/>
-          </a:prstGeom>
-          <a:noFill/>
-        </p:spPr>
-        <p:txBody>
-          <a:bodyPr wrap="square">
-            <a:spAutoFit/>
-          </a:bodyPr>
-          <a:lstStyle/>
-          <a:p>
-            <a:pPr algn="l"/>
-            <a:r>
-              <a:rPr sz="950" b="1" i="0">
-                <a:solidFill>
-                  <a:srgbClr val="F0F2F8"/>
-                </a:solidFill>
-              </a:rPr>
-              <a:t>🎯 Accuracy — Not Estimates</a:t>
-            </a:r>
-          </a:p>
-        </p:txBody>
-      </p:sp>
-      <p:sp>
-        <p:nvSpPr>
-          <p:cNvPr id="33" name="TextBox 32"/>
-          <p:cNvSpPr txBox="1"/>
-          <p:nvPr/>
-        </p:nvSpPr>
-        <p:spPr>
-          <a:xfrm>
-            <a:off x="3374136" y="3319272"/>
-            <a:ext cx="2560320" cy="731520"/>
-          </a:xfrm>
-          <a:prstGeom prst="rect">
-            <a:avLst/>
-          </a:prstGeom>
-          <a:noFill/>
-        </p:spPr>
-        <p:txBody>
-          <a:bodyPr wrap="square">
-            <a:spAutoFit/>
-          </a:bodyPr>
-          <a:lstStyle/>
-          <a:p>
-            <a:pPr algn="l"/>
-            <a:r>
-              <a:rPr sz="850" b="0" i="0">
-                <a:solidFill>
-                  <a:srgbClr val="9AA3B8"/>
-                </a:solidFill>
-              </a:rPr>
-              <a:t>Physics-based models calibrated to actual shop floor data. ±8% typical accuracy vs actual. Dramatically better than rule-of-thumb or parametric estimates.</a:t>
-            </a:r>
-          </a:p>
-        </p:txBody>
-      </p:sp>
-      <p:sp>
-        <p:nvSpPr>
-          <p:cNvPr id="34" name="Rectangle 33"/>
-          <p:cNvSpPr/>
-          <p:nvPr/>
-        </p:nvSpPr>
-        <p:spPr>
-          <a:xfrm>
-            <a:off x="6080760" y="2971800"/>
-            <a:ext cx="2743200" cy="1188720"/>
-          </a:xfrm>
-          <a:prstGeom prst="rect">
-            <a:avLst/>
-          </a:prstGeom>
-          <a:solidFill>
-            <a:srgbClr val="1E2330"/>
-          </a:solidFill>
-          <a:ln w="6350">
-            <a:solidFill>
-              <a:srgbClr val="2A3045"/>
-            </a:solidFill>
-          </a:ln>
-        </p:spPr>
-        <p:style>
-          <a:lnRef idx="1">
-            <a:schemeClr val="accent1"/>
-          </a:lnRef>
-          <a:fillRef idx="3">
-            <a:schemeClr val="accent1"/>
-          </a:fillRef>
-          <a:effectRef idx="2">
-            <a:schemeClr val="accent1"/>
-          </a:effectRef>
-          <a:fontRef idx="minor">
-            <a:schemeClr val="lt1"/>
-          </a:fontRef>
-        </p:style>
-        <p:txBody>
-          <a:bodyPr rtlCol="0" anchor="ctr"/>
-          <a:lstStyle/>
-          <a:p>
-            <a:pPr algn="ctr"/>
-          </a:p>
-        </p:txBody>
-      </p:sp>
-      <p:sp>
-        <p:nvSpPr>
-          <p:cNvPr id="35" name="Rectangle 34"/>
-          <p:cNvSpPr/>
-          <p:nvPr/>
-        </p:nvSpPr>
-        <p:spPr>
-          <a:xfrm>
-            <a:off x="6080760" y="2971800"/>
-            <a:ext cx="54864" cy="1188720"/>
-          </a:xfrm>
-          <a:prstGeom prst="rect">
-            <a:avLst/>
-          </a:prstGeom>
-          <a:solidFill>
-            <a:srgbClr val="F59E0B"/>
-          </a:solidFill>
-          <a:ln>
-            <a:noFill/>
-          </a:ln>
-        </p:spPr>
-        <p:style>
-          <a:lnRef idx="1">
-            <a:schemeClr val="accent1"/>
-          </a:lnRef>
-          <a:fillRef idx="3">
-            <a:schemeClr val="accent1"/>
-          </a:fillRef>
-          <a:effectRef idx="2">
-            <a:schemeClr val="accent1"/>
-          </a:effectRef>
-          <a:fontRef idx="minor">
-            <a:schemeClr val="lt1"/>
-          </a:fontRef>
-        </p:style>
-        <p:txBody>
-          <a:bodyPr rtlCol="0" anchor="ctr"/>
-          <a:lstStyle/>
-          <a:p>
-            <a:pPr algn="ctr"/>
-          </a:p>
-        </p:txBody>
-      </p:sp>
-      <p:sp>
-        <p:nvSpPr>
-          <p:cNvPr id="36" name="TextBox 35"/>
-          <p:cNvSpPr txBox="1"/>
-          <p:nvPr/>
-        </p:nvSpPr>
-        <p:spPr>
-          <a:xfrm>
-            <a:off x="6208776" y="3063240"/>
-            <a:ext cx="2560320" cy="292608"/>
-          </a:xfrm>
-          <a:prstGeom prst="rect">
-            <a:avLst/>
-          </a:prstGeom>
-          <a:noFill/>
-        </p:spPr>
-        <p:txBody>
-          <a:bodyPr wrap="square">
-            <a:spAutoFit/>
-          </a:bodyPr>
-          <a:lstStyle/>
-          <a:p>
-            <a:pPr algn="l"/>
-            <a:r>
-              <a:rPr sz="950" b="1" i="0">
-                <a:solidFill>
-                  <a:srgbClr val="F0F2F8"/>
-                </a:solidFill>
-              </a:rPr>
-              <a:t>💰 Negotiation Power</a:t>
-            </a:r>
-          </a:p>
-        </p:txBody>
-      </p:sp>
-      <p:sp>
-        <p:nvSpPr>
-          <p:cNvPr id="37" name="TextBox 36"/>
-          <p:cNvSpPr txBox="1"/>
-          <p:nvPr/>
-        </p:nvSpPr>
-        <p:spPr>
-          <a:xfrm>
-            <a:off x="6208776" y="3319272"/>
-            <a:ext cx="2560320" cy="731520"/>
-          </a:xfrm>
-          <a:prstGeom prst="rect">
-            <a:avLst/>
-          </a:prstGeom>
-          <a:noFill/>
-        </p:spPr>
-        <p:txBody>
-          <a:bodyPr wrap="square">
-            <a:spAutoFit/>
-          </a:bodyPr>
-          <a:lstStyle/>
-          <a:p>
-            <a:pPr algn="l"/>
-            <a:r>
-              <a:rPr sz="850" b="0" i="0">
-                <a:solidFill>
-                  <a:srgbClr val="9AA3B8"/>
-                </a:solidFill>
-              </a:rPr>
-              <a:t>Should-cost models give buyers a defensible floor price for every part. Supplier margins become visible and challengeable with engineering data, not opinion.</a:t>
-            </a:r>
-          </a:p>
-        </p:txBody>
-      </p:sp>
-      <p:sp>
-        <p:nvSpPr>
-          <p:cNvPr id="38" name="Rectangle 37"/>
-          <p:cNvSpPr/>
-          <p:nvPr/>
-        </p:nvSpPr>
-        <p:spPr>
-          <a:xfrm>
-            <a:off x="8915400" y="2971800"/>
-            <a:ext cx="2743200" cy="1188720"/>
-          </a:xfrm>
-          <a:prstGeom prst="rect">
-            <a:avLst/>
-          </a:prstGeom>
-          <a:solidFill>
-            <a:srgbClr val="1E2330"/>
-          </a:solidFill>
-          <a:ln w="6350">
-            <a:solidFill>
-              <a:srgbClr val="2A3045"/>
-            </a:solidFill>
-          </a:ln>
-        </p:spPr>
-        <p:style>
-          <a:lnRef idx="1">
-            <a:schemeClr val="accent1"/>
-          </a:lnRef>
-          <a:fillRef idx="3">
-            <a:schemeClr val="accent1"/>
-          </a:fillRef>
-          <a:effectRef idx="2">
-            <a:schemeClr val="accent1"/>
-          </a:effectRef>
-          <a:fontRef idx="minor">
-            <a:schemeClr val="lt1"/>
-          </a:fontRef>
-        </p:style>
-        <p:txBody>
-          <a:bodyPr rtlCol="0" anchor="ctr"/>
-          <a:lstStyle/>
-          <a:p>
-            <a:pPr algn="ctr"/>
-          </a:p>
-        </p:txBody>
-      </p:sp>
-      <p:sp>
-        <p:nvSpPr>
-          <p:cNvPr id="39" name="Rectangle 38"/>
-          <p:cNvSpPr/>
-          <p:nvPr/>
-        </p:nvSpPr>
-        <p:spPr>
-          <a:xfrm>
-            <a:off x="8915400" y="2971800"/>
-            <a:ext cx="54864" cy="1188720"/>
-          </a:xfrm>
-          <a:prstGeom prst="rect">
-            <a:avLst/>
-          </a:prstGeom>
-          <a:solidFill>
-            <a:srgbClr val="7C3AED"/>
-          </a:solidFill>
-          <a:ln>
-            <a:noFill/>
-          </a:ln>
-        </p:spPr>
-        <p:style>
-          <a:lnRef idx="1">
-            <a:schemeClr val="accent1"/>
-          </a:lnRef>
-          <a:fillRef idx="3">
-            <a:schemeClr val="accent1"/>
-          </a:fillRef>
-          <a:effectRef idx="2">
-            <a:schemeClr val="accent1"/>
-          </a:effectRef>
-          <a:fontRef idx="minor">
-            <a:schemeClr val="lt1"/>
-          </a:fontRef>
-        </p:style>
-        <p:txBody>
-          <a:bodyPr rtlCol="0" anchor="ctr"/>
-          <a:lstStyle/>
-          <a:p>
-            <a:pPr algn="ctr"/>
-          </a:p>
-        </p:txBody>
-      </p:sp>
-      <p:sp>
-        <p:nvSpPr>
-          <p:cNvPr id="40" name="TextBox 39"/>
-          <p:cNvSpPr txBox="1"/>
-          <p:nvPr/>
-        </p:nvSpPr>
-        <p:spPr>
-          <a:xfrm>
-            <a:off x="9043416" y="3063240"/>
-            <a:ext cx="2560320" cy="292608"/>
-          </a:xfrm>
-          <a:prstGeom prst="rect">
-            <a:avLst/>
-          </a:prstGeom>
-          <a:noFill/>
-        </p:spPr>
-        <p:txBody>
-          <a:bodyPr wrap="square">
-            <a:spAutoFit/>
-          </a:bodyPr>
-          <a:lstStyle/>
-          <a:p>
-            <a:pPr algn="l"/>
-            <a:r>
-              <a:rPr sz="950" b="1" i="0">
-                <a:solidFill>
-                  <a:srgbClr val="F0F2F8"/>
-                </a:solidFill>
-              </a:rPr>
-              <a:t>📐 DFM at Concept Stage</a:t>
-            </a:r>
-          </a:p>
-        </p:txBody>
-      </p:sp>
-      <p:sp>
-        <p:nvSpPr>
-          <p:cNvPr id="41" name="TextBox 40"/>
-          <p:cNvSpPr txBox="1"/>
-          <p:nvPr/>
-        </p:nvSpPr>
-        <p:spPr>
-          <a:xfrm>
-            <a:off x="9043416" y="3319272"/>
-            <a:ext cx="2560320" cy="731520"/>
-          </a:xfrm>
-          <a:prstGeom prst="rect">
-            <a:avLst/>
-          </a:prstGeom>
-          <a:noFill/>
-        </p:spPr>
-        <p:txBody>
-          <a:bodyPr wrap="square">
-            <a:spAutoFit/>
-          </a:bodyPr>
-          <a:lstStyle/>
-          <a:p>
-            <a:pPr algn="l"/>
-            <a:r>
-              <a:rPr sz="850" b="0" i="0">
-                <a:solidFill>
-                  <a:srgbClr val="9AA3B8"/>
-                </a:solidFill>
-              </a:rPr>
-              <a:t>80% of cost is locked at design. DFM/DFA analysis at concept prevents expensive late-stage redesigns. Engineering issues caught when change is free.</a:t>
-            </a:r>
-          </a:p>
-        </p:txBody>
-      </p:sp>
-      <p:sp>
-        <p:nvSpPr>
-          <p:cNvPr id="42" name="Rectangle 41"/>
-          <p:cNvSpPr/>
-          <p:nvPr/>
-        </p:nvSpPr>
-        <p:spPr>
-          <a:xfrm>
-            <a:off x="411480" y="4251960"/>
-            <a:ext cx="2743200" cy="1188720"/>
-          </a:xfrm>
-          <a:prstGeom prst="rect">
-            <a:avLst/>
-          </a:prstGeom>
-          <a:solidFill>
-            <a:srgbClr val="1E2330"/>
-          </a:solidFill>
-          <a:ln w="6350">
-            <a:solidFill>
-              <a:srgbClr val="2A3045"/>
-            </a:solidFill>
-          </a:ln>
-        </p:spPr>
-        <p:style>
-          <a:lnRef idx="1">
-            <a:schemeClr val="accent1"/>
-          </a:lnRef>
-          <a:fillRef idx="3">
-            <a:schemeClr val="accent1"/>
-          </a:fillRef>
-          <a:effectRef idx="2">
-            <a:schemeClr val="accent1"/>
-          </a:effectRef>
-          <a:fontRef idx="minor">
-            <a:schemeClr val="lt1"/>
-          </a:fontRef>
-        </p:style>
-        <p:txBody>
-          <a:bodyPr rtlCol="0" anchor="ctr"/>
-          <a:lstStyle/>
-          <a:p>
-            <a:pPr algn="ctr"/>
-          </a:p>
-        </p:txBody>
-      </p:sp>
-      <p:sp>
-        <p:nvSpPr>
-          <p:cNvPr id="43" name="Rectangle 42"/>
-          <p:cNvSpPr/>
-          <p:nvPr/>
-        </p:nvSpPr>
-        <p:spPr>
-          <a:xfrm>
-            <a:off x="411480" y="4251960"/>
-            <a:ext cx="54864" cy="1188720"/>
-          </a:xfrm>
-          <a:prstGeom prst="rect">
-            <a:avLst/>
-          </a:prstGeom>
-          <a:solidFill>
-            <a:srgbClr val="10B981"/>
-          </a:solidFill>
-          <a:ln>
-            <a:noFill/>
-          </a:ln>
-        </p:spPr>
-        <p:style>
-          <a:lnRef idx="1">
-            <a:schemeClr val="accent1"/>
-          </a:lnRef>
-          <a:fillRef idx="3">
-            <a:schemeClr val="accent1"/>
-          </a:fillRef>
-          <a:effectRef idx="2">
-            <a:schemeClr val="accent1"/>
-          </a:effectRef>
-          <a:fontRef idx="minor">
-            <a:schemeClr val="lt1"/>
-          </a:fontRef>
-        </p:style>
-        <p:txBody>
-          <a:bodyPr rtlCol="0" anchor="ctr"/>
-          <a:lstStyle/>
-          <a:p>
-            <a:pPr algn="ctr"/>
-          </a:p>
-        </p:txBody>
-      </p:sp>
-      <p:sp>
-        <p:nvSpPr>
-          <p:cNvPr id="44" name="TextBox 43"/>
-          <p:cNvSpPr txBox="1"/>
-          <p:nvPr/>
-        </p:nvSpPr>
-        <p:spPr>
-          <a:xfrm>
-            <a:off x="539496" y="4343400"/>
-            <a:ext cx="2560320" cy="292608"/>
-          </a:xfrm>
-          <a:prstGeom prst="rect">
-            <a:avLst/>
-          </a:prstGeom>
-          <a:noFill/>
-        </p:spPr>
-        <p:txBody>
-          <a:bodyPr wrap="square">
-            <a:spAutoFit/>
-          </a:bodyPr>
-          <a:lstStyle/>
-          <a:p>
-            <a:pPr algn="l"/>
-            <a:r>
-              <a:rPr sz="950" b="1" i="0">
-                <a:solidFill>
-                  <a:srgbClr val="F0F2F8"/>
-                </a:solidFill>
-              </a:rPr>
-              <a:t>🌍 Regional Arbitrage</a:t>
-            </a:r>
-          </a:p>
-        </p:txBody>
-      </p:sp>
-      <p:sp>
-        <p:nvSpPr>
-          <p:cNvPr id="45" name="TextBox 44"/>
-          <p:cNvSpPr txBox="1"/>
-          <p:nvPr/>
-        </p:nvSpPr>
-        <p:spPr>
-          <a:xfrm>
-            <a:off x="539496" y="4599432"/>
-            <a:ext cx="2560320" cy="731520"/>
-          </a:xfrm>
-          <a:prstGeom prst="rect">
-            <a:avLst/>
-          </a:prstGeom>
-          <a:noFill/>
-        </p:spPr>
-        <p:txBody>
-          <a:bodyPr wrap="square">
-            <a:spAutoFit/>
-          </a:bodyPr>
-          <a:lstStyle/>
-          <a:p>
-            <a:pPr algn="l"/>
-            <a:r>
-              <a:rPr sz="850" b="0" i="0">
-                <a:solidFill>
-                  <a:srgbClr val="9AA3B8"/>
-                </a:solidFill>
-              </a:rPr>
-              <a:t>Instantly compare cost across 20 regions. Identify LCC sourcing opportunities. Quantify make-vs-buy with real data — not assumptions.</a:t>
-            </a:r>
-          </a:p>
-        </p:txBody>
-      </p:sp>
-      <p:sp>
-        <p:nvSpPr>
-          <p:cNvPr id="46" name="Rectangle 45"/>
-          <p:cNvSpPr/>
-          <p:nvPr/>
-        </p:nvSpPr>
-        <p:spPr>
-          <a:xfrm>
-            <a:off x="3246120" y="4251960"/>
-            <a:ext cx="2743200" cy="1188720"/>
-          </a:xfrm>
-          <a:prstGeom prst="rect">
-            <a:avLst/>
-          </a:prstGeom>
-          <a:solidFill>
-            <a:srgbClr val="1E2330"/>
-          </a:solidFill>
-          <a:ln w="6350">
-            <a:solidFill>
-              <a:srgbClr val="2A3045"/>
-            </a:solidFill>
-          </a:ln>
-        </p:spPr>
-        <p:style>
-          <a:lnRef idx="1">
-            <a:schemeClr val="accent1"/>
-          </a:lnRef>
-          <a:fillRef idx="3">
-            <a:schemeClr val="accent1"/>
-          </a:fillRef>
-          <a:effectRef idx="2">
-            <a:schemeClr val="accent1"/>
-          </a:effectRef>
-          <a:fontRef idx="minor">
-            <a:schemeClr val="lt1"/>
-          </a:fontRef>
-        </p:style>
-        <p:txBody>
-          <a:bodyPr rtlCol="0" anchor="ctr"/>
-          <a:lstStyle/>
-          <a:p>
-            <a:pPr algn="ctr"/>
-          </a:p>
-        </p:txBody>
-      </p:sp>
-      <p:sp>
-        <p:nvSpPr>
-          <p:cNvPr id="47" name="Rectangle 46"/>
-          <p:cNvSpPr/>
-          <p:nvPr/>
-        </p:nvSpPr>
-        <p:spPr>
-          <a:xfrm>
-            <a:off x="3246120" y="4251960"/>
-            <a:ext cx="54864" cy="1188720"/>
-          </a:xfrm>
-          <a:prstGeom prst="rect">
-            <a:avLst/>
-          </a:prstGeom>
-          <a:solidFill>
-            <a:srgbClr val="4F8EF7"/>
-          </a:solidFill>
-          <a:ln>
-            <a:noFill/>
-          </a:ln>
-        </p:spPr>
-        <p:style>
-          <a:lnRef idx="1">
-            <a:schemeClr val="accent1"/>
-          </a:lnRef>
-          <a:fillRef idx="3">
-            <a:schemeClr val="accent1"/>
-          </a:fillRef>
-          <a:effectRef idx="2">
-            <a:schemeClr val="accent1"/>
-          </a:effectRef>
-          <a:fontRef idx="minor">
-            <a:schemeClr val="lt1"/>
-          </a:fontRef>
-        </p:style>
-        <p:txBody>
-          <a:bodyPr rtlCol="0" anchor="ctr"/>
-          <a:lstStyle/>
-          <a:p>
-            <a:pPr algn="ctr"/>
-          </a:p>
-        </p:txBody>
-      </p:sp>
-      <p:sp>
-        <p:nvSpPr>
-          <p:cNvPr id="48" name="TextBox 47"/>
-          <p:cNvSpPr txBox="1"/>
-          <p:nvPr/>
-        </p:nvSpPr>
-        <p:spPr>
-          <a:xfrm>
-            <a:off x="3374136" y="4343400"/>
-            <a:ext cx="2560320" cy="292608"/>
-          </a:xfrm>
-          <a:prstGeom prst="rect">
-            <a:avLst/>
-          </a:prstGeom>
-          <a:noFill/>
-        </p:spPr>
-        <p:txBody>
-          <a:bodyPr wrap="square">
-            <a:spAutoFit/>
-          </a:bodyPr>
-          <a:lstStyle/>
-          <a:p>
-            <a:pPr algn="l"/>
-            <a:r>
-              <a:rPr sz="950" b="1" i="0">
-                <a:solidFill>
-                  <a:srgbClr val="F0F2F8"/>
-                </a:solidFill>
-              </a:rPr>
-              <a:t>📊 Standardised Methodology</a:t>
-            </a:r>
-          </a:p>
-        </p:txBody>
-      </p:sp>
-      <p:sp>
-        <p:nvSpPr>
-          <p:cNvPr id="49" name="TextBox 48"/>
-          <p:cNvSpPr txBox="1"/>
-          <p:nvPr/>
-        </p:nvSpPr>
-        <p:spPr>
-          <a:xfrm>
-            <a:off x="3374136" y="4599432"/>
-            <a:ext cx="2560320" cy="731520"/>
-          </a:xfrm>
-          <a:prstGeom prst="rect">
-            <a:avLst/>
-          </a:prstGeom>
-          <a:noFill/>
-        </p:spPr>
-        <p:txBody>
-          <a:bodyPr wrap="square">
-            <a:spAutoFit/>
-          </a:bodyPr>
-          <a:lstStyle/>
-          <a:p>
-            <a:pPr algn="l"/>
-            <a:r>
-              <a:rPr sz="850" b="0" i="0">
-                <a:solidFill>
-                  <a:srgbClr val="9AA3B8"/>
-                </a:solidFill>
-              </a:rPr>
-              <a:t>One consistent cost model across all teams, programmes, and regions. Full audit trail for every assumption. Leadership gets a single source of truth.</a:t>
-            </a:r>
-          </a:p>
-        </p:txBody>
-      </p:sp>
-      <p:sp>
-        <p:nvSpPr>
-          <p:cNvPr id="50" name="Rectangle 49"/>
-          <p:cNvSpPr/>
-          <p:nvPr/>
-        </p:nvSpPr>
-        <p:spPr>
-          <a:xfrm>
-            <a:off x="6080760" y="4251960"/>
-            <a:ext cx="2743200" cy="1188720"/>
-          </a:xfrm>
-          <a:prstGeom prst="rect">
-            <a:avLst/>
-          </a:prstGeom>
-          <a:solidFill>
-            <a:srgbClr val="1E2330"/>
-          </a:solidFill>
-          <a:ln w="6350">
-            <a:solidFill>
-              <a:srgbClr val="2A3045"/>
-            </a:solidFill>
-          </a:ln>
-        </p:spPr>
-        <p:style>
-          <a:lnRef idx="1">
-            <a:schemeClr val="accent1"/>
-          </a:lnRef>
-          <a:fillRef idx="3">
-            <a:schemeClr val="accent1"/>
-          </a:fillRef>
-          <a:effectRef idx="2">
-            <a:schemeClr val="accent1"/>
-          </a:effectRef>
-          <a:fontRef idx="minor">
-            <a:schemeClr val="lt1"/>
-          </a:fontRef>
-        </p:style>
-        <p:txBody>
-          <a:bodyPr rtlCol="0" anchor="ctr"/>
-          <a:lstStyle/>
-          <a:p>
-            <a:pPr algn="ctr"/>
-          </a:p>
-        </p:txBody>
-      </p:sp>
-      <p:sp>
-        <p:nvSpPr>
-          <p:cNvPr id="51" name="Rectangle 50"/>
-          <p:cNvSpPr/>
-          <p:nvPr/>
-        </p:nvSpPr>
-        <p:spPr>
-          <a:xfrm>
-            <a:off x="6080760" y="4251960"/>
-            <a:ext cx="54864" cy="1188720"/>
-          </a:xfrm>
-          <a:prstGeom prst="rect">
-            <a:avLst/>
-          </a:prstGeom>
-          <a:solidFill>
-            <a:srgbClr val="F59E0B"/>
-          </a:solidFill>
-          <a:ln>
-            <a:noFill/>
-          </a:ln>
-        </p:spPr>
-        <p:style>
-          <a:lnRef idx="1">
-            <a:schemeClr val="accent1"/>
-          </a:lnRef>
-          <a:fillRef idx="3">
-            <a:schemeClr val="accent1"/>
-          </a:fillRef>
-          <a:effectRef idx="2">
-            <a:schemeClr val="accent1"/>
-          </a:effectRef>
-          <a:fontRef idx="minor">
-            <a:schemeClr val="lt1"/>
-          </a:fontRef>
-        </p:style>
-        <p:txBody>
-          <a:bodyPr rtlCol="0" anchor="ctr"/>
-          <a:lstStyle/>
-          <a:p>
-            <a:pPr algn="ctr"/>
-          </a:p>
-        </p:txBody>
-      </p:sp>
-      <p:sp>
-        <p:nvSpPr>
-          <p:cNvPr id="52" name="TextBox 51"/>
-          <p:cNvSpPr txBox="1"/>
-          <p:nvPr/>
-        </p:nvSpPr>
-        <p:spPr>
-          <a:xfrm>
-            <a:off x="6208776" y="4343400"/>
-            <a:ext cx="2560320" cy="292608"/>
-          </a:xfrm>
-          <a:prstGeom prst="rect">
-            <a:avLst/>
-          </a:prstGeom>
-          <a:noFill/>
-        </p:spPr>
-        <p:txBody>
-          <a:bodyPr wrap="square">
-            <a:spAutoFit/>
-          </a:bodyPr>
-          <a:lstStyle/>
-          <a:p>
-            <a:pPr algn="l"/>
-            <a:r>
-              <a:rPr sz="950" b="1" i="0">
-                <a:solidFill>
-                  <a:srgbClr val="F0F2F8"/>
-                </a:solidFill>
-              </a:rPr>
-              <a:t>📉 Volume Optimisation</a:t>
-            </a:r>
-          </a:p>
-        </p:txBody>
-      </p:sp>
-      <p:sp>
-        <p:nvSpPr>
-          <p:cNvPr id="53" name="TextBox 52"/>
-          <p:cNvSpPr txBox="1"/>
-          <p:nvPr/>
-        </p:nvSpPr>
-        <p:spPr>
-          <a:xfrm>
-            <a:off x="6208776" y="4599432"/>
-            <a:ext cx="2560320" cy="731520"/>
-          </a:xfrm>
-          <a:prstGeom prst="rect">
-            <a:avLst/>
-          </a:prstGeom>
-          <a:noFill/>
-        </p:spPr>
-        <p:txBody>
-          <a:bodyPr wrap="square">
-            <a:spAutoFit/>
-          </a:bodyPr>
-          <a:lstStyle/>
-          <a:p>
-            <a:pPr algn="l"/>
-            <a:r>
-              <a:rPr sz="850" b="0" i="0">
-                <a:solidFill>
-                  <a:srgbClr val="9AA3B8"/>
-                </a:solidFill>
-              </a:rPr>
-              <a:t>Learning curve modelling shows cost reduction with volume. Identify the volume at which a new process becomes cost-competitive.</a:t>
-            </a:r>
-          </a:p>
-        </p:txBody>
-      </p:sp>
-      <p:sp>
-        <p:nvSpPr>
-          <p:cNvPr id="54" name="Rectangle 53"/>
-          <p:cNvSpPr/>
-          <p:nvPr/>
-        </p:nvSpPr>
-        <p:spPr>
-          <a:xfrm>
-            <a:off x="8915400" y="4251960"/>
-            <a:ext cx="2743200" cy="1188720"/>
-          </a:xfrm>
-          <a:prstGeom prst="rect">
-            <a:avLst/>
-          </a:prstGeom>
-          <a:solidFill>
-            <a:srgbClr val="1E2330"/>
-          </a:solidFill>
-          <a:ln w="6350">
-            <a:solidFill>
-              <a:srgbClr val="2A3045"/>
-            </a:solidFill>
-          </a:ln>
-        </p:spPr>
-        <p:style>
-          <a:lnRef idx="1">
-            <a:schemeClr val="accent1"/>
-          </a:lnRef>
-          <a:fillRef idx="3">
-            <a:schemeClr val="accent1"/>
-          </a:fillRef>
-          <a:effectRef idx="2">
-            <a:schemeClr val="accent1"/>
-          </a:effectRef>
-          <a:fontRef idx="minor">
-            <a:schemeClr val="lt1"/>
-          </a:fontRef>
-        </p:style>
-        <p:txBody>
-          <a:bodyPr rtlCol="0" anchor="ctr"/>
-          <a:lstStyle/>
-          <a:p>
-            <a:pPr algn="ctr"/>
-          </a:p>
-        </p:txBody>
-      </p:sp>
-      <p:sp>
-        <p:nvSpPr>
-          <p:cNvPr id="55" name="Rectangle 54"/>
-          <p:cNvSpPr/>
-          <p:nvPr/>
-        </p:nvSpPr>
-        <p:spPr>
-          <a:xfrm>
-            <a:off x="8915400" y="4251960"/>
-            <a:ext cx="54864" cy="1188720"/>
-          </a:xfrm>
-          <a:prstGeom prst="rect">
-            <a:avLst/>
-          </a:prstGeom>
-          <a:solidFill>
-            <a:srgbClr val="7C3AED"/>
-          </a:solidFill>
-          <a:ln>
-            <a:noFill/>
-          </a:ln>
-        </p:spPr>
-        <p:style>
-          <a:lnRef idx="1">
-            <a:schemeClr val="accent1"/>
-          </a:lnRef>
-          <a:fillRef idx="3">
-            <a:schemeClr val="accent1"/>
-          </a:fillRef>
-          <a:effectRef idx="2">
-            <a:schemeClr val="accent1"/>
-          </a:effectRef>
-          <a:fontRef idx="minor">
-            <a:schemeClr val="lt1"/>
-          </a:fontRef>
-        </p:style>
-        <p:txBody>
-          <a:bodyPr rtlCol="0" anchor="ctr"/>
-          <a:lstStyle/>
-          <a:p>
-            <a:pPr algn="ctr"/>
-          </a:p>
-        </p:txBody>
-      </p:sp>
-      <p:sp>
-        <p:nvSpPr>
-          <p:cNvPr id="56" name="TextBox 55"/>
-          <p:cNvSpPr txBox="1"/>
-          <p:nvPr/>
-        </p:nvSpPr>
-        <p:spPr>
-          <a:xfrm>
-            <a:off x="9043416" y="4343400"/>
-            <a:ext cx="2560320" cy="292608"/>
-          </a:xfrm>
-          <a:prstGeom prst="rect">
-            <a:avLst/>
-          </a:prstGeom>
-          <a:noFill/>
-        </p:spPr>
-        <p:txBody>
-          <a:bodyPr wrap="square">
-            <a:spAutoFit/>
-          </a:bodyPr>
-          <a:lstStyle/>
-          <a:p>
-            <a:pPr algn="l"/>
-            <a:r>
-              <a:rPr sz="950" b="1" i="0">
-                <a:solidFill>
-                  <a:srgbClr val="F0F2F8"/>
-                </a:solidFill>
-              </a:rPr>
-              <a:t>☁️ Team Collaboration</a:t>
-            </a:r>
-          </a:p>
-        </p:txBody>
-      </p:sp>
-      <p:sp>
-        <p:nvSpPr>
-          <p:cNvPr id="57" name="TextBox 56"/>
-          <p:cNvSpPr txBox="1"/>
-          <p:nvPr/>
-        </p:nvSpPr>
-        <p:spPr>
-          <a:xfrm>
-            <a:off x="9043416" y="4599432"/>
-            <a:ext cx="2560320" cy="731520"/>
-          </a:xfrm>
-          <a:prstGeom prst="rect">
-            <a:avLst/>
-          </a:prstGeom>
-          <a:noFill/>
-        </p:spPr>
-        <p:txBody>
-          <a:bodyPr wrap="square">
-            <a:spAutoFit/>
-          </a:bodyPr>
-          <a:lstStyle/>
-          <a:p>
-            <a:pPr algn="l"/>
-            <a:r>
-              <a:rPr sz="850" b="0" i="0">
-                <a:solidFill>
-                  <a:srgbClr val="9AA3B8"/>
-                </a:solidFill>
-              </a:rPr>
-              <a:t>Cloud sync means all engineers share the same cost baseline. No more conflicting spreadsheets. Cost knowledge is captured, not locked in individuals.</a:t>
+              <a:t>7-tab Help Centre: Getting Started, AI Agent, CAD &amp; Photo,
+Commodities, FAQ (6 items), Glossary (12 terms),
+Troubleshooting (5 common issues)
+Contact support form built-in to the application</a:t>
             </a:r>
           </a:p>
         </p:txBody>
@@ -16607,7 +16504,2179 @@
                   <a:srgbClr val="5A6380"/>
                 </a:solidFill>
               </a:rPr>
-              <a:t>SLIDE 16 / 16</a:t>
+              <a:t>SLIDE 16 / 17</a:t>
+            </a:r>
+          </a:p>
+        </p:txBody>
+      </p:sp>
+      <p:sp>
+        <p:nvSpPr>
+          <p:cNvPr id="4" name="TextBox 3"/>
+          <p:cNvSpPr txBox="1"/>
+          <p:nvPr/>
+        </p:nvSpPr>
+        <p:spPr>
+          <a:xfrm>
+            <a:off x="10454335" y="91440"/>
+            <a:ext cx="1463040" cy="320040"/>
+          </a:xfrm>
+          <a:prstGeom prst="rect">
+            <a:avLst/>
+          </a:prstGeom>
+          <a:noFill/>
+        </p:spPr>
+        <p:txBody>
+          <a:bodyPr wrap="square">
+            <a:spAutoFit/>
+          </a:bodyPr>
+          <a:lstStyle/>
+          <a:p>
+            <a:pPr algn="r"/>
+            <a:r>
+              <a:rPr sz="1100" b="1" i="0">
+                <a:solidFill>
+                  <a:srgbClr val="4F8EF7"/>
+                </a:solidFill>
+              </a:rPr>
+              <a:t>CostVision</a:t>
+            </a:r>
+          </a:p>
+        </p:txBody>
+      </p:sp>
+      <p:sp>
+        <p:nvSpPr>
+          <p:cNvPr id="5" name="Rectangle 4"/>
+          <p:cNvSpPr/>
+          <p:nvPr/>
+        </p:nvSpPr>
+        <p:spPr>
+          <a:xfrm>
+            <a:off x="0" y="475488"/>
+            <a:ext cx="12191695" cy="7315"/>
+          </a:xfrm>
+          <a:prstGeom prst="rect">
+            <a:avLst/>
+          </a:prstGeom>
+          <a:solidFill>
+            <a:srgbClr val="2A3045"/>
+          </a:solidFill>
+          <a:ln>
+            <a:noFill/>
+          </a:ln>
+        </p:spPr>
+        <p:style>
+          <a:lnRef idx="1">
+            <a:schemeClr val="accent1"/>
+          </a:lnRef>
+          <a:fillRef idx="3">
+            <a:schemeClr val="accent1"/>
+          </a:fillRef>
+          <a:effectRef idx="2">
+            <a:schemeClr val="accent1"/>
+          </a:effectRef>
+          <a:fontRef idx="minor">
+            <a:schemeClr val="lt1"/>
+          </a:fontRef>
+        </p:style>
+        <p:txBody>
+          <a:bodyPr rtlCol="0" anchor="ctr"/>
+          <a:lstStyle/>
+          <a:p>
+            <a:pPr algn="ctr"/>
+          </a:p>
+        </p:txBody>
+      </p:sp>
+      <p:sp>
+        <p:nvSpPr>
+          <p:cNvPr id="6" name="TextBox 5"/>
+          <p:cNvSpPr txBox="1"/>
+          <p:nvPr/>
+        </p:nvSpPr>
+        <p:spPr>
+          <a:xfrm>
+            <a:off x="457200" y="621792"/>
+            <a:ext cx="7315200" cy="256032"/>
+          </a:xfrm>
+          <a:prstGeom prst="rect">
+            <a:avLst/>
+          </a:prstGeom>
+          <a:noFill/>
+        </p:spPr>
+        <p:txBody>
+          <a:bodyPr wrap="square">
+            <a:spAutoFit/>
+          </a:bodyPr>
+          <a:lstStyle/>
+          <a:p>
+            <a:pPr algn="l"/>
+            <a:r>
+              <a:rPr sz="800" b="1" i="0">
+                <a:solidFill>
+                  <a:srgbClr val="4F8EF7"/>
+                </a:solidFill>
+              </a:rPr>
+              <a:t>VALUE DELIVERED</a:t>
+            </a:r>
+          </a:p>
+        </p:txBody>
+      </p:sp>
+      <p:sp>
+        <p:nvSpPr>
+          <p:cNvPr id="7" name="TextBox 6"/>
+          <p:cNvSpPr txBox="1"/>
+          <p:nvPr/>
+        </p:nvSpPr>
+        <p:spPr>
+          <a:xfrm>
+            <a:off x="457200" y="822960"/>
+            <a:ext cx="10972800" cy="548640"/>
+          </a:xfrm>
+          <a:prstGeom prst="rect">
+            <a:avLst/>
+          </a:prstGeom>
+          <a:noFill/>
+        </p:spPr>
+        <p:txBody>
+          <a:bodyPr wrap="square">
+            <a:spAutoFit/>
+          </a:bodyPr>
+          <a:lstStyle/>
+          <a:p>
+            <a:pPr algn="l"/>
+            <a:r>
+              <a:rPr sz="2600" b="1" i="0">
+                <a:solidFill>
+                  <a:srgbClr val="F0F2F8"/>
+                </a:solidFill>
+              </a:rPr>
+              <a:t>Business Impact &amp; Measurable ROI</a:t>
+            </a:r>
+          </a:p>
+        </p:txBody>
+      </p:sp>
+      <p:sp>
+        <p:nvSpPr>
+          <p:cNvPr id="8" name="TextBox 7"/>
+          <p:cNvSpPr txBox="1"/>
+          <p:nvPr/>
+        </p:nvSpPr>
+        <p:spPr>
+          <a:xfrm>
+            <a:off x="457200" y="1325880"/>
+            <a:ext cx="10972800" cy="347472"/>
+          </a:xfrm>
+          <a:prstGeom prst="rect">
+            <a:avLst/>
+          </a:prstGeom>
+          <a:noFill/>
+        </p:spPr>
+        <p:txBody>
+          <a:bodyPr wrap="square">
+            <a:spAutoFit/>
+          </a:bodyPr>
+          <a:lstStyle/>
+          <a:p>
+            <a:pPr algn="l"/>
+            <a:r>
+              <a:rPr sz="1200" b="0" i="0">
+                <a:solidFill>
+                  <a:srgbClr val="9AA3B8"/>
+                </a:solidFill>
+              </a:rPr>
+              <a:t>Quantified improvements across speed, accuracy, and cost reduction that directly impact the bottom line.</a:t>
+            </a:r>
+          </a:p>
+        </p:txBody>
+      </p:sp>
+      <p:sp>
+        <p:nvSpPr>
+          <p:cNvPr id="9" name="Rectangle 8"/>
+          <p:cNvSpPr/>
+          <p:nvPr/>
+        </p:nvSpPr>
+        <p:spPr>
+          <a:xfrm>
+            <a:off x="0" y="6446520"/>
+            <a:ext cx="12191695" cy="7315"/>
+          </a:xfrm>
+          <a:prstGeom prst="rect">
+            <a:avLst/>
+          </a:prstGeom>
+          <a:solidFill>
+            <a:srgbClr val="2A3045"/>
+          </a:solidFill>
+          <a:ln>
+            <a:noFill/>
+          </a:ln>
+        </p:spPr>
+        <p:style>
+          <a:lnRef idx="1">
+            <a:schemeClr val="accent1"/>
+          </a:lnRef>
+          <a:fillRef idx="3">
+            <a:schemeClr val="accent1"/>
+          </a:fillRef>
+          <a:effectRef idx="2">
+            <a:schemeClr val="accent1"/>
+          </a:effectRef>
+          <a:fontRef idx="minor">
+            <a:schemeClr val="lt1"/>
+          </a:fontRef>
+        </p:style>
+        <p:txBody>
+          <a:bodyPr rtlCol="0" anchor="ctr"/>
+          <a:lstStyle/>
+          <a:p>
+            <a:pPr algn="ctr"/>
+          </a:p>
+        </p:txBody>
+      </p:sp>
+      <p:sp>
+        <p:nvSpPr>
+          <p:cNvPr id="10" name="TextBox 9"/>
+          <p:cNvSpPr txBox="1"/>
+          <p:nvPr/>
+        </p:nvSpPr>
+        <p:spPr>
+          <a:xfrm>
+            <a:off x="365760" y="6492240"/>
+            <a:ext cx="11460175" cy="320040"/>
+          </a:xfrm>
+          <a:prstGeom prst="rect">
+            <a:avLst/>
+          </a:prstGeom>
+          <a:noFill/>
+        </p:spPr>
+        <p:txBody>
+          <a:bodyPr wrap="square">
+            <a:spAutoFit/>
+          </a:bodyPr>
+          <a:lstStyle/>
+          <a:p>
+            <a:pPr algn="ctr"/>
+            <a:r>
+              <a:rPr sz="750" b="0" i="0">
+                <a:solidFill>
+                  <a:srgbClr val="5A6380"/>
+                </a:solidFill>
+              </a:rPr>
+              <a:t>CostVision — AI-Powered Should-Cost Intelligence  |  Avinash Bhosale  |  Confidential</a:t>
+            </a:r>
+          </a:p>
+        </p:txBody>
+      </p:sp>
+      <p:sp>
+        <p:nvSpPr>
+          <p:cNvPr id="11" name="Rectangle 10"/>
+          <p:cNvSpPr/>
+          <p:nvPr/>
+        </p:nvSpPr>
+        <p:spPr>
+          <a:xfrm>
+            <a:off x="411480" y="1810512"/>
+            <a:ext cx="2194560" cy="1005840"/>
+          </a:xfrm>
+          <a:prstGeom prst="rect">
+            <a:avLst/>
+          </a:prstGeom>
+          <a:solidFill>
+            <a:srgbClr val="1E2330"/>
+          </a:solidFill>
+          <a:ln w="6350">
+            <a:solidFill>
+              <a:srgbClr val="2A3045"/>
+            </a:solidFill>
+          </a:ln>
+        </p:spPr>
+        <p:style>
+          <a:lnRef idx="1">
+            <a:schemeClr val="accent1"/>
+          </a:lnRef>
+          <a:fillRef idx="3">
+            <a:schemeClr val="accent1"/>
+          </a:fillRef>
+          <a:effectRef idx="2">
+            <a:schemeClr val="accent1"/>
+          </a:effectRef>
+          <a:fontRef idx="minor">
+            <a:schemeClr val="lt1"/>
+          </a:fontRef>
+        </p:style>
+        <p:txBody>
+          <a:bodyPr rtlCol="0" anchor="ctr"/>
+          <a:lstStyle/>
+          <a:p>
+            <a:pPr algn="ctr"/>
+          </a:p>
+        </p:txBody>
+      </p:sp>
+      <p:sp>
+        <p:nvSpPr>
+          <p:cNvPr id="12" name="TextBox 11"/>
+          <p:cNvSpPr txBox="1"/>
+          <p:nvPr/>
+        </p:nvSpPr>
+        <p:spPr>
+          <a:xfrm>
+            <a:off x="411480" y="1901952"/>
+            <a:ext cx="2194560" cy="502920"/>
+          </a:xfrm>
+          <a:prstGeom prst="rect">
+            <a:avLst/>
+          </a:prstGeom>
+          <a:noFill/>
+        </p:spPr>
+        <p:txBody>
+          <a:bodyPr wrap="square">
+            <a:spAutoFit/>
+          </a:bodyPr>
+          <a:lstStyle/>
+          <a:p>
+            <a:pPr algn="ctr"/>
+            <a:r>
+              <a:rPr sz="2800" b="1" i="0">
+                <a:solidFill>
+                  <a:srgbClr val="4F8EF7"/>
+                </a:solidFill>
+              </a:rPr>
+              <a:t>70–90%</a:t>
+            </a:r>
+          </a:p>
+        </p:txBody>
+      </p:sp>
+      <p:sp>
+        <p:nvSpPr>
+          <p:cNvPr id="13" name="TextBox 12"/>
+          <p:cNvSpPr txBox="1"/>
+          <p:nvPr/>
+        </p:nvSpPr>
+        <p:spPr>
+          <a:xfrm>
+            <a:off x="411480" y="2377440"/>
+            <a:ext cx="2194560" cy="347472"/>
+          </a:xfrm>
+          <a:prstGeom prst="rect">
+            <a:avLst/>
+          </a:prstGeom>
+          <a:noFill/>
+        </p:spPr>
+        <p:txBody>
+          <a:bodyPr wrap="square">
+            <a:spAutoFit/>
+          </a:bodyPr>
+          <a:lstStyle/>
+          <a:p>
+            <a:pPr algn="ctr"/>
+            <a:r>
+              <a:rPr sz="800" b="0" i="0">
+                <a:solidFill>
+                  <a:srgbClr val="9AA3B8"/>
+                </a:solidFill>
+              </a:rPr>
+              <a:t>Reduction in costing time</a:t>
+            </a:r>
+          </a:p>
+        </p:txBody>
+      </p:sp>
+      <p:sp>
+        <p:nvSpPr>
+          <p:cNvPr id="14" name="Rectangle 13"/>
+          <p:cNvSpPr/>
+          <p:nvPr/>
+        </p:nvSpPr>
+        <p:spPr>
+          <a:xfrm>
+            <a:off x="2697480" y="1810512"/>
+            <a:ext cx="2194560" cy="1005840"/>
+          </a:xfrm>
+          <a:prstGeom prst="rect">
+            <a:avLst/>
+          </a:prstGeom>
+          <a:solidFill>
+            <a:srgbClr val="1E2330"/>
+          </a:solidFill>
+          <a:ln w="6350">
+            <a:solidFill>
+              <a:srgbClr val="2A3045"/>
+            </a:solidFill>
+          </a:ln>
+        </p:spPr>
+        <p:style>
+          <a:lnRef idx="1">
+            <a:schemeClr val="accent1"/>
+          </a:lnRef>
+          <a:fillRef idx="3">
+            <a:schemeClr val="accent1"/>
+          </a:fillRef>
+          <a:effectRef idx="2">
+            <a:schemeClr val="accent1"/>
+          </a:effectRef>
+          <a:fontRef idx="minor">
+            <a:schemeClr val="lt1"/>
+          </a:fontRef>
+        </p:style>
+        <p:txBody>
+          <a:bodyPr rtlCol="0" anchor="ctr"/>
+          <a:lstStyle/>
+          <a:p>
+            <a:pPr algn="ctr"/>
+          </a:p>
+        </p:txBody>
+      </p:sp>
+      <p:sp>
+        <p:nvSpPr>
+          <p:cNvPr id="15" name="TextBox 14"/>
+          <p:cNvSpPr txBox="1"/>
+          <p:nvPr/>
+        </p:nvSpPr>
+        <p:spPr>
+          <a:xfrm>
+            <a:off x="2697480" y="1901952"/>
+            <a:ext cx="2194560" cy="502920"/>
+          </a:xfrm>
+          <a:prstGeom prst="rect">
+            <a:avLst/>
+          </a:prstGeom>
+          <a:noFill/>
+        </p:spPr>
+        <p:txBody>
+          <a:bodyPr wrap="square">
+            <a:spAutoFit/>
+          </a:bodyPr>
+          <a:lstStyle/>
+          <a:p>
+            <a:pPr algn="ctr"/>
+            <a:r>
+              <a:rPr sz="2800" b="1" i="0">
+                <a:solidFill>
+                  <a:srgbClr val="10B981"/>
+                </a:solidFill>
+              </a:rPr>
+              <a:t>±8%</a:t>
+            </a:r>
+          </a:p>
+        </p:txBody>
+      </p:sp>
+      <p:sp>
+        <p:nvSpPr>
+          <p:cNvPr id="16" name="TextBox 15"/>
+          <p:cNvSpPr txBox="1"/>
+          <p:nvPr/>
+        </p:nvSpPr>
+        <p:spPr>
+          <a:xfrm>
+            <a:off x="2697480" y="2377440"/>
+            <a:ext cx="2194560" cy="347472"/>
+          </a:xfrm>
+          <a:prstGeom prst="rect">
+            <a:avLst/>
+          </a:prstGeom>
+          <a:noFill/>
+        </p:spPr>
+        <p:txBody>
+          <a:bodyPr wrap="square">
+            <a:spAutoFit/>
+          </a:bodyPr>
+          <a:lstStyle/>
+          <a:p>
+            <a:pPr algn="ctr"/>
+            <a:r>
+              <a:rPr sz="800" b="0" i="0">
+                <a:solidFill>
+                  <a:srgbClr val="9AA3B8"/>
+                </a:solidFill>
+              </a:rPr>
+              <a:t>Typical cost model accuracy</a:t>
+            </a:r>
+          </a:p>
+        </p:txBody>
+      </p:sp>
+      <p:sp>
+        <p:nvSpPr>
+          <p:cNvPr id="17" name="Rectangle 16"/>
+          <p:cNvSpPr/>
+          <p:nvPr/>
+        </p:nvSpPr>
+        <p:spPr>
+          <a:xfrm>
+            <a:off x="4983480" y="1810512"/>
+            <a:ext cx="2194560" cy="1005840"/>
+          </a:xfrm>
+          <a:prstGeom prst="rect">
+            <a:avLst/>
+          </a:prstGeom>
+          <a:solidFill>
+            <a:srgbClr val="1E2330"/>
+          </a:solidFill>
+          <a:ln w="6350">
+            <a:solidFill>
+              <a:srgbClr val="2A3045"/>
+            </a:solidFill>
+          </a:ln>
+        </p:spPr>
+        <p:style>
+          <a:lnRef idx="1">
+            <a:schemeClr val="accent1"/>
+          </a:lnRef>
+          <a:fillRef idx="3">
+            <a:schemeClr val="accent1"/>
+          </a:fillRef>
+          <a:effectRef idx="2">
+            <a:schemeClr val="accent1"/>
+          </a:effectRef>
+          <a:fontRef idx="minor">
+            <a:schemeClr val="lt1"/>
+          </a:fontRef>
+        </p:style>
+        <p:txBody>
+          <a:bodyPr rtlCol="0" anchor="ctr"/>
+          <a:lstStyle/>
+          <a:p>
+            <a:pPr algn="ctr"/>
+          </a:p>
+        </p:txBody>
+      </p:sp>
+      <p:sp>
+        <p:nvSpPr>
+          <p:cNvPr id="18" name="TextBox 17"/>
+          <p:cNvSpPr txBox="1"/>
+          <p:nvPr/>
+        </p:nvSpPr>
+        <p:spPr>
+          <a:xfrm>
+            <a:off x="4983480" y="1901952"/>
+            <a:ext cx="2194560" cy="502920"/>
+          </a:xfrm>
+          <a:prstGeom prst="rect">
+            <a:avLst/>
+          </a:prstGeom>
+          <a:noFill/>
+        </p:spPr>
+        <p:txBody>
+          <a:bodyPr wrap="square">
+            <a:spAutoFit/>
+          </a:bodyPr>
+          <a:lstStyle/>
+          <a:p>
+            <a:pPr algn="ctr"/>
+            <a:r>
+              <a:rPr sz="2800" b="1" i="0">
+                <a:solidFill>
+                  <a:srgbClr val="F59E0B"/>
+                </a:solidFill>
+              </a:rPr>
+              <a:t>15–25%</a:t>
+            </a:r>
+          </a:p>
+        </p:txBody>
+      </p:sp>
+      <p:sp>
+        <p:nvSpPr>
+          <p:cNvPr id="19" name="TextBox 18"/>
+          <p:cNvSpPr txBox="1"/>
+          <p:nvPr/>
+        </p:nvSpPr>
+        <p:spPr>
+          <a:xfrm>
+            <a:off x="4983480" y="2377440"/>
+            <a:ext cx="2194560" cy="347472"/>
+          </a:xfrm>
+          <a:prstGeom prst="rect">
+            <a:avLst/>
+          </a:prstGeom>
+          <a:noFill/>
+        </p:spPr>
+        <p:txBody>
+          <a:bodyPr wrap="square">
+            <a:spAutoFit/>
+          </a:bodyPr>
+          <a:lstStyle/>
+          <a:p>
+            <a:pPr algn="ctr"/>
+            <a:r>
+              <a:rPr sz="800" b="0" i="0">
+                <a:solidFill>
+                  <a:srgbClr val="9AA3B8"/>
+                </a:solidFill>
+              </a:rPr>
+              <a:t>Supplier price reduction via should-cost intel</a:t>
+            </a:r>
+          </a:p>
+        </p:txBody>
+      </p:sp>
+      <p:sp>
+        <p:nvSpPr>
+          <p:cNvPr id="20" name="Rectangle 19"/>
+          <p:cNvSpPr/>
+          <p:nvPr/>
+        </p:nvSpPr>
+        <p:spPr>
+          <a:xfrm>
+            <a:off x="7269480" y="1810512"/>
+            <a:ext cx="2194560" cy="1005840"/>
+          </a:xfrm>
+          <a:prstGeom prst="rect">
+            <a:avLst/>
+          </a:prstGeom>
+          <a:solidFill>
+            <a:srgbClr val="1E2330"/>
+          </a:solidFill>
+          <a:ln w="6350">
+            <a:solidFill>
+              <a:srgbClr val="2A3045"/>
+            </a:solidFill>
+          </a:ln>
+        </p:spPr>
+        <p:style>
+          <a:lnRef idx="1">
+            <a:schemeClr val="accent1"/>
+          </a:lnRef>
+          <a:fillRef idx="3">
+            <a:schemeClr val="accent1"/>
+          </a:fillRef>
+          <a:effectRef idx="2">
+            <a:schemeClr val="accent1"/>
+          </a:effectRef>
+          <a:fontRef idx="minor">
+            <a:schemeClr val="lt1"/>
+          </a:fontRef>
+        </p:style>
+        <p:txBody>
+          <a:bodyPr rtlCol="0" anchor="ctr"/>
+          <a:lstStyle/>
+          <a:p>
+            <a:pPr algn="ctr"/>
+          </a:p>
+        </p:txBody>
+      </p:sp>
+      <p:sp>
+        <p:nvSpPr>
+          <p:cNvPr id="21" name="TextBox 20"/>
+          <p:cNvSpPr txBox="1"/>
+          <p:nvPr/>
+        </p:nvSpPr>
+        <p:spPr>
+          <a:xfrm>
+            <a:off x="7269480" y="1901952"/>
+            <a:ext cx="2194560" cy="502920"/>
+          </a:xfrm>
+          <a:prstGeom prst="rect">
+            <a:avLst/>
+          </a:prstGeom>
+          <a:noFill/>
+        </p:spPr>
+        <p:txBody>
+          <a:bodyPr wrap="square">
+            <a:spAutoFit/>
+          </a:bodyPr>
+          <a:lstStyle/>
+          <a:p>
+            <a:pPr algn="ctr"/>
+            <a:r>
+              <a:rPr sz="2800" b="1" i="0">
+                <a:solidFill>
+                  <a:srgbClr val="7C3AED"/>
+                </a:solidFill>
+              </a:rPr>
+              <a:t>3×</a:t>
+            </a:r>
+          </a:p>
+        </p:txBody>
+      </p:sp>
+      <p:sp>
+        <p:nvSpPr>
+          <p:cNvPr id="22" name="TextBox 21"/>
+          <p:cNvSpPr txBox="1"/>
+          <p:nvPr/>
+        </p:nvSpPr>
+        <p:spPr>
+          <a:xfrm>
+            <a:off x="7269480" y="2377440"/>
+            <a:ext cx="2194560" cy="347472"/>
+          </a:xfrm>
+          <a:prstGeom prst="rect">
+            <a:avLst/>
+          </a:prstGeom>
+          <a:noFill/>
+        </p:spPr>
+        <p:txBody>
+          <a:bodyPr wrap="square">
+            <a:spAutoFit/>
+          </a:bodyPr>
+          <a:lstStyle/>
+          <a:p>
+            <a:pPr algn="ctr"/>
+            <a:r>
+              <a:rPr sz="800" b="0" i="0">
+                <a:solidFill>
+                  <a:srgbClr val="9AA3B8"/>
+                </a:solidFill>
+              </a:rPr>
+              <a:t>Faster sourcing decisions</a:t>
+            </a:r>
+          </a:p>
+        </p:txBody>
+      </p:sp>
+      <p:sp>
+        <p:nvSpPr>
+          <p:cNvPr id="23" name="Rectangle 22"/>
+          <p:cNvSpPr/>
+          <p:nvPr/>
+        </p:nvSpPr>
+        <p:spPr>
+          <a:xfrm>
+            <a:off x="9555480" y="1810512"/>
+            <a:ext cx="2194560" cy="1005840"/>
+          </a:xfrm>
+          <a:prstGeom prst="rect">
+            <a:avLst/>
+          </a:prstGeom>
+          <a:solidFill>
+            <a:srgbClr val="1E2330"/>
+          </a:solidFill>
+          <a:ln w="6350">
+            <a:solidFill>
+              <a:srgbClr val="2A3045"/>
+            </a:solidFill>
+          </a:ln>
+        </p:spPr>
+        <p:style>
+          <a:lnRef idx="1">
+            <a:schemeClr val="accent1"/>
+          </a:lnRef>
+          <a:fillRef idx="3">
+            <a:schemeClr val="accent1"/>
+          </a:fillRef>
+          <a:effectRef idx="2">
+            <a:schemeClr val="accent1"/>
+          </a:effectRef>
+          <a:fontRef idx="minor">
+            <a:schemeClr val="lt1"/>
+          </a:fontRef>
+        </p:style>
+        <p:txBody>
+          <a:bodyPr rtlCol="0" anchor="ctr"/>
+          <a:lstStyle/>
+          <a:p>
+            <a:pPr algn="ctr"/>
+          </a:p>
+        </p:txBody>
+      </p:sp>
+      <p:sp>
+        <p:nvSpPr>
+          <p:cNvPr id="24" name="TextBox 23"/>
+          <p:cNvSpPr txBox="1"/>
+          <p:nvPr/>
+        </p:nvSpPr>
+        <p:spPr>
+          <a:xfrm>
+            <a:off x="9555480" y="1901952"/>
+            <a:ext cx="2194560" cy="502920"/>
+          </a:xfrm>
+          <a:prstGeom prst="rect">
+            <a:avLst/>
+          </a:prstGeom>
+          <a:noFill/>
+        </p:spPr>
+        <p:txBody>
+          <a:bodyPr wrap="square">
+            <a:spAutoFit/>
+          </a:bodyPr>
+          <a:lstStyle/>
+          <a:p>
+            <a:pPr algn="ctr"/>
+            <a:r>
+              <a:rPr sz="2800" b="1" i="0">
+                <a:solidFill>
+                  <a:srgbClr val="10B981"/>
+                </a:solidFill>
+              </a:rPr>
+              <a:t>£15M</a:t>
+            </a:r>
+          </a:p>
+        </p:txBody>
+      </p:sp>
+      <p:sp>
+        <p:nvSpPr>
+          <p:cNvPr id="25" name="TextBox 24"/>
+          <p:cNvSpPr txBox="1"/>
+          <p:nvPr/>
+        </p:nvSpPr>
+        <p:spPr>
+          <a:xfrm>
+            <a:off x="9555480" y="2377440"/>
+            <a:ext cx="2194560" cy="347472"/>
+          </a:xfrm>
+          <a:prstGeom prst="rect">
+            <a:avLst/>
+          </a:prstGeom>
+          <a:noFill/>
+        </p:spPr>
+        <p:txBody>
+          <a:bodyPr wrap="square">
+            <a:spAutoFit/>
+          </a:bodyPr>
+          <a:lstStyle/>
+          <a:p>
+            <a:pPr algn="ctr"/>
+            <a:r>
+              <a:rPr sz="800" b="0" i="0">
+                <a:solidFill>
+                  <a:srgbClr val="9AA3B8"/>
+                </a:solidFill>
+              </a:rPr>
+              <a:t>Saving on £500M spend at 3% improvement</a:t>
+            </a:r>
+          </a:p>
+        </p:txBody>
+      </p:sp>
+      <p:sp>
+        <p:nvSpPr>
+          <p:cNvPr id="26" name="Rectangle 25"/>
+          <p:cNvSpPr/>
+          <p:nvPr/>
+        </p:nvSpPr>
+        <p:spPr>
+          <a:xfrm>
+            <a:off x="411480" y="2971800"/>
+            <a:ext cx="2743200" cy="1188720"/>
+          </a:xfrm>
+          <a:prstGeom prst="rect">
+            <a:avLst/>
+          </a:prstGeom>
+          <a:solidFill>
+            <a:srgbClr val="1E2330"/>
+          </a:solidFill>
+          <a:ln w="6350">
+            <a:solidFill>
+              <a:srgbClr val="2A3045"/>
+            </a:solidFill>
+          </a:ln>
+        </p:spPr>
+        <p:style>
+          <a:lnRef idx="1">
+            <a:schemeClr val="accent1"/>
+          </a:lnRef>
+          <a:fillRef idx="3">
+            <a:schemeClr val="accent1"/>
+          </a:fillRef>
+          <a:effectRef idx="2">
+            <a:schemeClr val="accent1"/>
+          </a:effectRef>
+          <a:fontRef idx="minor">
+            <a:schemeClr val="lt1"/>
+          </a:fontRef>
+        </p:style>
+        <p:txBody>
+          <a:bodyPr rtlCol="0" anchor="ctr"/>
+          <a:lstStyle/>
+          <a:p>
+            <a:pPr algn="ctr"/>
+          </a:p>
+        </p:txBody>
+      </p:sp>
+      <p:sp>
+        <p:nvSpPr>
+          <p:cNvPr id="27" name="Rectangle 26"/>
+          <p:cNvSpPr/>
+          <p:nvPr/>
+        </p:nvSpPr>
+        <p:spPr>
+          <a:xfrm>
+            <a:off x="411480" y="2971800"/>
+            <a:ext cx="54864" cy="1188720"/>
+          </a:xfrm>
+          <a:prstGeom prst="rect">
+            <a:avLst/>
+          </a:prstGeom>
+          <a:solidFill>
+            <a:srgbClr val="4F8EF7"/>
+          </a:solidFill>
+          <a:ln>
+            <a:noFill/>
+          </a:ln>
+        </p:spPr>
+        <p:style>
+          <a:lnRef idx="1">
+            <a:schemeClr val="accent1"/>
+          </a:lnRef>
+          <a:fillRef idx="3">
+            <a:schemeClr val="accent1"/>
+          </a:fillRef>
+          <a:effectRef idx="2">
+            <a:schemeClr val="accent1"/>
+          </a:effectRef>
+          <a:fontRef idx="minor">
+            <a:schemeClr val="lt1"/>
+          </a:fontRef>
+        </p:style>
+        <p:txBody>
+          <a:bodyPr rtlCol="0" anchor="ctr"/>
+          <a:lstStyle/>
+          <a:p>
+            <a:pPr algn="ctr"/>
+          </a:p>
+        </p:txBody>
+      </p:sp>
+      <p:sp>
+        <p:nvSpPr>
+          <p:cNvPr id="28" name="TextBox 27"/>
+          <p:cNvSpPr txBox="1"/>
+          <p:nvPr/>
+        </p:nvSpPr>
+        <p:spPr>
+          <a:xfrm>
+            <a:off x="539496" y="3063240"/>
+            <a:ext cx="2560320" cy="292608"/>
+          </a:xfrm>
+          <a:prstGeom prst="rect">
+            <a:avLst/>
+          </a:prstGeom>
+          <a:noFill/>
+        </p:spPr>
+        <p:txBody>
+          <a:bodyPr wrap="square">
+            <a:spAutoFit/>
+          </a:bodyPr>
+          <a:lstStyle/>
+          <a:p>
+            <a:pPr algn="l"/>
+            <a:r>
+              <a:rPr sz="950" b="1" i="0">
+                <a:solidFill>
+                  <a:srgbClr val="F0F2F8"/>
+                </a:solidFill>
+              </a:rPr>
+              <a:t>⚡ Speed — 10× Faster</a:t>
+            </a:r>
+          </a:p>
+        </p:txBody>
+      </p:sp>
+      <p:sp>
+        <p:nvSpPr>
+          <p:cNvPr id="29" name="TextBox 28"/>
+          <p:cNvSpPr txBox="1"/>
+          <p:nvPr/>
+        </p:nvSpPr>
+        <p:spPr>
+          <a:xfrm>
+            <a:off x="539496" y="3319272"/>
+            <a:ext cx="2560320" cy="731520"/>
+          </a:xfrm>
+          <a:prstGeom prst="rect">
+            <a:avLst/>
+          </a:prstGeom>
+          <a:noFill/>
+        </p:spPr>
+        <p:txBody>
+          <a:bodyPr wrap="square">
+            <a:spAutoFit/>
+          </a:bodyPr>
+          <a:lstStyle/>
+          <a:p>
+            <a:pPr algn="l"/>
+            <a:r>
+              <a:rPr sz="850" b="0" i="0">
+                <a:solidFill>
+                  <a:srgbClr val="9AA3B8"/>
+                </a:solidFill>
+              </a:rPr>
+              <a:t>What took 2–4 weeks now takes 5–10 minutes. Engineers spend time on decisions, not spreadsheets. Faster RFQ responses, faster programme decisions.</a:t>
+            </a:r>
+          </a:p>
+        </p:txBody>
+      </p:sp>
+      <p:sp>
+        <p:nvSpPr>
+          <p:cNvPr id="30" name="Rectangle 29"/>
+          <p:cNvSpPr/>
+          <p:nvPr/>
+        </p:nvSpPr>
+        <p:spPr>
+          <a:xfrm>
+            <a:off x="3246120" y="2971800"/>
+            <a:ext cx="2743200" cy="1188720"/>
+          </a:xfrm>
+          <a:prstGeom prst="rect">
+            <a:avLst/>
+          </a:prstGeom>
+          <a:solidFill>
+            <a:srgbClr val="1E2330"/>
+          </a:solidFill>
+          <a:ln w="6350">
+            <a:solidFill>
+              <a:srgbClr val="2A3045"/>
+            </a:solidFill>
+          </a:ln>
+        </p:spPr>
+        <p:style>
+          <a:lnRef idx="1">
+            <a:schemeClr val="accent1"/>
+          </a:lnRef>
+          <a:fillRef idx="3">
+            <a:schemeClr val="accent1"/>
+          </a:fillRef>
+          <a:effectRef idx="2">
+            <a:schemeClr val="accent1"/>
+          </a:effectRef>
+          <a:fontRef idx="minor">
+            <a:schemeClr val="lt1"/>
+          </a:fontRef>
+        </p:style>
+        <p:txBody>
+          <a:bodyPr rtlCol="0" anchor="ctr"/>
+          <a:lstStyle/>
+          <a:p>
+            <a:pPr algn="ctr"/>
+          </a:p>
+        </p:txBody>
+      </p:sp>
+      <p:sp>
+        <p:nvSpPr>
+          <p:cNvPr id="31" name="Rectangle 30"/>
+          <p:cNvSpPr/>
+          <p:nvPr/>
+        </p:nvSpPr>
+        <p:spPr>
+          <a:xfrm>
+            <a:off x="3246120" y="2971800"/>
+            <a:ext cx="54864" cy="1188720"/>
+          </a:xfrm>
+          <a:prstGeom prst="rect">
+            <a:avLst/>
+          </a:prstGeom>
+          <a:solidFill>
+            <a:srgbClr val="10B981"/>
+          </a:solidFill>
+          <a:ln>
+            <a:noFill/>
+          </a:ln>
+        </p:spPr>
+        <p:style>
+          <a:lnRef idx="1">
+            <a:schemeClr val="accent1"/>
+          </a:lnRef>
+          <a:fillRef idx="3">
+            <a:schemeClr val="accent1"/>
+          </a:fillRef>
+          <a:effectRef idx="2">
+            <a:schemeClr val="accent1"/>
+          </a:effectRef>
+          <a:fontRef idx="minor">
+            <a:schemeClr val="lt1"/>
+          </a:fontRef>
+        </p:style>
+        <p:txBody>
+          <a:bodyPr rtlCol="0" anchor="ctr"/>
+          <a:lstStyle/>
+          <a:p>
+            <a:pPr algn="ctr"/>
+          </a:p>
+        </p:txBody>
+      </p:sp>
+      <p:sp>
+        <p:nvSpPr>
+          <p:cNvPr id="32" name="TextBox 31"/>
+          <p:cNvSpPr txBox="1"/>
+          <p:nvPr/>
+        </p:nvSpPr>
+        <p:spPr>
+          <a:xfrm>
+            <a:off x="3374136" y="3063240"/>
+            <a:ext cx="2560320" cy="292608"/>
+          </a:xfrm>
+          <a:prstGeom prst="rect">
+            <a:avLst/>
+          </a:prstGeom>
+          <a:noFill/>
+        </p:spPr>
+        <p:txBody>
+          <a:bodyPr wrap="square">
+            <a:spAutoFit/>
+          </a:bodyPr>
+          <a:lstStyle/>
+          <a:p>
+            <a:pPr algn="l"/>
+            <a:r>
+              <a:rPr sz="950" b="1" i="0">
+                <a:solidFill>
+                  <a:srgbClr val="F0F2F8"/>
+                </a:solidFill>
+              </a:rPr>
+              <a:t>🎯 Accuracy — Not Estimates</a:t>
+            </a:r>
+          </a:p>
+        </p:txBody>
+      </p:sp>
+      <p:sp>
+        <p:nvSpPr>
+          <p:cNvPr id="33" name="TextBox 32"/>
+          <p:cNvSpPr txBox="1"/>
+          <p:nvPr/>
+        </p:nvSpPr>
+        <p:spPr>
+          <a:xfrm>
+            <a:off x="3374136" y="3319272"/>
+            <a:ext cx="2560320" cy="731520"/>
+          </a:xfrm>
+          <a:prstGeom prst="rect">
+            <a:avLst/>
+          </a:prstGeom>
+          <a:noFill/>
+        </p:spPr>
+        <p:txBody>
+          <a:bodyPr wrap="square">
+            <a:spAutoFit/>
+          </a:bodyPr>
+          <a:lstStyle/>
+          <a:p>
+            <a:pPr algn="l"/>
+            <a:r>
+              <a:rPr sz="850" b="0" i="0">
+                <a:solidFill>
+                  <a:srgbClr val="9AA3B8"/>
+                </a:solidFill>
+              </a:rPr>
+              <a:t>Physics-based models calibrated to actual shop floor data. ±8% typical accuracy vs actual. Dramatically better than rule-of-thumb or parametric estimates.</a:t>
+            </a:r>
+          </a:p>
+        </p:txBody>
+      </p:sp>
+      <p:sp>
+        <p:nvSpPr>
+          <p:cNvPr id="34" name="Rectangle 33"/>
+          <p:cNvSpPr/>
+          <p:nvPr/>
+        </p:nvSpPr>
+        <p:spPr>
+          <a:xfrm>
+            <a:off x="6080760" y="2971800"/>
+            <a:ext cx="2743200" cy="1188720"/>
+          </a:xfrm>
+          <a:prstGeom prst="rect">
+            <a:avLst/>
+          </a:prstGeom>
+          <a:solidFill>
+            <a:srgbClr val="1E2330"/>
+          </a:solidFill>
+          <a:ln w="6350">
+            <a:solidFill>
+              <a:srgbClr val="2A3045"/>
+            </a:solidFill>
+          </a:ln>
+        </p:spPr>
+        <p:style>
+          <a:lnRef idx="1">
+            <a:schemeClr val="accent1"/>
+          </a:lnRef>
+          <a:fillRef idx="3">
+            <a:schemeClr val="accent1"/>
+          </a:fillRef>
+          <a:effectRef idx="2">
+            <a:schemeClr val="accent1"/>
+          </a:effectRef>
+          <a:fontRef idx="minor">
+            <a:schemeClr val="lt1"/>
+          </a:fontRef>
+        </p:style>
+        <p:txBody>
+          <a:bodyPr rtlCol="0" anchor="ctr"/>
+          <a:lstStyle/>
+          <a:p>
+            <a:pPr algn="ctr"/>
+          </a:p>
+        </p:txBody>
+      </p:sp>
+      <p:sp>
+        <p:nvSpPr>
+          <p:cNvPr id="35" name="Rectangle 34"/>
+          <p:cNvSpPr/>
+          <p:nvPr/>
+        </p:nvSpPr>
+        <p:spPr>
+          <a:xfrm>
+            <a:off x="6080760" y="2971800"/>
+            <a:ext cx="54864" cy="1188720"/>
+          </a:xfrm>
+          <a:prstGeom prst="rect">
+            <a:avLst/>
+          </a:prstGeom>
+          <a:solidFill>
+            <a:srgbClr val="F59E0B"/>
+          </a:solidFill>
+          <a:ln>
+            <a:noFill/>
+          </a:ln>
+        </p:spPr>
+        <p:style>
+          <a:lnRef idx="1">
+            <a:schemeClr val="accent1"/>
+          </a:lnRef>
+          <a:fillRef idx="3">
+            <a:schemeClr val="accent1"/>
+          </a:fillRef>
+          <a:effectRef idx="2">
+            <a:schemeClr val="accent1"/>
+          </a:effectRef>
+          <a:fontRef idx="minor">
+            <a:schemeClr val="lt1"/>
+          </a:fontRef>
+        </p:style>
+        <p:txBody>
+          <a:bodyPr rtlCol="0" anchor="ctr"/>
+          <a:lstStyle/>
+          <a:p>
+            <a:pPr algn="ctr"/>
+          </a:p>
+        </p:txBody>
+      </p:sp>
+      <p:sp>
+        <p:nvSpPr>
+          <p:cNvPr id="36" name="TextBox 35"/>
+          <p:cNvSpPr txBox="1"/>
+          <p:nvPr/>
+        </p:nvSpPr>
+        <p:spPr>
+          <a:xfrm>
+            <a:off x="6208776" y="3063240"/>
+            <a:ext cx="2560320" cy="292608"/>
+          </a:xfrm>
+          <a:prstGeom prst="rect">
+            <a:avLst/>
+          </a:prstGeom>
+          <a:noFill/>
+        </p:spPr>
+        <p:txBody>
+          <a:bodyPr wrap="square">
+            <a:spAutoFit/>
+          </a:bodyPr>
+          <a:lstStyle/>
+          <a:p>
+            <a:pPr algn="l"/>
+            <a:r>
+              <a:rPr sz="950" b="1" i="0">
+                <a:solidFill>
+                  <a:srgbClr val="F0F2F8"/>
+                </a:solidFill>
+              </a:rPr>
+              <a:t>💰 Negotiation Power</a:t>
+            </a:r>
+          </a:p>
+        </p:txBody>
+      </p:sp>
+      <p:sp>
+        <p:nvSpPr>
+          <p:cNvPr id="37" name="TextBox 36"/>
+          <p:cNvSpPr txBox="1"/>
+          <p:nvPr/>
+        </p:nvSpPr>
+        <p:spPr>
+          <a:xfrm>
+            <a:off x="6208776" y="3319272"/>
+            <a:ext cx="2560320" cy="731520"/>
+          </a:xfrm>
+          <a:prstGeom prst="rect">
+            <a:avLst/>
+          </a:prstGeom>
+          <a:noFill/>
+        </p:spPr>
+        <p:txBody>
+          <a:bodyPr wrap="square">
+            <a:spAutoFit/>
+          </a:bodyPr>
+          <a:lstStyle/>
+          <a:p>
+            <a:pPr algn="l"/>
+            <a:r>
+              <a:rPr sz="850" b="0" i="0">
+                <a:solidFill>
+                  <a:srgbClr val="9AA3B8"/>
+                </a:solidFill>
+              </a:rPr>
+              <a:t>Should-cost models give buyers a defensible floor price for every part. Supplier margins become visible and challengeable with engineering data, not opinion.</a:t>
+            </a:r>
+          </a:p>
+        </p:txBody>
+      </p:sp>
+      <p:sp>
+        <p:nvSpPr>
+          <p:cNvPr id="38" name="Rectangle 37"/>
+          <p:cNvSpPr/>
+          <p:nvPr/>
+        </p:nvSpPr>
+        <p:spPr>
+          <a:xfrm>
+            <a:off x="8915400" y="2971800"/>
+            <a:ext cx="2743200" cy="1188720"/>
+          </a:xfrm>
+          <a:prstGeom prst="rect">
+            <a:avLst/>
+          </a:prstGeom>
+          <a:solidFill>
+            <a:srgbClr val="1E2330"/>
+          </a:solidFill>
+          <a:ln w="6350">
+            <a:solidFill>
+              <a:srgbClr val="2A3045"/>
+            </a:solidFill>
+          </a:ln>
+        </p:spPr>
+        <p:style>
+          <a:lnRef idx="1">
+            <a:schemeClr val="accent1"/>
+          </a:lnRef>
+          <a:fillRef idx="3">
+            <a:schemeClr val="accent1"/>
+          </a:fillRef>
+          <a:effectRef idx="2">
+            <a:schemeClr val="accent1"/>
+          </a:effectRef>
+          <a:fontRef idx="minor">
+            <a:schemeClr val="lt1"/>
+          </a:fontRef>
+        </p:style>
+        <p:txBody>
+          <a:bodyPr rtlCol="0" anchor="ctr"/>
+          <a:lstStyle/>
+          <a:p>
+            <a:pPr algn="ctr"/>
+          </a:p>
+        </p:txBody>
+      </p:sp>
+      <p:sp>
+        <p:nvSpPr>
+          <p:cNvPr id="39" name="Rectangle 38"/>
+          <p:cNvSpPr/>
+          <p:nvPr/>
+        </p:nvSpPr>
+        <p:spPr>
+          <a:xfrm>
+            <a:off x="8915400" y="2971800"/>
+            <a:ext cx="54864" cy="1188720"/>
+          </a:xfrm>
+          <a:prstGeom prst="rect">
+            <a:avLst/>
+          </a:prstGeom>
+          <a:solidFill>
+            <a:srgbClr val="7C3AED"/>
+          </a:solidFill>
+          <a:ln>
+            <a:noFill/>
+          </a:ln>
+        </p:spPr>
+        <p:style>
+          <a:lnRef idx="1">
+            <a:schemeClr val="accent1"/>
+          </a:lnRef>
+          <a:fillRef idx="3">
+            <a:schemeClr val="accent1"/>
+          </a:fillRef>
+          <a:effectRef idx="2">
+            <a:schemeClr val="accent1"/>
+          </a:effectRef>
+          <a:fontRef idx="minor">
+            <a:schemeClr val="lt1"/>
+          </a:fontRef>
+        </p:style>
+        <p:txBody>
+          <a:bodyPr rtlCol="0" anchor="ctr"/>
+          <a:lstStyle/>
+          <a:p>
+            <a:pPr algn="ctr"/>
+          </a:p>
+        </p:txBody>
+      </p:sp>
+      <p:sp>
+        <p:nvSpPr>
+          <p:cNvPr id="40" name="TextBox 39"/>
+          <p:cNvSpPr txBox="1"/>
+          <p:nvPr/>
+        </p:nvSpPr>
+        <p:spPr>
+          <a:xfrm>
+            <a:off x="9043416" y="3063240"/>
+            <a:ext cx="2560320" cy="292608"/>
+          </a:xfrm>
+          <a:prstGeom prst="rect">
+            <a:avLst/>
+          </a:prstGeom>
+          <a:noFill/>
+        </p:spPr>
+        <p:txBody>
+          <a:bodyPr wrap="square">
+            <a:spAutoFit/>
+          </a:bodyPr>
+          <a:lstStyle/>
+          <a:p>
+            <a:pPr algn="l"/>
+            <a:r>
+              <a:rPr sz="950" b="1" i="0">
+                <a:solidFill>
+                  <a:srgbClr val="F0F2F8"/>
+                </a:solidFill>
+              </a:rPr>
+              <a:t>📐 DFM at Concept Stage</a:t>
+            </a:r>
+          </a:p>
+        </p:txBody>
+      </p:sp>
+      <p:sp>
+        <p:nvSpPr>
+          <p:cNvPr id="41" name="TextBox 40"/>
+          <p:cNvSpPr txBox="1"/>
+          <p:nvPr/>
+        </p:nvSpPr>
+        <p:spPr>
+          <a:xfrm>
+            <a:off x="9043416" y="3319272"/>
+            <a:ext cx="2560320" cy="731520"/>
+          </a:xfrm>
+          <a:prstGeom prst="rect">
+            <a:avLst/>
+          </a:prstGeom>
+          <a:noFill/>
+        </p:spPr>
+        <p:txBody>
+          <a:bodyPr wrap="square">
+            <a:spAutoFit/>
+          </a:bodyPr>
+          <a:lstStyle/>
+          <a:p>
+            <a:pPr algn="l"/>
+            <a:r>
+              <a:rPr sz="850" b="0" i="0">
+                <a:solidFill>
+                  <a:srgbClr val="9AA3B8"/>
+                </a:solidFill>
+              </a:rPr>
+              <a:t>80% of cost is locked at design. DFM/DFA analysis at concept prevents expensive late-stage redesigns. Engineering issues caught when change is free.</a:t>
+            </a:r>
+          </a:p>
+        </p:txBody>
+      </p:sp>
+      <p:sp>
+        <p:nvSpPr>
+          <p:cNvPr id="42" name="Rectangle 41"/>
+          <p:cNvSpPr/>
+          <p:nvPr/>
+        </p:nvSpPr>
+        <p:spPr>
+          <a:xfrm>
+            <a:off x="411480" y="4251960"/>
+            <a:ext cx="2743200" cy="1188720"/>
+          </a:xfrm>
+          <a:prstGeom prst="rect">
+            <a:avLst/>
+          </a:prstGeom>
+          <a:solidFill>
+            <a:srgbClr val="1E2330"/>
+          </a:solidFill>
+          <a:ln w="6350">
+            <a:solidFill>
+              <a:srgbClr val="2A3045"/>
+            </a:solidFill>
+          </a:ln>
+        </p:spPr>
+        <p:style>
+          <a:lnRef idx="1">
+            <a:schemeClr val="accent1"/>
+          </a:lnRef>
+          <a:fillRef idx="3">
+            <a:schemeClr val="accent1"/>
+          </a:fillRef>
+          <a:effectRef idx="2">
+            <a:schemeClr val="accent1"/>
+          </a:effectRef>
+          <a:fontRef idx="minor">
+            <a:schemeClr val="lt1"/>
+          </a:fontRef>
+        </p:style>
+        <p:txBody>
+          <a:bodyPr rtlCol="0" anchor="ctr"/>
+          <a:lstStyle/>
+          <a:p>
+            <a:pPr algn="ctr"/>
+          </a:p>
+        </p:txBody>
+      </p:sp>
+      <p:sp>
+        <p:nvSpPr>
+          <p:cNvPr id="43" name="Rectangle 42"/>
+          <p:cNvSpPr/>
+          <p:nvPr/>
+        </p:nvSpPr>
+        <p:spPr>
+          <a:xfrm>
+            <a:off x="411480" y="4251960"/>
+            <a:ext cx="54864" cy="1188720"/>
+          </a:xfrm>
+          <a:prstGeom prst="rect">
+            <a:avLst/>
+          </a:prstGeom>
+          <a:solidFill>
+            <a:srgbClr val="10B981"/>
+          </a:solidFill>
+          <a:ln>
+            <a:noFill/>
+          </a:ln>
+        </p:spPr>
+        <p:style>
+          <a:lnRef idx="1">
+            <a:schemeClr val="accent1"/>
+          </a:lnRef>
+          <a:fillRef idx="3">
+            <a:schemeClr val="accent1"/>
+          </a:fillRef>
+          <a:effectRef idx="2">
+            <a:schemeClr val="accent1"/>
+          </a:effectRef>
+          <a:fontRef idx="minor">
+            <a:schemeClr val="lt1"/>
+          </a:fontRef>
+        </p:style>
+        <p:txBody>
+          <a:bodyPr rtlCol="0" anchor="ctr"/>
+          <a:lstStyle/>
+          <a:p>
+            <a:pPr algn="ctr"/>
+          </a:p>
+        </p:txBody>
+      </p:sp>
+      <p:sp>
+        <p:nvSpPr>
+          <p:cNvPr id="44" name="TextBox 43"/>
+          <p:cNvSpPr txBox="1"/>
+          <p:nvPr/>
+        </p:nvSpPr>
+        <p:spPr>
+          <a:xfrm>
+            <a:off x="539496" y="4343400"/>
+            <a:ext cx="2560320" cy="292608"/>
+          </a:xfrm>
+          <a:prstGeom prst="rect">
+            <a:avLst/>
+          </a:prstGeom>
+          <a:noFill/>
+        </p:spPr>
+        <p:txBody>
+          <a:bodyPr wrap="square">
+            <a:spAutoFit/>
+          </a:bodyPr>
+          <a:lstStyle/>
+          <a:p>
+            <a:pPr algn="l"/>
+            <a:r>
+              <a:rPr sz="950" b="1" i="0">
+                <a:solidFill>
+                  <a:srgbClr val="F0F2F8"/>
+                </a:solidFill>
+              </a:rPr>
+              <a:t>🌍 Regional Arbitrage</a:t>
+            </a:r>
+          </a:p>
+        </p:txBody>
+      </p:sp>
+      <p:sp>
+        <p:nvSpPr>
+          <p:cNvPr id="45" name="TextBox 44"/>
+          <p:cNvSpPr txBox="1"/>
+          <p:nvPr/>
+        </p:nvSpPr>
+        <p:spPr>
+          <a:xfrm>
+            <a:off x="539496" y="4599432"/>
+            <a:ext cx="2560320" cy="731520"/>
+          </a:xfrm>
+          <a:prstGeom prst="rect">
+            <a:avLst/>
+          </a:prstGeom>
+          <a:noFill/>
+        </p:spPr>
+        <p:txBody>
+          <a:bodyPr wrap="square">
+            <a:spAutoFit/>
+          </a:bodyPr>
+          <a:lstStyle/>
+          <a:p>
+            <a:pPr algn="l"/>
+            <a:r>
+              <a:rPr sz="850" b="0" i="0">
+                <a:solidFill>
+                  <a:srgbClr val="9AA3B8"/>
+                </a:solidFill>
+              </a:rPr>
+              <a:t>Instantly compare cost across 20 regions. Identify LCC sourcing opportunities. Quantify make-vs-buy with real data — not assumptions.</a:t>
+            </a:r>
+          </a:p>
+        </p:txBody>
+      </p:sp>
+      <p:sp>
+        <p:nvSpPr>
+          <p:cNvPr id="46" name="Rectangle 45"/>
+          <p:cNvSpPr/>
+          <p:nvPr/>
+        </p:nvSpPr>
+        <p:spPr>
+          <a:xfrm>
+            <a:off x="3246120" y="4251960"/>
+            <a:ext cx="2743200" cy="1188720"/>
+          </a:xfrm>
+          <a:prstGeom prst="rect">
+            <a:avLst/>
+          </a:prstGeom>
+          <a:solidFill>
+            <a:srgbClr val="1E2330"/>
+          </a:solidFill>
+          <a:ln w="6350">
+            <a:solidFill>
+              <a:srgbClr val="2A3045"/>
+            </a:solidFill>
+          </a:ln>
+        </p:spPr>
+        <p:style>
+          <a:lnRef idx="1">
+            <a:schemeClr val="accent1"/>
+          </a:lnRef>
+          <a:fillRef idx="3">
+            <a:schemeClr val="accent1"/>
+          </a:fillRef>
+          <a:effectRef idx="2">
+            <a:schemeClr val="accent1"/>
+          </a:effectRef>
+          <a:fontRef idx="minor">
+            <a:schemeClr val="lt1"/>
+          </a:fontRef>
+        </p:style>
+        <p:txBody>
+          <a:bodyPr rtlCol="0" anchor="ctr"/>
+          <a:lstStyle/>
+          <a:p>
+            <a:pPr algn="ctr"/>
+          </a:p>
+        </p:txBody>
+      </p:sp>
+      <p:sp>
+        <p:nvSpPr>
+          <p:cNvPr id="47" name="Rectangle 46"/>
+          <p:cNvSpPr/>
+          <p:nvPr/>
+        </p:nvSpPr>
+        <p:spPr>
+          <a:xfrm>
+            <a:off x="3246120" y="4251960"/>
+            <a:ext cx="54864" cy="1188720"/>
+          </a:xfrm>
+          <a:prstGeom prst="rect">
+            <a:avLst/>
+          </a:prstGeom>
+          <a:solidFill>
+            <a:srgbClr val="4F8EF7"/>
+          </a:solidFill>
+          <a:ln>
+            <a:noFill/>
+          </a:ln>
+        </p:spPr>
+        <p:style>
+          <a:lnRef idx="1">
+            <a:schemeClr val="accent1"/>
+          </a:lnRef>
+          <a:fillRef idx="3">
+            <a:schemeClr val="accent1"/>
+          </a:fillRef>
+          <a:effectRef idx="2">
+            <a:schemeClr val="accent1"/>
+          </a:effectRef>
+          <a:fontRef idx="minor">
+            <a:schemeClr val="lt1"/>
+          </a:fontRef>
+        </p:style>
+        <p:txBody>
+          <a:bodyPr rtlCol="0" anchor="ctr"/>
+          <a:lstStyle/>
+          <a:p>
+            <a:pPr algn="ctr"/>
+          </a:p>
+        </p:txBody>
+      </p:sp>
+      <p:sp>
+        <p:nvSpPr>
+          <p:cNvPr id="48" name="TextBox 47"/>
+          <p:cNvSpPr txBox="1"/>
+          <p:nvPr/>
+        </p:nvSpPr>
+        <p:spPr>
+          <a:xfrm>
+            <a:off x="3374136" y="4343400"/>
+            <a:ext cx="2560320" cy="292608"/>
+          </a:xfrm>
+          <a:prstGeom prst="rect">
+            <a:avLst/>
+          </a:prstGeom>
+          <a:noFill/>
+        </p:spPr>
+        <p:txBody>
+          <a:bodyPr wrap="square">
+            <a:spAutoFit/>
+          </a:bodyPr>
+          <a:lstStyle/>
+          <a:p>
+            <a:pPr algn="l"/>
+            <a:r>
+              <a:rPr sz="950" b="1" i="0">
+                <a:solidFill>
+                  <a:srgbClr val="F0F2F8"/>
+                </a:solidFill>
+              </a:rPr>
+              <a:t>📊 Standardised Methodology</a:t>
+            </a:r>
+          </a:p>
+        </p:txBody>
+      </p:sp>
+      <p:sp>
+        <p:nvSpPr>
+          <p:cNvPr id="49" name="TextBox 48"/>
+          <p:cNvSpPr txBox="1"/>
+          <p:nvPr/>
+        </p:nvSpPr>
+        <p:spPr>
+          <a:xfrm>
+            <a:off x="3374136" y="4599432"/>
+            <a:ext cx="2560320" cy="731520"/>
+          </a:xfrm>
+          <a:prstGeom prst="rect">
+            <a:avLst/>
+          </a:prstGeom>
+          <a:noFill/>
+        </p:spPr>
+        <p:txBody>
+          <a:bodyPr wrap="square">
+            <a:spAutoFit/>
+          </a:bodyPr>
+          <a:lstStyle/>
+          <a:p>
+            <a:pPr algn="l"/>
+            <a:r>
+              <a:rPr sz="850" b="0" i="0">
+                <a:solidFill>
+                  <a:srgbClr val="9AA3B8"/>
+                </a:solidFill>
+              </a:rPr>
+              <a:t>One consistent cost model across all teams, programmes, and regions. Full audit trail for every assumption. Leadership gets a single source of truth.</a:t>
+            </a:r>
+          </a:p>
+        </p:txBody>
+      </p:sp>
+      <p:sp>
+        <p:nvSpPr>
+          <p:cNvPr id="50" name="Rectangle 49"/>
+          <p:cNvSpPr/>
+          <p:nvPr/>
+        </p:nvSpPr>
+        <p:spPr>
+          <a:xfrm>
+            <a:off x="6080760" y="4251960"/>
+            <a:ext cx="2743200" cy="1188720"/>
+          </a:xfrm>
+          <a:prstGeom prst="rect">
+            <a:avLst/>
+          </a:prstGeom>
+          <a:solidFill>
+            <a:srgbClr val="1E2330"/>
+          </a:solidFill>
+          <a:ln w="6350">
+            <a:solidFill>
+              <a:srgbClr val="2A3045"/>
+            </a:solidFill>
+          </a:ln>
+        </p:spPr>
+        <p:style>
+          <a:lnRef idx="1">
+            <a:schemeClr val="accent1"/>
+          </a:lnRef>
+          <a:fillRef idx="3">
+            <a:schemeClr val="accent1"/>
+          </a:fillRef>
+          <a:effectRef idx="2">
+            <a:schemeClr val="accent1"/>
+          </a:effectRef>
+          <a:fontRef idx="minor">
+            <a:schemeClr val="lt1"/>
+          </a:fontRef>
+        </p:style>
+        <p:txBody>
+          <a:bodyPr rtlCol="0" anchor="ctr"/>
+          <a:lstStyle/>
+          <a:p>
+            <a:pPr algn="ctr"/>
+          </a:p>
+        </p:txBody>
+      </p:sp>
+      <p:sp>
+        <p:nvSpPr>
+          <p:cNvPr id="51" name="Rectangle 50"/>
+          <p:cNvSpPr/>
+          <p:nvPr/>
+        </p:nvSpPr>
+        <p:spPr>
+          <a:xfrm>
+            <a:off x="6080760" y="4251960"/>
+            <a:ext cx="54864" cy="1188720"/>
+          </a:xfrm>
+          <a:prstGeom prst="rect">
+            <a:avLst/>
+          </a:prstGeom>
+          <a:solidFill>
+            <a:srgbClr val="F59E0B"/>
+          </a:solidFill>
+          <a:ln>
+            <a:noFill/>
+          </a:ln>
+        </p:spPr>
+        <p:style>
+          <a:lnRef idx="1">
+            <a:schemeClr val="accent1"/>
+          </a:lnRef>
+          <a:fillRef idx="3">
+            <a:schemeClr val="accent1"/>
+          </a:fillRef>
+          <a:effectRef idx="2">
+            <a:schemeClr val="accent1"/>
+          </a:effectRef>
+          <a:fontRef idx="minor">
+            <a:schemeClr val="lt1"/>
+          </a:fontRef>
+        </p:style>
+        <p:txBody>
+          <a:bodyPr rtlCol="0" anchor="ctr"/>
+          <a:lstStyle/>
+          <a:p>
+            <a:pPr algn="ctr"/>
+          </a:p>
+        </p:txBody>
+      </p:sp>
+      <p:sp>
+        <p:nvSpPr>
+          <p:cNvPr id="52" name="TextBox 51"/>
+          <p:cNvSpPr txBox="1"/>
+          <p:nvPr/>
+        </p:nvSpPr>
+        <p:spPr>
+          <a:xfrm>
+            <a:off x="6208776" y="4343400"/>
+            <a:ext cx="2560320" cy="292608"/>
+          </a:xfrm>
+          <a:prstGeom prst="rect">
+            <a:avLst/>
+          </a:prstGeom>
+          <a:noFill/>
+        </p:spPr>
+        <p:txBody>
+          <a:bodyPr wrap="square">
+            <a:spAutoFit/>
+          </a:bodyPr>
+          <a:lstStyle/>
+          <a:p>
+            <a:pPr algn="l"/>
+            <a:r>
+              <a:rPr sz="950" b="1" i="0">
+                <a:solidFill>
+                  <a:srgbClr val="F0F2F8"/>
+                </a:solidFill>
+              </a:rPr>
+              <a:t>📉 Volume Optimisation</a:t>
+            </a:r>
+          </a:p>
+        </p:txBody>
+      </p:sp>
+      <p:sp>
+        <p:nvSpPr>
+          <p:cNvPr id="53" name="TextBox 52"/>
+          <p:cNvSpPr txBox="1"/>
+          <p:nvPr/>
+        </p:nvSpPr>
+        <p:spPr>
+          <a:xfrm>
+            <a:off x="6208776" y="4599432"/>
+            <a:ext cx="2560320" cy="731520"/>
+          </a:xfrm>
+          <a:prstGeom prst="rect">
+            <a:avLst/>
+          </a:prstGeom>
+          <a:noFill/>
+        </p:spPr>
+        <p:txBody>
+          <a:bodyPr wrap="square">
+            <a:spAutoFit/>
+          </a:bodyPr>
+          <a:lstStyle/>
+          <a:p>
+            <a:pPr algn="l"/>
+            <a:r>
+              <a:rPr sz="850" b="0" i="0">
+                <a:solidFill>
+                  <a:srgbClr val="9AA3B8"/>
+                </a:solidFill>
+              </a:rPr>
+              <a:t>Learning curve modelling shows cost reduction with volume. Identify the volume at which a new process becomes cost-competitive.</a:t>
+            </a:r>
+          </a:p>
+        </p:txBody>
+      </p:sp>
+      <p:sp>
+        <p:nvSpPr>
+          <p:cNvPr id="54" name="Rectangle 53"/>
+          <p:cNvSpPr/>
+          <p:nvPr/>
+        </p:nvSpPr>
+        <p:spPr>
+          <a:xfrm>
+            <a:off x="8915400" y="4251960"/>
+            <a:ext cx="2743200" cy="1188720"/>
+          </a:xfrm>
+          <a:prstGeom prst="rect">
+            <a:avLst/>
+          </a:prstGeom>
+          <a:solidFill>
+            <a:srgbClr val="1E2330"/>
+          </a:solidFill>
+          <a:ln w="6350">
+            <a:solidFill>
+              <a:srgbClr val="2A3045"/>
+            </a:solidFill>
+          </a:ln>
+        </p:spPr>
+        <p:style>
+          <a:lnRef idx="1">
+            <a:schemeClr val="accent1"/>
+          </a:lnRef>
+          <a:fillRef idx="3">
+            <a:schemeClr val="accent1"/>
+          </a:fillRef>
+          <a:effectRef idx="2">
+            <a:schemeClr val="accent1"/>
+          </a:effectRef>
+          <a:fontRef idx="minor">
+            <a:schemeClr val="lt1"/>
+          </a:fontRef>
+        </p:style>
+        <p:txBody>
+          <a:bodyPr rtlCol="0" anchor="ctr"/>
+          <a:lstStyle/>
+          <a:p>
+            <a:pPr algn="ctr"/>
+          </a:p>
+        </p:txBody>
+      </p:sp>
+      <p:sp>
+        <p:nvSpPr>
+          <p:cNvPr id="55" name="Rectangle 54"/>
+          <p:cNvSpPr/>
+          <p:nvPr/>
+        </p:nvSpPr>
+        <p:spPr>
+          <a:xfrm>
+            <a:off x="8915400" y="4251960"/>
+            <a:ext cx="54864" cy="1188720"/>
+          </a:xfrm>
+          <a:prstGeom prst="rect">
+            <a:avLst/>
+          </a:prstGeom>
+          <a:solidFill>
+            <a:srgbClr val="7C3AED"/>
+          </a:solidFill>
+          <a:ln>
+            <a:noFill/>
+          </a:ln>
+        </p:spPr>
+        <p:style>
+          <a:lnRef idx="1">
+            <a:schemeClr val="accent1"/>
+          </a:lnRef>
+          <a:fillRef idx="3">
+            <a:schemeClr val="accent1"/>
+          </a:fillRef>
+          <a:effectRef idx="2">
+            <a:schemeClr val="accent1"/>
+          </a:effectRef>
+          <a:fontRef idx="minor">
+            <a:schemeClr val="lt1"/>
+          </a:fontRef>
+        </p:style>
+        <p:txBody>
+          <a:bodyPr rtlCol="0" anchor="ctr"/>
+          <a:lstStyle/>
+          <a:p>
+            <a:pPr algn="ctr"/>
+          </a:p>
+        </p:txBody>
+      </p:sp>
+      <p:sp>
+        <p:nvSpPr>
+          <p:cNvPr id="56" name="TextBox 55"/>
+          <p:cNvSpPr txBox="1"/>
+          <p:nvPr/>
+        </p:nvSpPr>
+        <p:spPr>
+          <a:xfrm>
+            <a:off x="9043416" y="4343400"/>
+            <a:ext cx="2560320" cy="292608"/>
+          </a:xfrm>
+          <a:prstGeom prst="rect">
+            <a:avLst/>
+          </a:prstGeom>
+          <a:noFill/>
+        </p:spPr>
+        <p:txBody>
+          <a:bodyPr wrap="square">
+            <a:spAutoFit/>
+          </a:bodyPr>
+          <a:lstStyle/>
+          <a:p>
+            <a:pPr algn="l"/>
+            <a:r>
+              <a:rPr sz="950" b="1" i="0">
+                <a:solidFill>
+                  <a:srgbClr val="F0F2F8"/>
+                </a:solidFill>
+              </a:rPr>
+              <a:t>☁️ Team Collaboration</a:t>
+            </a:r>
+          </a:p>
+        </p:txBody>
+      </p:sp>
+      <p:sp>
+        <p:nvSpPr>
+          <p:cNvPr id="57" name="TextBox 56"/>
+          <p:cNvSpPr txBox="1"/>
+          <p:nvPr/>
+        </p:nvSpPr>
+        <p:spPr>
+          <a:xfrm>
+            <a:off x="9043416" y="4599432"/>
+            <a:ext cx="2560320" cy="731520"/>
+          </a:xfrm>
+          <a:prstGeom prst="rect">
+            <a:avLst/>
+          </a:prstGeom>
+          <a:noFill/>
+        </p:spPr>
+        <p:txBody>
+          <a:bodyPr wrap="square">
+            <a:spAutoFit/>
+          </a:bodyPr>
+          <a:lstStyle/>
+          <a:p>
+            <a:pPr algn="l"/>
+            <a:r>
+              <a:rPr sz="850" b="0" i="0">
+                <a:solidFill>
+                  <a:srgbClr val="9AA3B8"/>
+                </a:solidFill>
+              </a:rPr>
+              <a:t>Cloud sync means all engineers share the same cost baseline. No more conflicting spreadsheets. Cost knowledge is captured, not locked in individuals.</a:t>
+            </a:r>
+          </a:p>
+        </p:txBody>
+      </p:sp>
+    </p:spTree>
+  </p:cSld>
+  <p:clrMapOvr>
+    <a:masterClrMapping/>
+  </p:clrMapOvr>
+</p:sld>
+</file>
+
+<file path=ppt/slides/slide17.xml><?xml version="1.0" encoding="utf-8"?>
+<p:sld xmlns:a="http://schemas.openxmlformats.org/drawingml/2006/main" xmlns:p="http://schemas.openxmlformats.org/presentationml/2006/main" xmlns:r="http://schemas.openxmlformats.org/officeDocument/2006/relationships">
+  <p:cSld>
+    <p:bg>
+      <p:bgPr>
+        <a:solidFill>
+          <a:srgbClr val="0D0F14"/>
+        </a:solidFill>
+        <a:effectLst/>
+      </p:bgPr>
+    </p:bg>
+    <p:spTree>
+      <p:nvGrpSpPr>
+        <p:cNvPr id="1" name=""/>
+        <p:cNvGrpSpPr/>
+        <p:nvPr/>
+      </p:nvGrpSpPr>
+      <p:grpSpPr/>
+      <p:sp>
+        <p:nvSpPr>
+          <p:cNvPr id="2" name="Rectangle 1"/>
+          <p:cNvSpPr/>
+          <p:nvPr/>
+        </p:nvSpPr>
+        <p:spPr>
+          <a:xfrm>
+            <a:off x="0" y="0"/>
+            <a:ext cx="12191695" cy="54864"/>
+          </a:xfrm>
+          <a:prstGeom prst="rect">
+            <a:avLst/>
+          </a:prstGeom>
+          <a:solidFill>
+            <a:srgbClr val="4F8EF7"/>
+          </a:solidFill>
+          <a:ln>
+            <a:noFill/>
+          </a:ln>
+        </p:spPr>
+        <p:style>
+          <a:lnRef idx="1">
+            <a:schemeClr val="accent1"/>
+          </a:lnRef>
+          <a:fillRef idx="3">
+            <a:schemeClr val="accent1"/>
+          </a:fillRef>
+          <a:effectRef idx="2">
+            <a:schemeClr val="accent1"/>
+          </a:effectRef>
+          <a:fontRef idx="minor">
+            <a:schemeClr val="lt1"/>
+          </a:fontRef>
+        </p:style>
+        <p:txBody>
+          <a:bodyPr rtlCol="0" anchor="ctr"/>
+          <a:lstStyle/>
+          <a:p>
+            <a:pPr algn="ctr"/>
+          </a:p>
+        </p:txBody>
+      </p:sp>
+      <p:sp>
+        <p:nvSpPr>
+          <p:cNvPr id="3" name="TextBox 2"/>
+          <p:cNvSpPr txBox="1"/>
+          <p:nvPr/>
+        </p:nvSpPr>
+        <p:spPr>
+          <a:xfrm>
+            <a:off x="320040" y="109728"/>
+            <a:ext cx="1828800" cy="320040"/>
+          </a:xfrm>
+          <a:prstGeom prst="rect">
+            <a:avLst/>
+          </a:prstGeom>
+          <a:noFill/>
+        </p:spPr>
+        <p:txBody>
+          <a:bodyPr wrap="square">
+            <a:spAutoFit/>
+          </a:bodyPr>
+          <a:lstStyle/>
+          <a:p>
+            <a:pPr algn="l"/>
+            <a:r>
+              <a:rPr sz="700" b="1" i="0">
+                <a:solidFill>
+                  <a:srgbClr val="5A6380"/>
+                </a:solidFill>
+              </a:rPr>
+              <a:t>SLIDE 17 / 17</a:t>
             </a:r>
           </a:p>
         </p:txBody>
@@ -18804,7 +20873,7 @@
                   <a:srgbClr val="5A6380"/>
                 </a:solidFill>
               </a:rPr>
-              <a:t>SLIDE 02 / 16</a:t>
+              <a:t>SLIDE 02 / 17</a:t>
             </a:r>
           </a:p>
         </p:txBody>
@@ -20212,7 +22281,7 @@
                   <a:srgbClr val="5A6380"/>
                 </a:solidFill>
               </a:rPr>
-              <a:t>SLIDE 03 / 16</a:t>
+              <a:t>SLIDE 03 / 17</a:t>
             </a:r>
           </a:p>
         </p:txBody>
@@ -21975,7 +24044,7 @@
                   <a:srgbClr val="5A6380"/>
                 </a:solidFill>
               </a:rPr>
-              <a:t>SLIDE 04 / 16</a:t>
+              <a:t>SLIDE 04 / 17</a:t>
             </a:r>
           </a:p>
         </p:txBody>
@@ -23609,7 +25678,7 @@
                   <a:srgbClr val="5A6380"/>
                 </a:solidFill>
               </a:rPr>
-              <a:t>SLIDE 05 / 16</a:t>
+              <a:t>SLIDE 05 / 17</a:t>
             </a:r>
           </a:p>
         </p:txBody>
@@ -26243,7 +28312,7 @@
                   <a:srgbClr val="5A6380"/>
                 </a:solidFill>
               </a:rPr>
-              <a:t>SLIDE 06 / 16</a:t>
+              <a:t>SLIDE 06 / 17</a:t>
             </a:r>
           </a:p>
         </p:txBody>
@@ -29272,7 +31341,7 @@
                   <a:srgbClr val="5A6380"/>
                 </a:solidFill>
               </a:rPr>
-              <a:t>SLIDE 07 / 16</a:t>
+              <a:t>SLIDE 07 / 17</a:t>
             </a:r>
           </a:p>
         </p:txBody>
@@ -32718,7 +34787,7 @@
                   <a:srgbClr val="5A6380"/>
                 </a:solidFill>
               </a:rPr>
-              <a:t>SLIDE 08 / 16</a:t>
+              <a:t>SLIDE 08 / 17</a:t>
             </a:r>
           </a:p>
         </p:txBody>
@@ -34637,7 +36706,7 @@
                   <a:srgbClr val="5A6380"/>
                 </a:solidFill>
               </a:rPr>
-              <a:t>SLIDE 09 / 16</a:t>
+              <a:t>SLIDE 09 / 17</a:t>
             </a:r>
           </a:p>
         </p:txBody>

--- a/CostVision-Executive-Presentation.pptx
+++ b/CostVision-Executive-Presentation.pptx
@@ -730,7 +730,7 @@
           <a:lstStyle/>
           <a:p>
             <a:r>
-              <a:t>One thing I was careful about here: the DFM and DFA layer runs after the should-cost, and it never touches the calculation. It reads the finished cost structure and asks manufacturing questions of it. That separation is deliberate — I didn't want a 'design advice' feature quietly nudging the price. What it gives you is a manufacturability score and an assembly-efficiency score out of ten, and then something more useful than a grade: a ranked list of levers with rough savings against each. Automate a high-labour operation, five to twenty percent. Move to a near-net shape, five to fifteen percent on material. Increase volume to dilute the tooling NRE — quick win, low risk. And if you want more than the rule-based read, there's a deep-analysis button that has the AI write the root-cause commentary and a negotiation strategy. So the cost number comes with a 'here's how to make it cheaper' attached — at the concept stage, where it's still free to act on.</a:t>
+              <a:t>One thing I was careful about here: the DFM and DFA layer runs after the should-cost, and it never touches the calculation. It reads the finished cost structure and asks manufacturing questions of it. That separation is deliberate — I didn't want a 'design advice' feature quietly nudging the price. What it gives you is a manufacturability score and an assembly-efficiency score out of ten, and then something more useful than a grade: a ranked list of levers with rough savings against each. Automate a high-labour operation, five to twenty percent. Move to a near-net shape, five to fifteen percent on material. Increase volume to dilute the tooling NRE — quick win, low risk. And if you want more than the rule-based read, there's a deep-analysis button that has the AI write the root-cause commentary and a negotiation strategy. So the cost number comes with a 'here's how to make it cheaper' attached — at the concept stage, where it's still free to act on. One important update since the last time I showed you this. Your engineering team told me, quite bluntly, that these findings were too generic — that reading the cost and guessing backwards isn't good enough. They were right. So there's now a second layer underneath this one that opens the 3D model itself and measures every face on the part. Nineteen rules, and every one of them cites a published standard rather than my opinion. It doesn't say 'tooling looks high' — it says which specific faces on the part cannot come out of the die, and you can click one and see it highlighted on the model. That is the difference between a hint and an argument you can take to a supplier.</a:t>
             </a:r>
           </a:p>
         </p:txBody>
@@ -1780,7 +1780,7 @@
           <a:lstStyle/>
           <a:p>
             <a:r>
-              <a:t>Breadth is the point of this slide. Twenty-one commodities, from CNC machining and casting and forging, through the whole plastics family — injection, blow, extrusion, thermoforming, rotomoulding — into rubber and composites, then electronics: PCB fabrication, assembly, wiring harness, and body-in-white. Why does that matter? Because a real product isn't one process. A door module is stampings plus a harness plus a PCBA plus paint. If your costing tool only does machining, you're stuck the moment the part is plastic. CostVision costs all of them with the same rigour and the same eight-bucket structure, which is exactly what lets the assembly roll-up add them together into one number. And the last tile is the AI agent — the natural-language front door into any of the other twenty.</a:t>
+              <a:t>Breadth is the point of this slide. Twenty-two commodities, from CNC machining and casting and forging, through the whole plastics family — injection, blow, extrusion, thermoforming, rotomoulding — into rubber and composites, then electronics: PCB fabrication, assembly, wiring harness, and body-in-white. Why does that matter? Because a real product isn't one process. A door module is stampings plus a harness plus a PCBA plus paint. If your costing tool only does machining, you're stuck the moment the part is plastic. CostVision costs all of them with the same rigour and the same eight-bucket structure, which is exactly what lets the assembly roll-up add them together into one number. And the last tile is the AI agent — the natural-language front door into any of the other twenty.</a:t>
             </a:r>
           </a:p>
         </p:txBody>
@@ -8478,7 +8478,7 @@
                   <a:srgbClr val="9AA3B8"/>
                 </a:solidFill>
               </a:rPr>
-              <a:t>Build multi-level assemblies from any combination of 21 commodities:
+              <a:t>Build multi-level assemblies from any combination of 22 commodities:
 • Add components one-by-one with commodity type, weight, volume
 • Each component costed using its own should-cost model
 • Roll up to a total assembly cost with full per-component breakdown
@@ -16204,7 +16204,7 @@
                   <a:srgbClr val="9AA3B8"/>
                 </a:solidFill>
               </a:rPr>
-              <a:t>1,005 automated tests across 86 suites — a logic regression fails the build, not the demo</a:t>
+              <a:t>1,777 automated tests across 136 suites — a logic regression fails the build, not the demo</a:t>
             </a:r>
           </a:p>
         </p:txBody>
@@ -22348,7 +22348,7 @@
                   <a:srgbClr val="9AA3B8"/>
                 </a:solidFill>
               </a:rPr>
-              <a:t>21 commodity should-cost models — fully parametric, engineering-grade</a:t>
+              <a:t>22 commodity should-cost models — fully parametric, engineering-grade</a:t>
             </a:r>
           </a:p>
         </p:txBody>
@@ -23272,7 +23272,7 @@
                   <a:srgbClr val="9AA3B8"/>
                 </a:solidFill>
               </a:rPr>
-              <a:t>1,005 automated tests · CAD engine ships in a CI-verified container</a:t>
+              <a:t>1,777 automated tests · CAD engine ships in a CI-verified container</a:t>
             </a:r>
           </a:p>
         </p:txBody>
@@ -37166,7 +37166,7 @@
                   <a:srgbClr val="F0F2F8"/>
                 </a:solidFill>
               </a:rPr>
-              <a:t>21 Manufacturing Commodities — One Platform</a:t>
+              <a:t>22 Manufacturing Commodities — One Platform</a:t>
             </a:r>
           </a:p>
         </p:txBody>
@@ -37291,7 +37291,7 @@
         <p:spPr>
           <a:xfrm>
             <a:off x="411480" y="1810512"/>
-            <a:ext cx="1578385" cy="1207008"/>
+            <a:ext cx="1375371" cy="1207008"/>
           </a:xfrm>
           <a:prstGeom prst="rect">
             <a:avLst/>
@@ -37336,7 +37336,7 @@
         <p:spPr>
           <a:xfrm>
             <a:off x="411480" y="1865376"/>
-            <a:ext cx="1578385" cy="292608"/>
+            <a:ext cx="1375371" cy="292608"/>
           </a:xfrm>
           <a:prstGeom prst="rect">
             <a:avLst/>
@@ -37370,22 +37370,22 @@
         <p:spPr>
           <a:xfrm>
             <a:off x="411480" y="2157984"/>
-            <a:ext cx="1578385" cy="201168"/>
-          </a:xfrm>
-          <a:prstGeom prst="rect">
-            <a:avLst/>
-          </a:prstGeom>
-          <a:noFill/>
-        </p:spPr>
-        <p:txBody>
-          <a:bodyPr wrap="square">
-            <a:spAutoFit/>
-          </a:bodyPr>
-          <a:lstStyle/>
-          <a:p>
-            <a:pPr algn="ctr"/>
-            <a:r>
-              <a:rPr sz="750" b="1" i="0">
+            <a:ext cx="1375371" cy="201168"/>
+          </a:xfrm>
+          <a:prstGeom prst="rect">
+            <a:avLst/>
+          </a:prstGeom>
+          <a:noFill/>
+        </p:spPr>
+        <p:txBody>
+          <a:bodyPr wrap="square">
+            <a:spAutoFit/>
+          </a:bodyPr>
+          <a:lstStyle/>
+          <a:p>
+            <a:pPr algn="ctr"/>
+            <a:r>
+              <a:rPr sz="700" b="1" i="0">
                 <a:solidFill>
                   <a:srgbClr val="F0F2F8"/>
                 </a:solidFill>
@@ -37404,22 +37404,22 @@
         <p:spPr>
           <a:xfrm>
             <a:off x="411480" y="2340864"/>
-            <a:ext cx="1578385" cy="201168"/>
-          </a:xfrm>
-          <a:prstGeom prst="rect">
-            <a:avLst/>
-          </a:prstGeom>
-          <a:noFill/>
-        </p:spPr>
-        <p:txBody>
-          <a:bodyPr wrap="square">
-            <a:spAutoFit/>
-          </a:bodyPr>
-          <a:lstStyle/>
-          <a:p>
-            <a:pPr algn="ctr"/>
-            <a:r>
-              <a:rPr sz="650" b="0" i="0">
+            <a:ext cx="1375371" cy="310896"/>
+          </a:xfrm>
+          <a:prstGeom prst="rect">
+            <a:avLst/>
+          </a:prstGeom>
+          <a:noFill/>
+        </p:spPr>
+        <p:txBody>
+          <a:bodyPr wrap="square">
+            <a:spAutoFit/>
+          </a:bodyPr>
+          <a:lstStyle/>
+          <a:p>
+            <a:pPr algn="ctr"/>
+            <a:r>
+              <a:rPr sz="600" b="0" i="0">
                 <a:solidFill>
                   <a:srgbClr val="5A6380"/>
                 </a:solidFill>
@@ -37437,8 +37437,8 @@
         </p:nvSpPr>
         <p:spPr>
           <a:xfrm>
-            <a:off x="2040157" y="1810512"/>
-            <a:ext cx="1578385" cy="1207008"/>
+            <a:off x="1837143" y="1810512"/>
+            <a:ext cx="1375371" cy="1207008"/>
           </a:xfrm>
           <a:prstGeom prst="rect">
             <a:avLst/>
@@ -37482,8 +37482,8 @@
         </p:nvSpPr>
         <p:spPr>
           <a:xfrm>
-            <a:off x="2040157" y="1865376"/>
-            <a:ext cx="1578385" cy="292608"/>
+            <a:off x="1837143" y="1865376"/>
+            <a:ext cx="1375371" cy="292608"/>
           </a:xfrm>
           <a:prstGeom prst="rect">
             <a:avLst/>
@@ -37516,23 +37516,23 @@
         </p:nvSpPr>
         <p:spPr>
           <a:xfrm>
-            <a:off x="2040157" y="2157984"/>
-            <a:ext cx="1578385" cy="201168"/>
-          </a:xfrm>
-          <a:prstGeom prst="rect">
-            <a:avLst/>
-          </a:prstGeom>
-          <a:noFill/>
-        </p:spPr>
-        <p:txBody>
-          <a:bodyPr wrap="square">
-            <a:spAutoFit/>
-          </a:bodyPr>
-          <a:lstStyle/>
-          <a:p>
-            <a:pPr algn="ctr"/>
-            <a:r>
-              <a:rPr sz="750" b="1" i="0">
+            <a:off x="1837143" y="2157984"/>
+            <a:ext cx="1375371" cy="201168"/>
+          </a:xfrm>
+          <a:prstGeom prst="rect">
+            <a:avLst/>
+          </a:prstGeom>
+          <a:noFill/>
+        </p:spPr>
+        <p:txBody>
+          <a:bodyPr wrap="square">
+            <a:spAutoFit/>
+          </a:bodyPr>
+          <a:lstStyle/>
+          <a:p>
+            <a:pPr algn="ctr"/>
+            <a:r>
+              <a:rPr sz="700" b="1" i="0">
                 <a:solidFill>
                   <a:srgbClr val="F0F2F8"/>
                 </a:solidFill>
@@ -37550,23 +37550,23 @@
         </p:nvSpPr>
         <p:spPr>
           <a:xfrm>
-            <a:off x="2040157" y="2340864"/>
-            <a:ext cx="1578385" cy="201168"/>
-          </a:xfrm>
-          <a:prstGeom prst="rect">
-            <a:avLst/>
-          </a:prstGeom>
-          <a:noFill/>
-        </p:spPr>
-        <p:txBody>
-          <a:bodyPr wrap="square">
-            <a:spAutoFit/>
-          </a:bodyPr>
-          <a:lstStyle/>
-          <a:p>
-            <a:pPr algn="ctr"/>
-            <a:r>
-              <a:rPr sz="650" b="0" i="0">
+            <a:off x="1837143" y="2340864"/>
+            <a:ext cx="1375371" cy="310896"/>
+          </a:xfrm>
+          <a:prstGeom prst="rect">
+            <a:avLst/>
+          </a:prstGeom>
+          <a:noFill/>
+        </p:spPr>
+        <p:txBody>
+          <a:bodyPr wrap="square">
+            <a:spAutoFit/>
+          </a:bodyPr>
+          <a:lstStyle/>
+          <a:p>
+            <a:pPr algn="ctr"/>
+            <a:r>
+              <a:rPr sz="600" b="0" i="0">
                 <a:solidFill>
                   <a:srgbClr val="5A6380"/>
                 </a:solidFill>
@@ -37584,8 +37584,8 @@
         </p:nvSpPr>
         <p:spPr>
           <a:xfrm>
-            <a:off x="3668834" y="1810512"/>
-            <a:ext cx="1578385" cy="1207008"/>
+            <a:off x="3262807" y="1810512"/>
+            <a:ext cx="1375371" cy="1207008"/>
           </a:xfrm>
           <a:prstGeom prst="rect">
             <a:avLst/>
@@ -37629,8 +37629,8 @@
         </p:nvSpPr>
         <p:spPr>
           <a:xfrm>
-            <a:off x="3668834" y="1865376"/>
-            <a:ext cx="1578385" cy="292608"/>
+            <a:off x="3262807" y="1865376"/>
+            <a:ext cx="1375371" cy="292608"/>
           </a:xfrm>
           <a:prstGeom prst="rect">
             <a:avLst/>
@@ -37663,23 +37663,23 @@
         </p:nvSpPr>
         <p:spPr>
           <a:xfrm>
-            <a:off x="3668834" y="2157984"/>
-            <a:ext cx="1578385" cy="201168"/>
-          </a:xfrm>
-          <a:prstGeom prst="rect">
-            <a:avLst/>
-          </a:prstGeom>
-          <a:noFill/>
-        </p:spPr>
-        <p:txBody>
-          <a:bodyPr wrap="square">
-            <a:spAutoFit/>
-          </a:bodyPr>
-          <a:lstStyle/>
-          <a:p>
-            <a:pPr algn="ctr"/>
-            <a:r>
-              <a:rPr sz="750" b="1" i="0">
+            <a:off x="3262807" y="2157984"/>
+            <a:ext cx="1375371" cy="201168"/>
+          </a:xfrm>
+          <a:prstGeom prst="rect">
+            <a:avLst/>
+          </a:prstGeom>
+          <a:noFill/>
+        </p:spPr>
+        <p:txBody>
+          <a:bodyPr wrap="square">
+            <a:spAutoFit/>
+          </a:bodyPr>
+          <a:lstStyle/>
+          <a:p>
+            <a:pPr algn="ctr"/>
+            <a:r>
+              <a:rPr sz="700" b="1" i="0">
                 <a:solidFill>
                   <a:srgbClr val="F0F2F8"/>
                 </a:solidFill>
@@ -37697,23 +37697,23 @@
         </p:nvSpPr>
         <p:spPr>
           <a:xfrm>
-            <a:off x="3668834" y="2340864"/>
-            <a:ext cx="1578385" cy="201168"/>
-          </a:xfrm>
-          <a:prstGeom prst="rect">
-            <a:avLst/>
-          </a:prstGeom>
-          <a:noFill/>
-        </p:spPr>
-        <p:txBody>
-          <a:bodyPr wrap="square">
-            <a:spAutoFit/>
-          </a:bodyPr>
-          <a:lstStyle/>
-          <a:p>
-            <a:pPr algn="ctr"/>
-            <a:r>
-              <a:rPr sz="650" b="0" i="0">
+            <a:off x="3262807" y="2340864"/>
+            <a:ext cx="1375371" cy="310896"/>
+          </a:xfrm>
+          <a:prstGeom prst="rect">
+            <a:avLst/>
+          </a:prstGeom>
+          <a:noFill/>
+        </p:spPr>
+        <p:txBody>
+          <a:bodyPr wrap="square">
+            <a:spAutoFit/>
+          </a:bodyPr>
+          <a:lstStyle/>
+          <a:p>
+            <a:pPr algn="ctr"/>
+            <a:r>
+              <a:rPr sz="600" b="0" i="0">
                 <a:solidFill>
                   <a:srgbClr val="5A6380"/>
                 </a:solidFill>
@@ -37731,8 +37731,8 @@
         </p:nvSpPr>
         <p:spPr>
           <a:xfrm>
-            <a:off x="5297511" y="1810512"/>
-            <a:ext cx="1578385" cy="1207008"/>
+            <a:off x="4688471" y="1810512"/>
+            <a:ext cx="1375371" cy="1207008"/>
           </a:xfrm>
           <a:prstGeom prst="rect">
             <a:avLst/>
@@ -37776,8 +37776,8 @@
         </p:nvSpPr>
         <p:spPr>
           <a:xfrm>
-            <a:off x="5297511" y="1865376"/>
-            <a:ext cx="1578385" cy="292608"/>
+            <a:off x="4688471" y="1865376"/>
+            <a:ext cx="1375371" cy="292608"/>
           </a:xfrm>
           <a:prstGeom prst="rect">
             <a:avLst/>
@@ -37810,23 +37810,23 @@
         </p:nvSpPr>
         <p:spPr>
           <a:xfrm>
-            <a:off x="5297511" y="2157984"/>
-            <a:ext cx="1578385" cy="201168"/>
-          </a:xfrm>
-          <a:prstGeom prst="rect">
-            <a:avLst/>
-          </a:prstGeom>
-          <a:noFill/>
-        </p:spPr>
-        <p:txBody>
-          <a:bodyPr wrap="square">
-            <a:spAutoFit/>
-          </a:bodyPr>
-          <a:lstStyle/>
-          <a:p>
-            <a:pPr algn="ctr"/>
-            <a:r>
-              <a:rPr sz="750" b="1" i="0">
+            <a:off x="4688471" y="2157984"/>
+            <a:ext cx="1375371" cy="201168"/>
+          </a:xfrm>
+          <a:prstGeom prst="rect">
+            <a:avLst/>
+          </a:prstGeom>
+          <a:noFill/>
+        </p:spPr>
+        <p:txBody>
+          <a:bodyPr wrap="square">
+            <a:spAutoFit/>
+          </a:bodyPr>
+          <a:lstStyle/>
+          <a:p>
+            <a:pPr algn="ctr"/>
+            <a:r>
+              <a:rPr sz="700" b="1" i="0">
                 <a:solidFill>
                   <a:srgbClr val="F0F2F8"/>
                 </a:solidFill>
@@ -37844,23 +37844,23 @@
         </p:nvSpPr>
         <p:spPr>
           <a:xfrm>
-            <a:off x="5297511" y="2340864"/>
-            <a:ext cx="1578385" cy="201168"/>
-          </a:xfrm>
-          <a:prstGeom prst="rect">
-            <a:avLst/>
-          </a:prstGeom>
-          <a:noFill/>
-        </p:spPr>
-        <p:txBody>
-          <a:bodyPr wrap="square">
-            <a:spAutoFit/>
-          </a:bodyPr>
-          <a:lstStyle/>
-          <a:p>
-            <a:pPr algn="ctr"/>
-            <a:r>
-              <a:rPr sz="650" b="0" i="0">
+            <a:off x="4688471" y="2340864"/>
+            <a:ext cx="1375371" cy="310896"/>
+          </a:xfrm>
+          <a:prstGeom prst="rect">
+            <a:avLst/>
+          </a:prstGeom>
+          <a:noFill/>
+        </p:spPr>
+        <p:txBody>
+          <a:bodyPr wrap="square">
+            <a:spAutoFit/>
+          </a:bodyPr>
+          <a:lstStyle/>
+          <a:p>
+            <a:pPr algn="ctr"/>
+            <a:r>
+              <a:rPr sz="600" b="0" i="0">
                 <a:solidFill>
                   <a:srgbClr val="5A6380"/>
                 </a:solidFill>
@@ -37878,8 +37878,8 @@
         </p:nvSpPr>
         <p:spPr>
           <a:xfrm>
-            <a:off x="6926188" y="1810512"/>
-            <a:ext cx="1578385" cy="1207008"/>
+            <a:off x="6114135" y="1810512"/>
+            <a:ext cx="1375371" cy="1207008"/>
           </a:xfrm>
           <a:prstGeom prst="rect">
             <a:avLst/>
@@ -37923,8 +37923,8 @@
         </p:nvSpPr>
         <p:spPr>
           <a:xfrm>
-            <a:off x="6926188" y="1865376"/>
-            <a:ext cx="1578385" cy="292608"/>
+            <a:off x="6114135" y="1865376"/>
+            <a:ext cx="1375371" cy="292608"/>
           </a:xfrm>
           <a:prstGeom prst="rect">
             <a:avLst/>
@@ -37957,23 +37957,23 @@
         </p:nvSpPr>
         <p:spPr>
           <a:xfrm>
-            <a:off x="6926188" y="2157984"/>
-            <a:ext cx="1578385" cy="201168"/>
-          </a:xfrm>
-          <a:prstGeom prst="rect">
-            <a:avLst/>
-          </a:prstGeom>
-          <a:noFill/>
-        </p:spPr>
-        <p:txBody>
-          <a:bodyPr wrap="square">
-            <a:spAutoFit/>
-          </a:bodyPr>
-          <a:lstStyle/>
-          <a:p>
-            <a:pPr algn="ctr"/>
-            <a:r>
-              <a:rPr sz="750" b="1" i="0">
+            <a:off x="6114135" y="2157984"/>
+            <a:ext cx="1375371" cy="201168"/>
+          </a:xfrm>
+          <a:prstGeom prst="rect">
+            <a:avLst/>
+          </a:prstGeom>
+          <a:noFill/>
+        </p:spPr>
+        <p:txBody>
+          <a:bodyPr wrap="square">
+            <a:spAutoFit/>
+          </a:bodyPr>
+          <a:lstStyle/>
+          <a:p>
+            <a:pPr algn="ctr"/>
+            <a:r>
+              <a:rPr sz="700" b="1" i="0">
                 <a:solidFill>
                   <a:srgbClr val="F0F2F8"/>
                 </a:solidFill>
@@ -37991,23 +37991,23 @@
         </p:nvSpPr>
         <p:spPr>
           <a:xfrm>
-            <a:off x="6926188" y="2340864"/>
-            <a:ext cx="1578385" cy="201168"/>
-          </a:xfrm>
-          <a:prstGeom prst="rect">
-            <a:avLst/>
-          </a:prstGeom>
-          <a:noFill/>
-        </p:spPr>
-        <p:txBody>
-          <a:bodyPr wrap="square">
-            <a:spAutoFit/>
-          </a:bodyPr>
-          <a:lstStyle/>
-          <a:p>
-            <a:pPr algn="ctr"/>
-            <a:r>
-              <a:rPr sz="650" b="0" i="0">
+            <a:off x="6114135" y="2340864"/>
+            <a:ext cx="1375371" cy="310896"/>
+          </a:xfrm>
+          <a:prstGeom prst="rect">
+            <a:avLst/>
+          </a:prstGeom>
+          <a:noFill/>
+        </p:spPr>
+        <p:txBody>
+          <a:bodyPr wrap="square">
+            <a:spAutoFit/>
+          </a:bodyPr>
+          <a:lstStyle/>
+          <a:p>
+            <a:pPr algn="ctr"/>
+            <a:r>
+              <a:rPr sz="600" b="0" i="0">
                 <a:solidFill>
                   <a:srgbClr val="5A6380"/>
                 </a:solidFill>
@@ -38025,8 +38025,8 @@
         </p:nvSpPr>
         <p:spPr>
           <a:xfrm>
-            <a:off x="8554865" y="1810512"/>
-            <a:ext cx="1578385" cy="1207008"/>
+            <a:off x="7539799" y="1810512"/>
+            <a:ext cx="1375371" cy="1207008"/>
           </a:xfrm>
           <a:prstGeom prst="rect">
             <a:avLst/>
@@ -38070,8 +38070,8 @@
         </p:nvSpPr>
         <p:spPr>
           <a:xfrm>
-            <a:off x="8554865" y="1865376"/>
-            <a:ext cx="1578385" cy="292608"/>
+            <a:off x="7539799" y="1865376"/>
+            <a:ext cx="1375371" cy="292608"/>
           </a:xfrm>
           <a:prstGeom prst="rect">
             <a:avLst/>
@@ -38104,23 +38104,23 @@
         </p:nvSpPr>
         <p:spPr>
           <a:xfrm>
-            <a:off x="8554865" y="2157984"/>
-            <a:ext cx="1578385" cy="201168"/>
-          </a:xfrm>
-          <a:prstGeom prst="rect">
-            <a:avLst/>
-          </a:prstGeom>
-          <a:noFill/>
-        </p:spPr>
-        <p:txBody>
-          <a:bodyPr wrap="square">
-            <a:spAutoFit/>
-          </a:bodyPr>
-          <a:lstStyle/>
-          <a:p>
-            <a:pPr algn="ctr"/>
-            <a:r>
-              <a:rPr sz="750" b="1" i="0">
+            <a:off x="7539799" y="2157984"/>
+            <a:ext cx="1375371" cy="201168"/>
+          </a:xfrm>
+          <a:prstGeom prst="rect">
+            <a:avLst/>
+          </a:prstGeom>
+          <a:noFill/>
+        </p:spPr>
+        <p:txBody>
+          <a:bodyPr wrap="square">
+            <a:spAutoFit/>
+          </a:bodyPr>
+          <a:lstStyle/>
+          <a:p>
+            <a:pPr algn="ctr"/>
+            <a:r>
+              <a:rPr sz="700" b="1" i="0">
                 <a:solidFill>
                   <a:srgbClr val="F0F2F8"/>
                 </a:solidFill>
@@ -38138,23 +38138,23 @@
         </p:nvSpPr>
         <p:spPr>
           <a:xfrm>
-            <a:off x="8554865" y="2340864"/>
-            <a:ext cx="1578385" cy="201168"/>
-          </a:xfrm>
-          <a:prstGeom prst="rect">
-            <a:avLst/>
-          </a:prstGeom>
-          <a:noFill/>
-        </p:spPr>
-        <p:txBody>
-          <a:bodyPr wrap="square">
-            <a:spAutoFit/>
-          </a:bodyPr>
-          <a:lstStyle/>
-          <a:p>
-            <a:pPr algn="ctr"/>
-            <a:r>
-              <a:rPr sz="650" b="0" i="0">
+            <a:off x="7539799" y="2340864"/>
+            <a:ext cx="1375371" cy="310896"/>
+          </a:xfrm>
+          <a:prstGeom prst="rect">
+            <a:avLst/>
+          </a:prstGeom>
+          <a:noFill/>
+        </p:spPr>
+        <p:txBody>
+          <a:bodyPr wrap="square">
+            <a:spAutoFit/>
+          </a:bodyPr>
+          <a:lstStyle/>
+          <a:p>
+            <a:pPr algn="ctr"/>
+            <a:r>
+              <a:rPr sz="600" b="0" i="0">
                 <a:solidFill>
                   <a:srgbClr val="5A6380"/>
                 </a:solidFill>
@@ -38172,8 +38172,8 @@
         </p:nvSpPr>
         <p:spPr>
           <a:xfrm>
-            <a:off x="10183542" y="1810512"/>
-            <a:ext cx="1578385" cy="1207008"/>
+            <a:off x="8965463" y="1810512"/>
+            <a:ext cx="1375371" cy="1207008"/>
           </a:xfrm>
           <a:prstGeom prst="rect">
             <a:avLst/>
@@ -38217,8 +38217,8 @@
         </p:nvSpPr>
         <p:spPr>
           <a:xfrm>
-            <a:off x="10183542" y="1865376"/>
-            <a:ext cx="1578385" cy="292608"/>
+            <a:off x="8965463" y="1865376"/>
+            <a:ext cx="1375371" cy="292608"/>
           </a:xfrm>
           <a:prstGeom prst="rect">
             <a:avLst/>
@@ -38238,7 +38238,7 @@
                   <a:srgbClr val="F0F2F8"/>
                 </a:solidFill>
               </a:rPr>
-              <a:t>🏺</a:t>
+              <a:t>⚙️</a:t>
             </a:r>
           </a:p>
         </p:txBody>
@@ -38251,28 +38251,28 @@
         </p:nvSpPr>
         <p:spPr>
           <a:xfrm>
-            <a:off x="10183542" y="2157984"/>
-            <a:ext cx="1578385" cy="201168"/>
-          </a:xfrm>
-          <a:prstGeom prst="rect">
-            <a:avLst/>
-          </a:prstGeom>
-          <a:noFill/>
-        </p:spPr>
-        <p:txBody>
-          <a:bodyPr wrap="square">
-            <a:spAutoFit/>
-          </a:bodyPr>
-          <a:lstStyle/>
-          <a:p>
-            <a:pPr algn="ctr"/>
-            <a:r>
-              <a:rPr sz="750" b="1" i="0">
+            <a:off x="8965463" y="2157984"/>
+            <a:ext cx="1375371" cy="201168"/>
+          </a:xfrm>
+          <a:prstGeom prst="rect">
+            <a:avLst/>
+          </a:prstGeom>
+          <a:noFill/>
+        </p:spPr>
+        <p:txBody>
+          <a:bodyPr wrap="square">
+            <a:spAutoFit/>
+          </a:bodyPr>
+          <a:lstStyle/>
+          <a:p>
+            <a:pPr algn="ctr"/>
+            <a:r>
+              <a:rPr sz="700" b="1" i="0">
                 <a:solidFill>
                   <a:srgbClr val="F0F2F8"/>
                 </a:solidFill>
               </a:rPr>
-              <a:t>Injection Moulding</a:t>
+              <a:t>Gear Cutting</a:t>
             </a:r>
           </a:p>
         </p:txBody>
@@ -38285,28 +38285,28 @@
         </p:nvSpPr>
         <p:spPr>
           <a:xfrm>
-            <a:off x="10183542" y="2340864"/>
-            <a:ext cx="1578385" cy="201168"/>
-          </a:xfrm>
-          <a:prstGeom prst="rect">
-            <a:avLst/>
-          </a:prstGeom>
-          <a:noFill/>
-        </p:spPr>
-        <p:txBody>
-          <a:bodyPr wrap="square">
-            <a:spAutoFit/>
-          </a:bodyPr>
-          <a:lstStyle/>
-          <a:p>
-            <a:pPr algn="ctr"/>
-            <a:r>
-              <a:rPr sz="650" b="0" i="0">
+            <a:off x="8965463" y="2340864"/>
+            <a:ext cx="1375371" cy="310896"/>
+          </a:xfrm>
+          <a:prstGeom prst="rect">
+            <a:avLst/>
+          </a:prstGeom>
+          <a:noFill/>
+        </p:spPr>
+        <p:txBody>
+          <a:bodyPr wrap="square">
+            <a:spAutoFit/>
+          </a:bodyPr>
+          <a:lstStyle/>
+          <a:p>
+            <a:pPr algn="ctr"/>
+            <a:r>
+              <a:rPr sz="600" b="0" i="0">
                 <a:solidFill>
                   <a:srgbClr val="5A6380"/>
                 </a:solidFill>
               </a:rPr>
-              <a:t>Thermoplastics, multi-cavity</a:t>
+              <a:t>Hob · shape · skive · broach · grind</a:t>
             </a:r>
           </a:p>
         </p:txBody>
@@ -38319,8 +38319,8 @@
         </p:nvSpPr>
         <p:spPr>
           <a:xfrm>
-            <a:off x="411480" y="3076956"/>
-            <a:ext cx="1578385" cy="1207008"/>
+            <a:off x="10391127" y="1810512"/>
+            <a:ext cx="1375371" cy="1207008"/>
           </a:xfrm>
           <a:prstGeom prst="rect">
             <a:avLst/>
@@ -38364,8 +38364,8 @@
         </p:nvSpPr>
         <p:spPr>
           <a:xfrm>
-            <a:off x="411480" y="3131820"/>
-            <a:ext cx="1578385" cy="292608"/>
+            <a:off x="10391127" y="1865376"/>
+            <a:ext cx="1375371" cy="292608"/>
           </a:xfrm>
           <a:prstGeom prst="rect">
             <a:avLst/>
@@ -38385,7 +38385,7 @@
                   <a:srgbClr val="F0F2F8"/>
                 </a:solidFill>
               </a:rPr>
-              <a:t>🫧</a:t>
+              <a:t>🏺</a:t>
             </a:r>
           </a:p>
         </p:txBody>
@@ -38398,28 +38398,28 @@
         </p:nvSpPr>
         <p:spPr>
           <a:xfrm>
-            <a:off x="411480" y="3424428"/>
-            <a:ext cx="1578385" cy="201168"/>
-          </a:xfrm>
-          <a:prstGeom prst="rect">
-            <a:avLst/>
-          </a:prstGeom>
-          <a:noFill/>
-        </p:spPr>
-        <p:txBody>
-          <a:bodyPr wrap="square">
-            <a:spAutoFit/>
-          </a:bodyPr>
-          <a:lstStyle/>
-          <a:p>
-            <a:pPr algn="ctr"/>
-            <a:r>
-              <a:rPr sz="750" b="1" i="0">
+            <a:off x="10391127" y="2157984"/>
+            <a:ext cx="1375371" cy="201168"/>
+          </a:xfrm>
+          <a:prstGeom prst="rect">
+            <a:avLst/>
+          </a:prstGeom>
+          <a:noFill/>
+        </p:spPr>
+        <p:txBody>
+          <a:bodyPr wrap="square">
+            <a:spAutoFit/>
+          </a:bodyPr>
+          <a:lstStyle/>
+          <a:p>
+            <a:pPr algn="ctr"/>
+            <a:r>
+              <a:rPr sz="700" b="1" i="0">
                 <a:solidFill>
                   <a:srgbClr val="F0F2F8"/>
                 </a:solidFill>
               </a:rPr>
-              <a:t>Blow Moulding</a:t>
+              <a:t>Injection Moulding</a:t>
             </a:r>
           </a:p>
         </p:txBody>
@@ -38432,28 +38432,28 @@
         </p:nvSpPr>
         <p:spPr>
           <a:xfrm>
-            <a:off x="411480" y="3607308"/>
-            <a:ext cx="1578385" cy="201168"/>
-          </a:xfrm>
-          <a:prstGeom prst="rect">
-            <a:avLst/>
-          </a:prstGeom>
-          <a:noFill/>
-        </p:spPr>
-        <p:txBody>
-          <a:bodyPr wrap="square">
-            <a:spAutoFit/>
-          </a:bodyPr>
-          <a:lstStyle/>
-          <a:p>
-            <a:pPr algn="ctr"/>
-            <a:r>
-              <a:rPr sz="650" b="0" i="0">
+            <a:off x="10391127" y="2340864"/>
+            <a:ext cx="1375371" cy="310896"/>
+          </a:xfrm>
+          <a:prstGeom prst="rect">
+            <a:avLst/>
+          </a:prstGeom>
+          <a:noFill/>
+        </p:spPr>
+        <p:txBody>
+          <a:bodyPr wrap="square">
+            <a:spAutoFit/>
+          </a:bodyPr>
+          <a:lstStyle/>
+          <a:p>
+            <a:pPr algn="ctr"/>
+            <a:r>
+              <a:rPr sz="600" b="0" i="0">
                 <a:solidFill>
                   <a:srgbClr val="5A6380"/>
                 </a:solidFill>
               </a:rPr>
-              <a:t>HDPE, PET, extrusion blow</a:t>
+              <a:t>Thermoplastics, multi-cavity</a:t>
             </a:r>
           </a:p>
         </p:txBody>
@@ -38466,8 +38466,8 @@
         </p:nvSpPr>
         <p:spPr>
           <a:xfrm>
-            <a:off x="2040157" y="3076956"/>
-            <a:ext cx="1578385" cy="1207008"/>
+            <a:off x="411480" y="3076956"/>
+            <a:ext cx="1375371" cy="1207008"/>
           </a:xfrm>
           <a:prstGeom prst="rect">
             <a:avLst/>
@@ -38511,8 +38511,8 @@
         </p:nvSpPr>
         <p:spPr>
           <a:xfrm>
-            <a:off x="2040157" y="3131820"/>
-            <a:ext cx="1578385" cy="292608"/>
+            <a:off x="411480" y="3131820"/>
+            <a:ext cx="1375371" cy="292608"/>
           </a:xfrm>
           <a:prstGeom prst="rect">
             <a:avLst/>
@@ -38532,7 +38532,7 @@
                   <a:srgbClr val="F0F2F8"/>
                 </a:solidFill>
               </a:rPr>
-              <a:t>🔩</a:t>
+              <a:t>🫧</a:t>
             </a:r>
           </a:p>
         </p:txBody>
@@ -38545,28 +38545,28 @@
         </p:nvSpPr>
         <p:spPr>
           <a:xfrm>
-            <a:off x="2040157" y="3424428"/>
-            <a:ext cx="1578385" cy="201168"/>
-          </a:xfrm>
-          <a:prstGeom prst="rect">
-            <a:avLst/>
-          </a:prstGeom>
-          <a:noFill/>
-        </p:spPr>
-        <p:txBody>
-          <a:bodyPr wrap="square">
-            <a:spAutoFit/>
-          </a:bodyPr>
-          <a:lstStyle/>
-          <a:p>
-            <a:pPr algn="ctr"/>
-            <a:r>
-              <a:rPr sz="750" b="1" i="0">
+            <a:off x="411480" y="3424428"/>
+            <a:ext cx="1375371" cy="201168"/>
+          </a:xfrm>
+          <a:prstGeom prst="rect">
+            <a:avLst/>
+          </a:prstGeom>
+          <a:noFill/>
+        </p:spPr>
+        <p:txBody>
+          <a:bodyPr wrap="square">
+            <a:spAutoFit/>
+          </a:bodyPr>
+          <a:lstStyle/>
+          <a:p>
+            <a:pPr algn="ctr"/>
+            <a:r>
+              <a:rPr sz="700" b="1" i="0">
                 <a:solidFill>
                   <a:srgbClr val="F0F2F8"/>
                 </a:solidFill>
               </a:rPr>
-              <a:t>Extrusion</a:t>
+              <a:t>Blow Moulding</a:t>
             </a:r>
           </a:p>
         </p:txBody>
@@ -38579,28 +38579,28 @@
         </p:nvSpPr>
         <p:spPr>
           <a:xfrm>
-            <a:off x="2040157" y="3607308"/>
-            <a:ext cx="1578385" cy="201168"/>
-          </a:xfrm>
-          <a:prstGeom prst="rect">
-            <a:avLst/>
-          </a:prstGeom>
-          <a:noFill/>
-        </p:spPr>
-        <p:txBody>
-          <a:bodyPr wrap="square">
-            <a:spAutoFit/>
-          </a:bodyPr>
-          <a:lstStyle/>
-          <a:p>
-            <a:pPr algn="ctr"/>
-            <a:r>
-              <a:rPr sz="650" b="0" i="0">
+            <a:off x="411480" y="3607308"/>
+            <a:ext cx="1375371" cy="310896"/>
+          </a:xfrm>
+          <a:prstGeom prst="rect">
+            <a:avLst/>
+          </a:prstGeom>
+          <a:noFill/>
+        </p:spPr>
+        <p:txBody>
+          <a:bodyPr wrap="square">
+            <a:spAutoFit/>
+          </a:bodyPr>
+          <a:lstStyle/>
+          <a:p>
+            <a:pPr algn="ctr"/>
+            <a:r>
+              <a:rPr sz="600" b="0" i="0">
                 <a:solidFill>
                   <a:srgbClr val="5A6380"/>
                 </a:solidFill>
               </a:rPr>
-              <a:t>Profile, pipe, sheet, rod</a:t>
+              <a:t>HDPE, PET, extrusion blow</a:t>
             </a:r>
           </a:p>
         </p:txBody>
@@ -38613,8 +38613,8 @@
         </p:nvSpPr>
         <p:spPr>
           <a:xfrm>
-            <a:off x="3668834" y="3076956"/>
-            <a:ext cx="1578385" cy="1207008"/>
+            <a:off x="1837143" y="3076956"/>
+            <a:ext cx="1375371" cy="1207008"/>
           </a:xfrm>
           <a:prstGeom prst="rect">
             <a:avLst/>
@@ -38658,8 +38658,8 @@
         </p:nvSpPr>
         <p:spPr>
           <a:xfrm>
-            <a:off x="3668834" y="3131820"/>
-            <a:ext cx="1578385" cy="292608"/>
+            <a:off x="1837143" y="3131820"/>
+            <a:ext cx="1375371" cy="292608"/>
           </a:xfrm>
           <a:prstGeom prst="rect">
             <a:avLst/>
@@ -38679,7 +38679,7 @@
                   <a:srgbClr val="F0F2F8"/>
                 </a:solidFill>
               </a:rPr>
-              <a:t>♨️</a:t>
+              <a:t>🔩</a:t>
             </a:r>
           </a:p>
         </p:txBody>
@@ -38692,28 +38692,28 @@
         </p:nvSpPr>
         <p:spPr>
           <a:xfrm>
-            <a:off x="3668834" y="3424428"/>
-            <a:ext cx="1578385" cy="201168"/>
-          </a:xfrm>
-          <a:prstGeom prst="rect">
-            <a:avLst/>
-          </a:prstGeom>
-          <a:noFill/>
-        </p:spPr>
-        <p:txBody>
-          <a:bodyPr wrap="square">
-            <a:spAutoFit/>
-          </a:bodyPr>
-          <a:lstStyle/>
-          <a:p>
-            <a:pPr algn="ctr"/>
-            <a:r>
-              <a:rPr sz="750" b="1" i="0">
+            <a:off x="1837143" y="3424428"/>
+            <a:ext cx="1375371" cy="201168"/>
+          </a:xfrm>
+          <a:prstGeom prst="rect">
+            <a:avLst/>
+          </a:prstGeom>
+          <a:noFill/>
+        </p:spPr>
+        <p:txBody>
+          <a:bodyPr wrap="square">
+            <a:spAutoFit/>
+          </a:bodyPr>
+          <a:lstStyle/>
+          <a:p>
+            <a:pPr algn="ctr"/>
+            <a:r>
+              <a:rPr sz="700" b="1" i="0">
                 <a:solidFill>
                   <a:srgbClr val="F0F2F8"/>
                 </a:solidFill>
               </a:rPr>
-              <a:t>Thermoforming</a:t>
+              <a:t>Extrusion</a:t>
             </a:r>
           </a:p>
         </p:txBody>
@@ -38726,28 +38726,28 @@
         </p:nvSpPr>
         <p:spPr>
           <a:xfrm>
-            <a:off x="3668834" y="3607308"/>
-            <a:ext cx="1578385" cy="201168"/>
-          </a:xfrm>
-          <a:prstGeom prst="rect">
-            <a:avLst/>
-          </a:prstGeom>
-          <a:noFill/>
-        </p:spPr>
-        <p:txBody>
-          <a:bodyPr wrap="square">
-            <a:spAutoFit/>
-          </a:bodyPr>
-          <a:lstStyle/>
-          <a:p>
-            <a:pPr algn="ctr"/>
-            <a:r>
-              <a:rPr sz="650" b="0" i="0">
+            <a:off x="1837143" y="3607308"/>
+            <a:ext cx="1375371" cy="310896"/>
+          </a:xfrm>
+          <a:prstGeom prst="rect">
+            <a:avLst/>
+          </a:prstGeom>
+          <a:noFill/>
+        </p:spPr>
+        <p:txBody>
+          <a:bodyPr wrap="square">
+            <a:spAutoFit/>
+          </a:bodyPr>
+          <a:lstStyle/>
+          <a:p>
+            <a:pPr algn="ctr"/>
+            <a:r>
+              <a:rPr sz="600" b="0" i="0">
                 <a:solidFill>
                   <a:srgbClr val="5A6380"/>
                 </a:solidFill>
               </a:rPr>
-              <a:t>Vacuum, pressure, twin-sheet</a:t>
+              <a:t>Profile, pipe, sheet, rod</a:t>
             </a:r>
           </a:p>
         </p:txBody>
@@ -38760,8 +38760,8 @@
         </p:nvSpPr>
         <p:spPr>
           <a:xfrm>
-            <a:off x="5297511" y="3076956"/>
-            <a:ext cx="1578385" cy="1207008"/>
+            <a:off x="3262807" y="3076956"/>
+            <a:ext cx="1375371" cy="1207008"/>
           </a:xfrm>
           <a:prstGeom prst="rect">
             <a:avLst/>
@@ -38805,8 +38805,8 @@
         </p:nvSpPr>
         <p:spPr>
           <a:xfrm>
-            <a:off x="5297511" y="3131820"/>
-            <a:ext cx="1578385" cy="292608"/>
+            <a:off x="3262807" y="3131820"/>
+            <a:ext cx="1375371" cy="292608"/>
           </a:xfrm>
           <a:prstGeom prst="rect">
             <a:avLst/>
@@ -38826,7 +38826,7 @@
                   <a:srgbClr val="F0F2F8"/>
                 </a:solidFill>
               </a:rPr>
-              <a:t>🔄</a:t>
+              <a:t>♨️</a:t>
             </a:r>
           </a:p>
         </p:txBody>
@@ -38839,28 +38839,28 @@
         </p:nvSpPr>
         <p:spPr>
           <a:xfrm>
-            <a:off x="5297511" y="3424428"/>
-            <a:ext cx="1578385" cy="201168"/>
-          </a:xfrm>
-          <a:prstGeom prst="rect">
-            <a:avLst/>
-          </a:prstGeom>
-          <a:noFill/>
-        </p:spPr>
-        <p:txBody>
-          <a:bodyPr wrap="square">
-            <a:spAutoFit/>
-          </a:bodyPr>
-          <a:lstStyle/>
-          <a:p>
-            <a:pPr algn="ctr"/>
-            <a:r>
-              <a:rPr sz="750" b="1" i="0">
+            <a:off x="3262807" y="3424428"/>
+            <a:ext cx="1375371" cy="201168"/>
+          </a:xfrm>
+          <a:prstGeom prst="rect">
+            <a:avLst/>
+          </a:prstGeom>
+          <a:noFill/>
+        </p:spPr>
+        <p:txBody>
+          <a:bodyPr wrap="square">
+            <a:spAutoFit/>
+          </a:bodyPr>
+          <a:lstStyle/>
+          <a:p>
+            <a:pPr algn="ctr"/>
+            <a:r>
+              <a:rPr sz="700" b="1" i="0">
                 <a:solidFill>
                   <a:srgbClr val="F0F2F8"/>
                 </a:solidFill>
               </a:rPr>
-              <a:t>Rotational Moulding</a:t>
+              <a:t>Thermoforming</a:t>
             </a:r>
           </a:p>
         </p:txBody>
@@ -38873,28 +38873,28 @@
         </p:nvSpPr>
         <p:spPr>
           <a:xfrm>
-            <a:off x="5297511" y="3607308"/>
-            <a:ext cx="1578385" cy="201168"/>
-          </a:xfrm>
-          <a:prstGeom prst="rect">
-            <a:avLst/>
-          </a:prstGeom>
-          <a:noFill/>
-        </p:spPr>
-        <p:txBody>
-          <a:bodyPr wrap="square">
-            <a:spAutoFit/>
-          </a:bodyPr>
-          <a:lstStyle/>
-          <a:p>
-            <a:pPr algn="ctr"/>
-            <a:r>
-              <a:rPr sz="650" b="0" i="0">
+            <a:off x="3262807" y="3607308"/>
+            <a:ext cx="1375371" cy="310896"/>
+          </a:xfrm>
+          <a:prstGeom prst="rect">
+            <a:avLst/>
+          </a:prstGeom>
+          <a:noFill/>
+        </p:spPr>
+        <p:txBody>
+          <a:bodyPr wrap="square">
+            <a:spAutoFit/>
+          </a:bodyPr>
+          <a:lstStyle/>
+          <a:p>
+            <a:pPr algn="ctr"/>
+            <a:r>
+              <a:rPr sz="600" b="0" i="0">
                 <a:solidFill>
                   <a:srgbClr val="5A6380"/>
                 </a:solidFill>
               </a:rPr>
-              <a:t>Large hollow shapes, LLDPE</a:t>
+              <a:t>Vacuum, pressure, twin-sheet</a:t>
             </a:r>
           </a:p>
         </p:txBody>
@@ -38907,8 +38907,8 @@
         </p:nvSpPr>
         <p:spPr>
           <a:xfrm>
-            <a:off x="6926188" y="3076956"/>
-            <a:ext cx="1578385" cy="1207008"/>
+            <a:off x="4688471" y="3076956"/>
+            <a:ext cx="1375371" cy="1207008"/>
           </a:xfrm>
           <a:prstGeom prst="rect">
             <a:avLst/>
@@ -38952,8 +38952,8 @@
         </p:nvSpPr>
         <p:spPr>
           <a:xfrm>
-            <a:off x="6926188" y="3131820"/>
-            <a:ext cx="1578385" cy="292608"/>
+            <a:off x="4688471" y="3131820"/>
+            <a:ext cx="1375371" cy="292608"/>
           </a:xfrm>
           <a:prstGeom prst="rect">
             <a:avLst/>
@@ -38973,7 +38973,7 @@
                   <a:srgbClr val="F0F2F8"/>
                 </a:solidFill>
               </a:rPr>
-              <a:t>🧱</a:t>
+              <a:t>🔄</a:t>
             </a:r>
           </a:p>
         </p:txBody>
@@ -38986,28 +38986,28 @@
         </p:nvSpPr>
         <p:spPr>
           <a:xfrm>
-            <a:off x="6926188" y="3424428"/>
-            <a:ext cx="1578385" cy="201168"/>
-          </a:xfrm>
-          <a:prstGeom prst="rect">
-            <a:avLst/>
-          </a:prstGeom>
-          <a:noFill/>
-        </p:spPr>
-        <p:txBody>
-          <a:bodyPr wrap="square">
-            <a:spAutoFit/>
-          </a:bodyPr>
-          <a:lstStyle/>
-          <a:p>
-            <a:pPr algn="ctr"/>
-            <a:r>
-              <a:rPr sz="750" b="1" i="0">
+            <a:off x="4688471" y="3424428"/>
+            <a:ext cx="1375371" cy="201168"/>
+          </a:xfrm>
+          <a:prstGeom prst="rect">
+            <a:avLst/>
+          </a:prstGeom>
+          <a:noFill/>
+        </p:spPr>
+        <p:txBody>
+          <a:bodyPr wrap="square">
+            <a:spAutoFit/>
+          </a:bodyPr>
+          <a:lstStyle/>
+          <a:p>
+            <a:pPr algn="ctr"/>
+            <a:r>
+              <a:rPr sz="700" b="1" i="0">
                 <a:solidFill>
                   <a:srgbClr val="F0F2F8"/>
                 </a:solidFill>
               </a:rPr>
-              <a:t>Rubber Moulding</a:t>
+              <a:t>Rotational Moulding</a:t>
             </a:r>
           </a:p>
         </p:txBody>
@@ -39020,28 +39020,28 @@
         </p:nvSpPr>
         <p:spPr>
           <a:xfrm>
-            <a:off x="6926188" y="3607308"/>
-            <a:ext cx="1578385" cy="201168"/>
-          </a:xfrm>
-          <a:prstGeom prst="rect">
-            <a:avLst/>
-          </a:prstGeom>
-          <a:noFill/>
-        </p:spPr>
-        <p:txBody>
-          <a:bodyPr wrap="square">
-            <a:spAutoFit/>
-          </a:bodyPr>
-          <a:lstStyle/>
-          <a:p>
-            <a:pPr algn="ctr"/>
-            <a:r>
-              <a:rPr sz="650" b="0" i="0">
+            <a:off x="4688471" y="3607308"/>
+            <a:ext cx="1375371" cy="310896"/>
+          </a:xfrm>
+          <a:prstGeom prst="rect">
+            <a:avLst/>
+          </a:prstGeom>
+          <a:noFill/>
+        </p:spPr>
+        <p:txBody>
+          <a:bodyPr wrap="square">
+            <a:spAutoFit/>
+          </a:bodyPr>
+          <a:lstStyle/>
+          <a:p>
+            <a:pPr algn="ctr"/>
+            <a:r>
+              <a:rPr sz="600" b="0" i="0">
                 <a:solidFill>
                   <a:srgbClr val="5A6380"/>
                 </a:solidFill>
               </a:rPr>
-              <a:t>Compression, injection, LSR</a:t>
+              <a:t>Large hollow shapes, LLDPE</a:t>
             </a:r>
           </a:p>
         </p:txBody>
@@ -39054,8 +39054,8 @@
         </p:nvSpPr>
         <p:spPr>
           <a:xfrm>
-            <a:off x="8554865" y="3076956"/>
-            <a:ext cx="1578385" cy="1207008"/>
+            <a:off x="6114135" y="3076956"/>
+            <a:ext cx="1375371" cy="1207008"/>
           </a:xfrm>
           <a:prstGeom prst="rect">
             <a:avLst/>
@@ -39099,8 +39099,8 @@
         </p:nvSpPr>
         <p:spPr>
           <a:xfrm>
-            <a:off x="8554865" y="3131820"/>
-            <a:ext cx="1578385" cy="292608"/>
+            <a:off x="6114135" y="3131820"/>
+            <a:ext cx="1375371" cy="292608"/>
           </a:xfrm>
           <a:prstGeom prst="rect">
             <a:avLst/>
@@ -39120,7 +39120,7 @@
                   <a:srgbClr val="F0F2F8"/>
                 </a:solidFill>
               </a:rPr>
-              <a:t>🪢</a:t>
+              <a:t>🧱</a:t>
             </a:r>
           </a:p>
         </p:txBody>
@@ -39133,28 +39133,28 @@
         </p:nvSpPr>
         <p:spPr>
           <a:xfrm>
-            <a:off x="8554865" y="3424428"/>
-            <a:ext cx="1578385" cy="201168"/>
-          </a:xfrm>
-          <a:prstGeom prst="rect">
-            <a:avLst/>
-          </a:prstGeom>
-          <a:noFill/>
-        </p:spPr>
-        <p:txBody>
-          <a:bodyPr wrap="square">
-            <a:spAutoFit/>
-          </a:bodyPr>
-          <a:lstStyle/>
-          <a:p>
-            <a:pPr algn="ctr"/>
-            <a:r>
-              <a:rPr sz="750" b="1" i="0">
+            <a:off x="6114135" y="3424428"/>
+            <a:ext cx="1375371" cy="201168"/>
+          </a:xfrm>
+          <a:prstGeom prst="rect">
+            <a:avLst/>
+          </a:prstGeom>
+          <a:noFill/>
+        </p:spPr>
+        <p:txBody>
+          <a:bodyPr wrap="square">
+            <a:spAutoFit/>
+          </a:bodyPr>
+          <a:lstStyle/>
+          <a:p>
+            <a:pPr algn="ctr"/>
+            <a:r>
+              <a:rPr sz="700" b="1" i="0">
                 <a:solidFill>
                   <a:srgbClr val="F0F2F8"/>
                 </a:solidFill>
               </a:rPr>
-              <a:t>Composites</a:t>
+              <a:t>Rubber Moulding</a:t>
             </a:r>
           </a:p>
         </p:txBody>
@@ -39167,28 +39167,28 @@
         </p:nvSpPr>
         <p:spPr>
           <a:xfrm>
-            <a:off x="8554865" y="3607308"/>
-            <a:ext cx="1578385" cy="201168"/>
-          </a:xfrm>
-          <a:prstGeom prst="rect">
-            <a:avLst/>
-          </a:prstGeom>
-          <a:noFill/>
-        </p:spPr>
-        <p:txBody>
-          <a:bodyPr wrap="square">
-            <a:spAutoFit/>
-          </a:bodyPr>
-          <a:lstStyle/>
-          <a:p>
-            <a:pPr algn="ctr"/>
-            <a:r>
-              <a:rPr sz="650" b="0" i="0">
+            <a:off x="6114135" y="3607308"/>
+            <a:ext cx="1375371" cy="310896"/>
+          </a:xfrm>
+          <a:prstGeom prst="rect">
+            <a:avLst/>
+          </a:prstGeom>
+          <a:noFill/>
+        </p:spPr>
+        <p:txBody>
+          <a:bodyPr wrap="square">
+            <a:spAutoFit/>
+          </a:bodyPr>
+          <a:lstStyle/>
+          <a:p>
+            <a:pPr algn="ctr"/>
+            <a:r>
+              <a:rPr sz="600" b="0" i="0">
                 <a:solidFill>
                   <a:srgbClr val="5A6380"/>
                 </a:solidFill>
               </a:rPr>
-              <a:t>CFRP/GFRP, autoclave, RTM, AFP</a:t>
+              <a:t>Compression, injection, LSR</a:t>
             </a:r>
           </a:p>
         </p:txBody>
@@ -39201,8 +39201,8 @@
         </p:nvSpPr>
         <p:spPr>
           <a:xfrm>
-            <a:off x="10183542" y="3076956"/>
-            <a:ext cx="1578385" cy="1207008"/>
+            <a:off x="7539799" y="3076956"/>
+            <a:ext cx="1375371" cy="1207008"/>
           </a:xfrm>
           <a:prstGeom prst="rect">
             <a:avLst/>
@@ -39246,8 +39246,8 @@
         </p:nvSpPr>
         <p:spPr>
           <a:xfrm>
-            <a:off x="10183542" y="3131820"/>
-            <a:ext cx="1578385" cy="292608"/>
+            <a:off x="7539799" y="3131820"/>
+            <a:ext cx="1375371" cy="292608"/>
           </a:xfrm>
           <a:prstGeom prst="rect">
             <a:avLst/>
@@ -39267,7 +39267,7 @@
                   <a:srgbClr val="F0F2F8"/>
                 </a:solidFill>
               </a:rPr>
-              <a:t>🎨</a:t>
+              <a:t>🪢</a:t>
             </a:r>
           </a:p>
         </p:txBody>
@@ -39280,28 +39280,28 @@
         </p:nvSpPr>
         <p:spPr>
           <a:xfrm>
-            <a:off x="10183542" y="3424428"/>
-            <a:ext cx="1578385" cy="201168"/>
-          </a:xfrm>
-          <a:prstGeom prst="rect">
-            <a:avLst/>
-          </a:prstGeom>
-          <a:noFill/>
-        </p:spPr>
-        <p:txBody>
-          <a:bodyPr wrap="square">
-            <a:spAutoFit/>
-          </a:bodyPr>
-          <a:lstStyle/>
-          <a:p>
-            <a:pPr algn="ctr"/>
-            <a:r>
-              <a:rPr sz="750" b="1" i="0">
+            <a:off x="7539799" y="3424428"/>
+            <a:ext cx="1375371" cy="201168"/>
+          </a:xfrm>
+          <a:prstGeom prst="rect">
+            <a:avLst/>
+          </a:prstGeom>
+          <a:noFill/>
+        </p:spPr>
+        <p:txBody>
+          <a:bodyPr wrap="square">
+            <a:spAutoFit/>
+          </a:bodyPr>
+          <a:lstStyle/>
+          <a:p>
+            <a:pPr algn="ctr"/>
+            <a:r>
+              <a:rPr sz="700" b="1" i="0">
                 <a:solidFill>
                   <a:srgbClr val="F0F2F8"/>
                 </a:solidFill>
               </a:rPr>
-              <a:t>Painting / Coating</a:t>
+              <a:t>Composites</a:t>
             </a:r>
           </a:p>
         </p:txBody>
@@ -39314,28 +39314,28 @@
         </p:nvSpPr>
         <p:spPr>
           <a:xfrm>
-            <a:off x="10183542" y="3607308"/>
-            <a:ext cx="1578385" cy="201168"/>
-          </a:xfrm>
-          <a:prstGeom prst="rect">
-            <a:avLst/>
-          </a:prstGeom>
-          <a:noFill/>
-        </p:spPr>
-        <p:txBody>
-          <a:bodyPr wrap="square">
-            <a:spAutoFit/>
-          </a:bodyPr>
-          <a:lstStyle/>
-          <a:p>
-            <a:pPr algn="ctr"/>
-            <a:r>
-              <a:rPr sz="650" b="0" i="0">
+            <a:off x="7539799" y="3607308"/>
+            <a:ext cx="1375371" cy="310896"/>
+          </a:xfrm>
+          <a:prstGeom prst="rect">
+            <a:avLst/>
+          </a:prstGeom>
+          <a:noFill/>
+        </p:spPr>
+        <p:txBody>
+          <a:bodyPr wrap="square">
+            <a:spAutoFit/>
+          </a:bodyPr>
+          <a:lstStyle/>
+          <a:p>
+            <a:pPr algn="ctr"/>
+            <a:r>
+              <a:rPr sz="600" b="0" i="0">
                 <a:solidFill>
                   <a:srgbClr val="5A6380"/>
                 </a:solidFill>
               </a:rPr>
-              <a:t>E-coat, powder, wet, anodise</a:t>
+              <a:t>CFRP/GFRP, autoclave, RTM, AFP</a:t>
             </a:r>
           </a:p>
         </p:txBody>
@@ -39348,8 +39348,8 @@
         </p:nvSpPr>
         <p:spPr>
           <a:xfrm>
-            <a:off x="411480" y="4343400"/>
-            <a:ext cx="1578385" cy="1207008"/>
+            <a:off x="8965463" y="3076956"/>
+            <a:ext cx="1375371" cy="1207008"/>
           </a:xfrm>
           <a:prstGeom prst="rect">
             <a:avLst/>
@@ -39393,8 +39393,8 @@
         </p:nvSpPr>
         <p:spPr>
           <a:xfrm>
-            <a:off x="411480" y="4398264"/>
-            <a:ext cx="1578385" cy="292608"/>
+            <a:off x="8965463" y="3131820"/>
+            <a:ext cx="1375371" cy="292608"/>
           </a:xfrm>
           <a:prstGeom prst="rect">
             <a:avLst/>
@@ -39414,7 +39414,7 @@
                   <a:srgbClr val="F0F2F8"/>
                 </a:solidFill>
               </a:rPr>
-              <a:t>🚗</a:t>
+              <a:t>🎨</a:t>
             </a:r>
           </a:p>
         </p:txBody>
@@ -39427,28 +39427,28 @@
         </p:nvSpPr>
         <p:spPr>
           <a:xfrm>
-            <a:off x="411480" y="4690872"/>
-            <a:ext cx="1578385" cy="201168"/>
-          </a:xfrm>
-          <a:prstGeom prst="rect">
-            <a:avLst/>
-          </a:prstGeom>
-          <a:noFill/>
-        </p:spPr>
-        <p:txBody>
-          <a:bodyPr wrap="square">
-            <a:spAutoFit/>
-          </a:bodyPr>
-          <a:lstStyle/>
-          <a:p>
-            <a:pPr algn="ctr"/>
-            <a:r>
-              <a:rPr sz="750" b="1" i="0">
+            <a:off x="8965463" y="3424428"/>
+            <a:ext cx="1375371" cy="201168"/>
+          </a:xfrm>
+          <a:prstGeom prst="rect">
+            <a:avLst/>
+          </a:prstGeom>
+          <a:noFill/>
+        </p:spPr>
+        <p:txBody>
+          <a:bodyPr wrap="square">
+            <a:spAutoFit/>
+          </a:bodyPr>
+          <a:lstStyle/>
+          <a:p>
+            <a:pPr algn="ctr"/>
+            <a:r>
+              <a:rPr sz="700" b="1" i="0">
                 <a:solidFill>
                   <a:srgbClr val="F0F2F8"/>
                 </a:solidFill>
               </a:rPr>
-              <a:t>BIW Assembly</a:t>
+              <a:t>Painting / Coating</a:t>
             </a:r>
           </a:p>
         </p:txBody>
@@ -39461,28 +39461,28 @@
         </p:nvSpPr>
         <p:spPr>
           <a:xfrm>
-            <a:off x="411480" y="4873752"/>
-            <a:ext cx="1578385" cy="201168"/>
-          </a:xfrm>
-          <a:prstGeom prst="rect">
-            <a:avLst/>
-          </a:prstGeom>
-          <a:noFill/>
-        </p:spPr>
-        <p:txBody>
-          <a:bodyPr wrap="square">
-            <a:spAutoFit/>
-          </a:bodyPr>
-          <a:lstStyle/>
-          <a:p>
-            <a:pPr algn="ctr"/>
-            <a:r>
-              <a:rPr sz="650" b="0" i="0">
+            <a:off x="8965463" y="3607308"/>
+            <a:ext cx="1375371" cy="310896"/>
+          </a:xfrm>
+          <a:prstGeom prst="rect">
+            <a:avLst/>
+          </a:prstGeom>
+          <a:noFill/>
+        </p:spPr>
+        <p:txBody>
+          <a:bodyPr wrap="square">
+            <a:spAutoFit/>
+          </a:bodyPr>
+          <a:lstStyle/>
+          <a:p>
+            <a:pPr algn="ctr"/>
+            <a:r>
+              <a:rPr sz="600" b="0" i="0">
                 <a:solidFill>
                   <a:srgbClr val="5A6380"/>
                 </a:solidFill>
               </a:rPr>
-              <a:t>Spot weld, MIG, hem, bond</a:t>
+              <a:t>E-coat, powder, wet, anodise</a:t>
             </a:r>
           </a:p>
         </p:txBody>
@@ -39495,8 +39495,8 @@
         </p:nvSpPr>
         <p:spPr>
           <a:xfrm>
-            <a:off x="2040157" y="4343400"/>
-            <a:ext cx="1578385" cy="1207008"/>
+            <a:off x="10391127" y="3076956"/>
+            <a:ext cx="1375371" cy="1207008"/>
           </a:xfrm>
           <a:prstGeom prst="rect">
             <a:avLst/>
@@ -39540,8 +39540,8 @@
         </p:nvSpPr>
         <p:spPr>
           <a:xfrm>
-            <a:off x="2040157" y="4398264"/>
-            <a:ext cx="1578385" cy="292608"/>
+            <a:off x="10391127" y="3131820"/>
+            <a:ext cx="1375371" cy="292608"/>
           </a:xfrm>
           <a:prstGeom prst="rect">
             <a:avLst/>
@@ -39561,7 +39561,7 @@
                   <a:srgbClr val="F0F2F8"/>
                 </a:solidFill>
               </a:rPr>
-              <a:t>🖥️</a:t>
+              <a:t>🚗</a:t>
             </a:r>
           </a:p>
         </p:txBody>
@@ -39574,28 +39574,28 @@
         </p:nvSpPr>
         <p:spPr>
           <a:xfrm>
-            <a:off x="2040157" y="4690872"/>
-            <a:ext cx="1578385" cy="201168"/>
-          </a:xfrm>
-          <a:prstGeom prst="rect">
-            <a:avLst/>
-          </a:prstGeom>
-          <a:noFill/>
-        </p:spPr>
-        <p:txBody>
-          <a:bodyPr wrap="square">
-            <a:spAutoFit/>
-          </a:bodyPr>
-          <a:lstStyle/>
-          <a:p>
-            <a:pPr algn="ctr"/>
-            <a:r>
-              <a:rPr sz="750" b="1" i="0">
+            <a:off x="10391127" y="3424428"/>
+            <a:ext cx="1375371" cy="201168"/>
+          </a:xfrm>
+          <a:prstGeom prst="rect">
+            <a:avLst/>
+          </a:prstGeom>
+          <a:noFill/>
+        </p:spPr>
+        <p:txBody>
+          <a:bodyPr wrap="square">
+            <a:spAutoFit/>
+          </a:bodyPr>
+          <a:lstStyle/>
+          <a:p>
+            <a:pPr algn="ctr"/>
+            <a:r>
+              <a:rPr sz="700" b="1" i="0">
                 <a:solidFill>
                   <a:srgbClr val="F0F2F8"/>
                 </a:solidFill>
               </a:rPr>
-              <a:t>PCB Fabrication</a:t>
+              <a:t>BIW Assembly</a:t>
             </a:r>
           </a:p>
         </p:txBody>
@@ -39608,28 +39608,28 @@
         </p:nvSpPr>
         <p:spPr>
           <a:xfrm>
-            <a:off x="2040157" y="4873752"/>
-            <a:ext cx="1578385" cy="201168"/>
-          </a:xfrm>
-          <a:prstGeom prst="rect">
-            <a:avLst/>
-          </a:prstGeom>
-          <a:noFill/>
-        </p:spPr>
-        <p:txBody>
-          <a:bodyPr wrap="square">
-            <a:spAutoFit/>
-          </a:bodyPr>
-          <a:lstStyle/>
-          <a:p>
-            <a:pPr algn="ctr"/>
-            <a:r>
-              <a:rPr sz="650" b="0" i="0">
+            <a:off x="10391127" y="3607308"/>
+            <a:ext cx="1375371" cy="310896"/>
+          </a:xfrm>
+          <a:prstGeom prst="rect">
+            <a:avLst/>
+          </a:prstGeom>
+          <a:noFill/>
+        </p:spPr>
+        <p:txBody>
+          <a:bodyPr wrap="square">
+            <a:spAutoFit/>
+          </a:bodyPr>
+          <a:lstStyle/>
+          <a:p>
+            <a:pPr algn="ctr"/>
+            <a:r>
+              <a:rPr sz="600" b="0" i="0">
                 <a:solidFill>
                   <a:srgbClr val="5A6380"/>
                 </a:solidFill>
               </a:rPr>
-              <a:t>2–16L, HDI, rigid-flex, RF/μwave</a:t>
+              <a:t>Spot weld, MIG, hem, bond</a:t>
             </a:r>
           </a:p>
         </p:txBody>
@@ -39642,8 +39642,8 @@
         </p:nvSpPr>
         <p:spPr>
           <a:xfrm>
-            <a:off x="3668834" y="4343400"/>
-            <a:ext cx="1578385" cy="1207008"/>
+            <a:off x="411480" y="4343400"/>
+            <a:ext cx="1375371" cy="1207008"/>
           </a:xfrm>
           <a:prstGeom prst="rect">
             <a:avLst/>
@@ -39687,8 +39687,8 @@
         </p:nvSpPr>
         <p:spPr>
           <a:xfrm>
-            <a:off x="3668834" y="4398264"/>
-            <a:ext cx="1578385" cy="292608"/>
+            <a:off x="411480" y="4398264"/>
+            <a:ext cx="1375371" cy="292608"/>
           </a:xfrm>
           <a:prstGeom prst="rect">
             <a:avLst/>
@@ -39708,7 +39708,7 @@
                   <a:srgbClr val="F0F2F8"/>
                 </a:solidFill>
               </a:rPr>
-              <a:t>🔌</a:t>
+              <a:t>🖥️</a:t>
             </a:r>
           </a:p>
         </p:txBody>
@@ -39721,28 +39721,28 @@
         </p:nvSpPr>
         <p:spPr>
           <a:xfrm>
-            <a:off x="3668834" y="4690872"/>
-            <a:ext cx="1578385" cy="201168"/>
-          </a:xfrm>
-          <a:prstGeom prst="rect">
-            <a:avLst/>
-          </a:prstGeom>
-          <a:noFill/>
-        </p:spPr>
-        <p:txBody>
-          <a:bodyPr wrap="square">
-            <a:spAutoFit/>
-          </a:bodyPr>
-          <a:lstStyle/>
-          <a:p>
-            <a:pPr algn="ctr"/>
-            <a:r>
-              <a:rPr sz="750" b="1" i="0">
+            <a:off x="411480" y="4690872"/>
+            <a:ext cx="1375371" cy="201168"/>
+          </a:xfrm>
+          <a:prstGeom prst="rect">
+            <a:avLst/>
+          </a:prstGeom>
+          <a:noFill/>
+        </p:spPr>
+        <p:txBody>
+          <a:bodyPr wrap="square">
+            <a:spAutoFit/>
+          </a:bodyPr>
+          <a:lstStyle/>
+          <a:p>
+            <a:pPr algn="ctr"/>
+            <a:r>
+              <a:rPr sz="700" b="1" i="0">
                 <a:solidFill>
                   <a:srgbClr val="F0F2F8"/>
                 </a:solidFill>
               </a:rPr>
-              <a:t>PCBA / SMD</a:t>
+              <a:t>PCB Fabrication</a:t>
             </a:r>
           </a:p>
         </p:txBody>
@@ -39755,28 +39755,28 @@
         </p:nvSpPr>
         <p:spPr>
           <a:xfrm>
-            <a:off x="3668834" y="4873752"/>
-            <a:ext cx="1578385" cy="201168"/>
-          </a:xfrm>
-          <a:prstGeom prst="rect">
-            <a:avLst/>
-          </a:prstGeom>
-          <a:noFill/>
-        </p:spPr>
-        <p:txBody>
-          <a:bodyPr wrap="square">
-            <a:spAutoFit/>
-          </a:bodyPr>
-          <a:lstStyle/>
-          <a:p>
-            <a:pPr algn="ctr"/>
-            <a:r>
-              <a:rPr sz="650" b="0" i="0">
+            <a:off x="411480" y="4873752"/>
+            <a:ext cx="1375371" cy="310896"/>
+          </a:xfrm>
+          <a:prstGeom prst="rect">
+            <a:avLst/>
+          </a:prstGeom>
+          <a:noFill/>
+        </p:spPr>
+        <p:txBody>
+          <a:bodyPr wrap="square">
+            <a:spAutoFit/>
+          </a:bodyPr>
+          <a:lstStyle/>
+          <a:p>
+            <a:pPr algn="ctr"/>
+            <a:r>
+              <a:rPr sz="600" b="0" i="0">
                 <a:solidFill>
                   <a:srgbClr val="5A6380"/>
                 </a:solidFill>
               </a:rPr>
-              <a:t>SMT, TH, reflow, conformal coat</a:t>
+              <a:t>2–16L, HDI, rigid-flex, RF/μwave</a:t>
             </a:r>
           </a:p>
         </p:txBody>
@@ -39789,8 +39789,8 @@
         </p:nvSpPr>
         <p:spPr>
           <a:xfrm>
-            <a:off x="5297511" y="4343400"/>
-            <a:ext cx="1578385" cy="1207008"/>
+            <a:off x="1837143" y="4343400"/>
+            <a:ext cx="1375371" cy="1207008"/>
           </a:xfrm>
           <a:prstGeom prst="rect">
             <a:avLst/>
@@ -39834,8 +39834,8 @@
         </p:nvSpPr>
         <p:spPr>
           <a:xfrm>
-            <a:off x="5297511" y="4398264"/>
-            <a:ext cx="1578385" cy="292608"/>
+            <a:off x="1837143" y="4398264"/>
+            <a:ext cx="1375371" cy="292608"/>
           </a:xfrm>
           <a:prstGeom prst="rect">
             <a:avLst/>
@@ -39855,7 +39855,7 @@
                   <a:srgbClr val="F0F2F8"/>
                 </a:solidFill>
               </a:rPr>
-              <a:t>🔗</a:t>
+              <a:t>🔌</a:t>
             </a:r>
           </a:p>
         </p:txBody>
@@ -39868,28 +39868,28 @@
         </p:nvSpPr>
         <p:spPr>
           <a:xfrm>
-            <a:off x="5297511" y="4690872"/>
-            <a:ext cx="1578385" cy="201168"/>
-          </a:xfrm>
-          <a:prstGeom prst="rect">
-            <a:avLst/>
-          </a:prstGeom>
-          <a:noFill/>
-        </p:spPr>
-        <p:txBody>
-          <a:bodyPr wrap="square">
-            <a:spAutoFit/>
-          </a:bodyPr>
-          <a:lstStyle/>
-          <a:p>
-            <a:pPr algn="ctr"/>
-            <a:r>
-              <a:rPr sz="750" b="1" i="0">
+            <a:off x="1837143" y="4690872"/>
+            <a:ext cx="1375371" cy="201168"/>
+          </a:xfrm>
+          <a:prstGeom prst="rect">
+            <a:avLst/>
+          </a:prstGeom>
+          <a:noFill/>
+        </p:spPr>
+        <p:txBody>
+          <a:bodyPr wrap="square">
+            <a:spAutoFit/>
+          </a:bodyPr>
+          <a:lstStyle/>
+          <a:p>
+            <a:pPr algn="ctr"/>
+            <a:r>
+              <a:rPr sz="700" b="1" i="0">
                 <a:solidFill>
                   <a:srgbClr val="F0F2F8"/>
                 </a:solidFill>
               </a:rPr>
-              <a:t>Wiring Harness</a:t>
+              <a:t>PCBA / SMD</a:t>
             </a:r>
           </a:p>
         </p:txBody>
@@ -39902,28 +39902,28 @@
         </p:nvSpPr>
         <p:spPr>
           <a:xfrm>
-            <a:off x="5297511" y="4873752"/>
-            <a:ext cx="1578385" cy="201168"/>
-          </a:xfrm>
-          <a:prstGeom prst="rect">
-            <a:avLst/>
-          </a:prstGeom>
-          <a:noFill/>
-        </p:spPr>
-        <p:txBody>
-          <a:bodyPr wrap="square">
-            <a:spAutoFit/>
-          </a:bodyPr>
-          <a:lstStyle/>
-          <a:p>
-            <a:pPr algn="ctr"/>
-            <a:r>
-              <a:rPr sz="650" b="0" i="0">
+            <a:off x="1837143" y="4873752"/>
+            <a:ext cx="1375371" cy="310896"/>
+          </a:xfrm>
+          <a:prstGeom prst="rect">
+            <a:avLst/>
+          </a:prstGeom>
+          <a:noFill/>
+        </p:spPr>
+        <p:txBody>
+          <a:bodyPr wrap="square">
+            <a:spAutoFit/>
+          </a:bodyPr>
+          <a:lstStyle/>
+          <a:p>
+            <a:pPr algn="ctr"/>
+            <a:r>
+              <a:rPr sz="600" b="0" i="0">
                 <a:solidFill>
                   <a:srgbClr val="5A6380"/>
                 </a:solidFill>
               </a:rPr>
-              <a:t>Cut-strip-crimp, test, sub-asm</a:t>
+              <a:t>SMT, TH, reflow, conformal coat</a:t>
             </a:r>
           </a:p>
         </p:txBody>
@@ -39936,8 +39936,155 @@
         </p:nvSpPr>
         <p:spPr>
           <a:xfrm>
-            <a:off x="6926188" y="4343400"/>
-            <a:ext cx="1578385" cy="1207008"/>
+            <a:off x="3262807" y="4343400"/>
+            <a:ext cx="1375371" cy="1207008"/>
+          </a:xfrm>
+          <a:prstGeom prst="rect">
+            <a:avLst/>
+          </a:prstGeom>
+          <a:solidFill>
+            <a:srgbClr val="1E2330"/>
+          </a:solidFill>
+          <a:ln w="10160">
+            <a:solidFill>
+              <a:srgbClr val="4F8EF7"/>
+            </a:solidFill>
+          </a:ln>
+        </p:spPr>
+        <p:style>
+          <a:lnRef idx="1">
+            <a:schemeClr val="accent1"/>
+          </a:lnRef>
+          <a:fillRef idx="3">
+            <a:schemeClr val="accent1"/>
+          </a:fillRef>
+          <a:effectRef idx="2">
+            <a:schemeClr val="accent1"/>
+          </a:effectRef>
+          <a:fontRef idx="minor">
+            <a:schemeClr val="lt1"/>
+          </a:fontRef>
+        </p:style>
+        <p:txBody>
+          <a:bodyPr rtlCol="0" anchor="ctr"/>
+          <a:lstStyle/>
+          <a:p>
+            <a:pPr algn="ctr"/>
+          </a:p>
+        </p:txBody>
+      </p:sp>
+      <p:sp>
+        <p:nvSpPr>
+          <p:cNvPr id="84" name="TextBox 83"/>
+          <p:cNvSpPr txBox="1"/>
+          <p:nvPr/>
+        </p:nvSpPr>
+        <p:spPr>
+          <a:xfrm>
+            <a:off x="3262807" y="4398264"/>
+            <a:ext cx="1375371" cy="292608"/>
+          </a:xfrm>
+          <a:prstGeom prst="rect">
+            <a:avLst/>
+          </a:prstGeom>
+          <a:noFill/>
+        </p:spPr>
+        <p:txBody>
+          <a:bodyPr wrap="square">
+            <a:spAutoFit/>
+          </a:bodyPr>
+          <a:lstStyle/>
+          <a:p>
+            <a:pPr algn="ctr"/>
+            <a:r>
+              <a:rPr sz="1300" b="0" i="0">
+                <a:solidFill>
+                  <a:srgbClr val="F0F2F8"/>
+                </a:solidFill>
+              </a:rPr>
+              <a:t>🔗</a:t>
+            </a:r>
+          </a:p>
+        </p:txBody>
+      </p:sp>
+      <p:sp>
+        <p:nvSpPr>
+          <p:cNvPr id="85" name="TextBox 84"/>
+          <p:cNvSpPr txBox="1"/>
+          <p:nvPr/>
+        </p:nvSpPr>
+        <p:spPr>
+          <a:xfrm>
+            <a:off x="3262807" y="4690872"/>
+            <a:ext cx="1375371" cy="201168"/>
+          </a:xfrm>
+          <a:prstGeom prst="rect">
+            <a:avLst/>
+          </a:prstGeom>
+          <a:noFill/>
+        </p:spPr>
+        <p:txBody>
+          <a:bodyPr wrap="square">
+            <a:spAutoFit/>
+          </a:bodyPr>
+          <a:lstStyle/>
+          <a:p>
+            <a:pPr algn="ctr"/>
+            <a:r>
+              <a:rPr sz="700" b="1" i="0">
+                <a:solidFill>
+                  <a:srgbClr val="F0F2F8"/>
+                </a:solidFill>
+              </a:rPr>
+              <a:t>Wiring Harness</a:t>
+            </a:r>
+          </a:p>
+        </p:txBody>
+      </p:sp>
+      <p:sp>
+        <p:nvSpPr>
+          <p:cNvPr id="86" name="TextBox 85"/>
+          <p:cNvSpPr txBox="1"/>
+          <p:nvPr/>
+        </p:nvSpPr>
+        <p:spPr>
+          <a:xfrm>
+            <a:off x="3262807" y="4873752"/>
+            <a:ext cx="1375371" cy="310896"/>
+          </a:xfrm>
+          <a:prstGeom prst="rect">
+            <a:avLst/>
+          </a:prstGeom>
+          <a:noFill/>
+        </p:spPr>
+        <p:txBody>
+          <a:bodyPr wrap="square">
+            <a:spAutoFit/>
+          </a:bodyPr>
+          <a:lstStyle/>
+          <a:p>
+            <a:pPr algn="ctr"/>
+            <a:r>
+              <a:rPr sz="600" b="0" i="0">
+                <a:solidFill>
+                  <a:srgbClr val="5A6380"/>
+                </a:solidFill>
+              </a:rPr>
+              <a:t>Cut-strip-crimp, test, sub-asm</a:t>
+            </a:r>
+          </a:p>
+        </p:txBody>
+      </p:sp>
+      <p:sp>
+        <p:nvSpPr>
+          <p:cNvPr id="87" name="Rectangle 86"/>
+          <p:cNvSpPr/>
+          <p:nvPr/>
+        </p:nvSpPr>
+        <p:spPr>
+          <a:xfrm>
+            <a:off x="4688471" y="4343400"/>
+            <a:ext cx="1375371" cy="1207008"/>
           </a:xfrm>
           <a:prstGeom prst="rect">
             <a:avLst/>
@@ -39975,14 +40122,14 @@
       </p:sp>
       <p:sp>
         <p:nvSpPr>
-          <p:cNvPr id="84" name="TextBox 83"/>
-          <p:cNvSpPr txBox="1"/>
-          <p:nvPr/>
-        </p:nvSpPr>
-        <p:spPr>
-          <a:xfrm>
-            <a:off x="6926188" y="4398264"/>
-            <a:ext cx="1578385" cy="292608"/>
+          <p:cNvPr id="88" name="TextBox 87"/>
+          <p:cNvSpPr txBox="1"/>
+          <p:nvPr/>
+        </p:nvSpPr>
+        <p:spPr>
+          <a:xfrm>
+            <a:off x="4688471" y="4398264"/>
+            <a:ext cx="1375371" cy="292608"/>
           </a:xfrm>
           <a:prstGeom prst="rect">
             <a:avLst/>
@@ -40009,29 +40156,29 @@
       </p:sp>
       <p:sp>
         <p:nvSpPr>
-          <p:cNvPr id="85" name="TextBox 84"/>
-          <p:cNvSpPr txBox="1"/>
-          <p:nvPr/>
-        </p:nvSpPr>
-        <p:spPr>
-          <a:xfrm>
-            <a:off x="6926188" y="4690872"/>
-            <a:ext cx="1578385" cy="201168"/>
-          </a:xfrm>
-          <a:prstGeom prst="rect">
-            <a:avLst/>
-          </a:prstGeom>
-          <a:noFill/>
-        </p:spPr>
-        <p:txBody>
-          <a:bodyPr wrap="square">
-            <a:spAutoFit/>
-          </a:bodyPr>
-          <a:lstStyle/>
-          <a:p>
-            <a:pPr algn="ctr"/>
-            <a:r>
-              <a:rPr sz="750" b="1" i="0">
+          <p:cNvPr id="89" name="TextBox 88"/>
+          <p:cNvSpPr txBox="1"/>
+          <p:nvPr/>
+        </p:nvSpPr>
+        <p:spPr>
+          <a:xfrm>
+            <a:off x="4688471" y="4690872"/>
+            <a:ext cx="1375371" cy="201168"/>
+          </a:xfrm>
+          <a:prstGeom prst="rect">
+            <a:avLst/>
+          </a:prstGeom>
+          <a:noFill/>
+        </p:spPr>
+        <p:txBody>
+          <a:bodyPr wrap="square">
+            <a:spAutoFit/>
+          </a:bodyPr>
+          <a:lstStyle/>
+          <a:p>
+            <a:pPr algn="ctr"/>
+            <a:r>
+              <a:rPr sz="700" b="1" i="0">
                 <a:solidFill>
                   <a:srgbClr val="F0F2F8"/>
                 </a:solidFill>
@@ -40043,29 +40190,29 @@
       </p:sp>
       <p:sp>
         <p:nvSpPr>
-          <p:cNvPr id="86" name="TextBox 85"/>
-          <p:cNvSpPr txBox="1"/>
-          <p:nvPr/>
-        </p:nvSpPr>
-        <p:spPr>
-          <a:xfrm>
-            <a:off x="6926188" y="4873752"/>
-            <a:ext cx="1578385" cy="201168"/>
-          </a:xfrm>
-          <a:prstGeom prst="rect">
-            <a:avLst/>
-          </a:prstGeom>
-          <a:noFill/>
-        </p:spPr>
-        <p:txBody>
-          <a:bodyPr wrap="square">
-            <a:spAutoFit/>
-          </a:bodyPr>
-          <a:lstStyle/>
-          <a:p>
-            <a:pPr algn="ctr"/>
-            <a:r>
-              <a:rPr sz="650" b="0" i="0">
+          <p:cNvPr id="90" name="TextBox 89"/>
+          <p:cNvSpPr txBox="1"/>
+          <p:nvPr/>
+        </p:nvSpPr>
+        <p:spPr>
+          <a:xfrm>
+            <a:off x="4688471" y="4873752"/>
+            <a:ext cx="1375371" cy="310896"/>
+          </a:xfrm>
+          <a:prstGeom prst="rect">
+            <a:avLst/>
+          </a:prstGeom>
+          <a:noFill/>
+        </p:spPr>
+        <p:txBody>
+          <a:bodyPr wrap="square">
+            <a:spAutoFit/>
+          </a:bodyPr>
+          <a:lstStyle/>
+          <a:p>
+            <a:pPr algn="ctr"/>
+            <a:r>
+              <a:rPr sz="600" b="0" i="0">
                 <a:solidFill>
                   <a:srgbClr val="5A6380"/>
                 </a:solidFill>
@@ -40077,14 +40224,14 @@
       </p:sp>
       <p:sp>
         <p:nvSpPr>
-          <p:cNvPr id="87" name="Rectangle 86"/>
+          <p:cNvPr id="91" name="Rectangle 90"/>
           <p:cNvSpPr/>
           <p:nvPr/>
         </p:nvSpPr>
         <p:spPr>
           <a:xfrm>
-            <a:off x="8554865" y="4343400"/>
-            <a:ext cx="1578385" cy="1207008"/>
+            <a:off x="6114135" y="4343400"/>
+            <a:ext cx="1375371" cy="1207008"/>
           </a:xfrm>
           <a:prstGeom prst="rect">
             <a:avLst/>
@@ -40122,14 +40269,14 @@
       </p:sp>
       <p:sp>
         <p:nvSpPr>
-          <p:cNvPr id="88" name="TextBox 87"/>
-          <p:cNvSpPr txBox="1"/>
-          <p:nvPr/>
-        </p:nvSpPr>
-        <p:spPr>
-          <a:xfrm>
-            <a:off x="8554865" y="4398264"/>
-            <a:ext cx="1578385" cy="292608"/>
+          <p:cNvPr id="92" name="TextBox 91"/>
+          <p:cNvSpPr txBox="1"/>
+          <p:nvPr/>
+        </p:nvSpPr>
+        <p:spPr>
+          <a:xfrm>
+            <a:off x="6114135" y="4398264"/>
+            <a:ext cx="1375371" cy="292608"/>
           </a:xfrm>
           <a:prstGeom prst="rect">
             <a:avLst/>
@@ -40156,29 +40303,29 @@
       </p:sp>
       <p:sp>
         <p:nvSpPr>
-          <p:cNvPr id="89" name="TextBox 88"/>
-          <p:cNvSpPr txBox="1"/>
-          <p:nvPr/>
-        </p:nvSpPr>
-        <p:spPr>
-          <a:xfrm>
-            <a:off x="8554865" y="4690872"/>
-            <a:ext cx="1578385" cy="201168"/>
-          </a:xfrm>
-          <a:prstGeom prst="rect">
-            <a:avLst/>
-          </a:prstGeom>
-          <a:noFill/>
-        </p:spPr>
-        <p:txBody>
-          <a:bodyPr wrap="square">
-            <a:spAutoFit/>
-          </a:bodyPr>
-          <a:lstStyle/>
-          <a:p>
-            <a:pPr algn="ctr"/>
-            <a:r>
-              <a:rPr sz="750" b="1" i="0">
+          <p:cNvPr id="93" name="TextBox 92"/>
+          <p:cNvSpPr txBox="1"/>
+          <p:nvPr/>
+        </p:nvSpPr>
+        <p:spPr>
+          <a:xfrm>
+            <a:off x="6114135" y="4690872"/>
+            <a:ext cx="1375371" cy="201168"/>
+          </a:xfrm>
+          <a:prstGeom prst="rect">
+            <a:avLst/>
+          </a:prstGeom>
+          <a:noFill/>
+        </p:spPr>
+        <p:txBody>
+          <a:bodyPr wrap="square">
+            <a:spAutoFit/>
+          </a:bodyPr>
+          <a:lstStyle/>
+          <a:p>
+            <a:pPr algn="ctr"/>
+            <a:r>
+              <a:rPr sz="700" b="1" i="0">
                 <a:solidFill>
                   <a:srgbClr val="F0F2F8"/>
                 </a:solidFill>
@@ -40190,29 +40337,29 @@
       </p:sp>
       <p:sp>
         <p:nvSpPr>
-          <p:cNvPr id="90" name="TextBox 89"/>
-          <p:cNvSpPr txBox="1"/>
-          <p:nvPr/>
-        </p:nvSpPr>
-        <p:spPr>
-          <a:xfrm>
-            <a:off x="8554865" y="4873752"/>
-            <a:ext cx="1578385" cy="201168"/>
-          </a:xfrm>
-          <a:prstGeom prst="rect">
-            <a:avLst/>
-          </a:prstGeom>
-          <a:noFill/>
-        </p:spPr>
-        <p:txBody>
-          <a:bodyPr wrap="square">
-            <a:spAutoFit/>
-          </a:bodyPr>
-          <a:lstStyle/>
-          <a:p>
-            <a:pPr algn="ctr"/>
-            <a:r>
-              <a:rPr sz="650" b="0" i="0">
+          <p:cNvPr id="94" name="TextBox 93"/>
+          <p:cNvSpPr txBox="1"/>
+          <p:nvPr/>
+        </p:nvSpPr>
+        <p:spPr>
+          <a:xfrm>
+            <a:off x="6114135" y="4873752"/>
+            <a:ext cx="1375371" cy="310896"/>
+          </a:xfrm>
+          <a:prstGeom prst="rect">
+            <a:avLst/>
+          </a:prstGeom>
+          <a:noFill/>
+        </p:spPr>
+        <p:txBody>
+          <a:bodyPr wrap="square">
+            <a:spAutoFit/>
+          </a:bodyPr>
+          <a:lstStyle/>
+          <a:p>
+            <a:pPr algn="ctr"/>
+            <a:r>
+              <a:rPr sz="600" b="0" i="0">
                 <a:solidFill>
                   <a:srgbClr val="5A6380"/>
                 </a:solidFill>
@@ -40224,14 +40371,14 @@
       </p:sp>
       <p:sp>
         <p:nvSpPr>
-          <p:cNvPr id="91" name="Rectangle 90"/>
+          <p:cNvPr id="95" name="Rectangle 94"/>
           <p:cNvSpPr/>
           <p:nvPr/>
         </p:nvSpPr>
         <p:spPr>
           <a:xfrm>
-            <a:off x="10183542" y="4343400"/>
-            <a:ext cx="1578385" cy="1207008"/>
+            <a:off x="7539799" y="4343400"/>
+            <a:ext cx="1375371" cy="1207008"/>
           </a:xfrm>
           <a:prstGeom prst="rect">
             <a:avLst/>
@@ -40269,14 +40416,14 @@
       </p:sp>
       <p:sp>
         <p:nvSpPr>
-          <p:cNvPr id="92" name="TextBox 91"/>
-          <p:cNvSpPr txBox="1"/>
-          <p:nvPr/>
-        </p:nvSpPr>
-        <p:spPr>
-          <a:xfrm>
-            <a:off x="10183542" y="4398264"/>
-            <a:ext cx="1578385" cy="292608"/>
+          <p:cNvPr id="96" name="TextBox 95"/>
+          <p:cNvSpPr txBox="1"/>
+          <p:nvPr/>
+        </p:nvSpPr>
+        <p:spPr>
+          <a:xfrm>
+            <a:off x="7539799" y="4398264"/>
+            <a:ext cx="1375371" cy="292608"/>
           </a:xfrm>
           <a:prstGeom prst="rect">
             <a:avLst/>
@@ -40303,29 +40450,29 @@
       </p:sp>
       <p:sp>
         <p:nvSpPr>
-          <p:cNvPr id="93" name="TextBox 92"/>
-          <p:cNvSpPr txBox="1"/>
-          <p:nvPr/>
-        </p:nvSpPr>
-        <p:spPr>
-          <a:xfrm>
-            <a:off x="10183542" y="4690872"/>
-            <a:ext cx="1578385" cy="201168"/>
-          </a:xfrm>
-          <a:prstGeom prst="rect">
-            <a:avLst/>
-          </a:prstGeom>
-          <a:noFill/>
-        </p:spPr>
-        <p:txBody>
-          <a:bodyPr wrap="square">
-            <a:spAutoFit/>
-          </a:bodyPr>
-          <a:lstStyle/>
-          <a:p>
-            <a:pPr algn="ctr"/>
-            <a:r>
-              <a:rPr sz="750" b="1" i="0">
+          <p:cNvPr id="97" name="TextBox 96"/>
+          <p:cNvSpPr txBox="1"/>
+          <p:nvPr/>
+        </p:nvSpPr>
+        <p:spPr>
+          <a:xfrm>
+            <a:off x="7539799" y="4690872"/>
+            <a:ext cx="1375371" cy="201168"/>
+          </a:xfrm>
+          <a:prstGeom prst="rect">
+            <a:avLst/>
+          </a:prstGeom>
+          <a:noFill/>
+        </p:spPr>
+        <p:txBody>
+          <a:bodyPr wrap="square">
+            <a:spAutoFit/>
+          </a:bodyPr>
+          <a:lstStyle/>
+          <a:p>
+            <a:pPr algn="ctr"/>
+            <a:r>
+              <a:rPr sz="700" b="1" i="0">
                 <a:solidFill>
                   <a:srgbClr val="F0F2F8"/>
                 </a:solidFill>
@@ -40337,29 +40484,29 @@
       </p:sp>
       <p:sp>
         <p:nvSpPr>
-          <p:cNvPr id="94" name="TextBox 93"/>
-          <p:cNvSpPr txBox="1"/>
-          <p:nvPr/>
-        </p:nvSpPr>
-        <p:spPr>
-          <a:xfrm>
-            <a:off x="10183542" y="4873752"/>
-            <a:ext cx="1578385" cy="201168"/>
-          </a:xfrm>
-          <a:prstGeom prst="rect">
-            <a:avLst/>
-          </a:prstGeom>
-          <a:noFill/>
-        </p:spPr>
-        <p:txBody>
-          <a:bodyPr wrap="square">
-            <a:spAutoFit/>
-          </a:bodyPr>
-          <a:lstStyle/>
-          <a:p>
-            <a:pPr algn="ctr"/>
-            <a:r>
-              <a:rPr sz="650" b="0" i="0">
+          <p:cNvPr id="98" name="TextBox 97"/>
+          <p:cNvSpPr txBox="1"/>
+          <p:nvPr/>
+        </p:nvSpPr>
+        <p:spPr>
+          <a:xfrm>
+            <a:off x="7539799" y="4873752"/>
+            <a:ext cx="1375371" cy="310896"/>
+          </a:xfrm>
+          <a:prstGeom prst="rect">
+            <a:avLst/>
+          </a:prstGeom>
+          <a:noFill/>
+        </p:spPr>
+        <p:txBody>
+          <a:bodyPr wrap="square">
+            <a:spAutoFit/>
+          </a:bodyPr>
+          <a:lstStyle/>
+          <a:p>
+            <a:pPr algn="ctr"/>
+            <a:r>
+              <a:rPr sz="600" b="0" i="0">
                 <a:solidFill>
                   <a:srgbClr val="5A6380"/>
                 </a:solidFill>

--- a/CostVision-Executive-Presentation.pptx
+++ b/CostVision-Executive-Presentation.pptx
@@ -5983,7 +5983,7 @@
           <a:p>
             <a:pPr algn="l"/>
             <a:r>
-              <a:rPr sz="700" b="1" i="0">
+              <a:rPr sz="750" b="1" i="0">
                 <a:solidFill>
                   <a:srgbClr val="5A6380"/>
                 </a:solidFill>
@@ -6258,7 +6258,7 @@
         <p:spPr>
           <a:xfrm>
             <a:off x="411480" y="1810512"/>
-            <a:ext cx="3547872" cy="1170432"/>
+            <a:ext cx="2773603" cy="1170432"/>
           </a:xfrm>
           <a:prstGeom prst="rect">
             <a:avLst/>
@@ -6346,7 +6346,7 @@
         <p:spPr>
           <a:xfrm>
             <a:off x="539496" y="1901952"/>
-            <a:ext cx="3364992" cy="292608"/>
+            <a:ext cx="2590723" cy="292608"/>
           </a:xfrm>
           <a:prstGeom prst="rect">
             <a:avLst/>
@@ -6365,8 +6365,17 @@
                 <a:solidFill>
                   <a:srgbClr val="F0F2F8"/>
                 </a:solidFill>
-              </a:rPr>
-              <a:t>📦 Material Database</a:t>
+                <a:latin typeface="Segoe UI Emoji"/>
+              </a:rPr>
+              <a:t>📦</a:t>
+            </a:r>
+            <a:r>
+              <a:rPr sz="950" b="1" i="0">
+                <a:solidFill>
+                  <a:srgbClr val="F0F2F8"/>
+                </a:solidFill>
+              </a:rPr>
+              <a:t> Material Database</a:t>
             </a:r>
           </a:p>
         </p:txBody>
@@ -6380,7 +6389,7 @@
         <p:spPr>
           <a:xfrm>
             <a:off x="539496" y="2157984"/>
-            <a:ext cx="3364992" cy="713232"/>
+            <a:ext cx="2590723" cy="713232"/>
           </a:xfrm>
           <a:prstGeom prst="rect">
             <a:avLst/>
@@ -6413,8 +6422,8 @@
         </p:nvSpPr>
         <p:spPr>
           <a:xfrm>
-            <a:off x="4050792" y="1810512"/>
-            <a:ext cx="3547872" cy="1170432"/>
+            <a:off x="3276523" y="1810512"/>
+            <a:ext cx="2773603" cy="1170432"/>
           </a:xfrm>
           <a:prstGeom prst="rect">
             <a:avLst/>
@@ -6458,7 +6467,7 @@
         </p:nvSpPr>
         <p:spPr>
           <a:xfrm>
-            <a:off x="4050792" y="1810512"/>
+            <a:off x="3276523" y="1810512"/>
             <a:ext cx="54864" cy="1170432"/>
           </a:xfrm>
           <a:prstGeom prst="rect">
@@ -6501,8 +6510,8 @@
         </p:nvSpPr>
         <p:spPr>
           <a:xfrm>
-            <a:off x="4178808" y="1901952"/>
-            <a:ext cx="3364992" cy="292608"/>
+            <a:off x="3404539" y="1901952"/>
+            <a:ext cx="2590723" cy="292608"/>
           </a:xfrm>
           <a:prstGeom prst="rect">
             <a:avLst/>
@@ -6521,8 +6530,17 @@
                 <a:solidFill>
                   <a:srgbClr val="F0F2F8"/>
                 </a:solidFill>
-              </a:rPr>
-              <a:t>⚙️ Machine &amp; Rate Library</a:t>
+                <a:latin typeface="Segoe UI Emoji"/>
+              </a:rPr>
+              <a:t>⚙️</a:t>
+            </a:r>
+            <a:r>
+              <a:rPr sz="950" b="1" i="0">
+                <a:solidFill>
+                  <a:srgbClr val="F0F2F8"/>
+                </a:solidFill>
+              </a:rPr>
+              <a:t> Machine &amp; Rate Library</a:t>
             </a:r>
           </a:p>
         </p:txBody>
@@ -6535,8 +6553,8 @@
         </p:nvSpPr>
         <p:spPr>
           <a:xfrm>
-            <a:off x="4178808" y="2157984"/>
-            <a:ext cx="3364992" cy="713232"/>
+            <a:off x="3404539" y="2157984"/>
+            <a:ext cx="2590723" cy="713232"/>
           </a:xfrm>
           <a:prstGeom prst="rect">
             <a:avLst/>
@@ -6569,8 +6587,8 @@
         </p:nvSpPr>
         <p:spPr>
           <a:xfrm>
-            <a:off x="7690104" y="1810512"/>
-            <a:ext cx="3547872" cy="1170432"/>
+            <a:off x="6141567" y="1810512"/>
+            <a:ext cx="2773603" cy="1170432"/>
           </a:xfrm>
           <a:prstGeom prst="rect">
             <a:avLst/>
@@ -6614,7 +6632,7 @@
         </p:nvSpPr>
         <p:spPr>
           <a:xfrm>
-            <a:off x="7690104" y="1810512"/>
+            <a:off x="6141567" y="1810512"/>
             <a:ext cx="54864" cy="1170432"/>
           </a:xfrm>
           <a:prstGeom prst="rect">
@@ -6657,8 +6675,8 @@
         </p:nvSpPr>
         <p:spPr>
           <a:xfrm>
-            <a:off x="7818120" y="1901952"/>
-            <a:ext cx="3364992" cy="292608"/>
+            <a:off x="6269583" y="1901952"/>
+            <a:ext cx="2590723" cy="292608"/>
           </a:xfrm>
           <a:prstGeom prst="rect">
             <a:avLst/>
@@ -6677,8 +6695,17 @@
                 <a:solidFill>
                   <a:srgbClr val="F0F2F8"/>
                 </a:solidFill>
-              </a:rPr>
-              <a:t>🛤️ Routing &amp; Process Logic</a:t>
+                <a:latin typeface="Segoe UI Emoji"/>
+              </a:rPr>
+              <a:t>🛤️</a:t>
+            </a:r>
+            <a:r>
+              <a:rPr sz="950" b="1" i="0">
+                <a:solidFill>
+                  <a:srgbClr val="F0F2F8"/>
+                </a:solidFill>
+              </a:rPr>
+              <a:t> Routing &amp; Process Logic</a:t>
             </a:r>
           </a:p>
         </p:txBody>
@@ -6691,8 +6718,8 @@
         </p:nvSpPr>
         <p:spPr>
           <a:xfrm>
-            <a:off x="7818120" y="2157984"/>
-            <a:ext cx="3364992" cy="713232"/>
+            <a:off x="6269583" y="2157984"/>
+            <a:ext cx="2590723" cy="713232"/>
           </a:xfrm>
           <a:prstGeom prst="rect">
             <a:avLst/>
@@ -6725,8 +6752,8 @@
         </p:nvSpPr>
         <p:spPr>
           <a:xfrm>
-            <a:off x="11329416" y="1810512"/>
-            <a:ext cx="3547872" cy="1170432"/>
+            <a:off x="9006611" y="1810512"/>
+            <a:ext cx="2773603" cy="1170432"/>
           </a:xfrm>
           <a:prstGeom prst="rect">
             <a:avLst/>
@@ -6770,7 +6797,7 @@
         </p:nvSpPr>
         <p:spPr>
           <a:xfrm>
-            <a:off x="11329416" y="1810512"/>
+            <a:off x="9006611" y="1810512"/>
             <a:ext cx="54864" cy="1170432"/>
           </a:xfrm>
           <a:prstGeom prst="rect">
@@ -6813,8 +6840,8 @@
         </p:nvSpPr>
         <p:spPr>
           <a:xfrm>
-            <a:off x="11457432" y="1901952"/>
-            <a:ext cx="3364992" cy="292608"/>
+            <a:off x="9134627" y="1901952"/>
+            <a:ext cx="2590723" cy="292608"/>
           </a:xfrm>
           <a:prstGeom prst="rect">
             <a:avLst/>
@@ -6833,8 +6860,17 @@
                 <a:solidFill>
                   <a:srgbClr val="F0F2F8"/>
                 </a:solidFill>
-              </a:rPr>
-              <a:t>🔩 Tooling &amp; NRE Amortisation</a:t>
+                <a:latin typeface="Segoe UI Emoji"/>
+              </a:rPr>
+              <a:t>🔩</a:t>
+            </a:r>
+            <a:r>
+              <a:rPr sz="950" b="1" i="0">
+                <a:solidFill>
+                  <a:srgbClr val="F0F2F8"/>
+                </a:solidFill>
+              </a:rPr>
+              <a:t> Tooling &amp; NRE Amortisation</a:t>
             </a:r>
           </a:p>
         </p:txBody>
@@ -6847,8 +6883,8 @@
         </p:nvSpPr>
         <p:spPr>
           <a:xfrm>
-            <a:off x="11457432" y="2157984"/>
-            <a:ext cx="3364992" cy="713232"/>
+            <a:off x="9134627" y="2157984"/>
+            <a:ext cx="2590723" cy="713232"/>
           </a:xfrm>
           <a:prstGeom prst="rect">
             <a:avLst/>
@@ -6882,7 +6918,7 @@
         <p:spPr>
           <a:xfrm>
             <a:off x="411480" y="3072384"/>
-            <a:ext cx="3547872" cy="1170432"/>
+            <a:ext cx="2773603" cy="1170432"/>
           </a:xfrm>
           <a:prstGeom prst="rect">
             <a:avLst/>
@@ -6970,7 +7006,7 @@
         <p:spPr>
           <a:xfrm>
             <a:off x="539496" y="3163824"/>
-            <a:ext cx="3364992" cy="292608"/>
+            <a:ext cx="2590723" cy="292608"/>
           </a:xfrm>
           <a:prstGeom prst="rect">
             <a:avLst/>
@@ -6989,8 +7025,17 @@
                 <a:solidFill>
                   <a:srgbClr val="F0F2F8"/>
                 </a:solidFill>
-              </a:rPr>
-              <a:t>📉 Yield &amp; Scrap Models</a:t>
+                <a:latin typeface="Segoe UI Emoji"/>
+              </a:rPr>
+              <a:t>📉</a:t>
+            </a:r>
+            <a:r>
+              <a:rPr sz="950" b="1" i="0">
+                <a:solidFill>
+                  <a:srgbClr val="F0F2F8"/>
+                </a:solidFill>
+              </a:rPr>
+              <a:t> Yield &amp; Scrap Models</a:t>
             </a:r>
           </a:p>
         </p:txBody>
@@ -7004,7 +7049,7 @@
         <p:spPr>
           <a:xfrm>
             <a:off x="539496" y="3419856"/>
-            <a:ext cx="3364992" cy="713232"/>
+            <a:ext cx="2590723" cy="713232"/>
           </a:xfrm>
           <a:prstGeom prst="rect">
             <a:avLst/>
@@ -7037,8 +7082,8 @@
         </p:nvSpPr>
         <p:spPr>
           <a:xfrm>
-            <a:off x="4050792" y="3072384"/>
-            <a:ext cx="3547872" cy="1170432"/>
+            <a:off x="3276523" y="3072384"/>
+            <a:ext cx="2773603" cy="1170432"/>
           </a:xfrm>
           <a:prstGeom prst="rect">
             <a:avLst/>
@@ -7082,7 +7127,7 @@
         </p:nvSpPr>
         <p:spPr>
           <a:xfrm>
-            <a:off x="4050792" y="3072384"/>
+            <a:off x="3276523" y="3072384"/>
             <a:ext cx="54864" cy="1170432"/>
           </a:xfrm>
           <a:prstGeom prst="rect">
@@ -7125,8 +7170,8 @@
         </p:nvSpPr>
         <p:spPr>
           <a:xfrm>
-            <a:off x="4178808" y="3163824"/>
-            <a:ext cx="3364992" cy="292608"/>
+            <a:off x="3404539" y="3163824"/>
+            <a:ext cx="2590723" cy="292608"/>
           </a:xfrm>
           <a:prstGeom prst="rect">
             <a:avLst/>
@@ -7145,8 +7190,17 @@
                 <a:solidFill>
                   <a:srgbClr val="F0F2F8"/>
                 </a:solidFill>
-              </a:rPr>
-              <a:t>🌍 Regional Cost Multipliers</a:t>
+                <a:latin typeface="Segoe UI Emoji"/>
+              </a:rPr>
+              <a:t>🌍</a:t>
+            </a:r>
+            <a:r>
+              <a:rPr sz="950" b="1" i="0">
+                <a:solidFill>
+                  <a:srgbClr val="F0F2F8"/>
+                </a:solidFill>
+              </a:rPr>
+              <a:t> Regional Cost Multipliers</a:t>
             </a:r>
           </a:p>
         </p:txBody>
@@ -7159,8 +7213,8 @@
         </p:nvSpPr>
         <p:spPr>
           <a:xfrm>
-            <a:off x="4178808" y="3419856"/>
-            <a:ext cx="3364992" cy="713232"/>
+            <a:off x="3404539" y="3419856"/>
+            <a:ext cx="2590723" cy="713232"/>
           </a:xfrm>
           <a:prstGeom prst="rect">
             <a:avLst/>
@@ -7193,8 +7247,8 @@
         </p:nvSpPr>
         <p:spPr>
           <a:xfrm>
-            <a:off x="7690104" y="3072384"/>
-            <a:ext cx="3547872" cy="1170432"/>
+            <a:off x="6141567" y="3072384"/>
+            <a:ext cx="2773603" cy="1170432"/>
           </a:xfrm>
           <a:prstGeom prst="rect">
             <a:avLst/>
@@ -7238,7 +7292,7 @@
         </p:nvSpPr>
         <p:spPr>
           <a:xfrm>
-            <a:off x="7690104" y="3072384"/>
+            <a:off x="6141567" y="3072384"/>
             <a:ext cx="54864" cy="1170432"/>
           </a:xfrm>
           <a:prstGeom prst="rect">
@@ -7281,8 +7335,8 @@
         </p:nvSpPr>
         <p:spPr>
           <a:xfrm>
-            <a:off x="7818120" y="3163824"/>
-            <a:ext cx="3364992" cy="292608"/>
+            <a:off x="6269583" y="3163824"/>
+            <a:ext cx="2590723" cy="292608"/>
           </a:xfrm>
           <a:prstGeom prst="rect">
             <a:avLst/>
@@ -7301,8 +7355,17 @@
                 <a:solidFill>
                   <a:srgbClr val="F0F2F8"/>
                 </a:solidFill>
-              </a:rPr>
-              <a:t>📊 Benchmarks &amp; Sensitivity</a:t>
+                <a:latin typeface="Segoe UI Emoji"/>
+              </a:rPr>
+              <a:t>📊</a:t>
+            </a:r>
+            <a:r>
+              <a:rPr sz="950" b="1" i="0">
+                <a:solidFill>
+                  <a:srgbClr val="F0F2F8"/>
+                </a:solidFill>
+              </a:rPr>
+              <a:t> Benchmarks &amp; Sensitivity</a:t>
             </a:r>
           </a:p>
         </p:txBody>
@@ -7315,8 +7378,8 @@
         </p:nvSpPr>
         <p:spPr>
           <a:xfrm>
-            <a:off x="7818120" y="3419856"/>
-            <a:ext cx="3364992" cy="713232"/>
+            <a:off x="6269583" y="3419856"/>
+            <a:ext cx="2590723" cy="713232"/>
           </a:xfrm>
           <a:prstGeom prst="rect">
             <a:avLst/>
@@ -7349,8 +7412,8 @@
         </p:nvSpPr>
         <p:spPr>
           <a:xfrm>
-            <a:off x="11329416" y="3072384"/>
-            <a:ext cx="3547872" cy="1170432"/>
+            <a:off x="9006611" y="3072384"/>
+            <a:ext cx="2773603" cy="1170432"/>
           </a:xfrm>
           <a:prstGeom prst="rect">
             <a:avLst/>
@@ -7394,7 +7457,7 @@
         </p:nvSpPr>
         <p:spPr>
           <a:xfrm>
-            <a:off x="11329416" y="3072384"/>
+            <a:off x="9006611" y="3072384"/>
             <a:ext cx="54864" cy="1170432"/>
           </a:xfrm>
           <a:prstGeom prst="rect">
@@ -7437,8 +7500,8 @@
         </p:nvSpPr>
         <p:spPr>
           <a:xfrm>
-            <a:off x="11457432" y="3163824"/>
-            <a:ext cx="3364992" cy="292608"/>
+            <a:off x="9134627" y="3163824"/>
+            <a:ext cx="2590723" cy="292608"/>
           </a:xfrm>
           <a:prstGeom prst="rect">
             <a:avLst/>
@@ -7457,8 +7520,17 @@
                 <a:solidFill>
                   <a:srgbClr val="F0F2F8"/>
                 </a:solidFill>
-              </a:rPr>
-              <a:t>📉 Learning Curve (Wright's Law)</a:t>
+                <a:latin typeface="Segoe UI Emoji"/>
+              </a:rPr>
+              <a:t>📉</a:t>
+            </a:r>
+            <a:r>
+              <a:rPr sz="950" b="1" i="0">
+                <a:solidFill>
+                  <a:srgbClr val="F0F2F8"/>
+                </a:solidFill>
+              </a:rPr>
+              <a:t> Learning Curve (Wright's Law)</a:t>
             </a:r>
           </a:p>
         </p:txBody>
@@ -7471,8 +7543,8 @@
         </p:nvSpPr>
         <p:spPr>
           <a:xfrm>
-            <a:off x="11457432" y="3419856"/>
-            <a:ext cx="3364992" cy="713232"/>
+            <a:off x="9134627" y="3419856"/>
+            <a:ext cx="2590723" cy="713232"/>
           </a:xfrm>
           <a:prstGeom prst="rect">
             <a:avLst/>
@@ -7506,7 +7578,7 @@
         <p:spPr>
           <a:xfrm>
             <a:off x="411480" y="4334256"/>
-            <a:ext cx="3547872" cy="1170432"/>
+            <a:ext cx="2773603" cy="1170432"/>
           </a:xfrm>
           <a:prstGeom prst="rect">
             <a:avLst/>
@@ -7594,7 +7666,7 @@
         <p:spPr>
           <a:xfrm>
             <a:off x="539496" y="4425696"/>
-            <a:ext cx="3364992" cy="292608"/>
+            <a:ext cx="2590723" cy="292608"/>
           </a:xfrm>
           <a:prstGeom prst="rect">
             <a:avLst/>
@@ -7613,8 +7685,17 @@
                 <a:solidFill>
                   <a:srgbClr val="F0F2F8"/>
                 </a:solidFill>
-              </a:rPr>
-              <a:t>💰 Supplier Quote Comparison</a:t>
+                <a:latin typeface="Segoe UI Emoji"/>
+              </a:rPr>
+              <a:t>💰</a:t>
+            </a:r>
+            <a:r>
+              <a:rPr sz="950" b="1" i="0">
+                <a:solidFill>
+                  <a:srgbClr val="F0F2F8"/>
+                </a:solidFill>
+              </a:rPr>
+              <a:t> Supplier Quote Comparison</a:t>
             </a:r>
           </a:p>
         </p:txBody>
@@ -7628,7 +7709,7 @@
         <p:spPr>
           <a:xfrm>
             <a:off x="539496" y="4681728"/>
-            <a:ext cx="3364992" cy="713232"/>
+            <a:ext cx="2590723" cy="713232"/>
           </a:xfrm>
           <a:prstGeom prst="rect">
             <a:avLst/>
@@ -7661,8 +7742,8 @@
         </p:nvSpPr>
         <p:spPr>
           <a:xfrm>
-            <a:off x="4050792" y="4334256"/>
-            <a:ext cx="3547872" cy="1170432"/>
+            <a:off x="3276523" y="4334256"/>
+            <a:ext cx="2773603" cy="1170432"/>
           </a:xfrm>
           <a:prstGeom prst="rect">
             <a:avLst/>
@@ -7706,7 +7787,7 @@
         </p:nvSpPr>
         <p:spPr>
           <a:xfrm>
-            <a:off x="4050792" y="4334256"/>
+            <a:off x="3276523" y="4334256"/>
             <a:ext cx="54864" cy="1170432"/>
           </a:xfrm>
           <a:prstGeom prst="rect">
@@ -7749,8 +7830,8 @@
         </p:nvSpPr>
         <p:spPr>
           <a:xfrm>
-            <a:off x="4178808" y="4425696"/>
-            <a:ext cx="3364992" cy="292608"/>
+            <a:off x="3404539" y="4425696"/>
+            <a:ext cx="2590723" cy="292608"/>
           </a:xfrm>
           <a:prstGeom prst="rect">
             <a:avLst/>
@@ -7769,8 +7850,17 @@
                 <a:solidFill>
                   <a:srgbClr val="F0F2F8"/>
                 </a:solidFill>
-              </a:rPr>
-              <a:t>🤖 AI-Driven Assumptions</a:t>
+                <a:latin typeface="Segoe UI Emoji"/>
+              </a:rPr>
+              <a:t>🤖</a:t>
+            </a:r>
+            <a:r>
+              <a:rPr sz="950" b="1" i="0">
+                <a:solidFill>
+                  <a:srgbClr val="F0F2F8"/>
+                </a:solidFill>
+              </a:rPr>
+              <a:t> AI-Driven Assumptions</a:t>
             </a:r>
           </a:p>
         </p:txBody>
@@ -7783,8 +7873,8 @@
         </p:nvSpPr>
         <p:spPr>
           <a:xfrm>
-            <a:off x="4178808" y="4681728"/>
-            <a:ext cx="3364992" cy="713232"/>
+            <a:off x="3404539" y="4681728"/>
+            <a:ext cx="2590723" cy="713232"/>
           </a:xfrm>
           <a:prstGeom prst="rect">
             <a:avLst/>
@@ -7902,7 +7992,7 @@
           <a:p>
             <a:pPr algn="l"/>
             <a:r>
-              <a:rPr sz="700" b="1" i="0">
+              <a:rPr sz="750" b="1" i="0">
                 <a:solidFill>
                   <a:srgbClr val="5A6380"/>
                 </a:solidFill>
@@ -8284,8 +8374,17 @@
                 <a:solidFill>
                   <a:srgbClr val="F0F2F8"/>
                 </a:solidFill>
-              </a:rPr>
-              <a:t>📉 Wright's Law Learning Curve</a:t>
+                <a:latin typeface="Segoe UI Emoji"/>
+              </a:rPr>
+              <a:t>📉</a:t>
+            </a:r>
+            <a:r>
+              <a:rPr sz="1000" b="1" i="0">
+                <a:solidFill>
+                  <a:srgbClr val="F0F2F8"/>
+                </a:solidFill>
+              </a:rPr>
+              <a:t> Wright's Law Learning Curve</a:t>
             </a:r>
           </a:p>
         </p:txBody>
@@ -8443,8 +8542,17 @@
                 <a:solidFill>
                   <a:srgbClr val="F0F2F8"/>
                 </a:solidFill>
-              </a:rPr>
-              <a:t>🔗 Assembly BOM Rollup</a:t>
+                <a:latin typeface="Segoe UI Emoji"/>
+              </a:rPr>
+              <a:t>🔗</a:t>
+            </a:r>
+            <a:r>
+              <a:rPr sz="1000" b="1" i="0">
+                <a:solidFill>
+                  <a:srgbClr val="F0F2F8"/>
+                </a:solidFill>
+              </a:rPr>
+              <a:t> Assembly BOM Rollup</a:t>
             </a:r>
           </a:p>
         </p:txBody>
@@ -8603,8 +8711,17 @@
                 <a:solidFill>
                   <a:srgbClr val="F0F2F8"/>
                 </a:solidFill>
-              </a:rPr>
-              <a:t>💰 Supplier Quote Comparison</a:t>
+                <a:latin typeface="Segoe UI Emoji"/>
+              </a:rPr>
+              <a:t>💰</a:t>
+            </a:r>
+            <a:r>
+              <a:rPr sz="950" b="1" i="0">
+                <a:solidFill>
+                  <a:srgbClr val="F0F2F8"/>
+                </a:solidFill>
+              </a:rPr>
+              <a:t> Supplier Quote Comparison</a:t>
             </a:r>
           </a:p>
         </p:txBody>
@@ -8763,8 +8880,17 @@
                 <a:solidFill>
                   <a:srgbClr val="F0F2F8"/>
                 </a:solidFill>
-              </a:rPr>
-              <a:t>📊 Sensitivity Analysis (Tornado Chart)</a:t>
+                <a:latin typeface="Segoe UI Emoji"/>
+              </a:rPr>
+              <a:t>📊</a:t>
+            </a:r>
+            <a:r>
+              <a:rPr sz="950" b="1" i="0">
+                <a:solidFill>
+                  <a:srgbClr val="F0F2F8"/>
+                </a:solidFill>
+              </a:rPr>
+              <a:t> Sensitivity Analysis (Tornado Chart)</a:t>
             </a:r>
           </a:p>
         </p:txBody>
@@ -8922,8 +9048,17 @@
                 <a:solidFill>
                   <a:srgbClr val="F0F2F8"/>
                 </a:solidFill>
-              </a:rPr>
-              <a:t>🧪 Scenario A/B/C Comparison</a:t>
+                <a:latin typeface="Segoe UI Emoji"/>
+              </a:rPr>
+              <a:t>🧪</a:t>
+            </a:r>
+            <a:r>
+              <a:rPr sz="950" b="1" i="0">
+                <a:solidFill>
+                  <a:srgbClr val="F0F2F8"/>
+                </a:solidFill>
+              </a:rPr>
+              <a:t> Scenario A/B/C Comparison</a:t>
             </a:r>
           </a:p>
         </p:txBody>
@@ -9058,7 +9193,7 @@
           <a:p>
             <a:pPr algn="l"/>
             <a:r>
-              <a:rPr sz="700" b="1" i="0">
+              <a:rPr sz="750" b="1" i="0">
                 <a:solidFill>
                   <a:srgbClr val="5A6380"/>
                 </a:solidFill>
@@ -9597,7 +9732,7 @@
           <a:p>
             <a:pPr algn="l"/>
             <a:r>
-              <a:rPr sz="700" b="0" i="0">
+              <a:rPr sz="750" b="0" i="0">
                 <a:solidFill>
                   <a:srgbClr val="5A6380"/>
                 </a:solidFill>
@@ -10339,7 +10474,7 @@
           <a:p>
             <a:pPr algn="l"/>
             <a:r>
-              <a:rPr sz="700" b="1" i="0">
+              <a:rPr sz="750" b="1" i="0">
                 <a:solidFill>
                   <a:srgbClr val="5A6380"/>
                 </a:solidFill>
@@ -12599,7 +12734,7 @@
           <a:p>
             <a:pPr algn="l"/>
             <a:r>
-              <a:rPr sz="700" b="1" i="0">
+              <a:rPr sz="750" b="1" i="0">
                 <a:solidFill>
                   <a:srgbClr val="5A6380"/>
                 </a:solidFill>
@@ -14597,7 +14732,7 @@
           <a:p>
             <a:pPr algn="l"/>
             <a:r>
-              <a:rPr sz="700" b="1" i="0">
+              <a:rPr sz="750" b="1" i="0">
                 <a:solidFill>
                   <a:srgbClr val="5A6380"/>
                 </a:solidFill>
@@ -14979,8 +15114,17 @@
                 <a:solidFill>
                   <a:srgbClr val="F0F2F8"/>
                 </a:solidFill>
-              </a:rPr>
-              <a:t>🔍 Self-Audit — it checks its own homework</a:t>
+                <a:latin typeface="Segoe UI Emoji"/>
+              </a:rPr>
+              <a:t>🔍</a:t>
+            </a:r>
+            <a:r>
+              <a:rPr sz="950" b="1" i="0">
+                <a:solidFill>
+                  <a:srgbClr val="F0F2F8"/>
+                </a:solidFill>
+              </a:rPr>
+              <a:t> Self-Audit — it checks its own homework</a:t>
             </a:r>
           </a:p>
         </p:txBody>
@@ -15135,8 +15279,17 @@
                 <a:solidFill>
                   <a:srgbClr val="F0F2F8"/>
                 </a:solidFill>
-              </a:rPr>
-              <a:t>📈 Calibration &amp; Drift — learns from actuals</a:t>
+                <a:latin typeface="Segoe UI Emoji"/>
+              </a:rPr>
+              <a:t>📈</a:t>
+            </a:r>
+            <a:r>
+              <a:rPr sz="950" b="1" i="0">
+                <a:solidFill>
+                  <a:srgbClr val="F0F2F8"/>
+                </a:solidFill>
+              </a:rPr>
+              <a:t> Calibration &amp; Drift — learns from actuals</a:t>
             </a:r>
           </a:p>
         </p:txBody>
@@ -15291,8 +15444,17 @@
                 <a:solidFill>
                   <a:srgbClr val="F0F2F8"/>
                 </a:solidFill>
-              </a:rPr>
-              <a:t>🛠️ Universal Machine-Sizing — right press, any commodity</a:t>
+                <a:latin typeface="Segoe UI Emoji"/>
+              </a:rPr>
+              <a:t>🛠️</a:t>
+            </a:r>
+            <a:r>
+              <a:rPr sz="950" b="1" i="0">
+                <a:solidFill>
+                  <a:srgbClr val="F0F2F8"/>
+                </a:solidFill>
+              </a:rPr>
+              <a:t> Universal Machine-Sizing — right press, any commodity</a:t>
             </a:r>
           </a:p>
         </p:txBody>
@@ -16456,7 +16618,7 @@
           <a:p>
             <a:pPr algn="l"/>
             <a:r>
-              <a:rPr sz="700" b="1" i="0">
+              <a:rPr sz="750" b="1" i="0">
                 <a:solidFill>
                   <a:srgbClr val="5A6380"/>
                 </a:solidFill>
@@ -18398,7 +18560,7 @@
           <a:p>
             <a:pPr algn="l"/>
             <a:r>
-              <a:rPr sz="700" b="1" i="0">
+              <a:rPr sz="750" b="1" i="0">
                 <a:solidFill>
                   <a:srgbClr val="5A6380"/>
                 </a:solidFill>
@@ -18780,8 +18942,17 @@
                 <a:solidFill>
                   <a:srgbClr val="F0F2F8"/>
                 </a:solidFill>
-              </a:rPr>
-              <a:t>📊 6-Sheet Excel Export</a:t>
+                <a:latin typeface="Segoe UI Emoji"/>
+              </a:rPr>
+              <a:t>📊</a:t>
+            </a:r>
+            <a:r>
+              <a:rPr sz="950" b="1" i="0">
+                <a:solidFill>
+                  <a:srgbClr val="F0F2F8"/>
+                </a:solidFill>
+              </a:rPr>
+              <a:t> 6-Sheet Excel Export</a:t>
             </a:r>
           </a:p>
         </p:txBody>
@@ -18941,8 +19112,17 @@
                 <a:solidFill>
                   <a:srgbClr val="F0F2F8"/>
                 </a:solidFill>
-              </a:rPr>
-              <a:t>📄 Professional PDF Report</a:t>
+                <a:latin typeface="Segoe UI Emoji"/>
+              </a:rPr>
+              <a:t>📄</a:t>
+            </a:r>
+            <a:r>
+              <a:rPr sz="950" b="1" i="0">
+                <a:solidFill>
+                  <a:srgbClr val="F0F2F8"/>
+                </a:solidFill>
+              </a:rPr>
+              <a:t> Professional PDF Report</a:t>
             </a:r>
           </a:p>
         </p:txBody>
@@ -19102,8 +19282,17 @@
                 <a:solidFill>
                   <a:srgbClr val="F0F2F8"/>
                 </a:solidFill>
-              </a:rPr>
-              <a:t>☁️ Cloud Team Sync</a:t>
+                <a:latin typeface="Segoe UI Emoji"/>
+              </a:rPr>
+              <a:t>☁️</a:t>
+            </a:r>
+            <a:r>
+              <a:rPr sz="950" b="1" i="0">
+                <a:solidFill>
+                  <a:srgbClr val="F0F2F8"/>
+                </a:solidFill>
+              </a:rPr>
+              <a:t> Cloud Team Sync</a:t>
             </a:r>
           </a:p>
         </p:txBody>
@@ -19262,8 +19451,17 @@
                 <a:solidFill>
                   <a:srgbClr val="F0F2F8"/>
                 </a:solidFill>
-              </a:rPr>
-              <a:t>📸 Part Photo &amp; Visual Docs</a:t>
+                <a:latin typeface="Segoe UI Emoji"/>
+              </a:rPr>
+              <a:t>📸</a:t>
+            </a:r>
+            <a:r>
+              <a:rPr sz="950" b="1" i="0">
+                <a:solidFill>
+                  <a:srgbClr val="F0F2F8"/>
+                </a:solidFill>
+              </a:rPr>
+              <a:t> Part Photo &amp; Visual Docs</a:t>
             </a:r>
           </a:p>
         </p:txBody>
@@ -19421,8 +19619,17 @@
                 <a:solidFill>
                   <a:srgbClr val="F0F2F8"/>
                 </a:solidFill>
-              </a:rPr>
-              <a:t>🔑 Enterprise Authentication</a:t>
+                <a:latin typeface="Segoe UI Emoji"/>
+              </a:rPr>
+              <a:t>🔑</a:t>
+            </a:r>
+            <a:r>
+              <a:rPr sz="950" b="1" i="0">
+                <a:solidFill>
+                  <a:srgbClr val="F0F2F8"/>
+                </a:solidFill>
+              </a:rPr>
+              <a:t> Enterprise Authentication</a:t>
             </a:r>
           </a:p>
         </p:txBody>
@@ -19580,8 +19787,17 @@
                 <a:solidFill>
                   <a:srgbClr val="F0F2F8"/>
                 </a:solidFill>
-              </a:rPr>
-              <a:t>❓ Help Centre &amp; Support</a:t>
+                <a:latin typeface="Segoe UI Emoji"/>
+              </a:rPr>
+              <a:t>❓</a:t>
+            </a:r>
+            <a:r>
+              <a:rPr sz="950" b="1" i="0">
+                <a:solidFill>
+                  <a:srgbClr val="F0F2F8"/>
+                </a:solidFill>
+              </a:rPr>
+              <a:t> Help Centre &amp; Support</a:t>
             </a:r>
           </a:p>
         </p:txBody>
@@ -19716,7 +19932,7 @@
           <a:p>
             <a:pPr algn="l"/>
             <a:r>
-              <a:rPr sz="700" b="1" i="0">
+              <a:rPr sz="750" b="1" i="0">
                 <a:solidFill>
                   <a:srgbClr val="5A6380"/>
                 </a:solidFill>
@@ -20663,8 +20879,17 @@
                 <a:solidFill>
                   <a:srgbClr val="F0F2F8"/>
                 </a:solidFill>
-              </a:rPr>
-              <a:t>⚡ Speed — 10× Faster</a:t>
+                <a:latin typeface="Segoe UI Emoji"/>
+              </a:rPr>
+              <a:t>⚡</a:t>
+            </a:r>
+            <a:r>
+              <a:rPr sz="950" b="1" i="0">
+                <a:solidFill>
+                  <a:srgbClr val="F0F2F8"/>
+                </a:solidFill>
+              </a:rPr>
+              <a:t> Speed — 10× Faster</a:t>
             </a:r>
           </a:p>
         </p:txBody>
@@ -20819,8 +21044,17 @@
                 <a:solidFill>
                   <a:srgbClr val="F0F2F8"/>
                 </a:solidFill>
-              </a:rPr>
-              <a:t>🎯 Accuracy — Not Estimates</a:t>
+                <a:latin typeface="Segoe UI Emoji"/>
+              </a:rPr>
+              <a:t>🎯</a:t>
+            </a:r>
+            <a:r>
+              <a:rPr sz="950" b="1" i="0">
+                <a:solidFill>
+                  <a:srgbClr val="F0F2F8"/>
+                </a:solidFill>
+              </a:rPr>
+              <a:t> Accuracy — Not Estimates</a:t>
             </a:r>
           </a:p>
         </p:txBody>
@@ -20975,8 +21209,17 @@
                 <a:solidFill>
                   <a:srgbClr val="F0F2F8"/>
                 </a:solidFill>
-              </a:rPr>
-              <a:t>💰 Negotiation Power</a:t>
+                <a:latin typeface="Segoe UI Emoji"/>
+              </a:rPr>
+              <a:t>💰</a:t>
+            </a:r>
+            <a:r>
+              <a:rPr sz="950" b="1" i="0">
+                <a:solidFill>
+                  <a:srgbClr val="F0F2F8"/>
+                </a:solidFill>
+              </a:rPr>
+              <a:t> Negotiation Power</a:t>
             </a:r>
           </a:p>
         </p:txBody>
@@ -21131,8 +21374,17 @@
                 <a:solidFill>
                   <a:srgbClr val="F0F2F8"/>
                 </a:solidFill>
-              </a:rPr>
-              <a:t>📐 DFM at Concept Stage</a:t>
+                <a:latin typeface="Segoe UI Emoji"/>
+              </a:rPr>
+              <a:t>📐</a:t>
+            </a:r>
+            <a:r>
+              <a:rPr sz="950" b="1" i="0">
+                <a:solidFill>
+                  <a:srgbClr val="F0F2F8"/>
+                </a:solidFill>
+              </a:rPr>
+              <a:t> DFM at Concept Stage</a:t>
             </a:r>
           </a:p>
         </p:txBody>
@@ -21287,8 +21539,17 @@
                 <a:solidFill>
                   <a:srgbClr val="F0F2F8"/>
                 </a:solidFill>
-              </a:rPr>
-              <a:t>🌍 Regional Arbitrage</a:t>
+                <a:latin typeface="Segoe UI Emoji"/>
+              </a:rPr>
+              <a:t>🌍</a:t>
+            </a:r>
+            <a:r>
+              <a:rPr sz="950" b="1" i="0">
+                <a:solidFill>
+                  <a:srgbClr val="F0F2F8"/>
+                </a:solidFill>
+              </a:rPr>
+              <a:t> Regional Arbitrage</a:t>
             </a:r>
           </a:p>
         </p:txBody>
@@ -21443,8 +21704,17 @@
                 <a:solidFill>
                   <a:srgbClr val="F0F2F8"/>
                 </a:solidFill>
-              </a:rPr>
-              <a:t>📊 Standardised Methodology</a:t>
+                <a:latin typeface="Segoe UI Emoji"/>
+              </a:rPr>
+              <a:t>📊</a:t>
+            </a:r>
+            <a:r>
+              <a:rPr sz="950" b="1" i="0">
+                <a:solidFill>
+                  <a:srgbClr val="F0F2F8"/>
+                </a:solidFill>
+              </a:rPr>
+              <a:t> Standardised Methodology</a:t>
             </a:r>
           </a:p>
         </p:txBody>
@@ -21599,8 +21869,17 @@
                 <a:solidFill>
                   <a:srgbClr val="F0F2F8"/>
                 </a:solidFill>
-              </a:rPr>
-              <a:t>📉 Volume Optimisation</a:t>
+                <a:latin typeface="Segoe UI Emoji"/>
+              </a:rPr>
+              <a:t>📉</a:t>
+            </a:r>
+            <a:r>
+              <a:rPr sz="950" b="1" i="0">
+                <a:solidFill>
+                  <a:srgbClr val="F0F2F8"/>
+                </a:solidFill>
+              </a:rPr>
+              <a:t> Volume Optimisation</a:t>
             </a:r>
           </a:p>
         </p:txBody>
@@ -21755,8 +22034,17 @@
                 <a:solidFill>
                   <a:srgbClr val="F0F2F8"/>
                 </a:solidFill>
-              </a:rPr>
-              <a:t>☁️ Team Collaboration</a:t>
+                <a:latin typeface="Segoe UI Emoji"/>
+              </a:rPr>
+              <a:t>☁️</a:t>
+            </a:r>
+            <a:r>
+              <a:rPr sz="950" b="1" i="0">
+                <a:solidFill>
+                  <a:srgbClr val="F0F2F8"/>
+                </a:solidFill>
+              </a:rPr>
+              <a:t> Team Collaboration</a:t>
             </a:r>
           </a:p>
         </p:txBody>
@@ -21888,7 +22176,7 @@
           <a:p>
             <a:pPr algn="l"/>
             <a:r>
-              <a:rPr sz="700" b="1" i="0">
+              <a:rPr sz="750" b="1" i="0">
                 <a:solidFill>
                   <a:srgbClr val="5A6380"/>
                 </a:solidFill>
@@ -22270,8 +22558,17 @@
                 <a:solidFill>
                   <a:srgbClr val="10B981"/>
                 </a:solidFill>
-              </a:rPr>
-              <a:t>📍 Current Capabilities — Live Today</a:t>
+                <a:latin typeface="Segoe UI Emoji"/>
+              </a:rPr>
+              <a:t>📍</a:t>
+            </a:r>
+            <a:r>
+              <a:rPr sz="950" b="1" i="0">
+                <a:solidFill>
+                  <a:srgbClr val="10B981"/>
+                </a:solidFill>
+              </a:rPr>
+              <a:t> Current Capabilities — Live Today</a:t>
             </a:r>
           </a:p>
         </p:txBody>
@@ -23870,8 +24167,17 @@
                 <a:solidFill>
                   <a:srgbClr val="10B981"/>
                 </a:solidFill>
-              </a:rPr>
-              <a:t>🚀  Pilot Rollout — Next Steps</a:t>
+                <a:latin typeface="Segoe UI Emoji"/>
+              </a:rPr>
+              <a:t>🚀</a:t>
+            </a:r>
+            <a:r>
+              <a:rPr sz="900" b="1" i="0">
+                <a:solidFill>
+                  <a:srgbClr val="10B981"/>
+                </a:solidFill>
+              </a:rPr>
+              <a:t>  Pilot Rollout — Next Steps</a:t>
             </a:r>
           </a:p>
         </p:txBody>
@@ -24085,7 +24391,7 @@
           <a:p>
             <a:pPr algn="l"/>
             <a:r>
-              <a:rPr sz="700" b="1" i="0">
+              <a:rPr sz="750" b="1" i="0">
                 <a:solidFill>
                   <a:srgbClr val="5A6380"/>
                 </a:solidFill>
@@ -24623,8 +24929,17 @@
                 <a:solidFill>
                   <a:srgbClr val="F0F2F8"/>
                 </a:solidFill>
-              </a:rPr>
-              <a:t>🔒  Supplier Dependency</a:t>
+                <a:latin typeface="Segoe UI Emoji"/>
+              </a:rPr>
+              <a:t>🔒</a:t>
+            </a:r>
+            <a:r>
+              <a:rPr sz="950" b="1" i="0">
+                <a:solidFill>
+                  <a:srgbClr val="F0F2F8"/>
+                </a:solidFill>
+              </a:rPr>
+              <a:t>  Supplier Dependency</a:t>
             </a:r>
           </a:p>
         </p:txBody>
@@ -24779,8 +25094,17 @@
                 <a:solidFill>
                   <a:srgbClr val="F0F2F8"/>
                 </a:solidFill>
-              </a:rPr>
-              <a:t>📊  Inconsistent Methodology</a:t>
+                <a:latin typeface="Segoe UI Emoji"/>
+              </a:rPr>
+              <a:t>📊</a:t>
+            </a:r>
+            <a:r>
+              <a:rPr sz="950" b="1" i="0">
+                <a:solidFill>
+                  <a:srgbClr val="F0F2F8"/>
+                </a:solidFill>
+              </a:rPr>
+              <a:t>  Inconsistent Methodology</a:t>
             </a:r>
           </a:p>
         </p:txBody>
@@ -24935,8 +25259,17 @@
                 <a:solidFill>
                   <a:srgbClr val="F0F2F8"/>
                 </a:solidFill>
-              </a:rPr>
-              <a:t>🌍  No Regional Visibility</a:t>
+                <a:latin typeface="Segoe UI Emoji"/>
+              </a:rPr>
+              <a:t>🌍</a:t>
+            </a:r>
+            <a:r>
+              <a:rPr sz="950" b="1" i="0">
+                <a:solidFill>
+                  <a:srgbClr val="F0F2F8"/>
+                </a:solidFill>
+              </a:rPr>
+              <a:t>  No Regional Visibility</a:t>
             </a:r>
           </a:p>
         </p:txBody>
@@ -25091,8 +25424,17 @@
                 <a:solidFill>
                   <a:srgbClr val="F0F2F8"/>
                 </a:solidFill>
-              </a:rPr>
-              <a:t>🎯  Late-Stage Cost Surprises</a:t>
+                <a:latin typeface="Segoe UI Emoji"/>
+              </a:rPr>
+              <a:t>🎯</a:t>
+            </a:r>
+            <a:r>
+              <a:rPr sz="950" b="1" i="0">
+                <a:solidFill>
+                  <a:srgbClr val="F0F2F8"/>
+                </a:solidFill>
+              </a:rPr>
+              <a:t>  Late-Stage Cost Surprises</a:t>
             </a:r>
           </a:p>
         </p:txBody>
@@ -25247,8 +25589,17 @@
                 <a:solidFill>
                   <a:srgbClr val="F0F2F8"/>
                 </a:solidFill>
-              </a:rPr>
-              <a:t>💸  No Supplier Quote Benchmark</a:t>
+                <a:latin typeface="Segoe UI Emoji"/>
+              </a:rPr>
+              <a:t>💸</a:t>
+            </a:r>
+            <a:r>
+              <a:rPr sz="950" b="1" i="0">
+                <a:solidFill>
+                  <a:srgbClr val="F0F2F8"/>
+                </a:solidFill>
+              </a:rPr>
+              <a:t>  No Supplier Quote Benchmark</a:t>
             </a:r>
           </a:p>
         </p:txBody>
@@ -25493,7 +25844,7 @@
           <a:p>
             <a:pPr algn="l"/>
             <a:r>
-              <a:rPr sz="700" b="1" i="0">
+              <a:rPr sz="750" b="1" i="0">
                 <a:solidFill>
                   <a:srgbClr val="5A6380"/>
                 </a:solidFill>
@@ -25875,8 +26226,17 @@
                 <a:solidFill>
                   <a:srgbClr val="F0F2F8"/>
                 </a:solidFill>
-              </a:rPr>
-              <a:t>🤖  AI Agent (Natural Language)</a:t>
+                <a:latin typeface="Segoe UI Emoji"/>
+              </a:rPr>
+              <a:t>🤖</a:t>
+            </a:r>
+            <a:r>
+              <a:rPr sz="950" b="1" i="0">
+                <a:solidFill>
+                  <a:srgbClr val="F0F2F8"/>
+                </a:solidFill>
+              </a:rPr>
+              <a:t>  AI Agent (Natural Language)</a:t>
             </a:r>
           </a:p>
         </p:txBody>
@@ -26031,8 +26391,17 @@
                 <a:solidFill>
                   <a:srgbClr val="F0F2F8"/>
                 </a:solidFill>
-              </a:rPr>
-              <a:t>📐  CAD-to-Cost Automation</a:t>
+                <a:latin typeface="Segoe UI Emoji"/>
+              </a:rPr>
+              <a:t>📐</a:t>
+            </a:r>
+            <a:r>
+              <a:rPr sz="950" b="1" i="0">
+                <a:solidFill>
+                  <a:srgbClr val="F0F2F8"/>
+                </a:solidFill>
+              </a:rPr>
+              <a:t>  CAD-to-Cost Automation</a:t>
             </a:r>
           </a:p>
         </p:txBody>
@@ -26187,8 +26556,17 @@
                 <a:solidFill>
                   <a:srgbClr val="F0F2F8"/>
                 </a:solidFill>
-              </a:rPr>
-              <a:t>🧠  21 Engineering-Grade Cost Models</a:t>
+                <a:latin typeface="Segoe UI Emoji"/>
+              </a:rPr>
+              <a:t>🧠</a:t>
+            </a:r>
+            <a:r>
+              <a:rPr sz="950" b="1" i="0">
+                <a:solidFill>
+                  <a:srgbClr val="F0F2F8"/>
+                </a:solidFill>
+              </a:rPr>
+              <a:t>  21 Engineering-Grade Cost Models</a:t>
             </a:r>
           </a:p>
         </p:txBody>
@@ -26343,8 +26721,17 @@
                 <a:solidFill>
                   <a:srgbClr val="F0F2F8"/>
                 </a:solidFill>
-              </a:rPr>
-              <a:t>🔗  Assembly BOM Rollup</a:t>
+                <a:latin typeface="Segoe UI Emoji"/>
+              </a:rPr>
+              <a:t>🔗</a:t>
+            </a:r>
+            <a:r>
+              <a:rPr sz="950" b="1" i="0">
+                <a:solidFill>
+                  <a:srgbClr val="F0F2F8"/>
+                </a:solidFill>
+              </a:rPr>
+              <a:t>  Assembly BOM Rollup</a:t>
             </a:r>
           </a:p>
         </p:txBody>
@@ -26499,8 +26886,17 @@
                 <a:solidFill>
                   <a:srgbClr val="F0F2F8"/>
                 </a:solidFill>
-              </a:rPr>
-              <a:t>📉  Learning Curve / Wright's Law</a:t>
+                <a:latin typeface="Segoe UI Emoji"/>
+              </a:rPr>
+              <a:t>📉</a:t>
+            </a:r>
+            <a:r>
+              <a:rPr sz="950" b="1" i="0">
+                <a:solidFill>
+                  <a:srgbClr val="F0F2F8"/>
+                </a:solidFill>
+              </a:rPr>
+              <a:t>  Learning Curve / Wright's Law</a:t>
             </a:r>
           </a:p>
         </p:txBody>
@@ -26655,8 +27051,17 @@
                 <a:solidFill>
                   <a:srgbClr val="F0F2F8"/>
                 </a:solidFill>
-              </a:rPr>
-              <a:t>💰  Supplier Quote Comparison</a:t>
+                <a:latin typeface="Segoe UI Emoji"/>
+              </a:rPr>
+              <a:t>💰</a:t>
+            </a:r>
+            <a:r>
+              <a:rPr sz="950" b="1" i="0">
+                <a:solidFill>
+                  <a:srgbClr val="F0F2F8"/>
+                </a:solidFill>
+              </a:rPr>
+              <a:t>  Supplier Quote Comparison</a:t>
             </a:r>
           </a:p>
         </p:txBody>
@@ -26811,8 +27216,17 @@
                 <a:solidFill>
                   <a:srgbClr val="F0F2F8"/>
                 </a:solidFill>
-              </a:rPr>
-              <a:t>🔬  DFM / DFA Intelligence</a:t>
+                <a:latin typeface="Segoe UI Emoji"/>
+              </a:rPr>
+              <a:t>🔬</a:t>
+            </a:r>
+            <a:r>
+              <a:rPr sz="950" b="1" i="0">
+                <a:solidFill>
+                  <a:srgbClr val="F0F2F8"/>
+                </a:solidFill>
+              </a:rPr>
+              <a:t>  DFM / DFA Intelligence</a:t>
             </a:r>
           </a:p>
         </p:txBody>
@@ -26967,8 +27381,17 @@
                 <a:solidFill>
                   <a:srgbClr val="F0F2F8"/>
                 </a:solidFill>
-              </a:rPr>
-              <a:t>🌍  20 Regions · 10 Currencies</a:t>
+                <a:latin typeface="Segoe UI Emoji"/>
+              </a:rPr>
+              <a:t>🌍</a:t>
+            </a:r>
+            <a:r>
+              <a:rPr sz="950" b="1" i="0">
+                <a:solidFill>
+                  <a:srgbClr val="F0F2F8"/>
+                </a:solidFill>
+              </a:rPr>
+              <a:t>  20 Regions · 10 Currencies</a:t>
             </a:r>
           </a:p>
         </p:txBody>
@@ -27123,8 +27546,17 @@
                 <a:solidFill>
                   <a:srgbClr val="F0F2F8"/>
                 </a:solidFill>
-              </a:rPr>
-              <a:t>📈  Export, Scenarios &amp; Team Sync</a:t>
+                <a:latin typeface="Segoe UI Emoji"/>
+              </a:rPr>
+              <a:t>📈</a:t>
+            </a:r>
+            <a:r>
+              <a:rPr sz="950" b="1" i="0">
+                <a:solidFill>
+                  <a:srgbClr val="F0F2F8"/>
+                </a:solidFill>
+              </a:rPr>
+              <a:t>  Export, Scenarios &amp; Team Sync</a:t>
             </a:r>
           </a:p>
         </p:txBody>
@@ -27256,7 +27688,7 @@
           <a:p>
             <a:pPr algn="l"/>
             <a:r>
-              <a:rPr sz="700" b="1" i="0">
+              <a:rPr sz="750" b="1" i="0">
                 <a:solidFill>
                   <a:srgbClr val="5A6380"/>
                 </a:solidFill>
@@ -28635,7 +29067,7 @@
         </p:nvSpPr>
         <p:spPr>
           <a:xfrm>
-            <a:off x="6035040" y="6208776"/>
+            <a:off x="6035040" y="5833872"/>
             <a:ext cx="5760720" cy="228600"/>
           </a:xfrm>
           <a:prstGeom prst="rect">
@@ -28669,7 +29101,7 @@
         </p:nvSpPr>
         <p:spPr>
           <a:xfrm>
-            <a:off x="6126480" y="6473952"/>
+            <a:off x="6126480" y="6099048"/>
             <a:ext cx="2651760" cy="228600"/>
           </a:xfrm>
           <a:prstGeom prst="rect">
@@ -28689,8 +29121,17 @@
                 <a:solidFill>
                   <a:srgbClr val="9AA3B8"/>
                 </a:solidFill>
-              </a:rPr>
-              <a:t>⚡ Zero manual form-filling</a:t>
+                <a:latin typeface="Segoe UI Emoji"/>
+              </a:rPr>
+              <a:t>⚡</a:t>
+            </a:r>
+            <a:r>
+              <a:rPr sz="750" b="0" i="0">
+                <a:solidFill>
+                  <a:srgbClr val="9AA3B8"/>
+                </a:solidFill>
+              </a:rPr>
+              <a:t> Zero manual form-filling</a:t>
             </a:r>
           </a:p>
         </p:txBody>
@@ -28703,7 +29144,7 @@
         </p:nvSpPr>
         <p:spPr>
           <a:xfrm>
-            <a:off x="8869680" y="6473952"/>
+            <a:off x="8869680" y="6099048"/>
             <a:ext cx="2651760" cy="228600"/>
           </a:xfrm>
           <a:prstGeom prst="rect">
@@ -28723,8 +29164,17 @@
                 <a:solidFill>
                   <a:srgbClr val="9AA3B8"/>
                 </a:solidFill>
-              </a:rPr>
-              <a:t>🎯 Works for any commodity</a:t>
+                <a:latin typeface="Segoe UI Emoji"/>
+              </a:rPr>
+              <a:t>🎯</a:t>
+            </a:r>
+            <a:r>
+              <a:rPr sz="750" b="0" i="0">
+                <a:solidFill>
+                  <a:srgbClr val="9AA3B8"/>
+                </a:solidFill>
+              </a:rPr>
+              <a:t> Works for any commodity</a:t>
             </a:r>
           </a:p>
         </p:txBody>
@@ -28737,7 +29187,7 @@
         </p:nvSpPr>
         <p:spPr>
           <a:xfrm>
-            <a:off x="6126480" y="6748272"/>
+            <a:off x="6126480" y="6373368"/>
             <a:ext cx="2651760" cy="228600"/>
           </a:xfrm>
           <a:prstGeom prst="rect">
@@ -28771,7 +29221,7 @@
         </p:nvSpPr>
         <p:spPr>
           <a:xfrm>
-            <a:off x="8869680" y="6748272"/>
+            <a:off x="8869680" y="6373368"/>
             <a:ext cx="2651760" cy="228600"/>
           </a:xfrm>
           <a:prstGeom prst="rect">
@@ -28791,8 +29241,17 @@
                 <a:solidFill>
                   <a:srgbClr val="9AA3B8"/>
                 </a:solidFill>
-              </a:rPr>
-              <a:t>📊 Full audit trail</a:t>
+                <a:latin typeface="Segoe UI Emoji"/>
+              </a:rPr>
+              <a:t>📊</a:t>
+            </a:r>
+            <a:r>
+              <a:rPr sz="750" b="0" i="0">
+                <a:solidFill>
+                  <a:srgbClr val="9AA3B8"/>
+                </a:solidFill>
+              </a:rPr>
+              <a:t> Full audit trail</a:t>
             </a:r>
           </a:p>
         </p:txBody>
@@ -28890,7 +29349,7 @@
           <a:p>
             <a:pPr algn="l"/>
             <a:r>
-              <a:rPr sz="700" b="1" i="0">
+              <a:rPr sz="750" b="1" i="0">
                 <a:solidFill>
                   <a:srgbClr val="5A6380"/>
                 </a:solidFill>
@@ -30347,7 +30806,7 @@
           <a:p>
             <a:pPr algn="l"/>
             <a:r>
-              <a:rPr sz="700" b="0" i="0">
+              <a:rPr sz="750" b="0" i="0">
                 <a:solidFill>
                   <a:srgbClr val="5A6380"/>
                 </a:solidFill>
@@ -30460,7 +30919,7 @@
           <a:p>
             <a:pPr algn="l"/>
             <a:r>
-              <a:rPr sz="700" b="0" i="0">
+              <a:rPr sz="750" b="0" i="0">
                 <a:solidFill>
                   <a:srgbClr val="5A6380"/>
                 </a:solidFill>
@@ -30573,7 +31032,7 @@
           <a:p>
             <a:pPr algn="l"/>
             <a:r>
-              <a:rPr sz="700" b="0" i="0">
+              <a:rPr sz="750" b="0" i="0">
                 <a:solidFill>
                   <a:srgbClr val="5A6380"/>
                 </a:solidFill>
@@ -30686,7 +31145,7 @@
           <a:p>
             <a:pPr algn="l"/>
             <a:r>
-              <a:rPr sz="700" b="0" i="0">
+              <a:rPr sz="750" b="0" i="0">
                 <a:solidFill>
                   <a:srgbClr val="5A6380"/>
                 </a:solidFill>
@@ -30799,7 +31258,7 @@
           <a:p>
             <a:pPr algn="l"/>
             <a:r>
-              <a:rPr sz="700" b="0" i="0">
+              <a:rPr sz="750" b="0" i="0">
                 <a:solidFill>
                   <a:srgbClr val="5A6380"/>
                 </a:solidFill>
@@ -30912,7 +31371,7 @@
           <a:p>
             <a:pPr algn="l"/>
             <a:r>
-              <a:rPr sz="700" b="0" i="0">
+              <a:rPr sz="750" b="0" i="0">
                 <a:solidFill>
                   <a:srgbClr val="5A6380"/>
                 </a:solidFill>
@@ -31308,7 +31767,7 @@
           <a:p>
             <a:pPr algn="l"/>
             <a:r>
-              <a:rPr sz="700" b="0" i="0">
+              <a:rPr sz="750" b="0" i="0">
                 <a:solidFill>
                   <a:srgbClr val="5A6380"/>
                 </a:solidFill>
@@ -31524,7 +31983,7 @@
           <a:p>
             <a:pPr algn="l"/>
             <a:r>
-              <a:rPr sz="700" b="1" i="0">
+              <a:rPr sz="750" b="1" i="0">
                 <a:solidFill>
                   <a:srgbClr val="5A6380"/>
                 </a:solidFill>
@@ -32824,7 +33283,7 @@
           <a:p>
             <a:pPr algn="l"/>
             <a:r>
-              <a:rPr sz="700" b="1" i="0">
+              <a:rPr sz="750" b="1" i="0">
                 <a:solidFill>
                   <a:srgbClr val="5A6380"/>
                 </a:solidFill>
@@ -33692,8 +34151,17 @@
                 <a:solidFill>
                   <a:srgbClr val="F0F2F8"/>
                 </a:solidFill>
-              </a:rPr>
-              <a:t>⚙  Worked example — Spur Gear (m3 · z38)</a:t>
+                <a:latin typeface="Segoe UI Emoji"/>
+              </a:rPr>
+              <a:t>⚙</a:t>
+            </a:r>
+            <a:r>
+              <a:rPr sz="1000" b="1" i="0">
+                <a:solidFill>
+                  <a:srgbClr val="F0F2F8"/>
+                </a:solidFill>
+              </a:rPr>
+              <a:t>  Worked example — Spur Gear (m3 · z38)</a:t>
             </a:r>
           </a:p>
         </p:txBody>
@@ -33854,8 +34322,17 @@
                 <a:solidFill>
                   <a:srgbClr val="10B981"/>
                 </a:solidFill>
-              </a:rPr>
-              <a:t>🔒  The golden rule</a:t>
+                <a:latin typeface="Segoe UI Emoji"/>
+              </a:rPr>
+              <a:t>🔒</a:t>
+            </a:r>
+            <a:r>
+              <a:rPr sz="1000" b="1" i="0">
+                <a:solidFill>
+                  <a:srgbClr val="10B981"/>
+                </a:solidFill>
+              </a:rPr>
+              <a:t>  The golden rule</a:t>
             </a:r>
           </a:p>
         </p:txBody>
@@ -33987,7 +34464,7 @@
           <a:p>
             <a:pPr algn="l"/>
             <a:r>
-              <a:rPr sz="700" b="1" i="0">
+              <a:rPr sz="750" b="1" i="0">
                 <a:solidFill>
                   <a:srgbClr val="5A6380"/>
                 </a:solidFill>
@@ -34327,7 +34804,58 @@
                   <a:srgbClr val="9AA3B8"/>
                 </a:solidFill>
               </a:rPr>
-              <a:t>Entry Point A: 🤖 AI Agent (plain English description)   |   Entry Point B: 📐 CAD / Photo Upload   |   Entry Point C: ✏️ Manual Form Entry</a:t>
+              <a:t>Entry Point A: </a:t>
+            </a:r>
+            <a:r>
+              <a:rPr sz="900" b="0" i="0">
+                <a:solidFill>
+                  <a:srgbClr val="9AA3B8"/>
+                </a:solidFill>
+                <a:latin typeface="Segoe UI Emoji"/>
+              </a:rPr>
+              <a:t>🤖</a:t>
+            </a:r>
+            <a:r>
+              <a:rPr sz="900" b="0" i="0">
+                <a:solidFill>
+                  <a:srgbClr val="9AA3B8"/>
+                </a:solidFill>
+              </a:rPr>
+              <a:t> AI Agent (plain English description)   |   Entry Point B: </a:t>
+            </a:r>
+            <a:r>
+              <a:rPr sz="900" b="0" i="0">
+                <a:solidFill>
+                  <a:srgbClr val="9AA3B8"/>
+                </a:solidFill>
+                <a:latin typeface="Segoe UI Emoji"/>
+              </a:rPr>
+              <a:t>📐</a:t>
+            </a:r>
+            <a:r>
+              <a:rPr sz="900" b="0" i="0">
+                <a:solidFill>
+                  <a:srgbClr val="9AA3B8"/>
+                </a:solidFill>
+              </a:rPr>
+              <a:t> CAD / Photo Upload   |   Entry Point C: </a:t>
+            </a:r>
+            <a:r>
+              <a:rPr sz="900" b="0" i="0">
+                <a:solidFill>
+                  <a:srgbClr val="9AA3B8"/>
+                </a:solidFill>
+                <a:latin typeface="Segoe UI Emoji"/>
+              </a:rPr>
+              <a:t>✏️</a:t>
+            </a:r>
+            <a:r>
+              <a:rPr sz="900" b="0" i="0">
+                <a:solidFill>
+                  <a:srgbClr val="9AA3B8"/>
+                </a:solidFill>
+              </a:rPr>
+              <a:t> Manual Form Entry</a:t>
             </a:r>
           </a:p>
         </p:txBody>
@@ -34482,6 +35010,7 @@
                 <a:solidFill>
                   <a:srgbClr val="F0F2F8"/>
                 </a:solidFill>
+                <a:latin typeface="Segoe UI Emoji"/>
               </a:rPr>
               <a:t>🏭</a:t>
             </a:r>
@@ -34547,7 +35076,7 @@
           <a:p>
             <a:pPr algn="ctr"/>
             <a:r>
-              <a:rPr sz="700" b="0" i="0">
+              <a:rPr sz="750" b="0" i="0">
                 <a:solidFill>
                   <a:srgbClr val="9AA3B8"/>
                 </a:solidFill>
@@ -34741,6 +35270,7 @@
                 <a:solidFill>
                   <a:srgbClr val="F0F2F8"/>
                 </a:solidFill>
+                <a:latin typeface="Segoe UI Emoji"/>
               </a:rPr>
               <a:t>🤖</a:t>
             </a:r>
@@ -34806,7 +35336,7 @@
           <a:p>
             <a:pPr algn="ctr"/>
             <a:r>
-              <a:rPr sz="700" b="0" i="0">
+              <a:rPr sz="750" b="0" i="0">
                 <a:solidFill>
                   <a:srgbClr val="9AA3B8"/>
                 </a:solidFill>
@@ -35000,6 +35530,7 @@
                 <a:solidFill>
                   <a:srgbClr val="F0F2F8"/>
                 </a:solidFill>
+                <a:latin typeface="Segoe UI Emoji"/>
               </a:rPr>
               <a:t>🔍</a:t>
             </a:r>
@@ -35065,7 +35596,7 @@
           <a:p>
             <a:pPr algn="ctr"/>
             <a:r>
-              <a:rPr sz="700" b="0" i="0">
+              <a:rPr sz="750" b="0" i="0">
                 <a:solidFill>
                   <a:srgbClr val="9AA3B8"/>
                 </a:solidFill>
@@ -35259,6 +35790,7 @@
                 <a:solidFill>
                   <a:srgbClr val="F0F2F8"/>
                 </a:solidFill>
+                <a:latin typeface="Segoe UI Emoji"/>
               </a:rPr>
               <a:t>🛤️</a:t>
             </a:r>
@@ -35324,7 +35856,7 @@
           <a:p>
             <a:pPr algn="ctr"/>
             <a:r>
-              <a:rPr sz="700" b="0" i="0">
+              <a:rPr sz="750" b="0" i="0">
                 <a:solidFill>
                   <a:srgbClr val="9AA3B8"/>
                 </a:solidFill>
@@ -35518,6 +36050,7 @@
                 <a:solidFill>
                   <a:srgbClr val="F0F2F8"/>
                 </a:solidFill>
+                <a:latin typeface="Segoe UI Emoji"/>
               </a:rPr>
               <a:t>⚙️</a:t>
             </a:r>
@@ -35583,7 +36116,7 @@
           <a:p>
             <a:pPr algn="ctr"/>
             <a:r>
-              <a:rPr sz="700" b="0" i="0">
+              <a:rPr sz="750" b="0" i="0">
                 <a:solidFill>
                   <a:srgbClr val="9AA3B8"/>
                 </a:solidFill>
@@ -35777,6 +36310,7 @@
                 <a:solidFill>
                   <a:srgbClr val="F0F2F8"/>
                 </a:solidFill>
+                <a:latin typeface="Segoe UI Emoji"/>
               </a:rPr>
               <a:t>💡</a:t>
             </a:r>
@@ -35842,7 +36376,7 @@
           <a:p>
             <a:pPr algn="ctr"/>
             <a:r>
-              <a:rPr sz="700" b="0" i="0">
+              <a:rPr sz="750" b="0" i="0">
                 <a:solidFill>
                   <a:srgbClr val="9AA3B8"/>
                 </a:solidFill>
@@ -36036,6 +36570,7 @@
                 <a:solidFill>
                   <a:srgbClr val="F0F2F8"/>
                 </a:solidFill>
+                <a:latin typeface="Segoe UI Emoji"/>
               </a:rPr>
               <a:t>🔬</a:t>
             </a:r>
@@ -36101,7 +36636,7 @@
           <a:p>
             <a:pPr algn="ctr"/>
             <a:r>
-              <a:rPr sz="700" b="0" i="0">
+              <a:rPr sz="750" b="0" i="0">
                 <a:solidFill>
                   <a:srgbClr val="9AA3B8"/>
                 </a:solidFill>
@@ -36295,6 +36830,7 @@
                 <a:solidFill>
                   <a:srgbClr val="F0F2F8"/>
                 </a:solidFill>
+                <a:latin typeface="Segoe UI Emoji"/>
               </a:rPr>
               <a:t>📤</a:t>
             </a:r>
@@ -36360,7 +36896,7 @@
           <a:p>
             <a:pPr algn="ctr"/>
             <a:r>
-              <a:rPr sz="700" b="0" i="0">
+              <a:rPr sz="750" b="0" i="0">
                 <a:solidFill>
                   <a:srgbClr val="9AA3B8"/>
                 </a:solidFill>
@@ -36443,8 +36979,17 @@
                 <a:solidFill>
                   <a:srgbClr val="4F8EF7"/>
                 </a:solidFill>
-              </a:rPr>
-              <a:t>⚡ Minutes, not weeks</a:t>
+                <a:latin typeface="Segoe UI Emoji"/>
+              </a:rPr>
+              <a:t>⚡</a:t>
+            </a:r>
+            <a:r>
+              <a:rPr sz="750" b="0" i="0">
+                <a:solidFill>
+                  <a:srgbClr val="4F8EF7"/>
+                </a:solidFill>
+              </a:rPr>
+              <a:t> Minutes, not weeks</a:t>
             </a:r>
           </a:p>
         </p:txBody>
@@ -36601,8 +37146,17 @@
                 <a:solidFill>
                   <a:srgbClr val="4F8EF7"/>
                 </a:solidFill>
-              </a:rPr>
-              <a:t>🤖 Claude AI powered</a:t>
+                <a:latin typeface="Segoe UI Emoji"/>
+              </a:rPr>
+              <a:t>🤖</a:t>
+            </a:r>
+            <a:r>
+              <a:rPr sz="750" b="0" i="0">
+                <a:solidFill>
+                  <a:srgbClr val="4F8EF7"/>
+                </a:solidFill>
+              </a:rPr>
+              <a:t> Claude AI powered</a:t>
             </a:r>
           </a:p>
         </p:txBody>
@@ -36680,8 +37234,17 @@
                 <a:solidFill>
                   <a:srgbClr val="4F8EF7"/>
                 </a:solidFill>
-              </a:rPr>
-              <a:t>🌍 20 regions</a:t>
+                <a:latin typeface="Segoe UI Emoji"/>
+              </a:rPr>
+              <a:t>🌍</a:t>
+            </a:r>
+            <a:r>
+              <a:rPr sz="750" b="0" i="0">
+                <a:solidFill>
+                  <a:srgbClr val="4F8EF7"/>
+                </a:solidFill>
+              </a:rPr>
+              <a:t> 20 regions</a:t>
             </a:r>
           </a:p>
         </p:txBody>
@@ -36759,8 +37322,17 @@
                 <a:solidFill>
                   <a:srgbClr val="4F8EF7"/>
                 </a:solidFill>
-              </a:rPr>
-              <a:t>📊 A/B/C scenarios</a:t>
+                <a:latin typeface="Segoe UI Emoji"/>
+              </a:rPr>
+              <a:t>📊</a:t>
+            </a:r>
+            <a:r>
+              <a:rPr sz="750" b="0" i="0">
+                <a:solidFill>
+                  <a:srgbClr val="4F8EF7"/>
+                </a:solidFill>
+              </a:rPr>
+              <a:t> A/B/C scenarios</a:t>
             </a:r>
           </a:p>
         </p:txBody>
@@ -36838,8 +37410,17 @@
                 <a:solidFill>
                   <a:srgbClr val="4F8EF7"/>
                 </a:solidFill>
-              </a:rPr>
-              <a:t>📐 Assembly BOM</a:t>
+                <a:latin typeface="Segoe UI Emoji"/>
+              </a:rPr>
+              <a:t>📐</a:t>
+            </a:r>
+            <a:r>
+              <a:rPr sz="750" b="0" i="0">
+                <a:solidFill>
+                  <a:srgbClr val="4F8EF7"/>
+                </a:solidFill>
+              </a:rPr>
+              <a:t> Assembly BOM</a:t>
             </a:r>
           </a:p>
         </p:txBody>
@@ -36917,8 +37498,17 @@
                 <a:solidFill>
                   <a:srgbClr val="4F8EF7"/>
                 </a:solidFill>
-              </a:rPr>
-              <a:t>📉 Learning curve</a:t>
+                <a:latin typeface="Segoe UI Emoji"/>
+              </a:rPr>
+              <a:t>📉</a:t>
+            </a:r>
+            <a:r>
+              <a:rPr sz="750" b="0" i="0">
+                <a:solidFill>
+                  <a:srgbClr val="4F8EF7"/>
+                </a:solidFill>
+              </a:rPr>
+              <a:t> Learning curve</a:t>
             </a:r>
           </a:p>
         </p:txBody>
@@ -37016,7 +37606,7 @@
           <a:p>
             <a:pPr algn="l"/>
             <a:r>
-              <a:rPr sz="700" b="1" i="0">
+              <a:rPr sz="750" b="1" i="0">
                 <a:solidFill>
                   <a:srgbClr val="5A6380"/>
                 </a:solidFill>
@@ -37291,7 +37881,7 @@
         <p:spPr>
           <a:xfrm>
             <a:off x="411480" y="1810512"/>
-            <a:ext cx="1375371" cy="1207008"/>
+            <a:ext cx="1844497" cy="1051560"/>
           </a:xfrm>
           <a:prstGeom prst="rect">
             <a:avLst/>
@@ -37336,7 +37926,7 @@
         <p:spPr>
           <a:xfrm>
             <a:off x="411480" y="1865376"/>
-            <a:ext cx="1375371" cy="292608"/>
+            <a:ext cx="1844497" cy="292608"/>
           </a:xfrm>
           <a:prstGeom prst="rect">
             <a:avLst/>
@@ -37355,6 +37945,7 @@
                 <a:solidFill>
                   <a:srgbClr val="F0F2F8"/>
                 </a:solidFill>
+                <a:latin typeface="Segoe UI Emoji"/>
               </a:rPr>
               <a:t>⚙️</a:t>
             </a:r>
@@ -37369,23 +37960,23 @@
         </p:nvSpPr>
         <p:spPr>
           <a:xfrm>
-            <a:off x="411480" y="2157984"/>
-            <a:ext cx="1375371" cy="201168"/>
-          </a:xfrm>
-          <a:prstGeom prst="rect">
-            <a:avLst/>
-          </a:prstGeom>
-          <a:noFill/>
-        </p:spPr>
-        <p:txBody>
-          <a:bodyPr wrap="square">
-            <a:spAutoFit/>
-          </a:bodyPr>
-          <a:lstStyle/>
-          <a:p>
-            <a:pPr algn="ctr"/>
-            <a:r>
-              <a:rPr sz="700" b="1" i="0">
+            <a:off x="411480" y="2121408"/>
+            <a:ext cx="1844497" cy="201168"/>
+          </a:xfrm>
+          <a:prstGeom prst="rect">
+            <a:avLst/>
+          </a:prstGeom>
+          <a:noFill/>
+        </p:spPr>
+        <p:txBody>
+          <a:bodyPr wrap="square">
+            <a:spAutoFit/>
+          </a:bodyPr>
+          <a:lstStyle/>
+          <a:p>
+            <a:pPr algn="ctr"/>
+            <a:r>
+              <a:rPr sz="800" b="1" i="0">
                 <a:solidFill>
                   <a:srgbClr val="F0F2F8"/>
                 </a:solidFill>
@@ -37403,23 +37994,23 @@
         </p:nvSpPr>
         <p:spPr>
           <a:xfrm>
-            <a:off x="411480" y="2340864"/>
-            <a:ext cx="1375371" cy="310896"/>
-          </a:xfrm>
-          <a:prstGeom prst="rect">
-            <a:avLst/>
-          </a:prstGeom>
-          <a:noFill/>
-        </p:spPr>
-        <p:txBody>
-          <a:bodyPr wrap="square">
-            <a:spAutoFit/>
-          </a:bodyPr>
-          <a:lstStyle/>
-          <a:p>
-            <a:pPr algn="ctr"/>
-            <a:r>
-              <a:rPr sz="600" b="0" i="0">
+            <a:off x="411480" y="2322576"/>
+            <a:ext cx="1844497" cy="457200"/>
+          </a:xfrm>
+          <a:prstGeom prst="rect">
+            <a:avLst/>
+          </a:prstGeom>
+          <a:noFill/>
+        </p:spPr>
+        <p:txBody>
+          <a:bodyPr wrap="square">
+            <a:spAutoFit/>
+          </a:bodyPr>
+          <a:lstStyle/>
+          <a:p>
+            <a:pPr algn="ctr"/>
+            <a:r>
+              <a:rPr sz="750" b="0" i="0">
                 <a:solidFill>
                   <a:srgbClr val="5A6380"/>
                 </a:solidFill>
@@ -37437,8 +38028,8 @@
         </p:nvSpPr>
         <p:spPr>
           <a:xfrm>
-            <a:off x="1837143" y="1810512"/>
-            <a:ext cx="1375371" cy="1207008"/>
+            <a:off x="2306269" y="1810512"/>
+            <a:ext cx="1844497" cy="1051560"/>
           </a:xfrm>
           <a:prstGeom prst="rect">
             <a:avLst/>
@@ -37482,8 +38073,8 @@
         </p:nvSpPr>
         <p:spPr>
           <a:xfrm>
-            <a:off x="1837143" y="1865376"/>
-            <a:ext cx="1375371" cy="292608"/>
+            <a:off x="2306269" y="1865376"/>
+            <a:ext cx="1844497" cy="292608"/>
           </a:xfrm>
           <a:prstGeom prst="rect">
             <a:avLst/>
@@ -37502,6 +38093,7 @@
                 <a:solidFill>
                   <a:srgbClr val="F0F2F8"/>
                 </a:solidFill>
+                <a:latin typeface="Segoe UI Emoji"/>
               </a:rPr>
               <a:t>🪨</a:t>
             </a:r>
@@ -37516,23 +38108,23 @@
         </p:nvSpPr>
         <p:spPr>
           <a:xfrm>
-            <a:off x="1837143" y="2157984"/>
-            <a:ext cx="1375371" cy="201168"/>
-          </a:xfrm>
-          <a:prstGeom prst="rect">
-            <a:avLst/>
-          </a:prstGeom>
-          <a:noFill/>
-        </p:spPr>
-        <p:txBody>
-          <a:bodyPr wrap="square">
-            <a:spAutoFit/>
-          </a:bodyPr>
-          <a:lstStyle/>
-          <a:p>
-            <a:pPr algn="ctr"/>
-            <a:r>
-              <a:rPr sz="700" b="1" i="0">
+            <a:off x="2306269" y="2121408"/>
+            <a:ext cx="1844497" cy="201168"/>
+          </a:xfrm>
+          <a:prstGeom prst="rect">
+            <a:avLst/>
+          </a:prstGeom>
+          <a:noFill/>
+        </p:spPr>
+        <p:txBody>
+          <a:bodyPr wrap="square">
+            <a:spAutoFit/>
+          </a:bodyPr>
+          <a:lstStyle/>
+          <a:p>
+            <a:pPr algn="ctr"/>
+            <a:r>
+              <a:rPr sz="800" b="1" i="0">
                 <a:solidFill>
                   <a:srgbClr val="F0F2F8"/>
                 </a:solidFill>
@@ -37550,23 +38142,23 @@
         </p:nvSpPr>
         <p:spPr>
           <a:xfrm>
-            <a:off x="1837143" y="2340864"/>
-            <a:ext cx="1375371" cy="310896"/>
-          </a:xfrm>
-          <a:prstGeom prst="rect">
-            <a:avLst/>
-          </a:prstGeom>
-          <a:noFill/>
-        </p:spPr>
-        <p:txBody>
-          <a:bodyPr wrap="square">
-            <a:spAutoFit/>
-          </a:bodyPr>
-          <a:lstStyle/>
-          <a:p>
-            <a:pPr algn="ctr"/>
-            <a:r>
-              <a:rPr sz="600" b="0" i="0">
+            <a:off x="2306269" y="2322576"/>
+            <a:ext cx="1844497" cy="457200"/>
+          </a:xfrm>
+          <a:prstGeom prst="rect">
+            <a:avLst/>
+          </a:prstGeom>
+          <a:noFill/>
+        </p:spPr>
+        <p:txBody>
+          <a:bodyPr wrap="square">
+            <a:spAutoFit/>
+          </a:bodyPr>
+          <a:lstStyle/>
+          <a:p>
+            <a:pPr algn="ctr"/>
+            <a:r>
+              <a:rPr sz="750" b="0" i="0">
                 <a:solidFill>
                   <a:srgbClr val="5A6380"/>
                 </a:solidFill>
@@ -37584,8 +38176,8 @@
         </p:nvSpPr>
         <p:spPr>
           <a:xfrm>
-            <a:off x="3262807" y="1810512"/>
-            <a:ext cx="1375371" cy="1207008"/>
+            <a:off x="4201058" y="1810512"/>
+            <a:ext cx="1844497" cy="1051560"/>
           </a:xfrm>
           <a:prstGeom prst="rect">
             <a:avLst/>
@@ -37629,8 +38221,8 @@
         </p:nvSpPr>
         <p:spPr>
           <a:xfrm>
-            <a:off x="3262807" y="1865376"/>
-            <a:ext cx="1375371" cy="292608"/>
+            <a:off x="4201058" y="1865376"/>
+            <a:ext cx="1844497" cy="292608"/>
           </a:xfrm>
           <a:prstGeom prst="rect">
             <a:avLst/>
@@ -37649,6 +38241,7 @@
                 <a:solidFill>
                   <a:srgbClr val="F0F2F8"/>
                 </a:solidFill>
+                <a:latin typeface="Segoe UI Emoji"/>
               </a:rPr>
               <a:t>🏗️</a:t>
             </a:r>
@@ -37663,23 +38256,23 @@
         </p:nvSpPr>
         <p:spPr>
           <a:xfrm>
-            <a:off x="3262807" y="2157984"/>
-            <a:ext cx="1375371" cy="201168"/>
-          </a:xfrm>
-          <a:prstGeom prst="rect">
-            <a:avLst/>
-          </a:prstGeom>
-          <a:noFill/>
-        </p:spPr>
-        <p:txBody>
-          <a:bodyPr wrap="square">
-            <a:spAutoFit/>
-          </a:bodyPr>
-          <a:lstStyle/>
-          <a:p>
-            <a:pPr algn="ctr"/>
-            <a:r>
-              <a:rPr sz="700" b="1" i="0">
+            <a:off x="4201058" y="2121408"/>
+            <a:ext cx="1844497" cy="201168"/>
+          </a:xfrm>
+          <a:prstGeom prst="rect">
+            <a:avLst/>
+          </a:prstGeom>
+          <a:noFill/>
+        </p:spPr>
+        <p:txBody>
+          <a:bodyPr wrap="square">
+            <a:spAutoFit/>
+          </a:bodyPr>
+          <a:lstStyle/>
+          <a:p>
+            <a:pPr algn="ctr"/>
+            <a:r>
+              <a:rPr sz="800" b="1" i="0">
                 <a:solidFill>
                   <a:srgbClr val="F0F2F8"/>
                 </a:solidFill>
@@ -37697,23 +38290,23 @@
         </p:nvSpPr>
         <p:spPr>
           <a:xfrm>
-            <a:off x="3262807" y="2340864"/>
-            <a:ext cx="1375371" cy="310896"/>
-          </a:xfrm>
-          <a:prstGeom prst="rect">
-            <a:avLst/>
-          </a:prstGeom>
-          <a:noFill/>
-        </p:spPr>
-        <p:txBody>
-          <a:bodyPr wrap="square">
-            <a:spAutoFit/>
-          </a:bodyPr>
-          <a:lstStyle/>
-          <a:p>
-            <a:pPr algn="ctr"/>
-            <a:r>
-              <a:rPr sz="600" b="0" i="0">
+            <a:off x="4201058" y="2322576"/>
+            <a:ext cx="1844497" cy="457200"/>
+          </a:xfrm>
+          <a:prstGeom prst="rect">
+            <a:avLst/>
+          </a:prstGeom>
+          <a:noFill/>
+        </p:spPr>
+        <p:txBody>
+          <a:bodyPr wrap="square">
+            <a:spAutoFit/>
+          </a:bodyPr>
+          <a:lstStyle/>
+          <a:p>
+            <a:pPr algn="ctr"/>
+            <a:r>
+              <a:rPr sz="750" b="0" i="0">
                 <a:solidFill>
                   <a:srgbClr val="5A6380"/>
                 </a:solidFill>
@@ -37731,8 +38324,8 @@
         </p:nvSpPr>
         <p:spPr>
           <a:xfrm>
-            <a:off x="4688471" y="1810512"/>
-            <a:ext cx="1375371" cy="1207008"/>
+            <a:off x="6095847" y="1810512"/>
+            <a:ext cx="1844497" cy="1051560"/>
           </a:xfrm>
           <a:prstGeom prst="rect">
             <a:avLst/>
@@ -37776,8 +38369,8 @@
         </p:nvSpPr>
         <p:spPr>
           <a:xfrm>
-            <a:off x="4688471" y="1865376"/>
-            <a:ext cx="1375371" cy="292608"/>
+            <a:off x="6095847" y="1865376"/>
+            <a:ext cx="1844497" cy="292608"/>
           </a:xfrm>
           <a:prstGeom prst="rect">
             <a:avLst/>
@@ -37796,6 +38389,7 @@
                 <a:solidFill>
                   <a:srgbClr val="F0F2F8"/>
                 </a:solidFill>
+                <a:latin typeface="Segoe UI Emoji"/>
               </a:rPr>
               <a:t>🔨</a:t>
             </a:r>
@@ -37810,23 +38404,23 @@
         </p:nvSpPr>
         <p:spPr>
           <a:xfrm>
-            <a:off x="4688471" y="2157984"/>
-            <a:ext cx="1375371" cy="201168"/>
-          </a:xfrm>
-          <a:prstGeom prst="rect">
-            <a:avLst/>
-          </a:prstGeom>
-          <a:noFill/>
-        </p:spPr>
-        <p:txBody>
-          <a:bodyPr wrap="square">
-            <a:spAutoFit/>
-          </a:bodyPr>
-          <a:lstStyle/>
-          <a:p>
-            <a:pPr algn="ctr"/>
-            <a:r>
-              <a:rPr sz="700" b="1" i="0">
+            <a:off x="6095847" y="2121408"/>
+            <a:ext cx="1844497" cy="201168"/>
+          </a:xfrm>
+          <a:prstGeom prst="rect">
+            <a:avLst/>
+          </a:prstGeom>
+          <a:noFill/>
+        </p:spPr>
+        <p:txBody>
+          <a:bodyPr wrap="square">
+            <a:spAutoFit/>
+          </a:bodyPr>
+          <a:lstStyle/>
+          <a:p>
+            <a:pPr algn="ctr"/>
+            <a:r>
+              <a:rPr sz="800" b="1" i="0">
                 <a:solidFill>
                   <a:srgbClr val="F0F2F8"/>
                 </a:solidFill>
@@ -37844,23 +38438,23 @@
         </p:nvSpPr>
         <p:spPr>
           <a:xfrm>
-            <a:off x="4688471" y="2340864"/>
-            <a:ext cx="1375371" cy="310896"/>
-          </a:xfrm>
-          <a:prstGeom prst="rect">
-            <a:avLst/>
-          </a:prstGeom>
-          <a:noFill/>
-        </p:spPr>
-        <p:txBody>
-          <a:bodyPr wrap="square">
-            <a:spAutoFit/>
-          </a:bodyPr>
-          <a:lstStyle/>
-          <a:p>
-            <a:pPr algn="ctr"/>
-            <a:r>
-              <a:rPr sz="600" b="0" i="0">
+            <a:off x="6095847" y="2322576"/>
+            <a:ext cx="1844497" cy="457200"/>
+          </a:xfrm>
+          <a:prstGeom prst="rect">
+            <a:avLst/>
+          </a:prstGeom>
+          <a:noFill/>
+        </p:spPr>
+        <p:txBody>
+          <a:bodyPr wrap="square">
+            <a:spAutoFit/>
+          </a:bodyPr>
+          <a:lstStyle/>
+          <a:p>
+            <a:pPr algn="ctr"/>
+            <a:r>
+              <a:rPr sz="750" b="0" i="0">
                 <a:solidFill>
                   <a:srgbClr val="5A6380"/>
                 </a:solidFill>
@@ -37878,8 +38472,8 @@
         </p:nvSpPr>
         <p:spPr>
           <a:xfrm>
-            <a:off x="6114135" y="1810512"/>
-            <a:ext cx="1375371" cy="1207008"/>
+            <a:off x="7990636" y="1810512"/>
+            <a:ext cx="1844497" cy="1051560"/>
           </a:xfrm>
           <a:prstGeom prst="rect">
             <a:avLst/>
@@ -37923,8 +38517,8 @@
         </p:nvSpPr>
         <p:spPr>
           <a:xfrm>
-            <a:off x="6114135" y="1865376"/>
-            <a:ext cx="1375371" cy="292608"/>
+            <a:off x="7990636" y="1865376"/>
+            <a:ext cx="1844497" cy="292608"/>
           </a:xfrm>
           <a:prstGeom prst="rect">
             <a:avLst/>
@@ -37943,6 +38537,7 @@
                 <a:solidFill>
                   <a:srgbClr val="F0F2F8"/>
                 </a:solidFill>
+                <a:latin typeface="Segoe UI Emoji"/>
               </a:rPr>
               <a:t>🪗</a:t>
             </a:r>
@@ -37957,23 +38552,23 @@
         </p:nvSpPr>
         <p:spPr>
           <a:xfrm>
-            <a:off x="6114135" y="2157984"/>
-            <a:ext cx="1375371" cy="201168"/>
-          </a:xfrm>
-          <a:prstGeom prst="rect">
-            <a:avLst/>
-          </a:prstGeom>
-          <a:noFill/>
-        </p:spPr>
-        <p:txBody>
-          <a:bodyPr wrap="square">
-            <a:spAutoFit/>
-          </a:bodyPr>
-          <a:lstStyle/>
-          <a:p>
-            <a:pPr algn="ctr"/>
-            <a:r>
-              <a:rPr sz="700" b="1" i="0">
+            <a:off x="7990636" y="2121408"/>
+            <a:ext cx="1844497" cy="201168"/>
+          </a:xfrm>
+          <a:prstGeom prst="rect">
+            <a:avLst/>
+          </a:prstGeom>
+          <a:noFill/>
+        </p:spPr>
+        <p:txBody>
+          <a:bodyPr wrap="square">
+            <a:spAutoFit/>
+          </a:bodyPr>
+          <a:lstStyle/>
+          <a:p>
+            <a:pPr algn="ctr"/>
+            <a:r>
+              <a:rPr sz="800" b="1" i="0">
                 <a:solidFill>
                   <a:srgbClr val="F0F2F8"/>
                 </a:solidFill>
@@ -37991,23 +38586,23 @@
         </p:nvSpPr>
         <p:spPr>
           <a:xfrm>
-            <a:off x="6114135" y="2340864"/>
-            <a:ext cx="1375371" cy="310896"/>
-          </a:xfrm>
-          <a:prstGeom prst="rect">
-            <a:avLst/>
-          </a:prstGeom>
-          <a:noFill/>
-        </p:spPr>
-        <p:txBody>
-          <a:bodyPr wrap="square">
-            <a:spAutoFit/>
-          </a:bodyPr>
-          <a:lstStyle/>
-          <a:p>
-            <a:pPr algn="ctr"/>
-            <a:r>
-              <a:rPr sz="600" b="0" i="0">
+            <a:off x="7990636" y="2322576"/>
+            <a:ext cx="1844497" cy="457200"/>
+          </a:xfrm>
+          <a:prstGeom prst="rect">
+            <a:avLst/>
+          </a:prstGeom>
+          <a:noFill/>
+        </p:spPr>
+        <p:txBody>
+          <a:bodyPr wrap="square">
+            <a:spAutoFit/>
+          </a:bodyPr>
+          <a:lstStyle/>
+          <a:p>
+            <a:pPr algn="ctr"/>
+            <a:r>
+              <a:rPr sz="750" b="0" i="0">
                 <a:solidFill>
                   <a:srgbClr val="5A6380"/>
                 </a:solidFill>
@@ -38025,8 +38620,8 @@
         </p:nvSpPr>
         <p:spPr>
           <a:xfrm>
-            <a:off x="7539799" y="1810512"/>
-            <a:ext cx="1375371" cy="1207008"/>
+            <a:off x="9885425" y="1810512"/>
+            <a:ext cx="1844497" cy="1051560"/>
           </a:xfrm>
           <a:prstGeom prst="rect">
             <a:avLst/>
@@ -38070,8 +38665,8 @@
         </p:nvSpPr>
         <p:spPr>
           <a:xfrm>
-            <a:off x="7539799" y="1865376"/>
-            <a:ext cx="1375371" cy="292608"/>
+            <a:off x="9885425" y="1865376"/>
+            <a:ext cx="1844497" cy="292608"/>
           </a:xfrm>
           <a:prstGeom prst="rect">
             <a:avLst/>
@@ -38090,6 +38685,7 @@
                 <a:solidFill>
                   <a:srgbClr val="F0F2F8"/>
                 </a:solidFill>
+                <a:latin typeface="Segoe UI Emoji"/>
               </a:rPr>
               <a:t>🔩</a:t>
             </a:r>
@@ -38104,23 +38700,23 @@
         </p:nvSpPr>
         <p:spPr>
           <a:xfrm>
-            <a:off x="7539799" y="2157984"/>
-            <a:ext cx="1375371" cy="201168"/>
-          </a:xfrm>
-          <a:prstGeom prst="rect">
-            <a:avLst/>
-          </a:prstGeom>
-          <a:noFill/>
-        </p:spPr>
-        <p:txBody>
-          <a:bodyPr wrap="square">
-            <a:spAutoFit/>
-          </a:bodyPr>
-          <a:lstStyle/>
-          <a:p>
-            <a:pPr algn="ctr"/>
-            <a:r>
-              <a:rPr sz="700" b="1" i="0">
+            <a:off x="9885425" y="2121408"/>
+            <a:ext cx="1844497" cy="201168"/>
+          </a:xfrm>
+          <a:prstGeom prst="rect">
+            <a:avLst/>
+          </a:prstGeom>
+          <a:noFill/>
+        </p:spPr>
+        <p:txBody>
+          <a:bodyPr wrap="square">
+            <a:spAutoFit/>
+          </a:bodyPr>
+          <a:lstStyle/>
+          <a:p>
+            <a:pPr algn="ctr"/>
+            <a:r>
+              <a:rPr sz="800" b="1" i="0">
                 <a:solidFill>
                   <a:srgbClr val="F0F2F8"/>
                 </a:solidFill>
@@ -38138,23 +38734,23 @@
         </p:nvSpPr>
         <p:spPr>
           <a:xfrm>
-            <a:off x="7539799" y="2340864"/>
-            <a:ext cx="1375371" cy="310896"/>
-          </a:xfrm>
-          <a:prstGeom prst="rect">
-            <a:avLst/>
-          </a:prstGeom>
-          <a:noFill/>
-        </p:spPr>
-        <p:txBody>
-          <a:bodyPr wrap="square">
-            <a:spAutoFit/>
-          </a:bodyPr>
-          <a:lstStyle/>
-          <a:p>
-            <a:pPr algn="ctr"/>
-            <a:r>
-              <a:rPr sz="600" b="0" i="0">
+            <a:off x="9885425" y="2322576"/>
+            <a:ext cx="1844497" cy="457200"/>
+          </a:xfrm>
+          <a:prstGeom prst="rect">
+            <a:avLst/>
+          </a:prstGeom>
+          <a:noFill/>
+        </p:spPr>
+        <p:txBody>
+          <a:bodyPr wrap="square">
+            <a:spAutoFit/>
+          </a:bodyPr>
+          <a:lstStyle/>
+          <a:p>
+            <a:pPr algn="ctr"/>
+            <a:r>
+              <a:rPr sz="750" b="0" i="0">
                 <a:solidFill>
                   <a:srgbClr val="5A6380"/>
                 </a:solidFill>
@@ -38172,8 +38768,8 @@
         </p:nvSpPr>
         <p:spPr>
           <a:xfrm>
-            <a:off x="8965463" y="1810512"/>
-            <a:ext cx="1375371" cy="1207008"/>
+            <a:off x="411480" y="2921508"/>
+            <a:ext cx="1844497" cy="1051560"/>
           </a:xfrm>
           <a:prstGeom prst="rect">
             <a:avLst/>
@@ -38217,8 +38813,8 @@
         </p:nvSpPr>
         <p:spPr>
           <a:xfrm>
-            <a:off x="8965463" y="1865376"/>
-            <a:ext cx="1375371" cy="292608"/>
+            <a:off x="411480" y="2976372"/>
+            <a:ext cx="1844497" cy="292608"/>
           </a:xfrm>
           <a:prstGeom prst="rect">
             <a:avLst/>
@@ -38237,6 +38833,7 @@
                 <a:solidFill>
                   <a:srgbClr val="F0F2F8"/>
                 </a:solidFill>
+                <a:latin typeface="Segoe UI Emoji"/>
               </a:rPr>
               <a:t>⚙️</a:t>
             </a:r>
@@ -38251,23 +38848,23 @@
         </p:nvSpPr>
         <p:spPr>
           <a:xfrm>
-            <a:off x="8965463" y="2157984"/>
-            <a:ext cx="1375371" cy="201168"/>
-          </a:xfrm>
-          <a:prstGeom prst="rect">
-            <a:avLst/>
-          </a:prstGeom>
-          <a:noFill/>
-        </p:spPr>
-        <p:txBody>
-          <a:bodyPr wrap="square">
-            <a:spAutoFit/>
-          </a:bodyPr>
-          <a:lstStyle/>
-          <a:p>
-            <a:pPr algn="ctr"/>
-            <a:r>
-              <a:rPr sz="700" b="1" i="0">
+            <a:off x="411480" y="3232404"/>
+            <a:ext cx="1844497" cy="201168"/>
+          </a:xfrm>
+          <a:prstGeom prst="rect">
+            <a:avLst/>
+          </a:prstGeom>
+          <a:noFill/>
+        </p:spPr>
+        <p:txBody>
+          <a:bodyPr wrap="square">
+            <a:spAutoFit/>
+          </a:bodyPr>
+          <a:lstStyle/>
+          <a:p>
+            <a:pPr algn="ctr"/>
+            <a:r>
+              <a:rPr sz="800" b="1" i="0">
                 <a:solidFill>
                   <a:srgbClr val="F0F2F8"/>
                 </a:solidFill>
@@ -38285,23 +38882,23 @@
         </p:nvSpPr>
         <p:spPr>
           <a:xfrm>
-            <a:off x="8965463" y="2340864"/>
-            <a:ext cx="1375371" cy="310896"/>
-          </a:xfrm>
-          <a:prstGeom prst="rect">
-            <a:avLst/>
-          </a:prstGeom>
-          <a:noFill/>
-        </p:spPr>
-        <p:txBody>
-          <a:bodyPr wrap="square">
-            <a:spAutoFit/>
-          </a:bodyPr>
-          <a:lstStyle/>
-          <a:p>
-            <a:pPr algn="ctr"/>
-            <a:r>
-              <a:rPr sz="600" b="0" i="0">
+            <a:off x="411480" y="3433572"/>
+            <a:ext cx="1844497" cy="457200"/>
+          </a:xfrm>
+          <a:prstGeom prst="rect">
+            <a:avLst/>
+          </a:prstGeom>
+          <a:noFill/>
+        </p:spPr>
+        <p:txBody>
+          <a:bodyPr wrap="square">
+            <a:spAutoFit/>
+          </a:bodyPr>
+          <a:lstStyle/>
+          <a:p>
+            <a:pPr algn="ctr"/>
+            <a:r>
+              <a:rPr sz="750" b="0" i="0">
                 <a:solidFill>
                   <a:srgbClr val="5A6380"/>
                 </a:solidFill>
@@ -38319,8 +38916,8 @@
         </p:nvSpPr>
         <p:spPr>
           <a:xfrm>
-            <a:off x="10391127" y="1810512"/>
-            <a:ext cx="1375371" cy="1207008"/>
+            <a:off x="2306269" y="2921508"/>
+            <a:ext cx="1844497" cy="1051560"/>
           </a:xfrm>
           <a:prstGeom prst="rect">
             <a:avLst/>
@@ -38364,8 +38961,8 @@
         </p:nvSpPr>
         <p:spPr>
           <a:xfrm>
-            <a:off x="10391127" y="1865376"/>
-            <a:ext cx="1375371" cy="292608"/>
+            <a:off x="2306269" y="2976372"/>
+            <a:ext cx="1844497" cy="292608"/>
           </a:xfrm>
           <a:prstGeom prst="rect">
             <a:avLst/>
@@ -38384,6 +38981,7 @@
                 <a:solidFill>
                   <a:srgbClr val="F0F2F8"/>
                 </a:solidFill>
+                <a:latin typeface="Segoe UI Emoji"/>
               </a:rPr>
               <a:t>🏺</a:t>
             </a:r>
@@ -38398,23 +38996,23 @@
         </p:nvSpPr>
         <p:spPr>
           <a:xfrm>
-            <a:off x="10391127" y="2157984"/>
-            <a:ext cx="1375371" cy="201168"/>
-          </a:xfrm>
-          <a:prstGeom prst="rect">
-            <a:avLst/>
-          </a:prstGeom>
-          <a:noFill/>
-        </p:spPr>
-        <p:txBody>
-          <a:bodyPr wrap="square">
-            <a:spAutoFit/>
-          </a:bodyPr>
-          <a:lstStyle/>
-          <a:p>
-            <a:pPr algn="ctr"/>
-            <a:r>
-              <a:rPr sz="700" b="1" i="0">
+            <a:off x="2306269" y="3232404"/>
+            <a:ext cx="1844497" cy="201168"/>
+          </a:xfrm>
+          <a:prstGeom prst="rect">
+            <a:avLst/>
+          </a:prstGeom>
+          <a:noFill/>
+        </p:spPr>
+        <p:txBody>
+          <a:bodyPr wrap="square">
+            <a:spAutoFit/>
+          </a:bodyPr>
+          <a:lstStyle/>
+          <a:p>
+            <a:pPr algn="ctr"/>
+            <a:r>
+              <a:rPr sz="800" b="1" i="0">
                 <a:solidFill>
                   <a:srgbClr val="F0F2F8"/>
                 </a:solidFill>
@@ -38432,23 +39030,23 @@
         </p:nvSpPr>
         <p:spPr>
           <a:xfrm>
-            <a:off x="10391127" y="2340864"/>
-            <a:ext cx="1375371" cy="310896"/>
-          </a:xfrm>
-          <a:prstGeom prst="rect">
-            <a:avLst/>
-          </a:prstGeom>
-          <a:noFill/>
-        </p:spPr>
-        <p:txBody>
-          <a:bodyPr wrap="square">
-            <a:spAutoFit/>
-          </a:bodyPr>
-          <a:lstStyle/>
-          <a:p>
-            <a:pPr algn="ctr"/>
-            <a:r>
-              <a:rPr sz="600" b="0" i="0">
+            <a:off x="2306269" y="3433572"/>
+            <a:ext cx="1844497" cy="457200"/>
+          </a:xfrm>
+          <a:prstGeom prst="rect">
+            <a:avLst/>
+          </a:prstGeom>
+          <a:noFill/>
+        </p:spPr>
+        <p:txBody>
+          <a:bodyPr wrap="square">
+            <a:spAutoFit/>
+          </a:bodyPr>
+          <a:lstStyle/>
+          <a:p>
+            <a:pPr algn="ctr"/>
+            <a:r>
+              <a:rPr sz="750" b="0" i="0">
                 <a:solidFill>
                   <a:srgbClr val="5A6380"/>
                 </a:solidFill>
@@ -38466,8 +39064,8 @@
         </p:nvSpPr>
         <p:spPr>
           <a:xfrm>
-            <a:off x="411480" y="3076956"/>
-            <a:ext cx="1375371" cy="1207008"/>
+            <a:off x="4201058" y="2921508"/>
+            <a:ext cx="1844497" cy="1051560"/>
           </a:xfrm>
           <a:prstGeom prst="rect">
             <a:avLst/>
@@ -38511,8 +39109,8 @@
         </p:nvSpPr>
         <p:spPr>
           <a:xfrm>
-            <a:off x="411480" y="3131820"/>
-            <a:ext cx="1375371" cy="292608"/>
+            <a:off x="4201058" y="2976372"/>
+            <a:ext cx="1844497" cy="292608"/>
           </a:xfrm>
           <a:prstGeom prst="rect">
             <a:avLst/>
@@ -38531,6 +39129,7 @@
                 <a:solidFill>
                   <a:srgbClr val="F0F2F8"/>
                 </a:solidFill>
+                <a:latin typeface="Segoe UI Emoji"/>
               </a:rPr>
               <a:t>🫧</a:t>
             </a:r>
@@ -38545,23 +39144,23 @@
         </p:nvSpPr>
         <p:spPr>
           <a:xfrm>
-            <a:off x="411480" y="3424428"/>
-            <a:ext cx="1375371" cy="201168"/>
-          </a:xfrm>
-          <a:prstGeom prst="rect">
-            <a:avLst/>
-          </a:prstGeom>
-          <a:noFill/>
-        </p:spPr>
-        <p:txBody>
-          <a:bodyPr wrap="square">
-            <a:spAutoFit/>
-          </a:bodyPr>
-          <a:lstStyle/>
-          <a:p>
-            <a:pPr algn="ctr"/>
-            <a:r>
-              <a:rPr sz="700" b="1" i="0">
+            <a:off x="4201058" y="3232404"/>
+            <a:ext cx="1844497" cy="201168"/>
+          </a:xfrm>
+          <a:prstGeom prst="rect">
+            <a:avLst/>
+          </a:prstGeom>
+          <a:noFill/>
+        </p:spPr>
+        <p:txBody>
+          <a:bodyPr wrap="square">
+            <a:spAutoFit/>
+          </a:bodyPr>
+          <a:lstStyle/>
+          <a:p>
+            <a:pPr algn="ctr"/>
+            <a:r>
+              <a:rPr sz="800" b="1" i="0">
                 <a:solidFill>
                   <a:srgbClr val="F0F2F8"/>
                 </a:solidFill>
@@ -38579,23 +39178,23 @@
         </p:nvSpPr>
         <p:spPr>
           <a:xfrm>
-            <a:off x="411480" y="3607308"/>
-            <a:ext cx="1375371" cy="310896"/>
-          </a:xfrm>
-          <a:prstGeom prst="rect">
-            <a:avLst/>
-          </a:prstGeom>
-          <a:noFill/>
-        </p:spPr>
-        <p:txBody>
-          <a:bodyPr wrap="square">
-            <a:spAutoFit/>
-          </a:bodyPr>
-          <a:lstStyle/>
-          <a:p>
-            <a:pPr algn="ctr"/>
-            <a:r>
-              <a:rPr sz="600" b="0" i="0">
+            <a:off x="4201058" y="3433572"/>
+            <a:ext cx="1844497" cy="457200"/>
+          </a:xfrm>
+          <a:prstGeom prst="rect">
+            <a:avLst/>
+          </a:prstGeom>
+          <a:noFill/>
+        </p:spPr>
+        <p:txBody>
+          <a:bodyPr wrap="square">
+            <a:spAutoFit/>
+          </a:bodyPr>
+          <a:lstStyle/>
+          <a:p>
+            <a:pPr algn="ctr"/>
+            <a:r>
+              <a:rPr sz="750" b="0" i="0">
                 <a:solidFill>
                   <a:srgbClr val="5A6380"/>
                 </a:solidFill>
@@ -38613,8 +39212,8 @@
         </p:nvSpPr>
         <p:spPr>
           <a:xfrm>
-            <a:off x="1837143" y="3076956"/>
-            <a:ext cx="1375371" cy="1207008"/>
+            <a:off x="6095847" y="2921508"/>
+            <a:ext cx="1844497" cy="1051560"/>
           </a:xfrm>
           <a:prstGeom prst="rect">
             <a:avLst/>
@@ -38658,8 +39257,8 @@
         </p:nvSpPr>
         <p:spPr>
           <a:xfrm>
-            <a:off x="1837143" y="3131820"/>
-            <a:ext cx="1375371" cy="292608"/>
+            <a:off x="6095847" y="2976372"/>
+            <a:ext cx="1844497" cy="292608"/>
           </a:xfrm>
           <a:prstGeom prst="rect">
             <a:avLst/>
@@ -38678,6 +39277,7 @@
                 <a:solidFill>
                   <a:srgbClr val="F0F2F8"/>
                 </a:solidFill>
+                <a:latin typeface="Segoe UI Emoji"/>
               </a:rPr>
               <a:t>🔩</a:t>
             </a:r>
@@ -38692,23 +39292,23 @@
         </p:nvSpPr>
         <p:spPr>
           <a:xfrm>
-            <a:off x="1837143" y="3424428"/>
-            <a:ext cx="1375371" cy="201168"/>
-          </a:xfrm>
-          <a:prstGeom prst="rect">
-            <a:avLst/>
-          </a:prstGeom>
-          <a:noFill/>
-        </p:spPr>
-        <p:txBody>
-          <a:bodyPr wrap="square">
-            <a:spAutoFit/>
-          </a:bodyPr>
-          <a:lstStyle/>
-          <a:p>
-            <a:pPr algn="ctr"/>
-            <a:r>
-              <a:rPr sz="700" b="1" i="0">
+            <a:off x="6095847" y="3232404"/>
+            <a:ext cx="1844497" cy="201168"/>
+          </a:xfrm>
+          <a:prstGeom prst="rect">
+            <a:avLst/>
+          </a:prstGeom>
+          <a:noFill/>
+        </p:spPr>
+        <p:txBody>
+          <a:bodyPr wrap="square">
+            <a:spAutoFit/>
+          </a:bodyPr>
+          <a:lstStyle/>
+          <a:p>
+            <a:pPr algn="ctr"/>
+            <a:r>
+              <a:rPr sz="800" b="1" i="0">
                 <a:solidFill>
                   <a:srgbClr val="F0F2F8"/>
                 </a:solidFill>
@@ -38726,23 +39326,23 @@
         </p:nvSpPr>
         <p:spPr>
           <a:xfrm>
-            <a:off x="1837143" y="3607308"/>
-            <a:ext cx="1375371" cy="310896"/>
-          </a:xfrm>
-          <a:prstGeom prst="rect">
-            <a:avLst/>
-          </a:prstGeom>
-          <a:noFill/>
-        </p:spPr>
-        <p:txBody>
-          <a:bodyPr wrap="square">
-            <a:spAutoFit/>
-          </a:bodyPr>
-          <a:lstStyle/>
-          <a:p>
-            <a:pPr algn="ctr"/>
-            <a:r>
-              <a:rPr sz="600" b="0" i="0">
+            <a:off x="6095847" y="3433572"/>
+            <a:ext cx="1844497" cy="457200"/>
+          </a:xfrm>
+          <a:prstGeom prst="rect">
+            <a:avLst/>
+          </a:prstGeom>
+          <a:noFill/>
+        </p:spPr>
+        <p:txBody>
+          <a:bodyPr wrap="square">
+            <a:spAutoFit/>
+          </a:bodyPr>
+          <a:lstStyle/>
+          <a:p>
+            <a:pPr algn="ctr"/>
+            <a:r>
+              <a:rPr sz="750" b="0" i="0">
                 <a:solidFill>
                   <a:srgbClr val="5A6380"/>
                 </a:solidFill>
@@ -38760,8 +39360,8 @@
         </p:nvSpPr>
         <p:spPr>
           <a:xfrm>
-            <a:off x="3262807" y="3076956"/>
-            <a:ext cx="1375371" cy="1207008"/>
+            <a:off x="7990636" y="2921508"/>
+            <a:ext cx="1844497" cy="1051560"/>
           </a:xfrm>
           <a:prstGeom prst="rect">
             <a:avLst/>
@@ -38805,8 +39405,8 @@
         </p:nvSpPr>
         <p:spPr>
           <a:xfrm>
-            <a:off x="3262807" y="3131820"/>
-            <a:ext cx="1375371" cy="292608"/>
+            <a:off x="7990636" y="2976372"/>
+            <a:ext cx="1844497" cy="292608"/>
           </a:xfrm>
           <a:prstGeom prst="rect">
             <a:avLst/>
@@ -38825,6 +39425,7 @@
                 <a:solidFill>
                   <a:srgbClr val="F0F2F8"/>
                 </a:solidFill>
+                <a:latin typeface="Segoe UI Emoji"/>
               </a:rPr>
               <a:t>♨️</a:t>
             </a:r>
@@ -38839,23 +39440,23 @@
         </p:nvSpPr>
         <p:spPr>
           <a:xfrm>
-            <a:off x="3262807" y="3424428"/>
-            <a:ext cx="1375371" cy="201168"/>
-          </a:xfrm>
-          <a:prstGeom prst="rect">
-            <a:avLst/>
-          </a:prstGeom>
-          <a:noFill/>
-        </p:spPr>
-        <p:txBody>
-          <a:bodyPr wrap="square">
-            <a:spAutoFit/>
-          </a:bodyPr>
-          <a:lstStyle/>
-          <a:p>
-            <a:pPr algn="ctr"/>
-            <a:r>
-              <a:rPr sz="700" b="1" i="0">
+            <a:off x="7990636" y="3232404"/>
+            <a:ext cx="1844497" cy="201168"/>
+          </a:xfrm>
+          <a:prstGeom prst="rect">
+            <a:avLst/>
+          </a:prstGeom>
+          <a:noFill/>
+        </p:spPr>
+        <p:txBody>
+          <a:bodyPr wrap="square">
+            <a:spAutoFit/>
+          </a:bodyPr>
+          <a:lstStyle/>
+          <a:p>
+            <a:pPr algn="ctr"/>
+            <a:r>
+              <a:rPr sz="800" b="1" i="0">
                 <a:solidFill>
                   <a:srgbClr val="F0F2F8"/>
                 </a:solidFill>
@@ -38873,23 +39474,23 @@
         </p:nvSpPr>
         <p:spPr>
           <a:xfrm>
-            <a:off x="3262807" y="3607308"/>
-            <a:ext cx="1375371" cy="310896"/>
-          </a:xfrm>
-          <a:prstGeom prst="rect">
-            <a:avLst/>
-          </a:prstGeom>
-          <a:noFill/>
-        </p:spPr>
-        <p:txBody>
-          <a:bodyPr wrap="square">
-            <a:spAutoFit/>
-          </a:bodyPr>
-          <a:lstStyle/>
-          <a:p>
-            <a:pPr algn="ctr"/>
-            <a:r>
-              <a:rPr sz="600" b="0" i="0">
+            <a:off x="7990636" y="3433572"/>
+            <a:ext cx="1844497" cy="457200"/>
+          </a:xfrm>
+          <a:prstGeom prst="rect">
+            <a:avLst/>
+          </a:prstGeom>
+          <a:noFill/>
+        </p:spPr>
+        <p:txBody>
+          <a:bodyPr wrap="square">
+            <a:spAutoFit/>
+          </a:bodyPr>
+          <a:lstStyle/>
+          <a:p>
+            <a:pPr algn="ctr"/>
+            <a:r>
+              <a:rPr sz="750" b="0" i="0">
                 <a:solidFill>
                   <a:srgbClr val="5A6380"/>
                 </a:solidFill>
@@ -38907,8 +39508,8 @@
         </p:nvSpPr>
         <p:spPr>
           <a:xfrm>
-            <a:off x="4688471" y="3076956"/>
-            <a:ext cx="1375371" cy="1207008"/>
+            <a:off x="9885425" y="2921508"/>
+            <a:ext cx="1844497" cy="1051560"/>
           </a:xfrm>
           <a:prstGeom prst="rect">
             <a:avLst/>
@@ -38952,8 +39553,8 @@
         </p:nvSpPr>
         <p:spPr>
           <a:xfrm>
-            <a:off x="4688471" y="3131820"/>
-            <a:ext cx="1375371" cy="292608"/>
+            <a:off x="9885425" y="2976372"/>
+            <a:ext cx="1844497" cy="292608"/>
           </a:xfrm>
           <a:prstGeom prst="rect">
             <a:avLst/>
@@ -38972,6 +39573,7 @@
                 <a:solidFill>
                   <a:srgbClr val="F0F2F8"/>
                 </a:solidFill>
+                <a:latin typeface="Segoe UI Emoji"/>
               </a:rPr>
               <a:t>🔄</a:t>
             </a:r>
@@ -38986,23 +39588,23 @@
         </p:nvSpPr>
         <p:spPr>
           <a:xfrm>
-            <a:off x="4688471" y="3424428"/>
-            <a:ext cx="1375371" cy="201168"/>
-          </a:xfrm>
-          <a:prstGeom prst="rect">
-            <a:avLst/>
-          </a:prstGeom>
-          <a:noFill/>
-        </p:spPr>
-        <p:txBody>
-          <a:bodyPr wrap="square">
-            <a:spAutoFit/>
-          </a:bodyPr>
-          <a:lstStyle/>
-          <a:p>
-            <a:pPr algn="ctr"/>
-            <a:r>
-              <a:rPr sz="700" b="1" i="0">
+            <a:off x="9885425" y="3232404"/>
+            <a:ext cx="1844497" cy="201168"/>
+          </a:xfrm>
+          <a:prstGeom prst="rect">
+            <a:avLst/>
+          </a:prstGeom>
+          <a:noFill/>
+        </p:spPr>
+        <p:txBody>
+          <a:bodyPr wrap="square">
+            <a:spAutoFit/>
+          </a:bodyPr>
+          <a:lstStyle/>
+          <a:p>
+            <a:pPr algn="ctr"/>
+            <a:r>
+              <a:rPr sz="800" b="1" i="0">
                 <a:solidFill>
                   <a:srgbClr val="F0F2F8"/>
                 </a:solidFill>
@@ -39020,23 +39622,23 @@
         </p:nvSpPr>
         <p:spPr>
           <a:xfrm>
-            <a:off x="4688471" y="3607308"/>
-            <a:ext cx="1375371" cy="310896"/>
-          </a:xfrm>
-          <a:prstGeom prst="rect">
-            <a:avLst/>
-          </a:prstGeom>
-          <a:noFill/>
-        </p:spPr>
-        <p:txBody>
-          <a:bodyPr wrap="square">
-            <a:spAutoFit/>
-          </a:bodyPr>
-          <a:lstStyle/>
-          <a:p>
-            <a:pPr algn="ctr"/>
-            <a:r>
-              <a:rPr sz="600" b="0" i="0">
+            <a:off x="9885425" y="3433572"/>
+            <a:ext cx="1844497" cy="457200"/>
+          </a:xfrm>
+          <a:prstGeom prst="rect">
+            <a:avLst/>
+          </a:prstGeom>
+          <a:noFill/>
+        </p:spPr>
+        <p:txBody>
+          <a:bodyPr wrap="square">
+            <a:spAutoFit/>
+          </a:bodyPr>
+          <a:lstStyle/>
+          <a:p>
+            <a:pPr algn="ctr"/>
+            <a:r>
+              <a:rPr sz="750" b="0" i="0">
                 <a:solidFill>
                   <a:srgbClr val="5A6380"/>
                 </a:solidFill>
@@ -39054,8 +39656,8 @@
         </p:nvSpPr>
         <p:spPr>
           <a:xfrm>
-            <a:off x="6114135" y="3076956"/>
-            <a:ext cx="1375371" cy="1207008"/>
+            <a:off x="411480" y="4032504"/>
+            <a:ext cx="1844497" cy="1051560"/>
           </a:xfrm>
           <a:prstGeom prst="rect">
             <a:avLst/>
@@ -39099,8 +39701,8 @@
         </p:nvSpPr>
         <p:spPr>
           <a:xfrm>
-            <a:off x="6114135" y="3131820"/>
-            <a:ext cx="1375371" cy="292608"/>
+            <a:off x="411480" y="4087368"/>
+            <a:ext cx="1844497" cy="292608"/>
           </a:xfrm>
           <a:prstGeom prst="rect">
             <a:avLst/>
@@ -39119,6 +39721,7 @@
                 <a:solidFill>
                   <a:srgbClr val="F0F2F8"/>
                 </a:solidFill>
+                <a:latin typeface="Segoe UI Emoji"/>
               </a:rPr>
               <a:t>🧱</a:t>
             </a:r>
@@ -39133,23 +39736,23 @@
         </p:nvSpPr>
         <p:spPr>
           <a:xfrm>
-            <a:off x="6114135" y="3424428"/>
-            <a:ext cx="1375371" cy="201168"/>
-          </a:xfrm>
-          <a:prstGeom prst="rect">
-            <a:avLst/>
-          </a:prstGeom>
-          <a:noFill/>
-        </p:spPr>
-        <p:txBody>
-          <a:bodyPr wrap="square">
-            <a:spAutoFit/>
-          </a:bodyPr>
-          <a:lstStyle/>
-          <a:p>
-            <a:pPr algn="ctr"/>
-            <a:r>
-              <a:rPr sz="700" b="1" i="0">
+            <a:off x="411480" y="4343400"/>
+            <a:ext cx="1844497" cy="201168"/>
+          </a:xfrm>
+          <a:prstGeom prst="rect">
+            <a:avLst/>
+          </a:prstGeom>
+          <a:noFill/>
+        </p:spPr>
+        <p:txBody>
+          <a:bodyPr wrap="square">
+            <a:spAutoFit/>
+          </a:bodyPr>
+          <a:lstStyle/>
+          <a:p>
+            <a:pPr algn="ctr"/>
+            <a:r>
+              <a:rPr sz="800" b="1" i="0">
                 <a:solidFill>
                   <a:srgbClr val="F0F2F8"/>
                 </a:solidFill>
@@ -39167,23 +39770,23 @@
         </p:nvSpPr>
         <p:spPr>
           <a:xfrm>
-            <a:off x="6114135" y="3607308"/>
-            <a:ext cx="1375371" cy="310896"/>
-          </a:xfrm>
-          <a:prstGeom prst="rect">
-            <a:avLst/>
-          </a:prstGeom>
-          <a:noFill/>
-        </p:spPr>
-        <p:txBody>
-          <a:bodyPr wrap="square">
-            <a:spAutoFit/>
-          </a:bodyPr>
-          <a:lstStyle/>
-          <a:p>
-            <a:pPr algn="ctr"/>
-            <a:r>
-              <a:rPr sz="600" b="0" i="0">
+            <a:off x="411480" y="4544568"/>
+            <a:ext cx="1844497" cy="457200"/>
+          </a:xfrm>
+          <a:prstGeom prst="rect">
+            <a:avLst/>
+          </a:prstGeom>
+          <a:noFill/>
+        </p:spPr>
+        <p:txBody>
+          <a:bodyPr wrap="square">
+            <a:spAutoFit/>
+          </a:bodyPr>
+          <a:lstStyle/>
+          <a:p>
+            <a:pPr algn="ctr"/>
+            <a:r>
+              <a:rPr sz="750" b="0" i="0">
                 <a:solidFill>
                   <a:srgbClr val="5A6380"/>
                 </a:solidFill>
@@ -39201,8 +39804,8 @@
         </p:nvSpPr>
         <p:spPr>
           <a:xfrm>
-            <a:off x="7539799" y="3076956"/>
-            <a:ext cx="1375371" cy="1207008"/>
+            <a:off x="2306269" y="4032504"/>
+            <a:ext cx="1844497" cy="1051560"/>
           </a:xfrm>
           <a:prstGeom prst="rect">
             <a:avLst/>
@@ -39246,8 +39849,8 @@
         </p:nvSpPr>
         <p:spPr>
           <a:xfrm>
-            <a:off x="7539799" y="3131820"/>
-            <a:ext cx="1375371" cy="292608"/>
+            <a:off x="2306269" y="4087368"/>
+            <a:ext cx="1844497" cy="292608"/>
           </a:xfrm>
           <a:prstGeom prst="rect">
             <a:avLst/>
@@ -39266,6 +39869,7 @@
                 <a:solidFill>
                   <a:srgbClr val="F0F2F8"/>
                 </a:solidFill>
+                <a:latin typeface="Segoe UI Emoji"/>
               </a:rPr>
               <a:t>🪢</a:t>
             </a:r>
@@ -39280,23 +39884,23 @@
         </p:nvSpPr>
         <p:spPr>
           <a:xfrm>
-            <a:off x="7539799" y="3424428"/>
-            <a:ext cx="1375371" cy="201168"/>
-          </a:xfrm>
-          <a:prstGeom prst="rect">
-            <a:avLst/>
-          </a:prstGeom>
-          <a:noFill/>
-        </p:spPr>
-        <p:txBody>
-          <a:bodyPr wrap="square">
-            <a:spAutoFit/>
-          </a:bodyPr>
-          <a:lstStyle/>
-          <a:p>
-            <a:pPr algn="ctr"/>
-            <a:r>
-              <a:rPr sz="700" b="1" i="0">
+            <a:off x="2306269" y="4343400"/>
+            <a:ext cx="1844497" cy="201168"/>
+          </a:xfrm>
+          <a:prstGeom prst="rect">
+            <a:avLst/>
+          </a:prstGeom>
+          <a:noFill/>
+        </p:spPr>
+        <p:txBody>
+          <a:bodyPr wrap="square">
+            <a:spAutoFit/>
+          </a:bodyPr>
+          <a:lstStyle/>
+          <a:p>
+            <a:pPr algn="ctr"/>
+            <a:r>
+              <a:rPr sz="800" b="1" i="0">
                 <a:solidFill>
                   <a:srgbClr val="F0F2F8"/>
                 </a:solidFill>
@@ -39314,23 +39918,23 @@
         </p:nvSpPr>
         <p:spPr>
           <a:xfrm>
-            <a:off x="7539799" y="3607308"/>
-            <a:ext cx="1375371" cy="310896"/>
-          </a:xfrm>
-          <a:prstGeom prst="rect">
-            <a:avLst/>
-          </a:prstGeom>
-          <a:noFill/>
-        </p:spPr>
-        <p:txBody>
-          <a:bodyPr wrap="square">
-            <a:spAutoFit/>
-          </a:bodyPr>
-          <a:lstStyle/>
-          <a:p>
-            <a:pPr algn="ctr"/>
-            <a:r>
-              <a:rPr sz="600" b="0" i="0">
+            <a:off x="2306269" y="4544568"/>
+            <a:ext cx="1844497" cy="457200"/>
+          </a:xfrm>
+          <a:prstGeom prst="rect">
+            <a:avLst/>
+          </a:prstGeom>
+          <a:noFill/>
+        </p:spPr>
+        <p:txBody>
+          <a:bodyPr wrap="square">
+            <a:spAutoFit/>
+          </a:bodyPr>
+          <a:lstStyle/>
+          <a:p>
+            <a:pPr algn="ctr"/>
+            <a:r>
+              <a:rPr sz="750" b="0" i="0">
                 <a:solidFill>
                   <a:srgbClr val="5A6380"/>
                 </a:solidFill>
@@ -39348,8 +39952,8 @@
         </p:nvSpPr>
         <p:spPr>
           <a:xfrm>
-            <a:off x="8965463" y="3076956"/>
-            <a:ext cx="1375371" cy="1207008"/>
+            <a:off x="4201058" y="4032504"/>
+            <a:ext cx="1844497" cy="1051560"/>
           </a:xfrm>
           <a:prstGeom prst="rect">
             <a:avLst/>
@@ -39393,8 +39997,8 @@
         </p:nvSpPr>
         <p:spPr>
           <a:xfrm>
-            <a:off x="8965463" y="3131820"/>
-            <a:ext cx="1375371" cy="292608"/>
+            <a:off x="4201058" y="4087368"/>
+            <a:ext cx="1844497" cy="292608"/>
           </a:xfrm>
           <a:prstGeom prst="rect">
             <a:avLst/>
@@ -39413,6 +40017,7 @@
                 <a:solidFill>
                   <a:srgbClr val="F0F2F8"/>
                 </a:solidFill>
+                <a:latin typeface="Segoe UI Emoji"/>
               </a:rPr>
               <a:t>🎨</a:t>
             </a:r>
@@ -39427,23 +40032,23 @@
         </p:nvSpPr>
         <p:spPr>
           <a:xfrm>
-            <a:off x="8965463" y="3424428"/>
-            <a:ext cx="1375371" cy="201168"/>
-          </a:xfrm>
-          <a:prstGeom prst="rect">
-            <a:avLst/>
-          </a:prstGeom>
-          <a:noFill/>
-        </p:spPr>
-        <p:txBody>
-          <a:bodyPr wrap="square">
-            <a:spAutoFit/>
-          </a:bodyPr>
-          <a:lstStyle/>
-          <a:p>
-            <a:pPr algn="ctr"/>
-            <a:r>
-              <a:rPr sz="700" b="1" i="0">
+            <a:off x="4201058" y="4343400"/>
+            <a:ext cx="1844497" cy="201168"/>
+          </a:xfrm>
+          <a:prstGeom prst="rect">
+            <a:avLst/>
+          </a:prstGeom>
+          <a:noFill/>
+        </p:spPr>
+        <p:txBody>
+          <a:bodyPr wrap="square">
+            <a:spAutoFit/>
+          </a:bodyPr>
+          <a:lstStyle/>
+          <a:p>
+            <a:pPr algn="ctr"/>
+            <a:r>
+              <a:rPr sz="800" b="1" i="0">
                 <a:solidFill>
                   <a:srgbClr val="F0F2F8"/>
                 </a:solidFill>
@@ -39461,23 +40066,23 @@
         </p:nvSpPr>
         <p:spPr>
           <a:xfrm>
-            <a:off x="8965463" y="3607308"/>
-            <a:ext cx="1375371" cy="310896"/>
-          </a:xfrm>
-          <a:prstGeom prst="rect">
-            <a:avLst/>
-          </a:prstGeom>
-          <a:noFill/>
-        </p:spPr>
-        <p:txBody>
-          <a:bodyPr wrap="square">
-            <a:spAutoFit/>
-          </a:bodyPr>
-          <a:lstStyle/>
-          <a:p>
-            <a:pPr algn="ctr"/>
-            <a:r>
-              <a:rPr sz="600" b="0" i="0">
+            <a:off x="4201058" y="4544568"/>
+            <a:ext cx="1844497" cy="457200"/>
+          </a:xfrm>
+          <a:prstGeom prst="rect">
+            <a:avLst/>
+          </a:prstGeom>
+          <a:noFill/>
+        </p:spPr>
+        <p:txBody>
+          <a:bodyPr wrap="square">
+            <a:spAutoFit/>
+          </a:bodyPr>
+          <a:lstStyle/>
+          <a:p>
+            <a:pPr algn="ctr"/>
+            <a:r>
+              <a:rPr sz="750" b="0" i="0">
                 <a:solidFill>
                   <a:srgbClr val="5A6380"/>
                 </a:solidFill>
@@ -39495,8 +40100,8 @@
         </p:nvSpPr>
         <p:spPr>
           <a:xfrm>
-            <a:off x="10391127" y="3076956"/>
-            <a:ext cx="1375371" cy="1207008"/>
+            <a:off x="6095847" y="4032504"/>
+            <a:ext cx="1844497" cy="1051560"/>
           </a:xfrm>
           <a:prstGeom prst="rect">
             <a:avLst/>
@@ -39540,8 +40145,8 @@
         </p:nvSpPr>
         <p:spPr>
           <a:xfrm>
-            <a:off x="10391127" y="3131820"/>
-            <a:ext cx="1375371" cy="292608"/>
+            <a:off x="6095847" y="4087368"/>
+            <a:ext cx="1844497" cy="292608"/>
           </a:xfrm>
           <a:prstGeom prst="rect">
             <a:avLst/>
@@ -39560,6 +40165,7 @@
                 <a:solidFill>
                   <a:srgbClr val="F0F2F8"/>
                 </a:solidFill>
+                <a:latin typeface="Segoe UI Emoji"/>
               </a:rPr>
               <a:t>🚗</a:t>
             </a:r>
@@ -39574,23 +40180,23 @@
         </p:nvSpPr>
         <p:spPr>
           <a:xfrm>
-            <a:off x="10391127" y="3424428"/>
-            <a:ext cx="1375371" cy="201168"/>
-          </a:xfrm>
-          <a:prstGeom prst="rect">
-            <a:avLst/>
-          </a:prstGeom>
-          <a:noFill/>
-        </p:spPr>
-        <p:txBody>
-          <a:bodyPr wrap="square">
-            <a:spAutoFit/>
-          </a:bodyPr>
-          <a:lstStyle/>
-          <a:p>
-            <a:pPr algn="ctr"/>
-            <a:r>
-              <a:rPr sz="700" b="1" i="0">
+            <a:off x="6095847" y="4343400"/>
+            <a:ext cx="1844497" cy="201168"/>
+          </a:xfrm>
+          <a:prstGeom prst="rect">
+            <a:avLst/>
+          </a:prstGeom>
+          <a:noFill/>
+        </p:spPr>
+        <p:txBody>
+          <a:bodyPr wrap="square">
+            <a:spAutoFit/>
+          </a:bodyPr>
+          <a:lstStyle/>
+          <a:p>
+            <a:pPr algn="ctr"/>
+            <a:r>
+              <a:rPr sz="800" b="1" i="0">
                 <a:solidFill>
                   <a:srgbClr val="F0F2F8"/>
                 </a:solidFill>
@@ -39608,23 +40214,23 @@
         </p:nvSpPr>
         <p:spPr>
           <a:xfrm>
-            <a:off x="10391127" y="3607308"/>
-            <a:ext cx="1375371" cy="310896"/>
-          </a:xfrm>
-          <a:prstGeom prst="rect">
-            <a:avLst/>
-          </a:prstGeom>
-          <a:noFill/>
-        </p:spPr>
-        <p:txBody>
-          <a:bodyPr wrap="square">
-            <a:spAutoFit/>
-          </a:bodyPr>
-          <a:lstStyle/>
-          <a:p>
-            <a:pPr algn="ctr"/>
-            <a:r>
-              <a:rPr sz="600" b="0" i="0">
+            <a:off x="6095847" y="4544568"/>
+            <a:ext cx="1844497" cy="457200"/>
+          </a:xfrm>
+          <a:prstGeom prst="rect">
+            <a:avLst/>
+          </a:prstGeom>
+          <a:noFill/>
+        </p:spPr>
+        <p:txBody>
+          <a:bodyPr wrap="square">
+            <a:spAutoFit/>
+          </a:bodyPr>
+          <a:lstStyle/>
+          <a:p>
+            <a:pPr algn="ctr"/>
+            <a:r>
+              <a:rPr sz="750" b="0" i="0">
                 <a:solidFill>
                   <a:srgbClr val="5A6380"/>
                 </a:solidFill>
@@ -39642,8 +40248,8 @@
         </p:nvSpPr>
         <p:spPr>
           <a:xfrm>
-            <a:off x="411480" y="4343400"/>
-            <a:ext cx="1375371" cy="1207008"/>
+            <a:off x="7990636" y="4032504"/>
+            <a:ext cx="1844497" cy="1051560"/>
           </a:xfrm>
           <a:prstGeom prst="rect">
             <a:avLst/>
@@ -39687,8 +40293,8 @@
         </p:nvSpPr>
         <p:spPr>
           <a:xfrm>
-            <a:off x="411480" y="4398264"/>
-            <a:ext cx="1375371" cy="292608"/>
+            <a:off x="7990636" y="4087368"/>
+            <a:ext cx="1844497" cy="292608"/>
           </a:xfrm>
           <a:prstGeom prst="rect">
             <a:avLst/>
@@ -39707,6 +40313,7 @@
                 <a:solidFill>
                   <a:srgbClr val="F0F2F8"/>
                 </a:solidFill>
+                <a:latin typeface="Segoe UI Emoji"/>
               </a:rPr>
               <a:t>🖥️</a:t>
             </a:r>
@@ -39721,23 +40328,23 @@
         </p:nvSpPr>
         <p:spPr>
           <a:xfrm>
-            <a:off x="411480" y="4690872"/>
-            <a:ext cx="1375371" cy="201168"/>
-          </a:xfrm>
-          <a:prstGeom prst="rect">
-            <a:avLst/>
-          </a:prstGeom>
-          <a:noFill/>
-        </p:spPr>
-        <p:txBody>
-          <a:bodyPr wrap="square">
-            <a:spAutoFit/>
-          </a:bodyPr>
-          <a:lstStyle/>
-          <a:p>
-            <a:pPr algn="ctr"/>
-            <a:r>
-              <a:rPr sz="700" b="1" i="0">
+            <a:off x="7990636" y="4343400"/>
+            <a:ext cx="1844497" cy="201168"/>
+          </a:xfrm>
+          <a:prstGeom prst="rect">
+            <a:avLst/>
+          </a:prstGeom>
+          <a:noFill/>
+        </p:spPr>
+        <p:txBody>
+          <a:bodyPr wrap="square">
+            <a:spAutoFit/>
+          </a:bodyPr>
+          <a:lstStyle/>
+          <a:p>
+            <a:pPr algn="ctr"/>
+            <a:r>
+              <a:rPr sz="800" b="1" i="0">
                 <a:solidFill>
                   <a:srgbClr val="F0F2F8"/>
                 </a:solidFill>
@@ -39755,23 +40362,23 @@
         </p:nvSpPr>
         <p:spPr>
           <a:xfrm>
-            <a:off x="411480" y="4873752"/>
-            <a:ext cx="1375371" cy="310896"/>
-          </a:xfrm>
-          <a:prstGeom prst="rect">
-            <a:avLst/>
-          </a:prstGeom>
-          <a:noFill/>
-        </p:spPr>
-        <p:txBody>
-          <a:bodyPr wrap="square">
-            <a:spAutoFit/>
-          </a:bodyPr>
-          <a:lstStyle/>
-          <a:p>
-            <a:pPr algn="ctr"/>
-            <a:r>
-              <a:rPr sz="600" b="0" i="0">
+            <a:off x="7990636" y="4544568"/>
+            <a:ext cx="1844497" cy="457200"/>
+          </a:xfrm>
+          <a:prstGeom prst="rect">
+            <a:avLst/>
+          </a:prstGeom>
+          <a:noFill/>
+        </p:spPr>
+        <p:txBody>
+          <a:bodyPr wrap="square">
+            <a:spAutoFit/>
+          </a:bodyPr>
+          <a:lstStyle/>
+          <a:p>
+            <a:pPr algn="ctr"/>
+            <a:r>
+              <a:rPr sz="750" b="0" i="0">
                 <a:solidFill>
                   <a:srgbClr val="5A6380"/>
                 </a:solidFill>
@@ -39789,8 +40396,8 @@
         </p:nvSpPr>
         <p:spPr>
           <a:xfrm>
-            <a:off x="1837143" y="4343400"/>
-            <a:ext cx="1375371" cy="1207008"/>
+            <a:off x="9885425" y="4032504"/>
+            <a:ext cx="1844497" cy="1051560"/>
           </a:xfrm>
           <a:prstGeom prst="rect">
             <a:avLst/>
@@ -39834,8 +40441,8 @@
         </p:nvSpPr>
         <p:spPr>
           <a:xfrm>
-            <a:off x="1837143" y="4398264"/>
-            <a:ext cx="1375371" cy="292608"/>
+            <a:off x="9885425" y="4087368"/>
+            <a:ext cx="1844497" cy="292608"/>
           </a:xfrm>
           <a:prstGeom prst="rect">
             <a:avLst/>
@@ -39854,6 +40461,7 @@
                 <a:solidFill>
                   <a:srgbClr val="F0F2F8"/>
                 </a:solidFill>
+                <a:latin typeface="Segoe UI Emoji"/>
               </a:rPr>
               <a:t>🔌</a:t>
             </a:r>
@@ -39868,23 +40476,23 @@
         </p:nvSpPr>
         <p:spPr>
           <a:xfrm>
-            <a:off x="1837143" y="4690872"/>
-            <a:ext cx="1375371" cy="201168"/>
-          </a:xfrm>
-          <a:prstGeom prst="rect">
-            <a:avLst/>
-          </a:prstGeom>
-          <a:noFill/>
-        </p:spPr>
-        <p:txBody>
-          <a:bodyPr wrap="square">
-            <a:spAutoFit/>
-          </a:bodyPr>
-          <a:lstStyle/>
-          <a:p>
-            <a:pPr algn="ctr"/>
-            <a:r>
-              <a:rPr sz="700" b="1" i="0">
+            <a:off x="9885425" y="4343400"/>
+            <a:ext cx="1844497" cy="201168"/>
+          </a:xfrm>
+          <a:prstGeom prst="rect">
+            <a:avLst/>
+          </a:prstGeom>
+          <a:noFill/>
+        </p:spPr>
+        <p:txBody>
+          <a:bodyPr wrap="square">
+            <a:spAutoFit/>
+          </a:bodyPr>
+          <a:lstStyle/>
+          <a:p>
+            <a:pPr algn="ctr"/>
+            <a:r>
+              <a:rPr sz="800" b="1" i="0">
                 <a:solidFill>
                   <a:srgbClr val="F0F2F8"/>
                 </a:solidFill>
@@ -39902,23 +40510,23 @@
         </p:nvSpPr>
         <p:spPr>
           <a:xfrm>
-            <a:off x="1837143" y="4873752"/>
-            <a:ext cx="1375371" cy="310896"/>
-          </a:xfrm>
-          <a:prstGeom prst="rect">
-            <a:avLst/>
-          </a:prstGeom>
-          <a:noFill/>
-        </p:spPr>
-        <p:txBody>
-          <a:bodyPr wrap="square">
-            <a:spAutoFit/>
-          </a:bodyPr>
-          <a:lstStyle/>
-          <a:p>
-            <a:pPr algn="ctr"/>
-            <a:r>
-              <a:rPr sz="600" b="0" i="0">
+            <a:off x="9885425" y="4544568"/>
+            <a:ext cx="1844497" cy="457200"/>
+          </a:xfrm>
+          <a:prstGeom prst="rect">
+            <a:avLst/>
+          </a:prstGeom>
+          <a:noFill/>
+        </p:spPr>
+        <p:txBody>
+          <a:bodyPr wrap="square">
+            <a:spAutoFit/>
+          </a:bodyPr>
+          <a:lstStyle/>
+          <a:p>
+            <a:pPr algn="ctr"/>
+            <a:r>
+              <a:rPr sz="750" b="0" i="0">
                 <a:solidFill>
                   <a:srgbClr val="5A6380"/>
                 </a:solidFill>
@@ -39936,8 +40544,8 @@
         </p:nvSpPr>
         <p:spPr>
           <a:xfrm>
-            <a:off x="3262807" y="4343400"/>
-            <a:ext cx="1375371" cy="1207008"/>
+            <a:off x="411480" y="5143500"/>
+            <a:ext cx="1844497" cy="1051560"/>
           </a:xfrm>
           <a:prstGeom prst="rect">
             <a:avLst/>
@@ -39981,8 +40589,8 @@
         </p:nvSpPr>
         <p:spPr>
           <a:xfrm>
-            <a:off x="3262807" y="4398264"/>
-            <a:ext cx="1375371" cy="292608"/>
+            <a:off x="411480" y="5198364"/>
+            <a:ext cx="1844497" cy="292608"/>
           </a:xfrm>
           <a:prstGeom prst="rect">
             <a:avLst/>
@@ -40001,6 +40609,7 @@
                 <a:solidFill>
                   <a:srgbClr val="F0F2F8"/>
                 </a:solidFill>
+                <a:latin typeface="Segoe UI Emoji"/>
               </a:rPr>
               <a:t>🔗</a:t>
             </a:r>
@@ -40015,23 +40624,23 @@
         </p:nvSpPr>
         <p:spPr>
           <a:xfrm>
-            <a:off x="3262807" y="4690872"/>
-            <a:ext cx="1375371" cy="201168"/>
-          </a:xfrm>
-          <a:prstGeom prst="rect">
-            <a:avLst/>
-          </a:prstGeom>
-          <a:noFill/>
-        </p:spPr>
-        <p:txBody>
-          <a:bodyPr wrap="square">
-            <a:spAutoFit/>
-          </a:bodyPr>
-          <a:lstStyle/>
-          <a:p>
-            <a:pPr algn="ctr"/>
-            <a:r>
-              <a:rPr sz="700" b="1" i="0">
+            <a:off x="411480" y="5454396"/>
+            <a:ext cx="1844497" cy="201168"/>
+          </a:xfrm>
+          <a:prstGeom prst="rect">
+            <a:avLst/>
+          </a:prstGeom>
+          <a:noFill/>
+        </p:spPr>
+        <p:txBody>
+          <a:bodyPr wrap="square">
+            <a:spAutoFit/>
+          </a:bodyPr>
+          <a:lstStyle/>
+          <a:p>
+            <a:pPr algn="ctr"/>
+            <a:r>
+              <a:rPr sz="800" b="1" i="0">
                 <a:solidFill>
                   <a:srgbClr val="F0F2F8"/>
                 </a:solidFill>
@@ -40049,23 +40658,23 @@
         </p:nvSpPr>
         <p:spPr>
           <a:xfrm>
-            <a:off x="3262807" y="4873752"/>
-            <a:ext cx="1375371" cy="310896"/>
-          </a:xfrm>
-          <a:prstGeom prst="rect">
-            <a:avLst/>
-          </a:prstGeom>
-          <a:noFill/>
-        </p:spPr>
-        <p:txBody>
-          <a:bodyPr wrap="square">
-            <a:spAutoFit/>
-          </a:bodyPr>
-          <a:lstStyle/>
-          <a:p>
-            <a:pPr algn="ctr"/>
-            <a:r>
-              <a:rPr sz="600" b="0" i="0">
+            <a:off x="411480" y="5655564"/>
+            <a:ext cx="1844497" cy="457200"/>
+          </a:xfrm>
+          <a:prstGeom prst="rect">
+            <a:avLst/>
+          </a:prstGeom>
+          <a:noFill/>
+        </p:spPr>
+        <p:txBody>
+          <a:bodyPr wrap="square">
+            <a:spAutoFit/>
+          </a:bodyPr>
+          <a:lstStyle/>
+          <a:p>
+            <a:pPr algn="ctr"/>
+            <a:r>
+              <a:rPr sz="750" b="0" i="0">
                 <a:solidFill>
                   <a:srgbClr val="5A6380"/>
                 </a:solidFill>
@@ -40083,8 +40692,8 @@
         </p:nvSpPr>
         <p:spPr>
           <a:xfrm>
-            <a:off x="4688471" y="4343400"/>
-            <a:ext cx="1375371" cy="1207008"/>
+            <a:off x="2306269" y="5143500"/>
+            <a:ext cx="1844497" cy="1051560"/>
           </a:xfrm>
           <a:prstGeom prst="rect">
             <a:avLst/>
@@ -40128,8 +40737,8 @@
         </p:nvSpPr>
         <p:spPr>
           <a:xfrm>
-            <a:off x="4688471" y="4398264"/>
-            <a:ext cx="1375371" cy="292608"/>
+            <a:off x="2306269" y="5198364"/>
+            <a:ext cx="1844497" cy="292608"/>
           </a:xfrm>
           <a:prstGeom prst="rect">
             <a:avLst/>
@@ -40148,6 +40757,7 @@
                 <a:solidFill>
                   <a:srgbClr val="F0F2F8"/>
                 </a:solidFill>
+                <a:latin typeface="Segoe UI Emoji"/>
               </a:rPr>
               <a:t>🔗</a:t>
             </a:r>
@@ -40162,23 +40772,23 @@
         </p:nvSpPr>
         <p:spPr>
           <a:xfrm>
-            <a:off x="4688471" y="4690872"/>
-            <a:ext cx="1375371" cy="201168"/>
-          </a:xfrm>
-          <a:prstGeom prst="rect">
-            <a:avLst/>
-          </a:prstGeom>
-          <a:noFill/>
-        </p:spPr>
-        <p:txBody>
-          <a:bodyPr wrap="square">
-            <a:spAutoFit/>
-          </a:bodyPr>
-          <a:lstStyle/>
-          <a:p>
-            <a:pPr algn="ctr"/>
-            <a:r>
-              <a:rPr sz="700" b="1" i="0">
+            <a:off x="2306269" y="5454396"/>
+            <a:ext cx="1844497" cy="201168"/>
+          </a:xfrm>
+          <a:prstGeom prst="rect">
+            <a:avLst/>
+          </a:prstGeom>
+          <a:noFill/>
+        </p:spPr>
+        <p:txBody>
+          <a:bodyPr wrap="square">
+            <a:spAutoFit/>
+          </a:bodyPr>
+          <a:lstStyle/>
+          <a:p>
+            <a:pPr algn="ctr"/>
+            <a:r>
+              <a:rPr sz="800" b="1" i="0">
                 <a:solidFill>
                   <a:srgbClr val="F0F2F8"/>
                 </a:solidFill>
@@ -40196,23 +40806,23 @@
         </p:nvSpPr>
         <p:spPr>
           <a:xfrm>
-            <a:off x="4688471" y="4873752"/>
-            <a:ext cx="1375371" cy="310896"/>
-          </a:xfrm>
-          <a:prstGeom prst="rect">
-            <a:avLst/>
-          </a:prstGeom>
-          <a:noFill/>
-        </p:spPr>
-        <p:txBody>
-          <a:bodyPr wrap="square">
-            <a:spAutoFit/>
-          </a:bodyPr>
-          <a:lstStyle/>
-          <a:p>
-            <a:pPr algn="ctr"/>
-            <a:r>
-              <a:rPr sz="600" b="0" i="0">
+            <a:off x="2306269" y="5655564"/>
+            <a:ext cx="1844497" cy="457200"/>
+          </a:xfrm>
+          <a:prstGeom prst="rect">
+            <a:avLst/>
+          </a:prstGeom>
+          <a:noFill/>
+        </p:spPr>
+        <p:txBody>
+          <a:bodyPr wrap="square">
+            <a:spAutoFit/>
+          </a:bodyPr>
+          <a:lstStyle/>
+          <a:p>
+            <a:pPr algn="ctr"/>
+            <a:r>
+              <a:rPr sz="750" b="0" i="0">
                 <a:solidFill>
                   <a:srgbClr val="5A6380"/>
                 </a:solidFill>
@@ -40230,8 +40840,8 @@
         </p:nvSpPr>
         <p:spPr>
           <a:xfrm>
-            <a:off x="6114135" y="4343400"/>
-            <a:ext cx="1375371" cy="1207008"/>
+            <a:off x="4201058" y="5143500"/>
+            <a:ext cx="1844497" cy="1051560"/>
           </a:xfrm>
           <a:prstGeom prst="rect">
             <a:avLst/>
@@ -40275,8 +40885,8 @@
         </p:nvSpPr>
         <p:spPr>
           <a:xfrm>
-            <a:off x="6114135" y="4398264"/>
-            <a:ext cx="1375371" cy="292608"/>
+            <a:off x="4201058" y="5198364"/>
+            <a:ext cx="1844497" cy="292608"/>
           </a:xfrm>
           <a:prstGeom prst="rect">
             <a:avLst/>
@@ -40295,6 +40905,7 @@
                 <a:solidFill>
                   <a:srgbClr val="F0F2F8"/>
                 </a:solidFill>
+                <a:latin typeface="Segoe UI Emoji"/>
               </a:rPr>
               <a:t>📉</a:t>
             </a:r>
@@ -40309,23 +40920,23 @@
         </p:nvSpPr>
         <p:spPr>
           <a:xfrm>
-            <a:off x="6114135" y="4690872"/>
-            <a:ext cx="1375371" cy="201168"/>
-          </a:xfrm>
-          <a:prstGeom prst="rect">
-            <a:avLst/>
-          </a:prstGeom>
-          <a:noFill/>
-        </p:spPr>
-        <p:txBody>
-          <a:bodyPr wrap="square">
-            <a:spAutoFit/>
-          </a:bodyPr>
-          <a:lstStyle/>
-          <a:p>
-            <a:pPr algn="ctr"/>
-            <a:r>
-              <a:rPr sz="700" b="1" i="0">
+            <a:off x="4201058" y="5454396"/>
+            <a:ext cx="1844497" cy="201168"/>
+          </a:xfrm>
+          <a:prstGeom prst="rect">
+            <a:avLst/>
+          </a:prstGeom>
+          <a:noFill/>
+        </p:spPr>
+        <p:txBody>
+          <a:bodyPr wrap="square">
+            <a:spAutoFit/>
+          </a:bodyPr>
+          <a:lstStyle/>
+          <a:p>
+            <a:pPr algn="ctr"/>
+            <a:r>
+              <a:rPr sz="800" b="1" i="0">
                 <a:solidFill>
                   <a:srgbClr val="F0F2F8"/>
                 </a:solidFill>
@@ -40343,23 +40954,23 @@
         </p:nvSpPr>
         <p:spPr>
           <a:xfrm>
-            <a:off x="6114135" y="4873752"/>
-            <a:ext cx="1375371" cy="310896"/>
-          </a:xfrm>
-          <a:prstGeom prst="rect">
-            <a:avLst/>
-          </a:prstGeom>
-          <a:noFill/>
-        </p:spPr>
-        <p:txBody>
-          <a:bodyPr wrap="square">
-            <a:spAutoFit/>
-          </a:bodyPr>
-          <a:lstStyle/>
-          <a:p>
-            <a:pPr algn="ctr"/>
-            <a:r>
-              <a:rPr sz="600" b="0" i="0">
+            <a:off x="4201058" y="5655564"/>
+            <a:ext cx="1844497" cy="457200"/>
+          </a:xfrm>
+          <a:prstGeom prst="rect">
+            <a:avLst/>
+          </a:prstGeom>
+          <a:noFill/>
+        </p:spPr>
+        <p:txBody>
+          <a:bodyPr wrap="square">
+            <a:spAutoFit/>
+          </a:bodyPr>
+          <a:lstStyle/>
+          <a:p>
+            <a:pPr algn="ctr"/>
+            <a:r>
+              <a:rPr sz="750" b="0" i="0">
                 <a:solidFill>
                   <a:srgbClr val="5A6380"/>
                 </a:solidFill>
@@ -40377,8 +40988,8 @@
         </p:nvSpPr>
         <p:spPr>
           <a:xfrm>
-            <a:off x="7539799" y="4343400"/>
-            <a:ext cx="1375371" cy="1207008"/>
+            <a:off x="6095847" y="5143500"/>
+            <a:ext cx="1844497" cy="1051560"/>
           </a:xfrm>
           <a:prstGeom prst="rect">
             <a:avLst/>
@@ -40422,8 +41033,8 @@
         </p:nvSpPr>
         <p:spPr>
           <a:xfrm>
-            <a:off x="7539799" y="4398264"/>
-            <a:ext cx="1375371" cy="292608"/>
+            <a:off x="6095847" y="5198364"/>
+            <a:ext cx="1844497" cy="292608"/>
           </a:xfrm>
           <a:prstGeom prst="rect">
             <a:avLst/>
@@ -40442,6 +41053,7 @@
                 <a:solidFill>
                   <a:srgbClr val="F0F2F8"/>
                 </a:solidFill>
+                <a:latin typeface="Segoe UI Emoji"/>
               </a:rPr>
               <a:t>🤖</a:t>
             </a:r>
@@ -40456,23 +41068,23 @@
         </p:nvSpPr>
         <p:spPr>
           <a:xfrm>
-            <a:off x="7539799" y="4690872"/>
-            <a:ext cx="1375371" cy="201168"/>
-          </a:xfrm>
-          <a:prstGeom prst="rect">
-            <a:avLst/>
-          </a:prstGeom>
-          <a:noFill/>
-        </p:spPr>
-        <p:txBody>
-          <a:bodyPr wrap="square">
-            <a:spAutoFit/>
-          </a:bodyPr>
-          <a:lstStyle/>
-          <a:p>
-            <a:pPr algn="ctr"/>
-            <a:r>
-              <a:rPr sz="700" b="1" i="0">
+            <a:off x="6095847" y="5454396"/>
+            <a:ext cx="1844497" cy="201168"/>
+          </a:xfrm>
+          <a:prstGeom prst="rect">
+            <a:avLst/>
+          </a:prstGeom>
+          <a:noFill/>
+        </p:spPr>
+        <p:txBody>
+          <a:bodyPr wrap="square">
+            <a:spAutoFit/>
+          </a:bodyPr>
+          <a:lstStyle/>
+          <a:p>
+            <a:pPr algn="ctr"/>
+            <a:r>
+              <a:rPr sz="800" b="1" i="0">
                 <a:solidFill>
                   <a:srgbClr val="F0F2F8"/>
                 </a:solidFill>
@@ -40490,23 +41102,23 @@
         </p:nvSpPr>
         <p:spPr>
           <a:xfrm>
-            <a:off x="7539799" y="4873752"/>
-            <a:ext cx="1375371" cy="310896"/>
-          </a:xfrm>
-          <a:prstGeom prst="rect">
-            <a:avLst/>
-          </a:prstGeom>
-          <a:noFill/>
-        </p:spPr>
-        <p:txBody>
-          <a:bodyPr wrap="square">
-            <a:spAutoFit/>
-          </a:bodyPr>
-          <a:lstStyle/>
-          <a:p>
-            <a:pPr algn="ctr"/>
-            <a:r>
-              <a:rPr sz="600" b="0" i="0">
+            <a:off x="6095847" y="5655564"/>
+            <a:ext cx="1844497" cy="457200"/>
+          </a:xfrm>
+          <a:prstGeom prst="rect">
+            <a:avLst/>
+          </a:prstGeom>
+          <a:noFill/>
+        </p:spPr>
+        <p:txBody>
+          <a:bodyPr wrap="square">
+            <a:spAutoFit/>
+          </a:bodyPr>
+          <a:lstStyle/>
+          <a:p>
+            <a:pPr algn="ctr"/>
+            <a:r>
+              <a:rPr sz="750" b="0" i="0">
                 <a:solidFill>
                   <a:srgbClr val="5A6380"/>
                 </a:solidFill>

--- a/CostVision-Executive-Presentation.pptx
+++ b/CostVision-Executive-Presentation.pptx
@@ -1780,7 +1780,7 @@
           <a:lstStyle/>
           <a:p>
             <a:r>
-              <a:t>Breadth is the point of this slide. Twenty-two commodities, from CNC machining and casting and forging, through the whole plastics family — injection, blow, extrusion, thermoforming, rotomoulding — into rubber and composites, then electronics: PCB fabrication, assembly, wiring harness, and body-in-white. Why does that matter? Because a real product isn't one process. A door module is stampings plus a harness plus a PCBA plus paint. If your costing tool only does machining, you're stuck the moment the part is plastic. CostVision costs all of them with the same rigour and the same eight-bucket structure, which is exactly what lets the assembly roll-up add them together into one number. And the last tile is the AI agent — the natural-language front door into any of the other twenty.</a:t>
+              <a:t>Breadth is the point of this slide. Twenty-one commodities, from CNC machining and casting and forging, through the whole plastics family — injection, blow, extrusion, thermoforming, rotomoulding — into rubber and composites, then electronics: PCB fabrication, assembly, wiring harness, and body-in-white. Why does that matter? Because a real product isn't one process. A door module is stampings plus a harness plus a PCBA plus paint. If your costing tool only does machining, you're stuck the moment the part is plastic. CostVision costs all of them with the same rigour and the same eight-bucket structure, which is exactly what lets the assembly roll-up add them together into one number. And the last tile is the AI agent — the natural-language front door into any of the other twenty.</a:t>
             </a:r>
           </a:p>
         </p:txBody>
@@ -8586,7 +8586,7 @@
                   <a:srgbClr val="9AA3B8"/>
                 </a:solidFill>
               </a:rPr>
-              <a:t>Build multi-level assemblies from any combination of 22 commodities:
+              <a:t>Build multi-level assemblies from any combination of 21 commodities:
 • Add components one-by-one with commodity type, weight, volume
 • Each component costed using its own should-cost model
 • Roll up to a total assembly cost with full per-component breakdown
@@ -22645,7 +22645,7 @@
                   <a:srgbClr val="9AA3B8"/>
                 </a:solidFill>
               </a:rPr>
-              <a:t>22 commodity should-cost models — fully parametric, engineering-grade</a:t>
+              <a:t>21 commodity should-cost models — fully parametric, engineering-grade</a:t>
             </a:r>
           </a:p>
         </p:txBody>
@@ -37756,7 +37756,7 @@
                   <a:srgbClr val="F0F2F8"/>
                 </a:solidFill>
               </a:rPr>
-              <a:t>22 Manufacturing Commodities — One Platform</a:t>
+              <a:t>21 Manufacturing Commodities — One Platform</a:t>
             </a:r>
           </a:p>
         </p:txBody>
@@ -40907,7 +40907,7 @@
                 </a:solidFill>
                 <a:latin typeface="Segoe UI Emoji"/>
               </a:rPr>
-              <a:t>📉</a:t>
+              <a:t>🤖</a:t>
             </a:r>
           </a:p>
         </p:txBody>
@@ -40941,7 +40941,7 @@
                   <a:srgbClr val="F0F2F8"/>
                 </a:solidFill>
               </a:rPr>
-              <a:t>Extrusion (Profile)</a:t>
+              <a:t>AI Agent</a:t>
             </a:r>
           </a:p>
         </p:txBody>
@@ -40955,154 +40955,6 @@
         <p:spPr>
           <a:xfrm>
             <a:off x="4201058" y="5655564"/>
-            <a:ext cx="1844497" cy="457200"/>
-          </a:xfrm>
-          <a:prstGeom prst="rect">
-            <a:avLst/>
-          </a:prstGeom>
-          <a:noFill/>
-        </p:spPr>
-        <p:txBody>
-          <a:bodyPr wrap="square">
-            <a:spAutoFit/>
-          </a:bodyPr>
-          <a:lstStyle/>
-          <a:p>
-            <a:pPr algn="ctr"/>
-            <a:r>
-              <a:rPr sz="750" b="0" i="0">
-                <a:solidFill>
-                  <a:srgbClr val="5A6380"/>
-                </a:solidFill>
-              </a:rPr>
-              <a:t>Continuous linear profiles</a:t>
-            </a:r>
-          </a:p>
-        </p:txBody>
-      </p:sp>
-      <p:sp>
-        <p:nvSpPr>
-          <p:cNvPr id="95" name="Rectangle 94"/>
-          <p:cNvSpPr/>
-          <p:nvPr/>
-        </p:nvSpPr>
-        <p:spPr>
-          <a:xfrm>
-            <a:off x="6095847" y="5143500"/>
-            <a:ext cx="1844497" cy="1051560"/>
-          </a:xfrm>
-          <a:prstGeom prst="rect">
-            <a:avLst/>
-          </a:prstGeom>
-          <a:solidFill>
-            <a:srgbClr val="1E2330"/>
-          </a:solidFill>
-          <a:ln w="10160">
-            <a:solidFill>
-              <a:srgbClr val="10B981"/>
-            </a:solidFill>
-          </a:ln>
-        </p:spPr>
-        <p:style>
-          <a:lnRef idx="1">
-            <a:schemeClr val="accent1"/>
-          </a:lnRef>
-          <a:fillRef idx="3">
-            <a:schemeClr val="accent1"/>
-          </a:fillRef>
-          <a:effectRef idx="2">
-            <a:schemeClr val="accent1"/>
-          </a:effectRef>
-          <a:fontRef idx="minor">
-            <a:schemeClr val="lt1"/>
-          </a:fontRef>
-        </p:style>
-        <p:txBody>
-          <a:bodyPr rtlCol="0" anchor="ctr"/>
-          <a:lstStyle/>
-          <a:p>
-            <a:pPr algn="ctr"/>
-          </a:p>
-        </p:txBody>
-      </p:sp>
-      <p:sp>
-        <p:nvSpPr>
-          <p:cNvPr id="96" name="TextBox 95"/>
-          <p:cNvSpPr txBox="1"/>
-          <p:nvPr/>
-        </p:nvSpPr>
-        <p:spPr>
-          <a:xfrm>
-            <a:off x="6095847" y="5198364"/>
-            <a:ext cx="1844497" cy="292608"/>
-          </a:xfrm>
-          <a:prstGeom prst="rect">
-            <a:avLst/>
-          </a:prstGeom>
-          <a:noFill/>
-        </p:spPr>
-        <p:txBody>
-          <a:bodyPr wrap="square">
-            <a:spAutoFit/>
-          </a:bodyPr>
-          <a:lstStyle/>
-          <a:p>
-            <a:pPr algn="ctr"/>
-            <a:r>
-              <a:rPr sz="1300" b="0" i="0">
-                <a:solidFill>
-                  <a:srgbClr val="F0F2F8"/>
-                </a:solidFill>
-                <a:latin typeface="Segoe UI Emoji"/>
-              </a:rPr>
-              <a:t>🤖</a:t>
-            </a:r>
-          </a:p>
-        </p:txBody>
-      </p:sp>
-      <p:sp>
-        <p:nvSpPr>
-          <p:cNvPr id="97" name="TextBox 96"/>
-          <p:cNvSpPr txBox="1"/>
-          <p:nvPr/>
-        </p:nvSpPr>
-        <p:spPr>
-          <a:xfrm>
-            <a:off x="6095847" y="5454396"/>
-            <a:ext cx="1844497" cy="201168"/>
-          </a:xfrm>
-          <a:prstGeom prst="rect">
-            <a:avLst/>
-          </a:prstGeom>
-          <a:noFill/>
-        </p:spPr>
-        <p:txBody>
-          <a:bodyPr wrap="square">
-            <a:spAutoFit/>
-          </a:bodyPr>
-          <a:lstStyle/>
-          <a:p>
-            <a:pPr algn="ctr"/>
-            <a:r>
-              <a:rPr sz="800" b="1" i="0">
-                <a:solidFill>
-                  <a:srgbClr val="F0F2F8"/>
-                </a:solidFill>
-              </a:rPr>
-              <a:t>AI Agent</a:t>
-            </a:r>
-          </a:p>
-        </p:txBody>
-      </p:sp>
-      <p:sp>
-        <p:nvSpPr>
-          <p:cNvPr id="98" name="TextBox 97"/>
-          <p:cNvSpPr txBox="1"/>
-          <p:nvPr/>
-        </p:nvSpPr>
-        <p:spPr>
-          <a:xfrm>
-            <a:off x="6095847" y="5655564"/>
             <a:ext cx="1844497" cy="457200"/>
           </a:xfrm>
           <a:prstGeom prst="rect">

--- a/CostVision-Executive-Presentation.pptx
+++ b/CostVision-Executive-Presentation.pptx
@@ -6258,7 +6258,7 @@
         <p:spPr>
           <a:xfrm>
             <a:off x="411480" y="1810512"/>
-            <a:ext cx="2773603" cy="1170432"/>
+            <a:ext cx="2773603" cy="1453896"/>
           </a:xfrm>
           <a:prstGeom prst="rect">
             <a:avLst/>
@@ -6303,7 +6303,7 @@
         <p:spPr>
           <a:xfrm>
             <a:off x="411480" y="1810512"/>
-            <a:ext cx="54864" cy="1170432"/>
+            <a:ext cx="54864" cy="1453896"/>
           </a:xfrm>
           <a:prstGeom prst="rect">
             <a:avLst/>
@@ -6346,7 +6346,7 @@
         <p:spPr>
           <a:xfrm>
             <a:off x="539496" y="1901952"/>
-            <a:ext cx="2590723" cy="292608"/>
+            <a:ext cx="2590723" cy="310896"/>
           </a:xfrm>
           <a:prstGeom prst="rect">
             <a:avLst/>
@@ -6361,7 +6361,7 @@
           <a:p>
             <a:pPr algn="l"/>
             <a:r>
-              <a:rPr sz="950" b="1" i="0">
+              <a:rPr sz="1050" b="1" i="0">
                 <a:solidFill>
                   <a:srgbClr val="F0F2F8"/>
                 </a:solidFill>
@@ -6370,7 +6370,7 @@
               <a:t>📦</a:t>
             </a:r>
             <a:r>
-              <a:rPr sz="950" b="1" i="0">
+              <a:rPr sz="1050" b="1" i="0">
                 <a:solidFill>
                   <a:srgbClr val="F0F2F8"/>
                 </a:solidFill>
@@ -6388,8 +6388,8 @@
         </p:nvSpPr>
         <p:spPr>
           <a:xfrm>
-            <a:off x="539496" y="2157984"/>
-            <a:ext cx="2590723" cy="713232"/>
+            <a:off x="539496" y="2194560"/>
+            <a:ext cx="2590723" cy="960120"/>
           </a:xfrm>
           <a:prstGeom prst="rect">
             <a:avLst/>
@@ -6404,7 +6404,7 @@
           <a:p>
             <a:pPr algn="l"/>
             <a:r>
-              <a:rPr sz="850" b="0" i="0">
+              <a:rPr sz="950" b="0" i="0">
                 <a:solidFill>
                   <a:srgbClr val="9AA3B8"/>
                 </a:solidFill>
@@ -6423,7 +6423,7 @@
         <p:spPr>
           <a:xfrm>
             <a:off x="3276523" y="1810512"/>
-            <a:ext cx="2773603" cy="1170432"/>
+            <a:ext cx="2773603" cy="1453896"/>
           </a:xfrm>
           <a:prstGeom prst="rect">
             <a:avLst/>
@@ -6468,7 +6468,7 @@
         <p:spPr>
           <a:xfrm>
             <a:off x="3276523" y="1810512"/>
-            <a:ext cx="54864" cy="1170432"/>
+            <a:ext cx="54864" cy="1453896"/>
           </a:xfrm>
           <a:prstGeom prst="rect">
             <a:avLst/>
@@ -6511,7 +6511,7 @@
         <p:spPr>
           <a:xfrm>
             <a:off x="3404539" y="1901952"/>
-            <a:ext cx="2590723" cy="292608"/>
+            <a:ext cx="2590723" cy="310896"/>
           </a:xfrm>
           <a:prstGeom prst="rect">
             <a:avLst/>
@@ -6526,16 +6526,16 @@
           <a:p>
             <a:pPr algn="l"/>
             <a:r>
-              <a:rPr sz="950" b="1" i="0">
+              <a:rPr sz="1050" b="1" i="0">
                 <a:solidFill>
                   <a:srgbClr val="F0F2F8"/>
                 </a:solidFill>
                 <a:latin typeface="Segoe UI Emoji"/>
               </a:rPr>
-              <a:t>⚙️</a:t>
-            </a:r>
-            <a:r>
-              <a:rPr sz="950" b="1" i="0">
+              <a:t>🏭</a:t>
+            </a:r>
+            <a:r>
+              <a:rPr sz="1050" b="1" i="0">
                 <a:solidFill>
                   <a:srgbClr val="F0F2F8"/>
                 </a:solidFill>
@@ -6553,8 +6553,8 @@
         </p:nvSpPr>
         <p:spPr>
           <a:xfrm>
-            <a:off x="3404539" y="2157984"/>
-            <a:ext cx="2590723" cy="713232"/>
+            <a:off x="3404539" y="2194560"/>
+            <a:ext cx="2590723" cy="960120"/>
           </a:xfrm>
           <a:prstGeom prst="rect">
             <a:avLst/>
@@ -6569,7 +6569,7 @@
           <a:p>
             <a:pPr algn="l"/>
             <a:r>
-              <a:rPr sz="850" b="0" i="0">
+              <a:rPr sz="950" b="0" i="0">
                 <a:solidFill>
                   <a:srgbClr val="9AA3B8"/>
                 </a:solidFill>
@@ -6588,7 +6588,7 @@
         <p:spPr>
           <a:xfrm>
             <a:off x="6141567" y="1810512"/>
-            <a:ext cx="2773603" cy="1170432"/>
+            <a:ext cx="2773603" cy="1453896"/>
           </a:xfrm>
           <a:prstGeom prst="rect">
             <a:avLst/>
@@ -6633,7 +6633,7 @@
         <p:spPr>
           <a:xfrm>
             <a:off x="6141567" y="1810512"/>
-            <a:ext cx="54864" cy="1170432"/>
+            <a:ext cx="54864" cy="1453896"/>
           </a:xfrm>
           <a:prstGeom prst="rect">
             <a:avLst/>
@@ -6676,7 +6676,7 @@
         <p:spPr>
           <a:xfrm>
             <a:off x="6269583" y="1901952"/>
-            <a:ext cx="2590723" cy="292608"/>
+            <a:ext cx="2590723" cy="310896"/>
           </a:xfrm>
           <a:prstGeom prst="rect">
             <a:avLst/>
@@ -6691,7 +6691,7 @@
           <a:p>
             <a:pPr algn="l"/>
             <a:r>
-              <a:rPr sz="950" b="1" i="0">
+              <a:rPr sz="1050" b="1" i="0">
                 <a:solidFill>
                   <a:srgbClr val="F0F2F8"/>
                 </a:solidFill>
@@ -6700,7 +6700,7 @@
               <a:t>🛤️</a:t>
             </a:r>
             <a:r>
-              <a:rPr sz="950" b="1" i="0">
+              <a:rPr sz="1050" b="1" i="0">
                 <a:solidFill>
                   <a:srgbClr val="F0F2F8"/>
                 </a:solidFill>
@@ -6718,8 +6718,8 @@
         </p:nvSpPr>
         <p:spPr>
           <a:xfrm>
-            <a:off x="6269583" y="2157984"/>
-            <a:ext cx="2590723" cy="713232"/>
+            <a:off x="6269583" y="2194560"/>
+            <a:ext cx="2590723" cy="960120"/>
           </a:xfrm>
           <a:prstGeom prst="rect">
             <a:avLst/>
@@ -6734,7 +6734,7 @@
           <a:p>
             <a:pPr algn="l"/>
             <a:r>
-              <a:rPr sz="850" b="0" i="0">
+              <a:rPr sz="950" b="0" i="0">
                 <a:solidFill>
                   <a:srgbClr val="9AA3B8"/>
                 </a:solidFill>
@@ -6753,7 +6753,7 @@
         <p:spPr>
           <a:xfrm>
             <a:off x="9006611" y="1810512"/>
-            <a:ext cx="2773603" cy="1170432"/>
+            <a:ext cx="2773603" cy="1453896"/>
           </a:xfrm>
           <a:prstGeom prst="rect">
             <a:avLst/>
@@ -6798,7 +6798,7 @@
         <p:spPr>
           <a:xfrm>
             <a:off x="9006611" y="1810512"/>
-            <a:ext cx="54864" cy="1170432"/>
+            <a:ext cx="54864" cy="1453896"/>
           </a:xfrm>
           <a:prstGeom prst="rect">
             <a:avLst/>
@@ -6841,7 +6841,7 @@
         <p:spPr>
           <a:xfrm>
             <a:off x="9134627" y="1901952"/>
-            <a:ext cx="2590723" cy="292608"/>
+            <a:ext cx="2590723" cy="310896"/>
           </a:xfrm>
           <a:prstGeom prst="rect">
             <a:avLst/>
@@ -6856,7 +6856,7 @@
           <a:p>
             <a:pPr algn="l"/>
             <a:r>
-              <a:rPr sz="950" b="1" i="0">
+              <a:rPr sz="1050" b="1" i="0">
                 <a:solidFill>
                   <a:srgbClr val="F0F2F8"/>
                 </a:solidFill>
@@ -6865,7 +6865,7 @@
               <a:t>🔩</a:t>
             </a:r>
             <a:r>
-              <a:rPr sz="950" b="1" i="0">
+              <a:rPr sz="1050" b="1" i="0">
                 <a:solidFill>
                   <a:srgbClr val="F0F2F8"/>
                 </a:solidFill>
@@ -6883,8 +6883,8 @@
         </p:nvSpPr>
         <p:spPr>
           <a:xfrm>
-            <a:off x="9134627" y="2157984"/>
-            <a:ext cx="2590723" cy="713232"/>
+            <a:off x="9134627" y="2194560"/>
+            <a:ext cx="2590723" cy="960120"/>
           </a:xfrm>
           <a:prstGeom prst="rect">
             <a:avLst/>
@@ -6899,7 +6899,7 @@
           <a:p>
             <a:pPr algn="l"/>
             <a:r>
-              <a:rPr sz="850" b="0" i="0">
+              <a:rPr sz="950" b="0" i="0">
                 <a:solidFill>
                   <a:srgbClr val="9AA3B8"/>
                 </a:solidFill>
@@ -6917,8 +6917,8 @@
         </p:nvSpPr>
         <p:spPr>
           <a:xfrm>
-            <a:off x="411480" y="3072384"/>
-            <a:ext cx="2773603" cy="1170432"/>
+            <a:off x="411480" y="3355848"/>
+            <a:ext cx="2773603" cy="1453896"/>
           </a:xfrm>
           <a:prstGeom prst="rect">
             <a:avLst/>
@@ -6962,8 +6962,8 @@
         </p:nvSpPr>
         <p:spPr>
           <a:xfrm>
-            <a:off x="411480" y="3072384"/>
-            <a:ext cx="54864" cy="1170432"/>
+            <a:off x="411480" y="3355848"/>
+            <a:ext cx="54864" cy="1453896"/>
           </a:xfrm>
           <a:prstGeom prst="rect">
             <a:avLst/>
@@ -7005,8 +7005,8 @@
         </p:nvSpPr>
         <p:spPr>
           <a:xfrm>
-            <a:off x="539496" y="3163824"/>
-            <a:ext cx="2590723" cy="292608"/>
+            <a:off x="539496" y="3447288"/>
+            <a:ext cx="2590723" cy="310896"/>
           </a:xfrm>
           <a:prstGeom prst="rect">
             <a:avLst/>
@@ -7021,7 +7021,7 @@
           <a:p>
             <a:pPr algn="l"/>
             <a:r>
-              <a:rPr sz="950" b="1" i="0">
+              <a:rPr sz="1050" b="1" i="0">
                 <a:solidFill>
                   <a:srgbClr val="F0F2F8"/>
                 </a:solidFill>
@@ -7030,7 +7030,7 @@
               <a:t>📉</a:t>
             </a:r>
             <a:r>
-              <a:rPr sz="950" b="1" i="0">
+              <a:rPr sz="1050" b="1" i="0">
                 <a:solidFill>
                   <a:srgbClr val="F0F2F8"/>
                 </a:solidFill>
@@ -7048,8 +7048,8 @@
         </p:nvSpPr>
         <p:spPr>
           <a:xfrm>
-            <a:off x="539496" y="3419856"/>
-            <a:ext cx="2590723" cy="713232"/>
+            <a:off x="539496" y="3739896"/>
+            <a:ext cx="2590723" cy="960120"/>
           </a:xfrm>
           <a:prstGeom prst="rect">
             <a:avLst/>
@@ -7064,7 +7064,7 @@
           <a:p>
             <a:pPr algn="l"/>
             <a:r>
-              <a:rPr sz="850" b="0" i="0">
+              <a:rPr sz="950" b="0" i="0">
                 <a:solidFill>
                   <a:srgbClr val="9AA3B8"/>
                 </a:solidFill>
@@ -7082,8 +7082,8 @@
         </p:nvSpPr>
         <p:spPr>
           <a:xfrm>
-            <a:off x="3276523" y="3072384"/>
-            <a:ext cx="2773603" cy="1170432"/>
+            <a:off x="3276523" y="3355848"/>
+            <a:ext cx="2773603" cy="1453896"/>
           </a:xfrm>
           <a:prstGeom prst="rect">
             <a:avLst/>
@@ -7127,8 +7127,8 @@
         </p:nvSpPr>
         <p:spPr>
           <a:xfrm>
-            <a:off x="3276523" y="3072384"/>
-            <a:ext cx="54864" cy="1170432"/>
+            <a:off x="3276523" y="3355848"/>
+            <a:ext cx="54864" cy="1453896"/>
           </a:xfrm>
           <a:prstGeom prst="rect">
             <a:avLst/>
@@ -7170,8 +7170,8 @@
         </p:nvSpPr>
         <p:spPr>
           <a:xfrm>
-            <a:off x="3404539" y="3163824"/>
-            <a:ext cx="2590723" cy="292608"/>
+            <a:off x="3404539" y="3447288"/>
+            <a:ext cx="2590723" cy="310896"/>
           </a:xfrm>
           <a:prstGeom prst="rect">
             <a:avLst/>
@@ -7186,7 +7186,7 @@
           <a:p>
             <a:pPr algn="l"/>
             <a:r>
-              <a:rPr sz="950" b="1" i="0">
+              <a:rPr sz="1050" b="1" i="0">
                 <a:solidFill>
                   <a:srgbClr val="F0F2F8"/>
                 </a:solidFill>
@@ -7195,7 +7195,7 @@
               <a:t>🌍</a:t>
             </a:r>
             <a:r>
-              <a:rPr sz="950" b="1" i="0">
+              <a:rPr sz="1050" b="1" i="0">
                 <a:solidFill>
                   <a:srgbClr val="F0F2F8"/>
                 </a:solidFill>
@@ -7213,8 +7213,8 @@
         </p:nvSpPr>
         <p:spPr>
           <a:xfrm>
-            <a:off x="3404539" y="3419856"/>
-            <a:ext cx="2590723" cy="713232"/>
+            <a:off x="3404539" y="3739896"/>
+            <a:ext cx="2590723" cy="960120"/>
           </a:xfrm>
           <a:prstGeom prst="rect">
             <a:avLst/>
@@ -7229,7 +7229,7 @@
           <a:p>
             <a:pPr algn="l"/>
             <a:r>
-              <a:rPr sz="850" b="0" i="0">
+              <a:rPr sz="950" b="0" i="0">
                 <a:solidFill>
                   <a:srgbClr val="9AA3B8"/>
                 </a:solidFill>
@@ -7247,8 +7247,8 @@
         </p:nvSpPr>
         <p:spPr>
           <a:xfrm>
-            <a:off x="6141567" y="3072384"/>
-            <a:ext cx="2773603" cy="1170432"/>
+            <a:off x="6141567" y="3355848"/>
+            <a:ext cx="2773603" cy="1453896"/>
           </a:xfrm>
           <a:prstGeom prst="rect">
             <a:avLst/>
@@ -7292,8 +7292,8 @@
         </p:nvSpPr>
         <p:spPr>
           <a:xfrm>
-            <a:off x="6141567" y="3072384"/>
-            <a:ext cx="54864" cy="1170432"/>
+            <a:off x="6141567" y="3355848"/>
+            <a:ext cx="54864" cy="1453896"/>
           </a:xfrm>
           <a:prstGeom prst="rect">
             <a:avLst/>
@@ -7335,8 +7335,8 @@
         </p:nvSpPr>
         <p:spPr>
           <a:xfrm>
-            <a:off x="6269583" y="3163824"/>
-            <a:ext cx="2590723" cy="292608"/>
+            <a:off x="6269583" y="3447288"/>
+            <a:ext cx="2590723" cy="310896"/>
           </a:xfrm>
           <a:prstGeom prst="rect">
             <a:avLst/>
@@ -7351,7 +7351,7 @@
           <a:p>
             <a:pPr algn="l"/>
             <a:r>
-              <a:rPr sz="950" b="1" i="0">
+              <a:rPr sz="1050" b="1" i="0">
                 <a:solidFill>
                   <a:srgbClr val="F0F2F8"/>
                 </a:solidFill>
@@ -7360,7 +7360,7 @@
               <a:t>📊</a:t>
             </a:r>
             <a:r>
-              <a:rPr sz="950" b="1" i="0">
+              <a:rPr sz="1050" b="1" i="0">
                 <a:solidFill>
                   <a:srgbClr val="F0F2F8"/>
                 </a:solidFill>
@@ -7378,8 +7378,8 @@
         </p:nvSpPr>
         <p:spPr>
           <a:xfrm>
-            <a:off x="6269583" y="3419856"/>
-            <a:ext cx="2590723" cy="713232"/>
+            <a:off x="6269583" y="3739896"/>
+            <a:ext cx="2590723" cy="960120"/>
           </a:xfrm>
           <a:prstGeom prst="rect">
             <a:avLst/>
@@ -7394,7 +7394,7 @@
           <a:p>
             <a:pPr algn="l"/>
             <a:r>
-              <a:rPr sz="850" b="0" i="0">
+              <a:rPr sz="950" b="0" i="0">
                 <a:solidFill>
                   <a:srgbClr val="9AA3B8"/>
                 </a:solidFill>
@@ -7412,8 +7412,8 @@
         </p:nvSpPr>
         <p:spPr>
           <a:xfrm>
-            <a:off x="9006611" y="3072384"/>
-            <a:ext cx="2773603" cy="1170432"/>
+            <a:off x="9006611" y="3355848"/>
+            <a:ext cx="2773603" cy="1453896"/>
           </a:xfrm>
           <a:prstGeom prst="rect">
             <a:avLst/>
@@ -7457,8 +7457,8 @@
         </p:nvSpPr>
         <p:spPr>
           <a:xfrm>
-            <a:off x="9006611" y="3072384"/>
-            <a:ext cx="54864" cy="1170432"/>
+            <a:off x="9006611" y="3355848"/>
+            <a:ext cx="54864" cy="1453896"/>
           </a:xfrm>
           <a:prstGeom prst="rect">
             <a:avLst/>
@@ -7500,8 +7500,8 @@
         </p:nvSpPr>
         <p:spPr>
           <a:xfrm>
-            <a:off x="9134627" y="3163824"/>
-            <a:ext cx="2590723" cy="292608"/>
+            <a:off x="9134627" y="3447288"/>
+            <a:ext cx="2590723" cy="310896"/>
           </a:xfrm>
           <a:prstGeom prst="rect">
             <a:avLst/>
@@ -7516,7 +7516,7 @@
           <a:p>
             <a:pPr algn="l"/>
             <a:r>
-              <a:rPr sz="950" b="1" i="0">
+              <a:rPr sz="1050" b="1" i="0">
                 <a:solidFill>
                   <a:srgbClr val="F0F2F8"/>
                 </a:solidFill>
@@ -7525,12 +7525,12 @@
               <a:t>📉</a:t>
             </a:r>
             <a:r>
-              <a:rPr sz="950" b="1" i="0">
+              <a:rPr sz="1050" b="1" i="0">
                 <a:solidFill>
                   <a:srgbClr val="F0F2F8"/>
                 </a:solidFill>
               </a:rPr>
-              <a:t> Learning Curve (Wright's Law)</a:t>
+              <a:t> Learning Curve</a:t>
             </a:r>
           </a:p>
         </p:txBody>
@@ -7543,8 +7543,8 @@
         </p:nvSpPr>
         <p:spPr>
           <a:xfrm>
-            <a:off x="9134627" y="3419856"/>
-            <a:ext cx="2590723" cy="713232"/>
+            <a:off x="9134627" y="3739896"/>
+            <a:ext cx="2590723" cy="960120"/>
           </a:xfrm>
           <a:prstGeom prst="rect">
             <a:avLst/>
@@ -7559,12 +7559,12 @@
           <a:p>
             <a:pPr algn="l"/>
             <a:r>
-              <a:rPr sz="850" b="0" i="0">
+              <a:rPr sz="950" b="0" i="0">
                 <a:solidFill>
                   <a:srgbClr val="9AA3B8"/>
                 </a:solidFill>
               </a:rPr>
-              <a:t>Configure 85% (or custom) learning curve to project volume-driven cost reduction. Essential for programme pricing and LTA negotiations.</a:t>
+              <a:t>Wright's Law: configure an 85% (or custom) curve to project volume-driven cost reduction. Essential for programme pricing and LTA negotiations.</a:t>
             </a:r>
           </a:p>
         </p:txBody>
@@ -7577,8 +7577,8 @@
         </p:nvSpPr>
         <p:spPr>
           <a:xfrm>
-            <a:off x="411480" y="4334256"/>
-            <a:ext cx="2773603" cy="1170432"/>
+            <a:off x="411480" y="4901184"/>
+            <a:ext cx="2773603" cy="1453896"/>
           </a:xfrm>
           <a:prstGeom prst="rect">
             <a:avLst/>
@@ -7622,8 +7622,8 @@
         </p:nvSpPr>
         <p:spPr>
           <a:xfrm>
-            <a:off x="411480" y="4334256"/>
-            <a:ext cx="54864" cy="1170432"/>
+            <a:off x="411480" y="4901184"/>
+            <a:ext cx="54864" cy="1453896"/>
           </a:xfrm>
           <a:prstGeom prst="rect">
             <a:avLst/>
@@ -7665,8 +7665,8 @@
         </p:nvSpPr>
         <p:spPr>
           <a:xfrm>
-            <a:off x="539496" y="4425696"/>
-            <a:ext cx="2590723" cy="292608"/>
+            <a:off x="539496" y="4992624"/>
+            <a:ext cx="2590723" cy="310896"/>
           </a:xfrm>
           <a:prstGeom prst="rect">
             <a:avLst/>
@@ -7681,7 +7681,7 @@
           <a:p>
             <a:pPr algn="l"/>
             <a:r>
-              <a:rPr sz="950" b="1" i="0">
+              <a:rPr sz="1050" b="1" i="0">
                 <a:solidFill>
                   <a:srgbClr val="F0F2F8"/>
                 </a:solidFill>
@@ -7690,7 +7690,7 @@
               <a:t>💰</a:t>
             </a:r>
             <a:r>
-              <a:rPr sz="950" b="1" i="0">
+              <a:rPr sz="1050" b="1" i="0">
                 <a:solidFill>
                   <a:srgbClr val="F0F2F8"/>
                 </a:solidFill>
@@ -7708,8 +7708,8 @@
         </p:nvSpPr>
         <p:spPr>
           <a:xfrm>
-            <a:off x="539496" y="4681728"/>
-            <a:ext cx="2590723" cy="713232"/>
+            <a:off x="539496" y="5285232"/>
+            <a:ext cx="2590723" cy="960120"/>
           </a:xfrm>
           <a:prstGeom prst="rect">
             <a:avLst/>
@@ -7724,7 +7724,7 @@
           <a:p>
             <a:pPr algn="l"/>
             <a:r>
-              <a:rPr sz="850" b="0" i="0">
+              <a:rPr sz="950" b="0" i="0">
                 <a:solidFill>
                   <a:srgbClr val="9AA3B8"/>
                 </a:solidFill>
@@ -7742,8 +7742,8 @@
         </p:nvSpPr>
         <p:spPr>
           <a:xfrm>
-            <a:off x="3276523" y="4334256"/>
-            <a:ext cx="2773603" cy="1170432"/>
+            <a:off x="3276523" y="4901184"/>
+            <a:ext cx="2773603" cy="1453896"/>
           </a:xfrm>
           <a:prstGeom prst="rect">
             <a:avLst/>
@@ -7787,8 +7787,8 @@
         </p:nvSpPr>
         <p:spPr>
           <a:xfrm>
-            <a:off x="3276523" y="4334256"/>
-            <a:ext cx="54864" cy="1170432"/>
+            <a:off x="3276523" y="4901184"/>
+            <a:ext cx="54864" cy="1453896"/>
           </a:xfrm>
           <a:prstGeom prst="rect">
             <a:avLst/>
@@ -7830,8 +7830,8 @@
         </p:nvSpPr>
         <p:spPr>
           <a:xfrm>
-            <a:off x="3404539" y="4425696"/>
-            <a:ext cx="2590723" cy="292608"/>
+            <a:off x="3404539" y="4992624"/>
+            <a:ext cx="2590723" cy="310896"/>
           </a:xfrm>
           <a:prstGeom prst="rect">
             <a:avLst/>
@@ -7846,7 +7846,7 @@
           <a:p>
             <a:pPr algn="l"/>
             <a:r>
-              <a:rPr sz="950" b="1" i="0">
+              <a:rPr sz="1050" b="1" i="0">
                 <a:solidFill>
                   <a:srgbClr val="F0F2F8"/>
                 </a:solidFill>
@@ -7855,7 +7855,7 @@
               <a:t>🤖</a:t>
             </a:r>
             <a:r>
-              <a:rPr sz="950" b="1" i="0">
+              <a:rPr sz="1050" b="1" i="0">
                 <a:solidFill>
                   <a:srgbClr val="F0F2F8"/>
                 </a:solidFill>
@@ -7873,8 +7873,8 @@
         </p:nvSpPr>
         <p:spPr>
           <a:xfrm>
-            <a:off x="3404539" y="4681728"/>
-            <a:ext cx="2590723" cy="713232"/>
+            <a:off x="3404539" y="5285232"/>
+            <a:ext cx="2590723" cy="960120"/>
           </a:xfrm>
           <a:prstGeom prst="rect">
             <a:avLst/>
@@ -7889,12 +7889,342 @@
           <a:p>
             <a:pPr algn="l"/>
             <a:r>
-              <a:rPr sz="850" b="0" i="0">
+              <a:rPr sz="950" b="0" i="0">
                 <a:solidFill>
                   <a:srgbClr val="9AA3B8"/>
                 </a:solidFill>
               </a:rPr>
               <a:t>Where geometry is unknown, Claude AI fills assumptions transparently — material, complexity, process, geometry — with explanation of every decision.</a:t>
+            </a:r>
+          </a:p>
+        </p:txBody>
+      </p:sp>
+      <p:sp>
+        <p:nvSpPr>
+          <p:cNvPr id="51" name="Rectangle 50"/>
+          <p:cNvSpPr/>
+          <p:nvPr/>
+        </p:nvSpPr>
+        <p:spPr>
+          <a:xfrm>
+            <a:off x="6141567" y="4901184"/>
+            <a:ext cx="2773603" cy="1453896"/>
+          </a:xfrm>
+          <a:prstGeom prst="rect">
+            <a:avLst/>
+          </a:prstGeom>
+          <a:solidFill>
+            <a:srgbClr val="1E2330"/>
+          </a:solidFill>
+          <a:ln w="6350">
+            <a:solidFill>
+              <a:srgbClr val="2A3045"/>
+            </a:solidFill>
+          </a:ln>
+        </p:spPr>
+        <p:style>
+          <a:lnRef idx="1">
+            <a:schemeClr val="accent1"/>
+          </a:lnRef>
+          <a:fillRef idx="3">
+            <a:schemeClr val="accent1"/>
+          </a:fillRef>
+          <a:effectRef idx="2">
+            <a:schemeClr val="accent1"/>
+          </a:effectRef>
+          <a:fontRef idx="minor">
+            <a:schemeClr val="lt1"/>
+          </a:fontRef>
+        </p:style>
+        <p:txBody>
+          <a:bodyPr rtlCol="0" anchor="ctr"/>
+          <a:lstStyle/>
+          <a:p>
+            <a:pPr algn="ctr"/>
+          </a:p>
+        </p:txBody>
+      </p:sp>
+      <p:sp>
+        <p:nvSpPr>
+          <p:cNvPr id="52" name="Rectangle 51"/>
+          <p:cNvSpPr/>
+          <p:nvPr/>
+        </p:nvSpPr>
+        <p:spPr>
+          <a:xfrm>
+            <a:off x="6141567" y="4901184"/>
+            <a:ext cx="54864" cy="1453896"/>
+          </a:xfrm>
+          <a:prstGeom prst="rect">
+            <a:avLst/>
+          </a:prstGeom>
+          <a:solidFill>
+            <a:srgbClr val="F59E0B"/>
+          </a:solidFill>
+          <a:ln>
+            <a:noFill/>
+          </a:ln>
+        </p:spPr>
+        <p:style>
+          <a:lnRef idx="1">
+            <a:schemeClr val="accent1"/>
+          </a:lnRef>
+          <a:fillRef idx="3">
+            <a:schemeClr val="accent1"/>
+          </a:fillRef>
+          <a:effectRef idx="2">
+            <a:schemeClr val="accent1"/>
+          </a:effectRef>
+          <a:fontRef idx="minor">
+            <a:schemeClr val="lt1"/>
+          </a:fontRef>
+        </p:style>
+        <p:txBody>
+          <a:bodyPr rtlCol="0" anchor="ctr"/>
+          <a:lstStyle/>
+          <a:p>
+            <a:pPr algn="ctr"/>
+          </a:p>
+        </p:txBody>
+      </p:sp>
+      <p:sp>
+        <p:nvSpPr>
+          <p:cNvPr id="53" name="TextBox 52"/>
+          <p:cNvSpPr txBox="1"/>
+          <p:nvPr/>
+        </p:nvSpPr>
+        <p:spPr>
+          <a:xfrm>
+            <a:off x="6269583" y="4992624"/>
+            <a:ext cx="2590723" cy="310896"/>
+          </a:xfrm>
+          <a:prstGeom prst="rect">
+            <a:avLst/>
+          </a:prstGeom>
+          <a:noFill/>
+        </p:spPr>
+        <p:txBody>
+          <a:bodyPr wrap="square">
+            <a:spAutoFit/>
+          </a:bodyPr>
+          <a:lstStyle/>
+          <a:p>
+            <a:pPr algn="l"/>
+            <a:r>
+              <a:rPr sz="1050" b="1" i="0">
+                <a:solidFill>
+                  <a:srgbClr val="F0F2F8"/>
+                </a:solidFill>
+                <a:latin typeface="Segoe UI Emoji"/>
+              </a:rPr>
+              <a:t>⚙️</a:t>
+            </a:r>
+            <a:r>
+              <a:rPr sz="1050" b="1" i="0">
+                <a:solidFill>
+                  <a:srgbClr val="F0F2F8"/>
+                </a:solidFill>
+              </a:rPr>
+              <a:t> Gear Cutting Kinematics</a:t>
+            </a:r>
+          </a:p>
+        </p:txBody>
+      </p:sp>
+      <p:sp>
+        <p:nvSpPr>
+          <p:cNvPr id="54" name="TextBox 53"/>
+          <p:cNvSpPr txBox="1"/>
+          <p:nvPr/>
+        </p:nvSpPr>
+        <p:spPr>
+          <a:xfrm>
+            <a:off x="6269583" y="5285232"/>
+            <a:ext cx="2590723" cy="960120"/>
+          </a:xfrm>
+          <a:prstGeom prst="rect">
+            <a:avLst/>
+          </a:prstGeom>
+          <a:noFill/>
+        </p:spPr>
+        <p:txBody>
+          <a:bodyPr wrap="square">
+            <a:spAutoFit/>
+          </a:bodyPr>
+          <a:lstStyle/>
+          <a:p>
+            <a:pPr algn="l"/>
+            <a:r>
+              <a:rPr sz="950" b="0" i="0">
+                <a:solidFill>
+                  <a:srgbClr val="9AA3B8"/>
+                </a:solidFill>
+              </a:rPr>
+              <a:t>Hobbing, shaping, power-skiving and grinding cycles derived from gear-train arithmetic rather than rules of thumb. Machine sized on module × diameter × face width.</a:t>
+            </a:r>
+          </a:p>
+        </p:txBody>
+      </p:sp>
+      <p:sp>
+        <p:nvSpPr>
+          <p:cNvPr id="55" name="Rectangle 54"/>
+          <p:cNvSpPr/>
+          <p:nvPr/>
+        </p:nvSpPr>
+        <p:spPr>
+          <a:xfrm>
+            <a:off x="9006611" y="4901184"/>
+            <a:ext cx="2773603" cy="1453896"/>
+          </a:xfrm>
+          <a:prstGeom prst="rect">
+            <a:avLst/>
+          </a:prstGeom>
+          <a:solidFill>
+            <a:srgbClr val="1E2330"/>
+          </a:solidFill>
+          <a:ln w="6350">
+            <a:solidFill>
+              <a:srgbClr val="2A3045"/>
+            </a:solidFill>
+          </a:ln>
+        </p:spPr>
+        <p:style>
+          <a:lnRef idx="1">
+            <a:schemeClr val="accent1"/>
+          </a:lnRef>
+          <a:fillRef idx="3">
+            <a:schemeClr val="accent1"/>
+          </a:fillRef>
+          <a:effectRef idx="2">
+            <a:schemeClr val="accent1"/>
+          </a:effectRef>
+          <a:fontRef idx="minor">
+            <a:schemeClr val="lt1"/>
+          </a:fontRef>
+        </p:style>
+        <p:txBody>
+          <a:bodyPr rtlCol="0" anchor="ctr"/>
+          <a:lstStyle/>
+          <a:p>
+            <a:pPr algn="ctr"/>
+          </a:p>
+        </p:txBody>
+      </p:sp>
+      <p:sp>
+        <p:nvSpPr>
+          <p:cNvPr id="56" name="Rectangle 55"/>
+          <p:cNvSpPr/>
+          <p:nvPr/>
+        </p:nvSpPr>
+        <p:spPr>
+          <a:xfrm>
+            <a:off x="9006611" y="4901184"/>
+            <a:ext cx="54864" cy="1453896"/>
+          </a:xfrm>
+          <a:prstGeom prst="rect">
+            <a:avLst/>
+          </a:prstGeom>
+          <a:solidFill>
+            <a:srgbClr val="7C3AED"/>
+          </a:solidFill>
+          <a:ln>
+            <a:noFill/>
+          </a:ln>
+        </p:spPr>
+        <p:style>
+          <a:lnRef idx="1">
+            <a:schemeClr val="accent1"/>
+          </a:lnRef>
+          <a:fillRef idx="3">
+            <a:schemeClr val="accent1"/>
+          </a:fillRef>
+          <a:effectRef idx="2">
+            <a:schemeClr val="accent1"/>
+          </a:effectRef>
+          <a:fontRef idx="minor">
+            <a:schemeClr val="lt1"/>
+          </a:fontRef>
+        </p:style>
+        <p:txBody>
+          <a:bodyPr rtlCol="0" anchor="ctr"/>
+          <a:lstStyle/>
+          <a:p>
+            <a:pPr algn="ctr"/>
+          </a:p>
+        </p:txBody>
+      </p:sp>
+      <p:sp>
+        <p:nvSpPr>
+          <p:cNvPr id="57" name="TextBox 56"/>
+          <p:cNvSpPr txBox="1"/>
+          <p:nvPr/>
+        </p:nvSpPr>
+        <p:spPr>
+          <a:xfrm>
+            <a:off x="9134627" y="4992624"/>
+            <a:ext cx="2590723" cy="310896"/>
+          </a:xfrm>
+          <a:prstGeom prst="rect">
+            <a:avLst/>
+          </a:prstGeom>
+          <a:noFill/>
+        </p:spPr>
+        <p:txBody>
+          <a:bodyPr wrap="square">
+            <a:spAutoFit/>
+          </a:bodyPr>
+          <a:lstStyle/>
+          <a:p>
+            <a:pPr algn="l"/>
+            <a:r>
+              <a:rPr sz="1050" b="1" i="0">
+                <a:solidFill>
+                  <a:srgbClr val="F0F2F8"/>
+                </a:solidFill>
+                <a:latin typeface="Segoe UI Emoji"/>
+              </a:rPr>
+              <a:t>🚢</a:t>
+            </a:r>
+            <a:r>
+              <a:rPr sz="1050" b="1" i="0">
+                <a:solidFill>
+                  <a:srgbClr val="F0F2F8"/>
+                </a:solidFill>
+              </a:rPr>
+              <a:t> Landed Cost &amp; Customs</a:t>
+            </a:r>
+          </a:p>
+        </p:txBody>
+      </p:sp>
+      <p:sp>
+        <p:nvSpPr>
+          <p:cNvPr id="58" name="TextBox 57"/>
+          <p:cNvSpPr txBox="1"/>
+          <p:nvPr/>
+        </p:nvSpPr>
+        <p:spPr>
+          <a:xfrm>
+            <a:off x="9134627" y="5285232"/>
+            <a:ext cx="2590723" cy="960120"/>
+          </a:xfrm>
+          <a:prstGeom prst="rect">
+            <a:avLst/>
+          </a:prstGeom>
+          <a:noFill/>
+        </p:spPr>
+        <p:txBody>
+          <a:bodyPr wrap="square">
+            <a:spAutoFit/>
+          </a:bodyPr>
+          <a:lstStyle/>
+          <a:p>
+            <a:pPr algn="l"/>
+            <a:r>
+              <a:rPr sz="950" b="0" i="0">
+                <a:solidFill>
+                  <a:srgbClr val="9AA3B8"/>
+                </a:solidFill>
+              </a:rPr>
+              <a:t>Duty on customs value, CBAM carbon border levy, rules of origin and incoterms — the cost at our door, not at the supplier's gate.</a:t>
             </a:r>
           </a:p>
         </p:txBody>
@@ -9839,7 +10169,7 @@
         <p:spPr>
           <a:xfrm>
             <a:off x="539496" y="2834640"/>
-            <a:ext cx="5303520" cy="292608"/>
+            <a:ext cx="5303520" cy="310896"/>
           </a:xfrm>
           <a:prstGeom prst="rect">
             <a:avLst/>
@@ -9872,8 +10202,8 @@
         </p:nvSpPr>
         <p:spPr>
           <a:xfrm>
-            <a:off x="539496" y="3090672"/>
-            <a:ext cx="5303520" cy="1371600"/>
+            <a:off x="539496" y="3127248"/>
+            <a:ext cx="5303520" cy="1335024"/>
           </a:xfrm>
           <a:prstGeom prst="rect">
             <a:avLst/>
@@ -9998,7 +10328,7 @@
         <p:spPr>
           <a:xfrm>
             <a:off x="6135624" y="2834640"/>
-            <a:ext cx="5303520" cy="292608"/>
+            <a:ext cx="5303520" cy="310896"/>
           </a:xfrm>
           <a:prstGeom prst="rect">
             <a:avLst/>
@@ -10031,8 +10361,8 @@
         </p:nvSpPr>
         <p:spPr>
           <a:xfrm>
-            <a:off x="6135624" y="3090672"/>
-            <a:ext cx="5303520" cy="1371600"/>
+            <a:off x="6135624" y="3127248"/>
+            <a:ext cx="5303520" cy="1335024"/>
           </a:xfrm>
           <a:prstGeom prst="rect">
             <a:avLst/>
@@ -10157,7 +10487,7 @@
         <p:spPr>
           <a:xfrm>
             <a:off x="539496" y="4754880"/>
-            <a:ext cx="5303520" cy="292608"/>
+            <a:ext cx="5303520" cy="310896"/>
           </a:xfrm>
           <a:prstGeom prst="rect">
             <a:avLst/>
@@ -10190,8 +10520,8 @@
         </p:nvSpPr>
         <p:spPr>
           <a:xfrm>
-            <a:off x="539496" y="5010912"/>
-            <a:ext cx="5303520" cy="1371600"/>
+            <a:off x="539496" y="5047488"/>
+            <a:ext cx="5303520" cy="1335024"/>
           </a:xfrm>
           <a:prstGeom prst="rect">
             <a:avLst/>
@@ -10318,7 +10648,7 @@
         <p:spPr>
           <a:xfrm>
             <a:off x="6135624" y="4754880"/>
-            <a:ext cx="5303520" cy="292608"/>
+            <a:ext cx="5303520" cy="310896"/>
           </a:xfrm>
           <a:prstGeom prst="rect">
             <a:avLst/>
@@ -10351,8 +10681,8 @@
         </p:nvSpPr>
         <p:spPr>
           <a:xfrm>
-            <a:off x="6135624" y="5010912"/>
-            <a:ext cx="5303520" cy="1371600"/>
+            <a:off x="6135624" y="5047488"/>
+            <a:ext cx="5303520" cy="1335024"/>
           </a:xfrm>
           <a:prstGeom prst="rect">
             <a:avLst/>
@@ -18923,7 +19253,7 @@
         <p:spPr>
           <a:xfrm>
             <a:off x="539496" y="1901952"/>
-            <a:ext cx="3566159" cy="292608"/>
+            <a:ext cx="3566159" cy="310896"/>
           </a:xfrm>
           <a:prstGeom prst="rect">
             <a:avLst/>
@@ -18965,8 +19295,8 @@
         </p:nvSpPr>
         <p:spPr>
           <a:xfrm>
-            <a:off x="539496" y="2157984"/>
-            <a:ext cx="3566159" cy="1508760"/>
+            <a:off x="539496" y="2194560"/>
+            <a:ext cx="3566159" cy="1472184"/>
           </a:xfrm>
           <a:prstGeom prst="rect">
             <a:avLst/>
@@ -19093,7 +19423,7 @@
         <p:spPr>
           <a:xfrm>
             <a:off x="4398263" y="1901952"/>
-            <a:ext cx="3566159" cy="292608"/>
+            <a:ext cx="3566159" cy="310896"/>
           </a:xfrm>
           <a:prstGeom prst="rect">
             <a:avLst/>
@@ -19135,8 +19465,8 @@
         </p:nvSpPr>
         <p:spPr>
           <a:xfrm>
-            <a:off x="4398263" y="2157984"/>
-            <a:ext cx="3566159" cy="1508760"/>
+            <a:off x="4398263" y="2194560"/>
+            <a:ext cx="3566159" cy="1472184"/>
           </a:xfrm>
           <a:prstGeom prst="rect">
             <a:avLst/>
@@ -19263,7 +19593,7 @@
         <p:spPr>
           <a:xfrm>
             <a:off x="8257030" y="1901952"/>
-            <a:ext cx="3566159" cy="292608"/>
+            <a:ext cx="3566159" cy="310896"/>
           </a:xfrm>
           <a:prstGeom prst="rect">
             <a:avLst/>
@@ -19305,8 +19635,8 @@
         </p:nvSpPr>
         <p:spPr>
           <a:xfrm>
-            <a:off x="8257030" y="2157984"/>
-            <a:ext cx="3566159" cy="1508760"/>
+            <a:off x="8257030" y="2194560"/>
+            <a:ext cx="3566159" cy="1472184"/>
           </a:xfrm>
           <a:prstGeom prst="rect">
             <a:avLst/>
@@ -19432,7 +19762,7 @@
         <p:spPr>
           <a:xfrm>
             <a:off x="539496" y="3977640"/>
-            <a:ext cx="3566159" cy="292608"/>
+            <a:ext cx="3566159" cy="310896"/>
           </a:xfrm>
           <a:prstGeom prst="rect">
             <a:avLst/>
@@ -19474,8 +19804,8 @@
         </p:nvSpPr>
         <p:spPr>
           <a:xfrm>
-            <a:off x="539496" y="4233672"/>
-            <a:ext cx="3566159" cy="1508760"/>
+            <a:off x="539496" y="4270248"/>
+            <a:ext cx="3566159" cy="1472184"/>
           </a:xfrm>
           <a:prstGeom prst="rect">
             <a:avLst/>
@@ -19600,7 +19930,7 @@
         <p:spPr>
           <a:xfrm>
             <a:off x="4398263" y="3977640"/>
-            <a:ext cx="3566159" cy="292608"/>
+            <a:ext cx="3566159" cy="310896"/>
           </a:xfrm>
           <a:prstGeom prst="rect">
             <a:avLst/>
@@ -19642,8 +19972,8 @@
         </p:nvSpPr>
         <p:spPr>
           <a:xfrm>
-            <a:off x="4398263" y="4233672"/>
-            <a:ext cx="3566159" cy="1508760"/>
+            <a:off x="4398263" y="4270248"/>
+            <a:ext cx="3566159" cy="1472184"/>
           </a:xfrm>
           <a:prstGeom prst="rect">
             <a:avLst/>
@@ -19768,7 +20098,7 @@
         <p:spPr>
           <a:xfrm>
             <a:off x="8257030" y="3977640"/>
-            <a:ext cx="3566159" cy="292608"/>
+            <a:ext cx="3566159" cy="310896"/>
           </a:xfrm>
           <a:prstGeom prst="rect">
             <a:avLst/>
@@ -19810,8 +20140,8 @@
         </p:nvSpPr>
         <p:spPr>
           <a:xfrm>
-            <a:off x="8257030" y="4233672"/>
-            <a:ext cx="3566159" cy="1508760"/>
+            <a:off x="8257030" y="4270248"/>
+            <a:ext cx="3566159" cy="1472184"/>
           </a:xfrm>
           <a:prstGeom prst="rect">
             <a:avLst/>
@@ -20860,7 +21190,7 @@
         <p:spPr>
           <a:xfrm>
             <a:off x="539496" y="3063240"/>
-            <a:ext cx="2560320" cy="292608"/>
+            <a:ext cx="2560320" cy="310896"/>
           </a:xfrm>
           <a:prstGeom prst="rect">
             <a:avLst/>
@@ -20902,8 +21232,8 @@
         </p:nvSpPr>
         <p:spPr>
           <a:xfrm>
-            <a:off x="539496" y="3319272"/>
-            <a:ext cx="2560320" cy="731520"/>
+            <a:off x="539496" y="3355848"/>
+            <a:ext cx="2560320" cy="694944"/>
           </a:xfrm>
           <a:prstGeom prst="rect">
             <a:avLst/>
@@ -21025,7 +21355,7 @@
         <p:spPr>
           <a:xfrm>
             <a:off x="3374136" y="3063240"/>
-            <a:ext cx="2560320" cy="292608"/>
+            <a:ext cx="2560320" cy="310896"/>
           </a:xfrm>
           <a:prstGeom prst="rect">
             <a:avLst/>
@@ -21067,8 +21397,8 @@
         </p:nvSpPr>
         <p:spPr>
           <a:xfrm>
-            <a:off x="3374136" y="3319272"/>
-            <a:ext cx="2560320" cy="731520"/>
+            <a:off x="3374136" y="3355848"/>
+            <a:ext cx="2560320" cy="694944"/>
           </a:xfrm>
           <a:prstGeom prst="rect">
             <a:avLst/>
@@ -21190,7 +21520,7 @@
         <p:spPr>
           <a:xfrm>
             <a:off x="6208776" y="3063240"/>
-            <a:ext cx="2560320" cy="292608"/>
+            <a:ext cx="2560320" cy="310896"/>
           </a:xfrm>
           <a:prstGeom prst="rect">
             <a:avLst/>
@@ -21232,8 +21562,8 @@
         </p:nvSpPr>
         <p:spPr>
           <a:xfrm>
-            <a:off x="6208776" y="3319272"/>
-            <a:ext cx="2560320" cy="731520"/>
+            <a:off x="6208776" y="3355848"/>
+            <a:ext cx="2560320" cy="694944"/>
           </a:xfrm>
           <a:prstGeom prst="rect">
             <a:avLst/>
@@ -21355,7 +21685,7 @@
         <p:spPr>
           <a:xfrm>
             <a:off x="9043416" y="3063240"/>
-            <a:ext cx="2560320" cy="292608"/>
+            <a:ext cx="2560320" cy="310896"/>
           </a:xfrm>
           <a:prstGeom prst="rect">
             <a:avLst/>
@@ -21397,8 +21727,8 @@
         </p:nvSpPr>
         <p:spPr>
           <a:xfrm>
-            <a:off x="9043416" y="3319272"/>
-            <a:ext cx="2560320" cy="731520"/>
+            <a:off x="9043416" y="3355848"/>
+            <a:ext cx="2560320" cy="694944"/>
           </a:xfrm>
           <a:prstGeom prst="rect">
             <a:avLst/>
@@ -21520,7 +21850,7 @@
         <p:spPr>
           <a:xfrm>
             <a:off x="539496" y="4343400"/>
-            <a:ext cx="2560320" cy="292608"/>
+            <a:ext cx="2560320" cy="310896"/>
           </a:xfrm>
           <a:prstGeom prst="rect">
             <a:avLst/>
@@ -21562,8 +21892,8 @@
         </p:nvSpPr>
         <p:spPr>
           <a:xfrm>
-            <a:off x="539496" y="4599432"/>
-            <a:ext cx="2560320" cy="731520"/>
+            <a:off x="539496" y="4636008"/>
+            <a:ext cx="2560320" cy="694944"/>
           </a:xfrm>
           <a:prstGeom prst="rect">
             <a:avLst/>
@@ -21685,7 +22015,7 @@
         <p:spPr>
           <a:xfrm>
             <a:off x="3374136" y="4343400"/>
-            <a:ext cx="2560320" cy="292608"/>
+            <a:ext cx="2560320" cy="310896"/>
           </a:xfrm>
           <a:prstGeom prst="rect">
             <a:avLst/>
@@ -21727,8 +22057,8 @@
         </p:nvSpPr>
         <p:spPr>
           <a:xfrm>
-            <a:off x="3374136" y="4599432"/>
-            <a:ext cx="2560320" cy="731520"/>
+            <a:off x="3374136" y="4636008"/>
+            <a:ext cx="2560320" cy="694944"/>
           </a:xfrm>
           <a:prstGeom prst="rect">
             <a:avLst/>
@@ -21850,7 +22180,7 @@
         <p:spPr>
           <a:xfrm>
             <a:off x="6208776" y="4343400"/>
-            <a:ext cx="2560320" cy="292608"/>
+            <a:ext cx="2560320" cy="310896"/>
           </a:xfrm>
           <a:prstGeom prst="rect">
             <a:avLst/>
@@ -21892,8 +22222,8 @@
         </p:nvSpPr>
         <p:spPr>
           <a:xfrm>
-            <a:off x="6208776" y="4599432"/>
-            <a:ext cx="2560320" cy="731520"/>
+            <a:off x="6208776" y="4636008"/>
+            <a:ext cx="2560320" cy="694944"/>
           </a:xfrm>
           <a:prstGeom prst="rect">
             <a:avLst/>
@@ -22015,7 +22345,7 @@
         <p:spPr>
           <a:xfrm>
             <a:off x="9043416" y="4343400"/>
-            <a:ext cx="2560320" cy="292608"/>
+            <a:ext cx="2560320" cy="310896"/>
           </a:xfrm>
           <a:prstGeom prst="rect">
             <a:avLst/>
@@ -22057,8 +22387,8 @@
         </p:nvSpPr>
         <p:spPr>
           <a:xfrm>
-            <a:off x="9043416" y="4599432"/>
-            <a:ext cx="2560320" cy="731520"/>
+            <a:off x="9043416" y="4636008"/>
+            <a:ext cx="2560320" cy="694944"/>
           </a:xfrm>
           <a:prstGeom prst="rect">
             <a:avLst/>
@@ -24754,7 +25084,7 @@
         <p:spPr>
           <a:xfrm>
             <a:off x="539496" y="1920240"/>
-            <a:ext cx="3566159" cy="292608"/>
+            <a:ext cx="3566159" cy="310896"/>
           </a:xfrm>
           <a:prstGeom prst="rect">
             <a:avLst/>
@@ -24787,8 +25117,8 @@
         </p:nvSpPr>
         <p:spPr>
           <a:xfrm>
-            <a:off x="539496" y="2176272"/>
-            <a:ext cx="3566159" cy="1005840"/>
+            <a:off x="539496" y="2212848"/>
+            <a:ext cx="3566159" cy="969264"/>
           </a:xfrm>
           <a:prstGeom prst="rect">
             <a:avLst/>
@@ -24910,7 +25240,7 @@
         <p:spPr>
           <a:xfrm>
             <a:off x="4398263" y="1920240"/>
-            <a:ext cx="3566159" cy="292608"/>
+            <a:ext cx="3566159" cy="310896"/>
           </a:xfrm>
           <a:prstGeom prst="rect">
             <a:avLst/>
@@ -24952,8 +25282,8 @@
         </p:nvSpPr>
         <p:spPr>
           <a:xfrm>
-            <a:off x="4398263" y="2176272"/>
-            <a:ext cx="3566159" cy="1005840"/>
+            <a:off x="4398263" y="2212848"/>
+            <a:ext cx="3566159" cy="969264"/>
           </a:xfrm>
           <a:prstGeom prst="rect">
             <a:avLst/>
@@ -25075,7 +25405,7 @@
         <p:spPr>
           <a:xfrm>
             <a:off x="8257030" y="1920240"/>
-            <a:ext cx="3566159" cy="292608"/>
+            <a:ext cx="3566159" cy="310896"/>
           </a:xfrm>
           <a:prstGeom prst="rect">
             <a:avLst/>
@@ -25117,8 +25447,8 @@
         </p:nvSpPr>
         <p:spPr>
           <a:xfrm>
-            <a:off x="8257030" y="2176272"/>
-            <a:ext cx="3566159" cy="1005840"/>
+            <a:off x="8257030" y="2212848"/>
+            <a:ext cx="3566159" cy="969264"/>
           </a:xfrm>
           <a:prstGeom prst="rect">
             <a:avLst/>
@@ -25240,7 +25570,7 @@
         <p:spPr>
           <a:xfrm>
             <a:off x="539496" y="3493008"/>
-            <a:ext cx="3566159" cy="292608"/>
+            <a:ext cx="3566159" cy="310896"/>
           </a:xfrm>
           <a:prstGeom prst="rect">
             <a:avLst/>
@@ -25282,8 +25612,8 @@
         </p:nvSpPr>
         <p:spPr>
           <a:xfrm>
-            <a:off x="539496" y="3749040"/>
-            <a:ext cx="3566159" cy="1005840"/>
+            <a:off x="539496" y="3785616"/>
+            <a:ext cx="3566159" cy="969264"/>
           </a:xfrm>
           <a:prstGeom prst="rect">
             <a:avLst/>
@@ -25405,7 +25735,7 @@
         <p:spPr>
           <a:xfrm>
             <a:off x="4398263" y="3493008"/>
-            <a:ext cx="3566159" cy="292608"/>
+            <a:ext cx="3566159" cy="310896"/>
           </a:xfrm>
           <a:prstGeom prst="rect">
             <a:avLst/>
@@ -25447,8 +25777,8 @@
         </p:nvSpPr>
         <p:spPr>
           <a:xfrm>
-            <a:off x="4398263" y="3749040"/>
-            <a:ext cx="3566159" cy="1005840"/>
+            <a:off x="4398263" y="3785616"/>
+            <a:ext cx="3566159" cy="969264"/>
           </a:xfrm>
           <a:prstGeom prst="rect">
             <a:avLst/>
@@ -25570,7 +25900,7 @@
         <p:spPr>
           <a:xfrm>
             <a:off x="8257030" y="3493008"/>
-            <a:ext cx="3566159" cy="292608"/>
+            <a:ext cx="3566159" cy="310896"/>
           </a:xfrm>
           <a:prstGeom prst="rect">
             <a:avLst/>
@@ -25612,8 +25942,8 @@
         </p:nvSpPr>
         <p:spPr>
           <a:xfrm>
-            <a:off x="8257030" y="3749040"/>
-            <a:ext cx="3566159" cy="1005840"/>
+            <a:off x="8257030" y="3785616"/>
+            <a:ext cx="3566159" cy="969264"/>
           </a:xfrm>
           <a:prstGeom prst="rect">
             <a:avLst/>
@@ -26207,7 +26537,7 @@
         <p:spPr>
           <a:xfrm>
             <a:off x="539496" y="1901952"/>
-            <a:ext cx="3566159" cy="292608"/>
+            <a:ext cx="3566159" cy="310896"/>
           </a:xfrm>
           <a:prstGeom prst="rect">
             <a:avLst/>
@@ -26249,8 +26579,8 @@
         </p:nvSpPr>
         <p:spPr>
           <a:xfrm>
-            <a:off x="539496" y="2157984"/>
-            <a:ext cx="3566159" cy="868680"/>
+            <a:off x="539496" y="2194560"/>
+            <a:ext cx="3566159" cy="832104"/>
           </a:xfrm>
           <a:prstGeom prst="rect">
             <a:avLst/>
@@ -26372,7 +26702,7 @@
         <p:spPr>
           <a:xfrm>
             <a:off x="4379975" y="1901952"/>
-            <a:ext cx="3566159" cy="292608"/>
+            <a:ext cx="3566159" cy="310896"/>
           </a:xfrm>
           <a:prstGeom prst="rect">
             <a:avLst/>
@@ -26414,8 +26744,8 @@
         </p:nvSpPr>
         <p:spPr>
           <a:xfrm>
-            <a:off x="4379975" y="2157984"/>
-            <a:ext cx="3566159" cy="868680"/>
+            <a:off x="4379975" y="2194560"/>
+            <a:ext cx="3566159" cy="832104"/>
           </a:xfrm>
           <a:prstGeom prst="rect">
             <a:avLst/>
@@ -26537,7 +26867,7 @@
         <p:spPr>
           <a:xfrm>
             <a:off x="8220454" y="1901952"/>
-            <a:ext cx="3566159" cy="292608"/>
+            <a:ext cx="3566159" cy="310896"/>
           </a:xfrm>
           <a:prstGeom prst="rect">
             <a:avLst/>
@@ -26579,8 +26909,8 @@
         </p:nvSpPr>
         <p:spPr>
           <a:xfrm>
-            <a:off x="8220454" y="2157984"/>
-            <a:ext cx="3566159" cy="868680"/>
+            <a:off x="8220454" y="2194560"/>
+            <a:ext cx="3566159" cy="832104"/>
           </a:xfrm>
           <a:prstGeom prst="rect">
             <a:avLst/>
@@ -26702,7 +27032,7 @@
         <p:spPr>
           <a:xfrm>
             <a:off x="539496" y="3319272"/>
-            <a:ext cx="3566159" cy="292608"/>
+            <a:ext cx="3566159" cy="310896"/>
           </a:xfrm>
           <a:prstGeom prst="rect">
             <a:avLst/>
@@ -26744,8 +27074,8 @@
         </p:nvSpPr>
         <p:spPr>
           <a:xfrm>
-            <a:off x="539496" y="3575304"/>
-            <a:ext cx="3566159" cy="868680"/>
+            <a:off x="539496" y="3611880"/>
+            <a:ext cx="3566159" cy="832104"/>
           </a:xfrm>
           <a:prstGeom prst="rect">
             <a:avLst/>
@@ -26867,7 +27197,7 @@
         <p:spPr>
           <a:xfrm>
             <a:off x="4379975" y="3319272"/>
-            <a:ext cx="3566159" cy="292608"/>
+            <a:ext cx="3566159" cy="310896"/>
           </a:xfrm>
           <a:prstGeom prst="rect">
             <a:avLst/>
@@ -26909,8 +27239,8 @@
         </p:nvSpPr>
         <p:spPr>
           <a:xfrm>
-            <a:off x="4379975" y="3575304"/>
-            <a:ext cx="3566159" cy="868680"/>
+            <a:off x="4379975" y="3611880"/>
+            <a:ext cx="3566159" cy="832104"/>
           </a:xfrm>
           <a:prstGeom prst="rect">
             <a:avLst/>
@@ -27032,7 +27362,7 @@
         <p:spPr>
           <a:xfrm>
             <a:off x="8220454" y="3319272"/>
-            <a:ext cx="3566159" cy="292608"/>
+            <a:ext cx="3566159" cy="310896"/>
           </a:xfrm>
           <a:prstGeom prst="rect">
             <a:avLst/>
@@ -27074,8 +27404,8 @@
         </p:nvSpPr>
         <p:spPr>
           <a:xfrm>
-            <a:off x="8220454" y="3575304"/>
-            <a:ext cx="3566159" cy="868680"/>
+            <a:off x="8220454" y="3611880"/>
+            <a:ext cx="3566159" cy="832104"/>
           </a:xfrm>
           <a:prstGeom prst="rect">
             <a:avLst/>
@@ -27197,7 +27527,7 @@
         <p:spPr>
           <a:xfrm>
             <a:off x="539496" y="4736592"/>
-            <a:ext cx="3566159" cy="292608"/>
+            <a:ext cx="3566159" cy="310896"/>
           </a:xfrm>
           <a:prstGeom prst="rect">
             <a:avLst/>
@@ -27239,8 +27569,8 @@
         </p:nvSpPr>
         <p:spPr>
           <a:xfrm>
-            <a:off x="539496" y="4992624"/>
-            <a:ext cx="3566159" cy="868680"/>
+            <a:off x="539496" y="5029200"/>
+            <a:ext cx="3566159" cy="832104"/>
           </a:xfrm>
           <a:prstGeom prst="rect">
             <a:avLst/>
@@ -27362,7 +27692,7 @@
         <p:spPr>
           <a:xfrm>
             <a:off x="4379975" y="4736592"/>
-            <a:ext cx="3566159" cy="292608"/>
+            <a:ext cx="3566159" cy="310896"/>
           </a:xfrm>
           <a:prstGeom prst="rect">
             <a:avLst/>
@@ -27404,8 +27734,8 @@
         </p:nvSpPr>
         <p:spPr>
           <a:xfrm>
-            <a:off x="4379975" y="4992624"/>
-            <a:ext cx="3566159" cy="868680"/>
+            <a:off x="4379975" y="5029200"/>
+            <a:ext cx="3566159" cy="832104"/>
           </a:xfrm>
           <a:prstGeom prst="rect">
             <a:avLst/>
@@ -27527,7 +27857,7 @@
         <p:spPr>
           <a:xfrm>
             <a:off x="8220454" y="4736592"/>
-            <a:ext cx="3566159" cy="292608"/>
+            <a:ext cx="3566159" cy="310896"/>
           </a:xfrm>
           <a:prstGeom prst="rect">
             <a:avLst/>
@@ -27569,8 +27899,8 @@
         </p:nvSpPr>
         <p:spPr>
           <a:xfrm>
-            <a:off x="8220454" y="4992624"/>
-            <a:ext cx="3566159" cy="868680"/>
+            <a:off x="8220454" y="5029200"/>
+            <a:ext cx="3566159" cy="832104"/>
           </a:xfrm>
           <a:prstGeom prst="rect">
             <a:avLst/>
@@ -32346,7 +32676,7 @@
         <p:spPr>
           <a:xfrm>
             <a:off x="539496" y="1938528"/>
-            <a:ext cx="3456432" cy="292608"/>
+            <a:ext cx="3456432" cy="310896"/>
           </a:xfrm>
           <a:prstGeom prst="rect">
             <a:avLst/>
@@ -32379,8 +32709,8 @@
         </p:nvSpPr>
         <p:spPr>
           <a:xfrm>
-            <a:off x="539496" y="2194560"/>
-            <a:ext cx="3456432" cy="1536192"/>
+            <a:off x="539496" y="2231136"/>
+            <a:ext cx="3456432" cy="1499616"/>
           </a:xfrm>
           <a:prstGeom prst="rect">
             <a:avLst/>
@@ -32502,7 +32832,7 @@
         <p:spPr>
           <a:xfrm>
             <a:off x="4398264" y="1938528"/>
-            <a:ext cx="3456432" cy="292608"/>
+            <a:ext cx="3456432" cy="310896"/>
           </a:xfrm>
           <a:prstGeom prst="rect">
             <a:avLst/>
@@ -32535,8 +32865,8 @@
         </p:nvSpPr>
         <p:spPr>
           <a:xfrm>
-            <a:off x="4398264" y="2194560"/>
-            <a:ext cx="3456432" cy="1536192"/>
+            <a:off x="4398264" y="2231136"/>
+            <a:ext cx="3456432" cy="1499616"/>
           </a:xfrm>
           <a:prstGeom prst="rect">
             <a:avLst/>
@@ -32658,7 +32988,7 @@
         <p:spPr>
           <a:xfrm>
             <a:off x="8257032" y="1938528"/>
-            <a:ext cx="3456432" cy="292608"/>
+            <a:ext cx="3456432" cy="310896"/>
           </a:xfrm>
           <a:prstGeom prst="rect">
             <a:avLst/>
@@ -32691,8 +33021,8 @@
         </p:nvSpPr>
         <p:spPr>
           <a:xfrm>
-            <a:off x="8257032" y="2194560"/>
-            <a:ext cx="3456432" cy="1536192"/>
+            <a:off x="8257032" y="2231136"/>
+            <a:ext cx="3456432" cy="1499616"/>
           </a:xfrm>
           <a:prstGeom prst="rect">
             <a:avLst/>
@@ -32814,7 +33144,7 @@
         <p:spPr>
           <a:xfrm>
             <a:off x="539496" y="4114800"/>
-            <a:ext cx="3456432" cy="292608"/>
+            <a:ext cx="3456432" cy="310896"/>
           </a:xfrm>
           <a:prstGeom prst="rect">
             <a:avLst/>
@@ -32847,8 +33177,8 @@
         </p:nvSpPr>
         <p:spPr>
           <a:xfrm>
-            <a:off x="539496" y="4370832"/>
-            <a:ext cx="3456432" cy="1536192"/>
+            <a:off x="539496" y="4407408"/>
+            <a:ext cx="3456432" cy="1499616"/>
           </a:xfrm>
           <a:prstGeom prst="rect">
             <a:avLst/>
@@ -32970,7 +33300,7 @@
         <p:spPr>
           <a:xfrm>
             <a:off x="4398264" y="4114800"/>
-            <a:ext cx="3456432" cy="292608"/>
+            <a:ext cx="3456432" cy="310896"/>
           </a:xfrm>
           <a:prstGeom prst="rect">
             <a:avLst/>
@@ -33003,8 +33333,8 @@
         </p:nvSpPr>
         <p:spPr>
           <a:xfrm>
-            <a:off x="4398264" y="4370832"/>
-            <a:ext cx="3456432" cy="1536192"/>
+            <a:off x="4398264" y="4407408"/>
+            <a:ext cx="3456432" cy="1499616"/>
           </a:xfrm>
           <a:prstGeom prst="rect">
             <a:avLst/>
@@ -37881,7 +38211,7 @@
         <p:spPr>
           <a:xfrm>
             <a:off x="411480" y="1810512"/>
-            <a:ext cx="1844497" cy="1051560"/>
+            <a:ext cx="1573813" cy="1475232"/>
           </a:xfrm>
           <a:prstGeom prst="rect">
             <a:avLst/>
@@ -37925,29 +38255,29 @@
         </p:nvSpPr>
         <p:spPr>
           <a:xfrm>
-            <a:off x="411480" y="1865376"/>
-            <a:ext cx="1844497" cy="292608"/>
-          </a:xfrm>
-          <a:prstGeom prst="rect">
-            <a:avLst/>
-          </a:prstGeom>
-          <a:noFill/>
-        </p:spPr>
-        <p:txBody>
-          <a:bodyPr wrap="square">
-            <a:spAutoFit/>
-          </a:bodyPr>
-          <a:lstStyle/>
-          <a:p>
-            <a:pPr algn="ctr"/>
-            <a:r>
-              <a:rPr sz="1300" b="0" i="0">
+            <a:off x="411480" y="1975104"/>
+            <a:ext cx="1573813" cy="365760"/>
+          </a:xfrm>
+          <a:prstGeom prst="rect">
+            <a:avLst/>
+          </a:prstGeom>
+          <a:noFill/>
+        </p:spPr>
+        <p:txBody>
+          <a:bodyPr wrap="square">
+            <a:spAutoFit/>
+          </a:bodyPr>
+          <a:lstStyle/>
+          <a:p>
+            <a:pPr algn="ctr"/>
+            <a:r>
+              <a:rPr sz="1700" b="0" i="0">
                 <a:solidFill>
                   <a:srgbClr val="F0F2F8"/>
                 </a:solidFill>
                 <a:latin typeface="Segoe UI Emoji"/>
               </a:rPr>
-              <a:t>⚙️</a:t>
+              <a:t>🛠️</a:t>
             </a:r>
           </a:p>
         </p:txBody>
@@ -37960,23 +38290,23 @@
         </p:nvSpPr>
         <p:spPr>
           <a:xfrm>
-            <a:off x="411480" y="2121408"/>
-            <a:ext cx="1844497" cy="201168"/>
-          </a:xfrm>
-          <a:prstGeom prst="rect">
-            <a:avLst/>
-          </a:prstGeom>
-          <a:noFill/>
-        </p:spPr>
-        <p:txBody>
-          <a:bodyPr wrap="square">
-            <a:spAutoFit/>
-          </a:bodyPr>
-          <a:lstStyle/>
-          <a:p>
-            <a:pPr algn="ctr"/>
-            <a:r>
-              <a:rPr sz="800" b="1" i="0">
+            <a:off x="411480" y="2395728"/>
+            <a:ext cx="1573813" cy="237744"/>
+          </a:xfrm>
+          <a:prstGeom prst="rect">
+            <a:avLst/>
+          </a:prstGeom>
+          <a:noFill/>
+        </p:spPr>
+        <p:txBody>
+          <a:bodyPr wrap="square">
+            <a:spAutoFit/>
+          </a:bodyPr>
+          <a:lstStyle/>
+          <a:p>
+            <a:pPr algn="ctr"/>
+            <a:r>
+              <a:rPr sz="900" b="1" i="0">
                 <a:solidFill>
                   <a:srgbClr val="F0F2F8"/>
                 </a:solidFill>
@@ -37994,23 +38324,23 @@
         </p:nvSpPr>
         <p:spPr>
           <a:xfrm>
-            <a:off x="411480" y="2322576"/>
-            <a:ext cx="1844497" cy="457200"/>
-          </a:xfrm>
-          <a:prstGeom prst="rect">
-            <a:avLst/>
-          </a:prstGeom>
-          <a:noFill/>
-        </p:spPr>
-        <p:txBody>
-          <a:bodyPr wrap="square">
-            <a:spAutoFit/>
-          </a:bodyPr>
-          <a:lstStyle/>
-          <a:p>
-            <a:pPr algn="ctr"/>
-            <a:r>
-              <a:rPr sz="750" b="0" i="0">
+            <a:off x="411480" y="2670048"/>
+            <a:ext cx="1573813" cy="530352"/>
+          </a:xfrm>
+          <a:prstGeom prst="rect">
+            <a:avLst/>
+          </a:prstGeom>
+          <a:noFill/>
+        </p:spPr>
+        <p:txBody>
+          <a:bodyPr wrap="square">
+            <a:spAutoFit/>
+          </a:bodyPr>
+          <a:lstStyle/>
+          <a:p>
+            <a:pPr algn="ctr"/>
+            <a:r>
+              <a:rPr sz="800" b="0" i="0">
                 <a:solidFill>
                   <a:srgbClr val="5A6380"/>
                 </a:solidFill>
@@ -38028,8 +38358,8 @@
         </p:nvSpPr>
         <p:spPr>
           <a:xfrm>
-            <a:off x="2306269" y="1810512"/>
-            <a:ext cx="1844497" cy="1051560"/>
+            <a:off x="2035585" y="1810512"/>
+            <a:ext cx="1573813" cy="1475232"/>
           </a:xfrm>
           <a:prstGeom prst="rect">
             <a:avLst/>
@@ -38073,23 +38403,23 @@
         </p:nvSpPr>
         <p:spPr>
           <a:xfrm>
-            <a:off x="2306269" y="1865376"/>
-            <a:ext cx="1844497" cy="292608"/>
-          </a:xfrm>
-          <a:prstGeom prst="rect">
-            <a:avLst/>
-          </a:prstGeom>
-          <a:noFill/>
-        </p:spPr>
-        <p:txBody>
-          <a:bodyPr wrap="square">
-            <a:spAutoFit/>
-          </a:bodyPr>
-          <a:lstStyle/>
-          <a:p>
-            <a:pPr algn="ctr"/>
-            <a:r>
-              <a:rPr sz="1300" b="0" i="0">
+            <a:off x="2035585" y="1975104"/>
+            <a:ext cx="1573813" cy="365760"/>
+          </a:xfrm>
+          <a:prstGeom prst="rect">
+            <a:avLst/>
+          </a:prstGeom>
+          <a:noFill/>
+        </p:spPr>
+        <p:txBody>
+          <a:bodyPr wrap="square">
+            <a:spAutoFit/>
+          </a:bodyPr>
+          <a:lstStyle/>
+          <a:p>
+            <a:pPr algn="ctr"/>
+            <a:r>
+              <a:rPr sz="1700" b="0" i="0">
                 <a:solidFill>
                   <a:srgbClr val="F0F2F8"/>
                 </a:solidFill>
@@ -38108,23 +38438,23 @@
         </p:nvSpPr>
         <p:spPr>
           <a:xfrm>
-            <a:off x="2306269" y="2121408"/>
-            <a:ext cx="1844497" cy="201168"/>
-          </a:xfrm>
-          <a:prstGeom prst="rect">
-            <a:avLst/>
-          </a:prstGeom>
-          <a:noFill/>
-        </p:spPr>
-        <p:txBody>
-          <a:bodyPr wrap="square">
-            <a:spAutoFit/>
-          </a:bodyPr>
-          <a:lstStyle/>
-          <a:p>
-            <a:pPr algn="ctr"/>
-            <a:r>
-              <a:rPr sz="800" b="1" i="0">
+            <a:off x="2035585" y="2395728"/>
+            <a:ext cx="1573813" cy="237744"/>
+          </a:xfrm>
+          <a:prstGeom prst="rect">
+            <a:avLst/>
+          </a:prstGeom>
+          <a:noFill/>
+        </p:spPr>
+        <p:txBody>
+          <a:bodyPr wrap="square">
+            <a:spAutoFit/>
+          </a:bodyPr>
+          <a:lstStyle/>
+          <a:p>
+            <a:pPr algn="ctr"/>
+            <a:r>
+              <a:rPr sz="900" b="1" i="0">
                 <a:solidFill>
                   <a:srgbClr val="F0F2F8"/>
                 </a:solidFill>
@@ -38142,23 +38472,23 @@
         </p:nvSpPr>
         <p:spPr>
           <a:xfrm>
-            <a:off x="2306269" y="2322576"/>
-            <a:ext cx="1844497" cy="457200"/>
-          </a:xfrm>
-          <a:prstGeom prst="rect">
-            <a:avLst/>
-          </a:prstGeom>
-          <a:noFill/>
-        </p:spPr>
-        <p:txBody>
-          <a:bodyPr wrap="square">
-            <a:spAutoFit/>
-          </a:bodyPr>
-          <a:lstStyle/>
-          <a:p>
-            <a:pPr algn="ctr"/>
-            <a:r>
-              <a:rPr sz="750" b="0" i="0">
+            <a:off x="2035585" y="2670048"/>
+            <a:ext cx="1573813" cy="530352"/>
+          </a:xfrm>
+          <a:prstGeom prst="rect">
+            <a:avLst/>
+          </a:prstGeom>
+          <a:noFill/>
+        </p:spPr>
+        <p:txBody>
+          <a:bodyPr wrap="square">
+            <a:spAutoFit/>
+          </a:bodyPr>
+          <a:lstStyle/>
+          <a:p>
+            <a:pPr algn="ctr"/>
+            <a:r>
+              <a:rPr sz="800" b="0" i="0">
                 <a:solidFill>
                   <a:srgbClr val="5A6380"/>
                 </a:solidFill>
@@ -38176,8 +38506,8 @@
         </p:nvSpPr>
         <p:spPr>
           <a:xfrm>
-            <a:off x="4201058" y="1810512"/>
-            <a:ext cx="1844497" cy="1051560"/>
+            <a:off x="3659690" y="1810512"/>
+            <a:ext cx="1573813" cy="1475232"/>
           </a:xfrm>
           <a:prstGeom prst="rect">
             <a:avLst/>
@@ -38221,23 +38551,23 @@
         </p:nvSpPr>
         <p:spPr>
           <a:xfrm>
-            <a:off x="4201058" y="1865376"/>
-            <a:ext cx="1844497" cy="292608"/>
-          </a:xfrm>
-          <a:prstGeom prst="rect">
-            <a:avLst/>
-          </a:prstGeom>
-          <a:noFill/>
-        </p:spPr>
-        <p:txBody>
-          <a:bodyPr wrap="square">
-            <a:spAutoFit/>
-          </a:bodyPr>
-          <a:lstStyle/>
-          <a:p>
-            <a:pPr algn="ctr"/>
-            <a:r>
-              <a:rPr sz="1300" b="0" i="0">
+            <a:off x="3659690" y="1975104"/>
+            <a:ext cx="1573813" cy="365760"/>
+          </a:xfrm>
+          <a:prstGeom prst="rect">
+            <a:avLst/>
+          </a:prstGeom>
+          <a:noFill/>
+        </p:spPr>
+        <p:txBody>
+          <a:bodyPr wrap="square">
+            <a:spAutoFit/>
+          </a:bodyPr>
+          <a:lstStyle/>
+          <a:p>
+            <a:pPr algn="ctr"/>
+            <a:r>
+              <a:rPr sz="1700" b="0" i="0">
                 <a:solidFill>
                   <a:srgbClr val="F0F2F8"/>
                 </a:solidFill>
@@ -38256,23 +38586,23 @@
         </p:nvSpPr>
         <p:spPr>
           <a:xfrm>
-            <a:off x="4201058" y="2121408"/>
-            <a:ext cx="1844497" cy="201168"/>
-          </a:xfrm>
-          <a:prstGeom prst="rect">
-            <a:avLst/>
-          </a:prstGeom>
-          <a:noFill/>
-        </p:spPr>
-        <p:txBody>
-          <a:bodyPr wrap="square">
-            <a:spAutoFit/>
-          </a:bodyPr>
-          <a:lstStyle/>
-          <a:p>
-            <a:pPr algn="ctr"/>
-            <a:r>
-              <a:rPr sz="800" b="1" i="0">
+            <a:off x="3659690" y="2395728"/>
+            <a:ext cx="1573813" cy="237744"/>
+          </a:xfrm>
+          <a:prstGeom prst="rect">
+            <a:avLst/>
+          </a:prstGeom>
+          <a:noFill/>
+        </p:spPr>
+        <p:txBody>
+          <a:bodyPr wrap="square">
+            <a:spAutoFit/>
+          </a:bodyPr>
+          <a:lstStyle/>
+          <a:p>
+            <a:pPr algn="ctr"/>
+            <a:r>
+              <a:rPr sz="900" b="1" i="0">
                 <a:solidFill>
                   <a:srgbClr val="F0F2F8"/>
                 </a:solidFill>
@@ -38290,23 +38620,23 @@
         </p:nvSpPr>
         <p:spPr>
           <a:xfrm>
-            <a:off x="4201058" y="2322576"/>
-            <a:ext cx="1844497" cy="457200"/>
-          </a:xfrm>
-          <a:prstGeom prst="rect">
-            <a:avLst/>
-          </a:prstGeom>
-          <a:noFill/>
-        </p:spPr>
-        <p:txBody>
-          <a:bodyPr wrap="square">
-            <a:spAutoFit/>
-          </a:bodyPr>
-          <a:lstStyle/>
-          <a:p>
-            <a:pPr algn="ctr"/>
-            <a:r>
-              <a:rPr sz="750" b="0" i="0">
+            <a:off x="3659690" y="2670048"/>
+            <a:ext cx="1573813" cy="530352"/>
+          </a:xfrm>
+          <a:prstGeom prst="rect">
+            <a:avLst/>
+          </a:prstGeom>
+          <a:noFill/>
+        </p:spPr>
+        <p:txBody>
+          <a:bodyPr wrap="square">
+            <a:spAutoFit/>
+          </a:bodyPr>
+          <a:lstStyle/>
+          <a:p>
+            <a:pPr algn="ctr"/>
+            <a:r>
+              <a:rPr sz="800" b="0" i="0">
                 <a:solidFill>
                   <a:srgbClr val="5A6380"/>
                 </a:solidFill>
@@ -38324,8 +38654,8 @@
         </p:nvSpPr>
         <p:spPr>
           <a:xfrm>
-            <a:off x="6095847" y="1810512"/>
-            <a:ext cx="1844497" cy="1051560"/>
+            <a:off x="5283795" y="1810512"/>
+            <a:ext cx="1573813" cy="1475232"/>
           </a:xfrm>
           <a:prstGeom prst="rect">
             <a:avLst/>
@@ -38369,23 +38699,23 @@
         </p:nvSpPr>
         <p:spPr>
           <a:xfrm>
-            <a:off x="6095847" y="1865376"/>
-            <a:ext cx="1844497" cy="292608"/>
-          </a:xfrm>
-          <a:prstGeom prst="rect">
-            <a:avLst/>
-          </a:prstGeom>
-          <a:noFill/>
-        </p:spPr>
-        <p:txBody>
-          <a:bodyPr wrap="square">
-            <a:spAutoFit/>
-          </a:bodyPr>
-          <a:lstStyle/>
-          <a:p>
-            <a:pPr algn="ctr"/>
-            <a:r>
-              <a:rPr sz="1300" b="0" i="0">
+            <a:off x="5283795" y="1975104"/>
+            <a:ext cx="1573813" cy="365760"/>
+          </a:xfrm>
+          <a:prstGeom prst="rect">
+            <a:avLst/>
+          </a:prstGeom>
+          <a:noFill/>
+        </p:spPr>
+        <p:txBody>
+          <a:bodyPr wrap="square">
+            <a:spAutoFit/>
+          </a:bodyPr>
+          <a:lstStyle/>
+          <a:p>
+            <a:pPr algn="ctr"/>
+            <a:r>
+              <a:rPr sz="1700" b="0" i="0">
                 <a:solidFill>
                   <a:srgbClr val="F0F2F8"/>
                 </a:solidFill>
@@ -38404,23 +38734,23 @@
         </p:nvSpPr>
         <p:spPr>
           <a:xfrm>
-            <a:off x="6095847" y="2121408"/>
-            <a:ext cx="1844497" cy="201168"/>
-          </a:xfrm>
-          <a:prstGeom prst="rect">
-            <a:avLst/>
-          </a:prstGeom>
-          <a:noFill/>
-        </p:spPr>
-        <p:txBody>
-          <a:bodyPr wrap="square">
-            <a:spAutoFit/>
-          </a:bodyPr>
-          <a:lstStyle/>
-          <a:p>
-            <a:pPr algn="ctr"/>
-            <a:r>
-              <a:rPr sz="800" b="1" i="0">
+            <a:off x="5283795" y="2395728"/>
+            <a:ext cx="1573813" cy="237744"/>
+          </a:xfrm>
+          <a:prstGeom prst="rect">
+            <a:avLst/>
+          </a:prstGeom>
+          <a:noFill/>
+        </p:spPr>
+        <p:txBody>
+          <a:bodyPr wrap="square">
+            <a:spAutoFit/>
+          </a:bodyPr>
+          <a:lstStyle/>
+          <a:p>
+            <a:pPr algn="ctr"/>
+            <a:r>
+              <a:rPr sz="900" b="1" i="0">
                 <a:solidFill>
                   <a:srgbClr val="F0F2F8"/>
                 </a:solidFill>
@@ -38438,23 +38768,23 @@
         </p:nvSpPr>
         <p:spPr>
           <a:xfrm>
-            <a:off x="6095847" y="2322576"/>
-            <a:ext cx="1844497" cy="457200"/>
-          </a:xfrm>
-          <a:prstGeom prst="rect">
-            <a:avLst/>
-          </a:prstGeom>
-          <a:noFill/>
-        </p:spPr>
-        <p:txBody>
-          <a:bodyPr wrap="square">
-            <a:spAutoFit/>
-          </a:bodyPr>
-          <a:lstStyle/>
-          <a:p>
-            <a:pPr algn="ctr"/>
-            <a:r>
-              <a:rPr sz="750" b="0" i="0">
+            <a:off x="5283795" y="2670048"/>
+            <a:ext cx="1573813" cy="530352"/>
+          </a:xfrm>
+          <a:prstGeom prst="rect">
+            <a:avLst/>
+          </a:prstGeom>
+          <a:noFill/>
+        </p:spPr>
+        <p:txBody>
+          <a:bodyPr wrap="square">
+            <a:spAutoFit/>
+          </a:bodyPr>
+          <a:lstStyle/>
+          <a:p>
+            <a:pPr algn="ctr"/>
+            <a:r>
+              <a:rPr sz="800" b="0" i="0">
                 <a:solidFill>
                   <a:srgbClr val="5A6380"/>
                 </a:solidFill>
@@ -38472,8 +38802,8 @@
         </p:nvSpPr>
         <p:spPr>
           <a:xfrm>
-            <a:off x="7990636" y="1810512"/>
-            <a:ext cx="1844497" cy="1051560"/>
+            <a:off x="6907900" y="1810512"/>
+            <a:ext cx="1573813" cy="1475232"/>
           </a:xfrm>
           <a:prstGeom prst="rect">
             <a:avLst/>
@@ -38517,23 +38847,23 @@
         </p:nvSpPr>
         <p:spPr>
           <a:xfrm>
-            <a:off x="7990636" y="1865376"/>
-            <a:ext cx="1844497" cy="292608"/>
-          </a:xfrm>
-          <a:prstGeom prst="rect">
-            <a:avLst/>
-          </a:prstGeom>
-          <a:noFill/>
-        </p:spPr>
-        <p:txBody>
-          <a:bodyPr wrap="square">
-            <a:spAutoFit/>
-          </a:bodyPr>
-          <a:lstStyle/>
-          <a:p>
-            <a:pPr algn="ctr"/>
-            <a:r>
-              <a:rPr sz="1300" b="0" i="0">
+            <a:off x="6907900" y="1975104"/>
+            <a:ext cx="1573813" cy="365760"/>
+          </a:xfrm>
+          <a:prstGeom prst="rect">
+            <a:avLst/>
+          </a:prstGeom>
+          <a:noFill/>
+        </p:spPr>
+        <p:txBody>
+          <a:bodyPr wrap="square">
+            <a:spAutoFit/>
+          </a:bodyPr>
+          <a:lstStyle/>
+          <a:p>
+            <a:pPr algn="ctr"/>
+            <a:r>
+              <a:rPr sz="1700" b="0" i="0">
                 <a:solidFill>
                   <a:srgbClr val="F0F2F8"/>
                 </a:solidFill>
@@ -38552,23 +38882,23 @@
         </p:nvSpPr>
         <p:spPr>
           <a:xfrm>
-            <a:off x="7990636" y="2121408"/>
-            <a:ext cx="1844497" cy="201168"/>
-          </a:xfrm>
-          <a:prstGeom prst="rect">
-            <a:avLst/>
-          </a:prstGeom>
-          <a:noFill/>
-        </p:spPr>
-        <p:txBody>
-          <a:bodyPr wrap="square">
-            <a:spAutoFit/>
-          </a:bodyPr>
-          <a:lstStyle/>
-          <a:p>
-            <a:pPr algn="ctr"/>
-            <a:r>
-              <a:rPr sz="800" b="1" i="0">
+            <a:off x="6907900" y="2395728"/>
+            <a:ext cx="1573813" cy="237744"/>
+          </a:xfrm>
+          <a:prstGeom prst="rect">
+            <a:avLst/>
+          </a:prstGeom>
+          <a:noFill/>
+        </p:spPr>
+        <p:txBody>
+          <a:bodyPr wrap="square">
+            <a:spAutoFit/>
+          </a:bodyPr>
+          <a:lstStyle/>
+          <a:p>
+            <a:pPr algn="ctr"/>
+            <a:r>
+              <a:rPr sz="900" b="1" i="0">
                 <a:solidFill>
                   <a:srgbClr val="F0F2F8"/>
                 </a:solidFill>
@@ -38586,23 +38916,23 @@
         </p:nvSpPr>
         <p:spPr>
           <a:xfrm>
-            <a:off x="7990636" y="2322576"/>
-            <a:ext cx="1844497" cy="457200"/>
-          </a:xfrm>
-          <a:prstGeom prst="rect">
-            <a:avLst/>
-          </a:prstGeom>
-          <a:noFill/>
-        </p:spPr>
-        <p:txBody>
-          <a:bodyPr wrap="square">
-            <a:spAutoFit/>
-          </a:bodyPr>
-          <a:lstStyle/>
-          <a:p>
-            <a:pPr algn="ctr"/>
-            <a:r>
-              <a:rPr sz="750" b="0" i="0">
+            <a:off x="6907900" y="2670048"/>
+            <a:ext cx="1573813" cy="530352"/>
+          </a:xfrm>
+          <a:prstGeom prst="rect">
+            <a:avLst/>
+          </a:prstGeom>
+          <a:noFill/>
+        </p:spPr>
+        <p:txBody>
+          <a:bodyPr wrap="square">
+            <a:spAutoFit/>
+          </a:bodyPr>
+          <a:lstStyle/>
+          <a:p>
+            <a:pPr algn="ctr"/>
+            <a:r>
+              <a:rPr sz="800" b="0" i="0">
                 <a:solidFill>
                   <a:srgbClr val="5A6380"/>
                 </a:solidFill>
@@ -38620,8 +38950,8 @@
         </p:nvSpPr>
         <p:spPr>
           <a:xfrm>
-            <a:off x="9885425" y="1810512"/>
-            <a:ext cx="1844497" cy="1051560"/>
+            <a:off x="8532005" y="1810512"/>
+            <a:ext cx="1573813" cy="1475232"/>
           </a:xfrm>
           <a:prstGeom prst="rect">
             <a:avLst/>
@@ -38665,29 +38995,29 @@
         </p:nvSpPr>
         <p:spPr>
           <a:xfrm>
-            <a:off x="9885425" y="1865376"/>
-            <a:ext cx="1844497" cy="292608"/>
-          </a:xfrm>
-          <a:prstGeom prst="rect">
-            <a:avLst/>
-          </a:prstGeom>
-          <a:noFill/>
-        </p:spPr>
-        <p:txBody>
-          <a:bodyPr wrap="square">
-            <a:spAutoFit/>
-          </a:bodyPr>
-          <a:lstStyle/>
-          <a:p>
-            <a:pPr algn="ctr"/>
-            <a:r>
-              <a:rPr sz="1300" b="0" i="0">
+            <a:off x="8532005" y="1975104"/>
+            <a:ext cx="1573813" cy="365760"/>
+          </a:xfrm>
+          <a:prstGeom prst="rect">
+            <a:avLst/>
+          </a:prstGeom>
+          <a:noFill/>
+        </p:spPr>
+        <p:txBody>
+          <a:bodyPr wrap="square">
+            <a:spAutoFit/>
+          </a:bodyPr>
+          <a:lstStyle/>
+          <a:p>
+            <a:pPr algn="ctr"/>
+            <a:r>
+              <a:rPr sz="1700" b="0" i="0">
                 <a:solidFill>
                   <a:srgbClr val="F0F2F8"/>
                 </a:solidFill>
                 <a:latin typeface="Segoe UI Emoji"/>
               </a:rPr>
-              <a:t>🔩</a:t>
+              <a:t>✂️</a:t>
             </a:r>
           </a:p>
         </p:txBody>
@@ -38700,23 +39030,23 @@
         </p:nvSpPr>
         <p:spPr>
           <a:xfrm>
-            <a:off x="9885425" y="2121408"/>
-            <a:ext cx="1844497" cy="201168"/>
-          </a:xfrm>
-          <a:prstGeom prst="rect">
-            <a:avLst/>
-          </a:prstGeom>
-          <a:noFill/>
-        </p:spPr>
-        <p:txBody>
-          <a:bodyPr wrap="square">
-            <a:spAutoFit/>
-          </a:bodyPr>
-          <a:lstStyle/>
-          <a:p>
-            <a:pPr algn="ctr"/>
-            <a:r>
-              <a:rPr sz="800" b="1" i="0">
+            <a:off x="8532005" y="2395728"/>
+            <a:ext cx="1573813" cy="237744"/>
+          </a:xfrm>
+          <a:prstGeom prst="rect">
+            <a:avLst/>
+          </a:prstGeom>
+          <a:noFill/>
+        </p:spPr>
+        <p:txBody>
+          <a:bodyPr wrap="square">
+            <a:spAutoFit/>
+          </a:bodyPr>
+          <a:lstStyle/>
+          <a:p>
+            <a:pPr algn="ctr"/>
+            <a:r>
+              <a:rPr sz="900" b="1" i="0">
                 <a:solidFill>
                   <a:srgbClr val="F0F2F8"/>
                 </a:solidFill>
@@ -38734,23 +39064,23 @@
         </p:nvSpPr>
         <p:spPr>
           <a:xfrm>
-            <a:off x="9885425" y="2322576"/>
-            <a:ext cx="1844497" cy="457200"/>
-          </a:xfrm>
-          <a:prstGeom prst="rect">
-            <a:avLst/>
-          </a:prstGeom>
-          <a:noFill/>
-        </p:spPr>
-        <p:txBody>
-          <a:bodyPr wrap="square">
-            <a:spAutoFit/>
-          </a:bodyPr>
-          <a:lstStyle/>
-          <a:p>
-            <a:pPr algn="ctr"/>
-            <a:r>
-              <a:rPr sz="750" b="0" i="0">
+            <a:off x="8532005" y="2670048"/>
+            <a:ext cx="1573813" cy="530352"/>
+          </a:xfrm>
+          <a:prstGeom prst="rect">
+            <a:avLst/>
+          </a:prstGeom>
+          <a:noFill/>
+        </p:spPr>
+        <p:txBody>
+          <a:bodyPr wrap="square">
+            <a:spAutoFit/>
+          </a:bodyPr>
+          <a:lstStyle/>
+          <a:p>
+            <a:pPr algn="ctr"/>
+            <a:r>
+              <a:rPr sz="800" b="0" i="0">
                 <a:solidFill>
                   <a:srgbClr val="5A6380"/>
                 </a:solidFill>
@@ -38768,8 +39098,8 @@
         </p:nvSpPr>
         <p:spPr>
           <a:xfrm>
-            <a:off x="411480" y="2921508"/>
-            <a:ext cx="1844497" cy="1051560"/>
+            <a:off x="10156110" y="1810512"/>
+            <a:ext cx="1573813" cy="1475232"/>
           </a:xfrm>
           <a:prstGeom prst="rect">
             <a:avLst/>
@@ -38813,23 +39143,23 @@
         </p:nvSpPr>
         <p:spPr>
           <a:xfrm>
-            <a:off x="411480" y="2976372"/>
-            <a:ext cx="1844497" cy="292608"/>
-          </a:xfrm>
-          <a:prstGeom prst="rect">
-            <a:avLst/>
-          </a:prstGeom>
-          <a:noFill/>
-        </p:spPr>
-        <p:txBody>
-          <a:bodyPr wrap="square">
-            <a:spAutoFit/>
-          </a:bodyPr>
-          <a:lstStyle/>
-          <a:p>
-            <a:pPr algn="ctr"/>
-            <a:r>
-              <a:rPr sz="1300" b="0" i="0">
+            <a:off x="10156110" y="1975104"/>
+            <a:ext cx="1573813" cy="365760"/>
+          </a:xfrm>
+          <a:prstGeom prst="rect">
+            <a:avLst/>
+          </a:prstGeom>
+          <a:noFill/>
+        </p:spPr>
+        <p:txBody>
+          <a:bodyPr wrap="square">
+            <a:spAutoFit/>
+          </a:bodyPr>
+          <a:lstStyle/>
+          <a:p>
+            <a:pPr algn="ctr"/>
+            <a:r>
+              <a:rPr sz="1700" b="0" i="0">
                 <a:solidFill>
                   <a:srgbClr val="F0F2F8"/>
                 </a:solidFill>
@@ -38848,23 +39178,23 @@
         </p:nvSpPr>
         <p:spPr>
           <a:xfrm>
-            <a:off x="411480" y="3232404"/>
-            <a:ext cx="1844497" cy="201168"/>
-          </a:xfrm>
-          <a:prstGeom prst="rect">
-            <a:avLst/>
-          </a:prstGeom>
-          <a:noFill/>
-        </p:spPr>
-        <p:txBody>
-          <a:bodyPr wrap="square">
-            <a:spAutoFit/>
-          </a:bodyPr>
-          <a:lstStyle/>
-          <a:p>
-            <a:pPr algn="ctr"/>
-            <a:r>
-              <a:rPr sz="800" b="1" i="0">
+            <a:off x="10156110" y="2395728"/>
+            <a:ext cx="1573813" cy="237744"/>
+          </a:xfrm>
+          <a:prstGeom prst="rect">
+            <a:avLst/>
+          </a:prstGeom>
+          <a:noFill/>
+        </p:spPr>
+        <p:txBody>
+          <a:bodyPr wrap="square">
+            <a:spAutoFit/>
+          </a:bodyPr>
+          <a:lstStyle/>
+          <a:p>
+            <a:pPr algn="ctr"/>
+            <a:r>
+              <a:rPr sz="900" b="1" i="0">
                 <a:solidFill>
                   <a:srgbClr val="F0F2F8"/>
                 </a:solidFill>
@@ -38882,23 +39212,23 @@
         </p:nvSpPr>
         <p:spPr>
           <a:xfrm>
-            <a:off x="411480" y="3433572"/>
-            <a:ext cx="1844497" cy="457200"/>
-          </a:xfrm>
-          <a:prstGeom prst="rect">
-            <a:avLst/>
-          </a:prstGeom>
-          <a:noFill/>
-        </p:spPr>
-        <p:txBody>
-          <a:bodyPr wrap="square">
-            <a:spAutoFit/>
-          </a:bodyPr>
-          <a:lstStyle/>
-          <a:p>
-            <a:pPr algn="ctr"/>
-            <a:r>
-              <a:rPr sz="750" b="0" i="0">
+            <a:off x="10156110" y="2670048"/>
+            <a:ext cx="1573813" cy="530352"/>
+          </a:xfrm>
+          <a:prstGeom prst="rect">
+            <a:avLst/>
+          </a:prstGeom>
+          <a:noFill/>
+        </p:spPr>
+        <p:txBody>
+          <a:bodyPr wrap="square">
+            <a:spAutoFit/>
+          </a:bodyPr>
+          <a:lstStyle/>
+          <a:p>
+            <a:pPr algn="ctr"/>
+            <a:r>
+              <a:rPr sz="800" b="0" i="0">
                 <a:solidFill>
                   <a:srgbClr val="5A6380"/>
                 </a:solidFill>
@@ -38916,8 +39246,8 @@
         </p:nvSpPr>
         <p:spPr>
           <a:xfrm>
-            <a:off x="2306269" y="2921508"/>
-            <a:ext cx="1844497" cy="1051560"/>
+            <a:off x="411480" y="3345180"/>
+            <a:ext cx="1573813" cy="1475232"/>
           </a:xfrm>
           <a:prstGeom prst="rect">
             <a:avLst/>
@@ -38961,23 +39291,23 @@
         </p:nvSpPr>
         <p:spPr>
           <a:xfrm>
-            <a:off x="2306269" y="2976372"/>
-            <a:ext cx="1844497" cy="292608"/>
-          </a:xfrm>
-          <a:prstGeom prst="rect">
-            <a:avLst/>
-          </a:prstGeom>
-          <a:noFill/>
-        </p:spPr>
-        <p:txBody>
-          <a:bodyPr wrap="square">
-            <a:spAutoFit/>
-          </a:bodyPr>
-          <a:lstStyle/>
-          <a:p>
-            <a:pPr algn="ctr"/>
-            <a:r>
-              <a:rPr sz="1300" b="0" i="0">
+            <a:off x="411480" y="3509772"/>
+            <a:ext cx="1573813" cy="365760"/>
+          </a:xfrm>
+          <a:prstGeom prst="rect">
+            <a:avLst/>
+          </a:prstGeom>
+          <a:noFill/>
+        </p:spPr>
+        <p:txBody>
+          <a:bodyPr wrap="square">
+            <a:spAutoFit/>
+          </a:bodyPr>
+          <a:lstStyle/>
+          <a:p>
+            <a:pPr algn="ctr"/>
+            <a:r>
+              <a:rPr sz="1700" b="0" i="0">
                 <a:solidFill>
                   <a:srgbClr val="F0F2F8"/>
                 </a:solidFill>
@@ -38996,23 +39326,23 @@
         </p:nvSpPr>
         <p:spPr>
           <a:xfrm>
-            <a:off x="2306269" y="3232404"/>
-            <a:ext cx="1844497" cy="201168"/>
-          </a:xfrm>
-          <a:prstGeom prst="rect">
-            <a:avLst/>
-          </a:prstGeom>
-          <a:noFill/>
-        </p:spPr>
-        <p:txBody>
-          <a:bodyPr wrap="square">
-            <a:spAutoFit/>
-          </a:bodyPr>
-          <a:lstStyle/>
-          <a:p>
-            <a:pPr algn="ctr"/>
-            <a:r>
-              <a:rPr sz="800" b="1" i="0">
+            <a:off x="411480" y="3930396"/>
+            <a:ext cx="1573813" cy="237744"/>
+          </a:xfrm>
+          <a:prstGeom prst="rect">
+            <a:avLst/>
+          </a:prstGeom>
+          <a:noFill/>
+        </p:spPr>
+        <p:txBody>
+          <a:bodyPr wrap="square">
+            <a:spAutoFit/>
+          </a:bodyPr>
+          <a:lstStyle/>
+          <a:p>
+            <a:pPr algn="ctr"/>
+            <a:r>
+              <a:rPr sz="900" b="1" i="0">
                 <a:solidFill>
                   <a:srgbClr val="F0F2F8"/>
                 </a:solidFill>
@@ -39030,23 +39360,23 @@
         </p:nvSpPr>
         <p:spPr>
           <a:xfrm>
-            <a:off x="2306269" y="3433572"/>
-            <a:ext cx="1844497" cy="457200"/>
-          </a:xfrm>
-          <a:prstGeom prst="rect">
-            <a:avLst/>
-          </a:prstGeom>
-          <a:noFill/>
-        </p:spPr>
-        <p:txBody>
-          <a:bodyPr wrap="square">
-            <a:spAutoFit/>
-          </a:bodyPr>
-          <a:lstStyle/>
-          <a:p>
-            <a:pPr algn="ctr"/>
-            <a:r>
-              <a:rPr sz="750" b="0" i="0">
+            <a:off x="411480" y="4204716"/>
+            <a:ext cx="1573813" cy="530352"/>
+          </a:xfrm>
+          <a:prstGeom prst="rect">
+            <a:avLst/>
+          </a:prstGeom>
+          <a:noFill/>
+        </p:spPr>
+        <p:txBody>
+          <a:bodyPr wrap="square">
+            <a:spAutoFit/>
+          </a:bodyPr>
+          <a:lstStyle/>
+          <a:p>
+            <a:pPr algn="ctr"/>
+            <a:r>
+              <a:rPr sz="800" b="0" i="0">
                 <a:solidFill>
                   <a:srgbClr val="5A6380"/>
                 </a:solidFill>
@@ -39064,8 +39394,8 @@
         </p:nvSpPr>
         <p:spPr>
           <a:xfrm>
-            <a:off x="4201058" y="2921508"/>
-            <a:ext cx="1844497" cy="1051560"/>
+            <a:off x="2035585" y="3345180"/>
+            <a:ext cx="1573813" cy="1475232"/>
           </a:xfrm>
           <a:prstGeom prst="rect">
             <a:avLst/>
@@ -39109,23 +39439,23 @@
         </p:nvSpPr>
         <p:spPr>
           <a:xfrm>
-            <a:off x="4201058" y="2976372"/>
-            <a:ext cx="1844497" cy="292608"/>
-          </a:xfrm>
-          <a:prstGeom prst="rect">
-            <a:avLst/>
-          </a:prstGeom>
-          <a:noFill/>
-        </p:spPr>
-        <p:txBody>
-          <a:bodyPr wrap="square">
-            <a:spAutoFit/>
-          </a:bodyPr>
-          <a:lstStyle/>
-          <a:p>
-            <a:pPr algn="ctr"/>
-            <a:r>
-              <a:rPr sz="1300" b="0" i="0">
+            <a:off x="2035585" y="3509772"/>
+            <a:ext cx="1573813" cy="365760"/>
+          </a:xfrm>
+          <a:prstGeom prst="rect">
+            <a:avLst/>
+          </a:prstGeom>
+          <a:noFill/>
+        </p:spPr>
+        <p:txBody>
+          <a:bodyPr wrap="square">
+            <a:spAutoFit/>
+          </a:bodyPr>
+          <a:lstStyle/>
+          <a:p>
+            <a:pPr algn="ctr"/>
+            <a:r>
+              <a:rPr sz="1700" b="0" i="0">
                 <a:solidFill>
                   <a:srgbClr val="F0F2F8"/>
                 </a:solidFill>
@@ -39144,23 +39474,23 @@
         </p:nvSpPr>
         <p:spPr>
           <a:xfrm>
-            <a:off x="4201058" y="3232404"/>
-            <a:ext cx="1844497" cy="201168"/>
-          </a:xfrm>
-          <a:prstGeom prst="rect">
-            <a:avLst/>
-          </a:prstGeom>
-          <a:noFill/>
-        </p:spPr>
-        <p:txBody>
-          <a:bodyPr wrap="square">
-            <a:spAutoFit/>
-          </a:bodyPr>
-          <a:lstStyle/>
-          <a:p>
-            <a:pPr algn="ctr"/>
-            <a:r>
-              <a:rPr sz="800" b="1" i="0">
+            <a:off x="2035585" y="3930396"/>
+            <a:ext cx="1573813" cy="237744"/>
+          </a:xfrm>
+          <a:prstGeom prst="rect">
+            <a:avLst/>
+          </a:prstGeom>
+          <a:noFill/>
+        </p:spPr>
+        <p:txBody>
+          <a:bodyPr wrap="square">
+            <a:spAutoFit/>
+          </a:bodyPr>
+          <a:lstStyle/>
+          <a:p>
+            <a:pPr algn="ctr"/>
+            <a:r>
+              <a:rPr sz="900" b="1" i="0">
                 <a:solidFill>
                   <a:srgbClr val="F0F2F8"/>
                 </a:solidFill>
@@ -39178,23 +39508,23 @@
         </p:nvSpPr>
         <p:spPr>
           <a:xfrm>
-            <a:off x="4201058" y="3433572"/>
-            <a:ext cx="1844497" cy="457200"/>
-          </a:xfrm>
-          <a:prstGeom prst="rect">
-            <a:avLst/>
-          </a:prstGeom>
-          <a:noFill/>
-        </p:spPr>
-        <p:txBody>
-          <a:bodyPr wrap="square">
-            <a:spAutoFit/>
-          </a:bodyPr>
-          <a:lstStyle/>
-          <a:p>
-            <a:pPr algn="ctr"/>
-            <a:r>
-              <a:rPr sz="750" b="0" i="0">
+            <a:off x="2035585" y="4204716"/>
+            <a:ext cx="1573813" cy="530352"/>
+          </a:xfrm>
+          <a:prstGeom prst="rect">
+            <a:avLst/>
+          </a:prstGeom>
+          <a:noFill/>
+        </p:spPr>
+        <p:txBody>
+          <a:bodyPr wrap="square">
+            <a:spAutoFit/>
+          </a:bodyPr>
+          <a:lstStyle/>
+          <a:p>
+            <a:pPr algn="ctr"/>
+            <a:r>
+              <a:rPr sz="800" b="0" i="0">
                 <a:solidFill>
                   <a:srgbClr val="5A6380"/>
                 </a:solidFill>
@@ -39212,8 +39542,8 @@
         </p:nvSpPr>
         <p:spPr>
           <a:xfrm>
-            <a:off x="6095847" y="2921508"/>
-            <a:ext cx="1844497" cy="1051560"/>
+            <a:off x="3659690" y="3345180"/>
+            <a:ext cx="1573813" cy="1475232"/>
           </a:xfrm>
           <a:prstGeom prst="rect">
             <a:avLst/>
@@ -39257,29 +39587,29 @@
         </p:nvSpPr>
         <p:spPr>
           <a:xfrm>
-            <a:off x="6095847" y="2976372"/>
-            <a:ext cx="1844497" cy="292608"/>
-          </a:xfrm>
-          <a:prstGeom prst="rect">
-            <a:avLst/>
-          </a:prstGeom>
-          <a:noFill/>
-        </p:spPr>
-        <p:txBody>
-          <a:bodyPr wrap="square">
-            <a:spAutoFit/>
-          </a:bodyPr>
-          <a:lstStyle/>
-          <a:p>
-            <a:pPr algn="ctr"/>
-            <a:r>
-              <a:rPr sz="1300" b="0" i="0">
+            <a:off x="3659690" y="3509772"/>
+            <a:ext cx="1573813" cy="365760"/>
+          </a:xfrm>
+          <a:prstGeom prst="rect">
+            <a:avLst/>
+          </a:prstGeom>
+          <a:noFill/>
+        </p:spPr>
+        <p:txBody>
+          <a:bodyPr wrap="square">
+            <a:spAutoFit/>
+          </a:bodyPr>
+          <a:lstStyle/>
+          <a:p>
+            <a:pPr algn="ctr"/>
+            <a:r>
+              <a:rPr sz="1700" b="0" i="0">
                 <a:solidFill>
                   <a:srgbClr val="F0F2F8"/>
                 </a:solidFill>
                 <a:latin typeface="Segoe UI Emoji"/>
               </a:rPr>
-              <a:t>🔩</a:t>
+              <a:t>📏</a:t>
             </a:r>
           </a:p>
         </p:txBody>
@@ -39292,23 +39622,23 @@
         </p:nvSpPr>
         <p:spPr>
           <a:xfrm>
-            <a:off x="6095847" y="3232404"/>
-            <a:ext cx="1844497" cy="201168"/>
-          </a:xfrm>
-          <a:prstGeom prst="rect">
-            <a:avLst/>
-          </a:prstGeom>
-          <a:noFill/>
-        </p:spPr>
-        <p:txBody>
-          <a:bodyPr wrap="square">
-            <a:spAutoFit/>
-          </a:bodyPr>
-          <a:lstStyle/>
-          <a:p>
-            <a:pPr algn="ctr"/>
-            <a:r>
-              <a:rPr sz="800" b="1" i="0">
+            <a:off x="3659690" y="3930396"/>
+            <a:ext cx="1573813" cy="237744"/>
+          </a:xfrm>
+          <a:prstGeom prst="rect">
+            <a:avLst/>
+          </a:prstGeom>
+          <a:noFill/>
+        </p:spPr>
+        <p:txBody>
+          <a:bodyPr wrap="square">
+            <a:spAutoFit/>
+          </a:bodyPr>
+          <a:lstStyle/>
+          <a:p>
+            <a:pPr algn="ctr"/>
+            <a:r>
+              <a:rPr sz="900" b="1" i="0">
                 <a:solidFill>
                   <a:srgbClr val="F0F2F8"/>
                 </a:solidFill>
@@ -39326,23 +39656,23 @@
         </p:nvSpPr>
         <p:spPr>
           <a:xfrm>
-            <a:off x="6095847" y="3433572"/>
-            <a:ext cx="1844497" cy="457200"/>
-          </a:xfrm>
-          <a:prstGeom prst="rect">
-            <a:avLst/>
-          </a:prstGeom>
-          <a:noFill/>
-        </p:spPr>
-        <p:txBody>
-          <a:bodyPr wrap="square">
-            <a:spAutoFit/>
-          </a:bodyPr>
-          <a:lstStyle/>
-          <a:p>
-            <a:pPr algn="ctr"/>
-            <a:r>
-              <a:rPr sz="750" b="0" i="0">
+            <a:off x="3659690" y="4204716"/>
+            <a:ext cx="1573813" cy="530352"/>
+          </a:xfrm>
+          <a:prstGeom prst="rect">
+            <a:avLst/>
+          </a:prstGeom>
+          <a:noFill/>
+        </p:spPr>
+        <p:txBody>
+          <a:bodyPr wrap="square">
+            <a:spAutoFit/>
+          </a:bodyPr>
+          <a:lstStyle/>
+          <a:p>
+            <a:pPr algn="ctr"/>
+            <a:r>
+              <a:rPr sz="800" b="0" i="0">
                 <a:solidFill>
                   <a:srgbClr val="5A6380"/>
                 </a:solidFill>
@@ -39360,8 +39690,8 @@
         </p:nvSpPr>
         <p:spPr>
           <a:xfrm>
-            <a:off x="7990636" y="2921508"/>
-            <a:ext cx="1844497" cy="1051560"/>
+            <a:off x="5283795" y="3345180"/>
+            <a:ext cx="1573813" cy="1475232"/>
           </a:xfrm>
           <a:prstGeom prst="rect">
             <a:avLst/>
@@ -39405,23 +39735,23 @@
         </p:nvSpPr>
         <p:spPr>
           <a:xfrm>
-            <a:off x="7990636" y="2976372"/>
-            <a:ext cx="1844497" cy="292608"/>
-          </a:xfrm>
-          <a:prstGeom prst="rect">
-            <a:avLst/>
-          </a:prstGeom>
-          <a:noFill/>
-        </p:spPr>
-        <p:txBody>
-          <a:bodyPr wrap="square">
-            <a:spAutoFit/>
-          </a:bodyPr>
-          <a:lstStyle/>
-          <a:p>
-            <a:pPr algn="ctr"/>
-            <a:r>
-              <a:rPr sz="1300" b="0" i="0">
+            <a:off x="5283795" y="3509772"/>
+            <a:ext cx="1573813" cy="365760"/>
+          </a:xfrm>
+          <a:prstGeom prst="rect">
+            <a:avLst/>
+          </a:prstGeom>
+          <a:noFill/>
+        </p:spPr>
+        <p:txBody>
+          <a:bodyPr wrap="square">
+            <a:spAutoFit/>
+          </a:bodyPr>
+          <a:lstStyle/>
+          <a:p>
+            <a:pPr algn="ctr"/>
+            <a:r>
+              <a:rPr sz="1700" b="0" i="0">
                 <a:solidFill>
                   <a:srgbClr val="F0F2F8"/>
                 </a:solidFill>
@@ -39440,23 +39770,23 @@
         </p:nvSpPr>
         <p:spPr>
           <a:xfrm>
-            <a:off x="7990636" y="3232404"/>
-            <a:ext cx="1844497" cy="201168"/>
-          </a:xfrm>
-          <a:prstGeom prst="rect">
-            <a:avLst/>
-          </a:prstGeom>
-          <a:noFill/>
-        </p:spPr>
-        <p:txBody>
-          <a:bodyPr wrap="square">
-            <a:spAutoFit/>
-          </a:bodyPr>
-          <a:lstStyle/>
-          <a:p>
-            <a:pPr algn="ctr"/>
-            <a:r>
-              <a:rPr sz="800" b="1" i="0">
+            <a:off x="5283795" y="3930396"/>
+            <a:ext cx="1573813" cy="237744"/>
+          </a:xfrm>
+          <a:prstGeom prst="rect">
+            <a:avLst/>
+          </a:prstGeom>
+          <a:noFill/>
+        </p:spPr>
+        <p:txBody>
+          <a:bodyPr wrap="square">
+            <a:spAutoFit/>
+          </a:bodyPr>
+          <a:lstStyle/>
+          <a:p>
+            <a:pPr algn="ctr"/>
+            <a:r>
+              <a:rPr sz="900" b="1" i="0">
                 <a:solidFill>
                   <a:srgbClr val="F0F2F8"/>
                 </a:solidFill>
@@ -39474,23 +39804,23 @@
         </p:nvSpPr>
         <p:spPr>
           <a:xfrm>
-            <a:off x="7990636" y="3433572"/>
-            <a:ext cx="1844497" cy="457200"/>
-          </a:xfrm>
-          <a:prstGeom prst="rect">
-            <a:avLst/>
-          </a:prstGeom>
-          <a:noFill/>
-        </p:spPr>
-        <p:txBody>
-          <a:bodyPr wrap="square">
-            <a:spAutoFit/>
-          </a:bodyPr>
-          <a:lstStyle/>
-          <a:p>
-            <a:pPr algn="ctr"/>
-            <a:r>
-              <a:rPr sz="750" b="0" i="0">
+            <a:off x="5283795" y="4204716"/>
+            <a:ext cx="1573813" cy="530352"/>
+          </a:xfrm>
+          <a:prstGeom prst="rect">
+            <a:avLst/>
+          </a:prstGeom>
+          <a:noFill/>
+        </p:spPr>
+        <p:txBody>
+          <a:bodyPr wrap="square">
+            <a:spAutoFit/>
+          </a:bodyPr>
+          <a:lstStyle/>
+          <a:p>
+            <a:pPr algn="ctr"/>
+            <a:r>
+              <a:rPr sz="800" b="0" i="0">
                 <a:solidFill>
                   <a:srgbClr val="5A6380"/>
                 </a:solidFill>
@@ -39508,8 +39838,8 @@
         </p:nvSpPr>
         <p:spPr>
           <a:xfrm>
-            <a:off x="9885425" y="2921508"/>
-            <a:ext cx="1844497" cy="1051560"/>
+            <a:off x="6907900" y="3345180"/>
+            <a:ext cx="1573813" cy="1475232"/>
           </a:xfrm>
           <a:prstGeom prst="rect">
             <a:avLst/>
@@ -39553,23 +39883,23 @@
         </p:nvSpPr>
         <p:spPr>
           <a:xfrm>
-            <a:off x="9885425" y="2976372"/>
-            <a:ext cx="1844497" cy="292608"/>
-          </a:xfrm>
-          <a:prstGeom prst="rect">
-            <a:avLst/>
-          </a:prstGeom>
-          <a:noFill/>
-        </p:spPr>
-        <p:txBody>
-          <a:bodyPr wrap="square">
-            <a:spAutoFit/>
-          </a:bodyPr>
-          <a:lstStyle/>
-          <a:p>
-            <a:pPr algn="ctr"/>
-            <a:r>
-              <a:rPr sz="1300" b="0" i="0">
+            <a:off x="6907900" y="3509772"/>
+            <a:ext cx="1573813" cy="365760"/>
+          </a:xfrm>
+          <a:prstGeom prst="rect">
+            <a:avLst/>
+          </a:prstGeom>
+          <a:noFill/>
+        </p:spPr>
+        <p:txBody>
+          <a:bodyPr wrap="square">
+            <a:spAutoFit/>
+          </a:bodyPr>
+          <a:lstStyle/>
+          <a:p>
+            <a:pPr algn="ctr"/>
+            <a:r>
+              <a:rPr sz="1700" b="0" i="0">
                 <a:solidFill>
                   <a:srgbClr val="F0F2F8"/>
                 </a:solidFill>
@@ -39588,23 +39918,23 @@
         </p:nvSpPr>
         <p:spPr>
           <a:xfrm>
-            <a:off x="9885425" y="3232404"/>
-            <a:ext cx="1844497" cy="201168"/>
-          </a:xfrm>
-          <a:prstGeom prst="rect">
-            <a:avLst/>
-          </a:prstGeom>
-          <a:noFill/>
-        </p:spPr>
-        <p:txBody>
-          <a:bodyPr wrap="square">
-            <a:spAutoFit/>
-          </a:bodyPr>
-          <a:lstStyle/>
-          <a:p>
-            <a:pPr algn="ctr"/>
-            <a:r>
-              <a:rPr sz="800" b="1" i="0">
+            <a:off x="6907900" y="3930396"/>
+            <a:ext cx="1573813" cy="237744"/>
+          </a:xfrm>
+          <a:prstGeom prst="rect">
+            <a:avLst/>
+          </a:prstGeom>
+          <a:noFill/>
+        </p:spPr>
+        <p:txBody>
+          <a:bodyPr wrap="square">
+            <a:spAutoFit/>
+          </a:bodyPr>
+          <a:lstStyle/>
+          <a:p>
+            <a:pPr algn="ctr"/>
+            <a:r>
+              <a:rPr sz="900" b="1" i="0">
                 <a:solidFill>
                   <a:srgbClr val="F0F2F8"/>
                 </a:solidFill>
@@ -39622,23 +39952,23 @@
         </p:nvSpPr>
         <p:spPr>
           <a:xfrm>
-            <a:off x="9885425" y="3433572"/>
-            <a:ext cx="1844497" cy="457200"/>
-          </a:xfrm>
-          <a:prstGeom prst="rect">
-            <a:avLst/>
-          </a:prstGeom>
-          <a:noFill/>
-        </p:spPr>
-        <p:txBody>
-          <a:bodyPr wrap="square">
-            <a:spAutoFit/>
-          </a:bodyPr>
-          <a:lstStyle/>
-          <a:p>
-            <a:pPr algn="ctr"/>
-            <a:r>
-              <a:rPr sz="750" b="0" i="0">
+            <a:off x="6907900" y="4204716"/>
+            <a:ext cx="1573813" cy="530352"/>
+          </a:xfrm>
+          <a:prstGeom prst="rect">
+            <a:avLst/>
+          </a:prstGeom>
+          <a:noFill/>
+        </p:spPr>
+        <p:txBody>
+          <a:bodyPr wrap="square">
+            <a:spAutoFit/>
+          </a:bodyPr>
+          <a:lstStyle/>
+          <a:p>
+            <a:pPr algn="ctr"/>
+            <a:r>
+              <a:rPr sz="800" b="0" i="0">
                 <a:solidFill>
                   <a:srgbClr val="5A6380"/>
                 </a:solidFill>
@@ -39656,8 +39986,8 @@
         </p:nvSpPr>
         <p:spPr>
           <a:xfrm>
-            <a:off x="411480" y="4032504"/>
-            <a:ext cx="1844497" cy="1051560"/>
+            <a:off x="8532005" y="3345180"/>
+            <a:ext cx="1573813" cy="1475232"/>
           </a:xfrm>
           <a:prstGeom prst="rect">
             <a:avLst/>
@@ -39701,23 +40031,23 @@
         </p:nvSpPr>
         <p:spPr>
           <a:xfrm>
-            <a:off x="411480" y="4087368"/>
-            <a:ext cx="1844497" cy="292608"/>
-          </a:xfrm>
-          <a:prstGeom prst="rect">
-            <a:avLst/>
-          </a:prstGeom>
-          <a:noFill/>
-        </p:spPr>
-        <p:txBody>
-          <a:bodyPr wrap="square">
-            <a:spAutoFit/>
-          </a:bodyPr>
-          <a:lstStyle/>
-          <a:p>
-            <a:pPr algn="ctr"/>
-            <a:r>
-              <a:rPr sz="1300" b="0" i="0">
+            <a:off x="8532005" y="3509772"/>
+            <a:ext cx="1573813" cy="365760"/>
+          </a:xfrm>
+          <a:prstGeom prst="rect">
+            <a:avLst/>
+          </a:prstGeom>
+          <a:noFill/>
+        </p:spPr>
+        <p:txBody>
+          <a:bodyPr wrap="square">
+            <a:spAutoFit/>
+          </a:bodyPr>
+          <a:lstStyle/>
+          <a:p>
+            <a:pPr algn="ctr"/>
+            <a:r>
+              <a:rPr sz="1700" b="0" i="0">
                 <a:solidFill>
                   <a:srgbClr val="F0F2F8"/>
                 </a:solidFill>
@@ -39736,23 +40066,23 @@
         </p:nvSpPr>
         <p:spPr>
           <a:xfrm>
-            <a:off x="411480" y="4343400"/>
-            <a:ext cx="1844497" cy="201168"/>
-          </a:xfrm>
-          <a:prstGeom prst="rect">
-            <a:avLst/>
-          </a:prstGeom>
-          <a:noFill/>
-        </p:spPr>
-        <p:txBody>
-          <a:bodyPr wrap="square">
-            <a:spAutoFit/>
-          </a:bodyPr>
-          <a:lstStyle/>
-          <a:p>
-            <a:pPr algn="ctr"/>
-            <a:r>
-              <a:rPr sz="800" b="1" i="0">
+            <a:off x="8532005" y="3930396"/>
+            <a:ext cx="1573813" cy="237744"/>
+          </a:xfrm>
+          <a:prstGeom prst="rect">
+            <a:avLst/>
+          </a:prstGeom>
+          <a:noFill/>
+        </p:spPr>
+        <p:txBody>
+          <a:bodyPr wrap="square">
+            <a:spAutoFit/>
+          </a:bodyPr>
+          <a:lstStyle/>
+          <a:p>
+            <a:pPr algn="ctr"/>
+            <a:r>
+              <a:rPr sz="900" b="1" i="0">
                 <a:solidFill>
                   <a:srgbClr val="F0F2F8"/>
                 </a:solidFill>
@@ -39770,23 +40100,23 @@
         </p:nvSpPr>
         <p:spPr>
           <a:xfrm>
-            <a:off x="411480" y="4544568"/>
-            <a:ext cx="1844497" cy="457200"/>
-          </a:xfrm>
-          <a:prstGeom prst="rect">
-            <a:avLst/>
-          </a:prstGeom>
-          <a:noFill/>
-        </p:spPr>
-        <p:txBody>
-          <a:bodyPr wrap="square">
-            <a:spAutoFit/>
-          </a:bodyPr>
-          <a:lstStyle/>
-          <a:p>
-            <a:pPr algn="ctr"/>
-            <a:r>
-              <a:rPr sz="750" b="0" i="0">
+            <a:off x="8532005" y="4204716"/>
+            <a:ext cx="1573813" cy="530352"/>
+          </a:xfrm>
+          <a:prstGeom prst="rect">
+            <a:avLst/>
+          </a:prstGeom>
+          <a:noFill/>
+        </p:spPr>
+        <p:txBody>
+          <a:bodyPr wrap="square">
+            <a:spAutoFit/>
+          </a:bodyPr>
+          <a:lstStyle/>
+          <a:p>
+            <a:pPr algn="ctr"/>
+            <a:r>
+              <a:rPr sz="800" b="0" i="0">
                 <a:solidFill>
                   <a:srgbClr val="5A6380"/>
                 </a:solidFill>
@@ -39804,8 +40134,8 @@
         </p:nvSpPr>
         <p:spPr>
           <a:xfrm>
-            <a:off x="2306269" y="4032504"/>
-            <a:ext cx="1844497" cy="1051560"/>
+            <a:off x="10156110" y="3345180"/>
+            <a:ext cx="1573813" cy="1475232"/>
           </a:xfrm>
           <a:prstGeom prst="rect">
             <a:avLst/>
@@ -39849,23 +40179,23 @@
         </p:nvSpPr>
         <p:spPr>
           <a:xfrm>
-            <a:off x="2306269" y="4087368"/>
-            <a:ext cx="1844497" cy="292608"/>
-          </a:xfrm>
-          <a:prstGeom prst="rect">
-            <a:avLst/>
-          </a:prstGeom>
-          <a:noFill/>
-        </p:spPr>
-        <p:txBody>
-          <a:bodyPr wrap="square">
-            <a:spAutoFit/>
-          </a:bodyPr>
-          <a:lstStyle/>
-          <a:p>
-            <a:pPr algn="ctr"/>
-            <a:r>
-              <a:rPr sz="1300" b="0" i="0">
+            <a:off x="10156110" y="3509772"/>
+            <a:ext cx="1573813" cy="365760"/>
+          </a:xfrm>
+          <a:prstGeom prst="rect">
+            <a:avLst/>
+          </a:prstGeom>
+          <a:noFill/>
+        </p:spPr>
+        <p:txBody>
+          <a:bodyPr wrap="square">
+            <a:spAutoFit/>
+          </a:bodyPr>
+          <a:lstStyle/>
+          <a:p>
+            <a:pPr algn="ctr"/>
+            <a:r>
+              <a:rPr sz="1700" b="0" i="0">
                 <a:solidFill>
                   <a:srgbClr val="F0F2F8"/>
                 </a:solidFill>
@@ -39884,23 +40214,23 @@
         </p:nvSpPr>
         <p:spPr>
           <a:xfrm>
-            <a:off x="2306269" y="4343400"/>
-            <a:ext cx="1844497" cy="201168"/>
-          </a:xfrm>
-          <a:prstGeom prst="rect">
-            <a:avLst/>
-          </a:prstGeom>
-          <a:noFill/>
-        </p:spPr>
-        <p:txBody>
-          <a:bodyPr wrap="square">
-            <a:spAutoFit/>
-          </a:bodyPr>
-          <a:lstStyle/>
-          <a:p>
-            <a:pPr algn="ctr"/>
-            <a:r>
-              <a:rPr sz="800" b="1" i="0">
+            <a:off x="10156110" y="3930396"/>
+            <a:ext cx="1573813" cy="237744"/>
+          </a:xfrm>
+          <a:prstGeom prst="rect">
+            <a:avLst/>
+          </a:prstGeom>
+          <a:noFill/>
+        </p:spPr>
+        <p:txBody>
+          <a:bodyPr wrap="square">
+            <a:spAutoFit/>
+          </a:bodyPr>
+          <a:lstStyle/>
+          <a:p>
+            <a:pPr algn="ctr"/>
+            <a:r>
+              <a:rPr sz="900" b="1" i="0">
                 <a:solidFill>
                   <a:srgbClr val="F0F2F8"/>
                 </a:solidFill>
@@ -39918,23 +40248,23 @@
         </p:nvSpPr>
         <p:spPr>
           <a:xfrm>
-            <a:off x="2306269" y="4544568"/>
-            <a:ext cx="1844497" cy="457200"/>
-          </a:xfrm>
-          <a:prstGeom prst="rect">
-            <a:avLst/>
-          </a:prstGeom>
-          <a:noFill/>
-        </p:spPr>
-        <p:txBody>
-          <a:bodyPr wrap="square">
-            <a:spAutoFit/>
-          </a:bodyPr>
-          <a:lstStyle/>
-          <a:p>
-            <a:pPr algn="ctr"/>
-            <a:r>
-              <a:rPr sz="750" b="0" i="0">
+            <a:off x="10156110" y="4204716"/>
+            <a:ext cx="1573813" cy="530352"/>
+          </a:xfrm>
+          <a:prstGeom prst="rect">
+            <a:avLst/>
+          </a:prstGeom>
+          <a:noFill/>
+        </p:spPr>
+        <p:txBody>
+          <a:bodyPr wrap="square">
+            <a:spAutoFit/>
+          </a:bodyPr>
+          <a:lstStyle/>
+          <a:p>
+            <a:pPr algn="ctr"/>
+            <a:r>
+              <a:rPr sz="800" b="0" i="0">
                 <a:solidFill>
                   <a:srgbClr val="5A6380"/>
                 </a:solidFill>
@@ -39952,8 +40282,8 @@
         </p:nvSpPr>
         <p:spPr>
           <a:xfrm>
-            <a:off x="4201058" y="4032504"/>
-            <a:ext cx="1844497" cy="1051560"/>
+            <a:off x="411480" y="4879848"/>
+            <a:ext cx="1573813" cy="1475232"/>
           </a:xfrm>
           <a:prstGeom prst="rect">
             <a:avLst/>
@@ -39997,23 +40327,23 @@
         </p:nvSpPr>
         <p:spPr>
           <a:xfrm>
-            <a:off x="4201058" y="4087368"/>
-            <a:ext cx="1844497" cy="292608"/>
-          </a:xfrm>
-          <a:prstGeom prst="rect">
-            <a:avLst/>
-          </a:prstGeom>
-          <a:noFill/>
-        </p:spPr>
-        <p:txBody>
-          <a:bodyPr wrap="square">
-            <a:spAutoFit/>
-          </a:bodyPr>
-          <a:lstStyle/>
-          <a:p>
-            <a:pPr algn="ctr"/>
-            <a:r>
-              <a:rPr sz="1300" b="0" i="0">
+            <a:off x="411480" y="5044440"/>
+            <a:ext cx="1573813" cy="365760"/>
+          </a:xfrm>
+          <a:prstGeom prst="rect">
+            <a:avLst/>
+          </a:prstGeom>
+          <a:noFill/>
+        </p:spPr>
+        <p:txBody>
+          <a:bodyPr wrap="square">
+            <a:spAutoFit/>
+          </a:bodyPr>
+          <a:lstStyle/>
+          <a:p>
+            <a:pPr algn="ctr"/>
+            <a:r>
+              <a:rPr sz="1700" b="0" i="0">
                 <a:solidFill>
                   <a:srgbClr val="F0F2F8"/>
                 </a:solidFill>
@@ -40032,23 +40362,23 @@
         </p:nvSpPr>
         <p:spPr>
           <a:xfrm>
-            <a:off x="4201058" y="4343400"/>
-            <a:ext cx="1844497" cy="201168"/>
-          </a:xfrm>
-          <a:prstGeom prst="rect">
-            <a:avLst/>
-          </a:prstGeom>
-          <a:noFill/>
-        </p:spPr>
-        <p:txBody>
-          <a:bodyPr wrap="square">
-            <a:spAutoFit/>
-          </a:bodyPr>
-          <a:lstStyle/>
-          <a:p>
-            <a:pPr algn="ctr"/>
-            <a:r>
-              <a:rPr sz="800" b="1" i="0">
+            <a:off x="411480" y="5465064"/>
+            <a:ext cx="1573813" cy="237744"/>
+          </a:xfrm>
+          <a:prstGeom prst="rect">
+            <a:avLst/>
+          </a:prstGeom>
+          <a:noFill/>
+        </p:spPr>
+        <p:txBody>
+          <a:bodyPr wrap="square">
+            <a:spAutoFit/>
+          </a:bodyPr>
+          <a:lstStyle/>
+          <a:p>
+            <a:pPr algn="ctr"/>
+            <a:r>
+              <a:rPr sz="900" b="1" i="0">
                 <a:solidFill>
                   <a:srgbClr val="F0F2F8"/>
                 </a:solidFill>
@@ -40066,23 +40396,23 @@
         </p:nvSpPr>
         <p:spPr>
           <a:xfrm>
-            <a:off x="4201058" y="4544568"/>
-            <a:ext cx="1844497" cy="457200"/>
-          </a:xfrm>
-          <a:prstGeom prst="rect">
-            <a:avLst/>
-          </a:prstGeom>
-          <a:noFill/>
-        </p:spPr>
-        <p:txBody>
-          <a:bodyPr wrap="square">
-            <a:spAutoFit/>
-          </a:bodyPr>
-          <a:lstStyle/>
-          <a:p>
-            <a:pPr algn="ctr"/>
-            <a:r>
-              <a:rPr sz="750" b="0" i="0">
+            <a:off x="411480" y="5739384"/>
+            <a:ext cx="1573813" cy="530352"/>
+          </a:xfrm>
+          <a:prstGeom prst="rect">
+            <a:avLst/>
+          </a:prstGeom>
+          <a:noFill/>
+        </p:spPr>
+        <p:txBody>
+          <a:bodyPr wrap="square">
+            <a:spAutoFit/>
+          </a:bodyPr>
+          <a:lstStyle/>
+          <a:p>
+            <a:pPr algn="ctr"/>
+            <a:r>
+              <a:rPr sz="800" b="0" i="0">
                 <a:solidFill>
                   <a:srgbClr val="5A6380"/>
                 </a:solidFill>
@@ -40100,8 +40430,8 @@
         </p:nvSpPr>
         <p:spPr>
           <a:xfrm>
-            <a:off x="6095847" y="4032504"/>
-            <a:ext cx="1844497" cy="1051560"/>
+            <a:off x="2035585" y="4879848"/>
+            <a:ext cx="1573813" cy="1475232"/>
           </a:xfrm>
           <a:prstGeom prst="rect">
             <a:avLst/>
@@ -40145,23 +40475,23 @@
         </p:nvSpPr>
         <p:spPr>
           <a:xfrm>
-            <a:off x="6095847" y="4087368"/>
-            <a:ext cx="1844497" cy="292608"/>
-          </a:xfrm>
-          <a:prstGeom prst="rect">
-            <a:avLst/>
-          </a:prstGeom>
-          <a:noFill/>
-        </p:spPr>
-        <p:txBody>
-          <a:bodyPr wrap="square">
-            <a:spAutoFit/>
-          </a:bodyPr>
-          <a:lstStyle/>
-          <a:p>
-            <a:pPr algn="ctr"/>
-            <a:r>
-              <a:rPr sz="1300" b="0" i="0">
+            <a:off x="2035585" y="5044440"/>
+            <a:ext cx="1573813" cy="365760"/>
+          </a:xfrm>
+          <a:prstGeom prst="rect">
+            <a:avLst/>
+          </a:prstGeom>
+          <a:noFill/>
+        </p:spPr>
+        <p:txBody>
+          <a:bodyPr wrap="square">
+            <a:spAutoFit/>
+          </a:bodyPr>
+          <a:lstStyle/>
+          <a:p>
+            <a:pPr algn="ctr"/>
+            <a:r>
+              <a:rPr sz="1700" b="0" i="0">
                 <a:solidFill>
                   <a:srgbClr val="F0F2F8"/>
                 </a:solidFill>
@@ -40180,23 +40510,23 @@
         </p:nvSpPr>
         <p:spPr>
           <a:xfrm>
-            <a:off x="6095847" y="4343400"/>
-            <a:ext cx="1844497" cy="201168"/>
-          </a:xfrm>
-          <a:prstGeom prst="rect">
-            <a:avLst/>
-          </a:prstGeom>
-          <a:noFill/>
-        </p:spPr>
-        <p:txBody>
-          <a:bodyPr wrap="square">
-            <a:spAutoFit/>
-          </a:bodyPr>
-          <a:lstStyle/>
-          <a:p>
-            <a:pPr algn="ctr"/>
-            <a:r>
-              <a:rPr sz="800" b="1" i="0">
+            <a:off x="2035585" y="5465064"/>
+            <a:ext cx="1573813" cy="237744"/>
+          </a:xfrm>
+          <a:prstGeom prst="rect">
+            <a:avLst/>
+          </a:prstGeom>
+          <a:noFill/>
+        </p:spPr>
+        <p:txBody>
+          <a:bodyPr wrap="square">
+            <a:spAutoFit/>
+          </a:bodyPr>
+          <a:lstStyle/>
+          <a:p>
+            <a:pPr algn="ctr"/>
+            <a:r>
+              <a:rPr sz="900" b="1" i="0">
                 <a:solidFill>
                   <a:srgbClr val="F0F2F8"/>
                 </a:solidFill>
@@ -40214,23 +40544,23 @@
         </p:nvSpPr>
         <p:spPr>
           <a:xfrm>
-            <a:off x="6095847" y="4544568"/>
-            <a:ext cx="1844497" cy="457200"/>
-          </a:xfrm>
-          <a:prstGeom prst="rect">
-            <a:avLst/>
-          </a:prstGeom>
-          <a:noFill/>
-        </p:spPr>
-        <p:txBody>
-          <a:bodyPr wrap="square">
-            <a:spAutoFit/>
-          </a:bodyPr>
-          <a:lstStyle/>
-          <a:p>
-            <a:pPr algn="ctr"/>
-            <a:r>
-              <a:rPr sz="750" b="0" i="0">
+            <a:off x="2035585" y="5739384"/>
+            <a:ext cx="1573813" cy="530352"/>
+          </a:xfrm>
+          <a:prstGeom prst="rect">
+            <a:avLst/>
+          </a:prstGeom>
+          <a:noFill/>
+        </p:spPr>
+        <p:txBody>
+          <a:bodyPr wrap="square">
+            <a:spAutoFit/>
+          </a:bodyPr>
+          <a:lstStyle/>
+          <a:p>
+            <a:pPr algn="ctr"/>
+            <a:r>
+              <a:rPr sz="800" b="0" i="0">
                 <a:solidFill>
                   <a:srgbClr val="5A6380"/>
                 </a:solidFill>
@@ -40248,8 +40578,8 @@
         </p:nvSpPr>
         <p:spPr>
           <a:xfrm>
-            <a:off x="7990636" y="4032504"/>
-            <a:ext cx="1844497" cy="1051560"/>
+            <a:off x="3659690" y="4879848"/>
+            <a:ext cx="1573813" cy="1475232"/>
           </a:xfrm>
           <a:prstGeom prst="rect">
             <a:avLst/>
@@ -40293,23 +40623,23 @@
         </p:nvSpPr>
         <p:spPr>
           <a:xfrm>
-            <a:off x="7990636" y="4087368"/>
-            <a:ext cx="1844497" cy="292608"/>
-          </a:xfrm>
-          <a:prstGeom prst="rect">
-            <a:avLst/>
-          </a:prstGeom>
-          <a:noFill/>
-        </p:spPr>
-        <p:txBody>
-          <a:bodyPr wrap="square">
-            <a:spAutoFit/>
-          </a:bodyPr>
-          <a:lstStyle/>
-          <a:p>
-            <a:pPr algn="ctr"/>
-            <a:r>
-              <a:rPr sz="1300" b="0" i="0">
+            <a:off x="3659690" y="5044440"/>
+            <a:ext cx="1573813" cy="365760"/>
+          </a:xfrm>
+          <a:prstGeom prst="rect">
+            <a:avLst/>
+          </a:prstGeom>
+          <a:noFill/>
+        </p:spPr>
+        <p:txBody>
+          <a:bodyPr wrap="square">
+            <a:spAutoFit/>
+          </a:bodyPr>
+          <a:lstStyle/>
+          <a:p>
+            <a:pPr algn="ctr"/>
+            <a:r>
+              <a:rPr sz="1700" b="0" i="0">
                 <a:solidFill>
                   <a:srgbClr val="F0F2F8"/>
                 </a:solidFill>
@@ -40328,23 +40658,23 @@
         </p:nvSpPr>
         <p:spPr>
           <a:xfrm>
-            <a:off x="7990636" y="4343400"/>
-            <a:ext cx="1844497" cy="201168"/>
-          </a:xfrm>
-          <a:prstGeom prst="rect">
-            <a:avLst/>
-          </a:prstGeom>
-          <a:noFill/>
-        </p:spPr>
-        <p:txBody>
-          <a:bodyPr wrap="square">
-            <a:spAutoFit/>
-          </a:bodyPr>
-          <a:lstStyle/>
-          <a:p>
-            <a:pPr algn="ctr"/>
-            <a:r>
-              <a:rPr sz="800" b="1" i="0">
+            <a:off x="3659690" y="5465064"/>
+            <a:ext cx="1573813" cy="237744"/>
+          </a:xfrm>
+          <a:prstGeom prst="rect">
+            <a:avLst/>
+          </a:prstGeom>
+          <a:noFill/>
+        </p:spPr>
+        <p:txBody>
+          <a:bodyPr wrap="square">
+            <a:spAutoFit/>
+          </a:bodyPr>
+          <a:lstStyle/>
+          <a:p>
+            <a:pPr algn="ctr"/>
+            <a:r>
+              <a:rPr sz="900" b="1" i="0">
                 <a:solidFill>
                   <a:srgbClr val="F0F2F8"/>
                 </a:solidFill>
@@ -40362,23 +40692,23 @@
         </p:nvSpPr>
         <p:spPr>
           <a:xfrm>
-            <a:off x="7990636" y="4544568"/>
-            <a:ext cx="1844497" cy="457200"/>
-          </a:xfrm>
-          <a:prstGeom prst="rect">
-            <a:avLst/>
-          </a:prstGeom>
-          <a:noFill/>
-        </p:spPr>
-        <p:txBody>
-          <a:bodyPr wrap="square">
-            <a:spAutoFit/>
-          </a:bodyPr>
-          <a:lstStyle/>
-          <a:p>
-            <a:pPr algn="ctr"/>
-            <a:r>
-              <a:rPr sz="750" b="0" i="0">
+            <a:off x="3659690" y="5739384"/>
+            <a:ext cx="1573813" cy="530352"/>
+          </a:xfrm>
+          <a:prstGeom prst="rect">
+            <a:avLst/>
+          </a:prstGeom>
+          <a:noFill/>
+        </p:spPr>
+        <p:txBody>
+          <a:bodyPr wrap="square">
+            <a:spAutoFit/>
+          </a:bodyPr>
+          <a:lstStyle/>
+          <a:p>
+            <a:pPr algn="ctr"/>
+            <a:r>
+              <a:rPr sz="800" b="0" i="0">
                 <a:solidFill>
                   <a:srgbClr val="5A6380"/>
                 </a:solidFill>
@@ -40396,8 +40726,8 @@
         </p:nvSpPr>
         <p:spPr>
           <a:xfrm>
-            <a:off x="9885425" y="4032504"/>
-            <a:ext cx="1844497" cy="1051560"/>
+            <a:off x="5283795" y="4879848"/>
+            <a:ext cx="1573813" cy="1475232"/>
           </a:xfrm>
           <a:prstGeom prst="rect">
             <a:avLst/>
@@ -40441,23 +40771,23 @@
         </p:nvSpPr>
         <p:spPr>
           <a:xfrm>
-            <a:off x="9885425" y="4087368"/>
-            <a:ext cx="1844497" cy="292608"/>
-          </a:xfrm>
-          <a:prstGeom prst="rect">
-            <a:avLst/>
-          </a:prstGeom>
-          <a:noFill/>
-        </p:spPr>
-        <p:txBody>
-          <a:bodyPr wrap="square">
-            <a:spAutoFit/>
-          </a:bodyPr>
-          <a:lstStyle/>
-          <a:p>
-            <a:pPr algn="ctr"/>
-            <a:r>
-              <a:rPr sz="1300" b="0" i="0">
+            <a:off x="5283795" y="5044440"/>
+            <a:ext cx="1573813" cy="365760"/>
+          </a:xfrm>
+          <a:prstGeom prst="rect">
+            <a:avLst/>
+          </a:prstGeom>
+          <a:noFill/>
+        </p:spPr>
+        <p:txBody>
+          <a:bodyPr wrap="square">
+            <a:spAutoFit/>
+          </a:bodyPr>
+          <a:lstStyle/>
+          <a:p>
+            <a:pPr algn="ctr"/>
+            <a:r>
+              <a:rPr sz="1700" b="0" i="0">
                 <a:solidFill>
                   <a:srgbClr val="F0F2F8"/>
                 </a:solidFill>
@@ -40476,23 +40806,23 @@
         </p:nvSpPr>
         <p:spPr>
           <a:xfrm>
-            <a:off x="9885425" y="4343400"/>
-            <a:ext cx="1844497" cy="201168"/>
-          </a:xfrm>
-          <a:prstGeom prst="rect">
-            <a:avLst/>
-          </a:prstGeom>
-          <a:noFill/>
-        </p:spPr>
-        <p:txBody>
-          <a:bodyPr wrap="square">
-            <a:spAutoFit/>
-          </a:bodyPr>
-          <a:lstStyle/>
-          <a:p>
-            <a:pPr algn="ctr"/>
-            <a:r>
-              <a:rPr sz="800" b="1" i="0">
+            <a:off x="5283795" y="5465064"/>
+            <a:ext cx="1573813" cy="237744"/>
+          </a:xfrm>
+          <a:prstGeom prst="rect">
+            <a:avLst/>
+          </a:prstGeom>
+          <a:noFill/>
+        </p:spPr>
+        <p:txBody>
+          <a:bodyPr wrap="square">
+            <a:spAutoFit/>
+          </a:bodyPr>
+          <a:lstStyle/>
+          <a:p>
+            <a:pPr algn="ctr"/>
+            <a:r>
+              <a:rPr sz="900" b="1" i="0">
                 <a:solidFill>
                   <a:srgbClr val="F0F2F8"/>
                 </a:solidFill>
@@ -40510,23 +40840,23 @@
         </p:nvSpPr>
         <p:spPr>
           <a:xfrm>
-            <a:off x="9885425" y="4544568"/>
-            <a:ext cx="1844497" cy="457200"/>
-          </a:xfrm>
-          <a:prstGeom prst="rect">
-            <a:avLst/>
-          </a:prstGeom>
-          <a:noFill/>
-        </p:spPr>
-        <p:txBody>
-          <a:bodyPr wrap="square">
-            <a:spAutoFit/>
-          </a:bodyPr>
-          <a:lstStyle/>
-          <a:p>
-            <a:pPr algn="ctr"/>
-            <a:r>
-              <a:rPr sz="750" b="0" i="0">
+            <a:off x="5283795" y="5739384"/>
+            <a:ext cx="1573813" cy="530352"/>
+          </a:xfrm>
+          <a:prstGeom prst="rect">
+            <a:avLst/>
+          </a:prstGeom>
+          <a:noFill/>
+        </p:spPr>
+        <p:txBody>
+          <a:bodyPr wrap="square">
+            <a:spAutoFit/>
+          </a:bodyPr>
+          <a:lstStyle/>
+          <a:p>
+            <a:pPr algn="ctr"/>
+            <a:r>
+              <a:rPr sz="800" b="0" i="0">
                 <a:solidFill>
                   <a:srgbClr val="5A6380"/>
                 </a:solidFill>
@@ -40544,8 +40874,8 @@
         </p:nvSpPr>
         <p:spPr>
           <a:xfrm>
-            <a:off x="411480" y="5143500"/>
-            <a:ext cx="1844497" cy="1051560"/>
+            <a:off x="6907900" y="4879848"/>
+            <a:ext cx="1573813" cy="1475232"/>
           </a:xfrm>
           <a:prstGeom prst="rect">
             <a:avLst/>
@@ -40589,23 +40919,23 @@
         </p:nvSpPr>
         <p:spPr>
           <a:xfrm>
-            <a:off x="411480" y="5198364"/>
-            <a:ext cx="1844497" cy="292608"/>
-          </a:xfrm>
-          <a:prstGeom prst="rect">
-            <a:avLst/>
-          </a:prstGeom>
-          <a:noFill/>
-        </p:spPr>
-        <p:txBody>
-          <a:bodyPr wrap="square">
-            <a:spAutoFit/>
-          </a:bodyPr>
-          <a:lstStyle/>
-          <a:p>
-            <a:pPr algn="ctr"/>
-            <a:r>
-              <a:rPr sz="1300" b="0" i="0">
+            <a:off x="6907900" y="5044440"/>
+            <a:ext cx="1573813" cy="365760"/>
+          </a:xfrm>
+          <a:prstGeom prst="rect">
+            <a:avLst/>
+          </a:prstGeom>
+          <a:noFill/>
+        </p:spPr>
+        <p:txBody>
+          <a:bodyPr wrap="square">
+            <a:spAutoFit/>
+          </a:bodyPr>
+          <a:lstStyle/>
+          <a:p>
+            <a:pPr algn="ctr"/>
+            <a:r>
+              <a:rPr sz="1700" b="0" i="0">
                 <a:solidFill>
                   <a:srgbClr val="F0F2F8"/>
                 </a:solidFill>
@@ -40624,23 +40954,23 @@
         </p:nvSpPr>
         <p:spPr>
           <a:xfrm>
-            <a:off x="411480" y="5454396"/>
-            <a:ext cx="1844497" cy="201168"/>
-          </a:xfrm>
-          <a:prstGeom prst="rect">
-            <a:avLst/>
-          </a:prstGeom>
-          <a:noFill/>
-        </p:spPr>
-        <p:txBody>
-          <a:bodyPr wrap="square">
-            <a:spAutoFit/>
-          </a:bodyPr>
-          <a:lstStyle/>
-          <a:p>
-            <a:pPr algn="ctr"/>
-            <a:r>
-              <a:rPr sz="800" b="1" i="0">
+            <a:off x="6907900" y="5465064"/>
+            <a:ext cx="1573813" cy="237744"/>
+          </a:xfrm>
+          <a:prstGeom prst="rect">
+            <a:avLst/>
+          </a:prstGeom>
+          <a:noFill/>
+        </p:spPr>
+        <p:txBody>
+          <a:bodyPr wrap="square">
+            <a:spAutoFit/>
+          </a:bodyPr>
+          <a:lstStyle/>
+          <a:p>
+            <a:pPr algn="ctr"/>
+            <a:r>
+              <a:rPr sz="900" b="1" i="0">
                 <a:solidFill>
                   <a:srgbClr val="F0F2F8"/>
                 </a:solidFill>
@@ -40658,23 +40988,23 @@
         </p:nvSpPr>
         <p:spPr>
           <a:xfrm>
-            <a:off x="411480" y="5655564"/>
-            <a:ext cx="1844497" cy="457200"/>
-          </a:xfrm>
-          <a:prstGeom prst="rect">
-            <a:avLst/>
-          </a:prstGeom>
-          <a:noFill/>
-        </p:spPr>
-        <p:txBody>
-          <a:bodyPr wrap="square">
-            <a:spAutoFit/>
-          </a:bodyPr>
-          <a:lstStyle/>
-          <a:p>
-            <a:pPr algn="ctr"/>
-            <a:r>
-              <a:rPr sz="750" b="0" i="0">
+            <a:off x="6907900" y="5739384"/>
+            <a:ext cx="1573813" cy="530352"/>
+          </a:xfrm>
+          <a:prstGeom prst="rect">
+            <a:avLst/>
+          </a:prstGeom>
+          <a:noFill/>
+        </p:spPr>
+        <p:txBody>
+          <a:bodyPr wrap="square">
+            <a:spAutoFit/>
+          </a:bodyPr>
+          <a:lstStyle/>
+          <a:p>
+            <a:pPr algn="ctr"/>
+            <a:r>
+              <a:rPr sz="800" b="0" i="0">
                 <a:solidFill>
                   <a:srgbClr val="5A6380"/>
                 </a:solidFill>
@@ -40692,8 +41022,8 @@
         </p:nvSpPr>
         <p:spPr>
           <a:xfrm>
-            <a:off x="2306269" y="5143500"/>
-            <a:ext cx="1844497" cy="1051560"/>
+            <a:off x="8532005" y="4879848"/>
+            <a:ext cx="1573813" cy="1475232"/>
           </a:xfrm>
           <a:prstGeom prst="rect">
             <a:avLst/>
@@ -40737,29 +41067,29 @@
         </p:nvSpPr>
         <p:spPr>
           <a:xfrm>
-            <a:off x="2306269" y="5198364"/>
-            <a:ext cx="1844497" cy="292608"/>
-          </a:xfrm>
-          <a:prstGeom prst="rect">
-            <a:avLst/>
-          </a:prstGeom>
-          <a:noFill/>
-        </p:spPr>
-        <p:txBody>
-          <a:bodyPr wrap="square">
-            <a:spAutoFit/>
-          </a:bodyPr>
-          <a:lstStyle/>
-          <a:p>
-            <a:pPr algn="ctr"/>
-            <a:r>
-              <a:rPr sz="1300" b="0" i="0">
+            <a:off x="8532005" y="5044440"/>
+            <a:ext cx="1573813" cy="365760"/>
+          </a:xfrm>
+          <a:prstGeom prst="rect">
+            <a:avLst/>
+          </a:prstGeom>
+          <a:noFill/>
+        </p:spPr>
+        <p:txBody>
+          <a:bodyPr wrap="square">
+            <a:spAutoFit/>
+          </a:bodyPr>
+          <a:lstStyle/>
+          <a:p>
+            <a:pPr algn="ctr"/>
+            <a:r>
+              <a:rPr sz="1700" b="0" i="0">
                 <a:solidFill>
                   <a:srgbClr val="F0F2F8"/>
                 </a:solidFill>
                 <a:latin typeface="Segoe UI Emoji"/>
               </a:rPr>
-              <a:t>🔗</a:t>
+              <a:t>🧩</a:t>
             </a:r>
           </a:p>
         </p:txBody>
@@ -40772,23 +41102,23 @@
         </p:nvSpPr>
         <p:spPr>
           <a:xfrm>
-            <a:off x="2306269" y="5454396"/>
-            <a:ext cx="1844497" cy="201168"/>
-          </a:xfrm>
-          <a:prstGeom prst="rect">
-            <a:avLst/>
-          </a:prstGeom>
-          <a:noFill/>
-        </p:spPr>
-        <p:txBody>
-          <a:bodyPr wrap="square">
-            <a:spAutoFit/>
-          </a:bodyPr>
-          <a:lstStyle/>
-          <a:p>
-            <a:pPr algn="ctr"/>
-            <a:r>
-              <a:rPr sz="800" b="1" i="0">
+            <a:off x="8532005" y="5465064"/>
+            <a:ext cx="1573813" cy="237744"/>
+          </a:xfrm>
+          <a:prstGeom prst="rect">
+            <a:avLst/>
+          </a:prstGeom>
+          <a:noFill/>
+        </p:spPr>
+        <p:txBody>
+          <a:bodyPr wrap="square">
+            <a:spAutoFit/>
+          </a:bodyPr>
+          <a:lstStyle/>
+          <a:p>
+            <a:pPr algn="ctr"/>
+            <a:r>
+              <a:rPr sz="900" b="1" i="0">
                 <a:solidFill>
                   <a:srgbClr val="F0F2F8"/>
                 </a:solidFill>
@@ -40806,23 +41136,23 @@
         </p:nvSpPr>
         <p:spPr>
           <a:xfrm>
-            <a:off x="2306269" y="5655564"/>
-            <a:ext cx="1844497" cy="457200"/>
-          </a:xfrm>
-          <a:prstGeom prst="rect">
-            <a:avLst/>
-          </a:prstGeom>
-          <a:noFill/>
-        </p:spPr>
-        <p:txBody>
-          <a:bodyPr wrap="square">
-            <a:spAutoFit/>
-          </a:bodyPr>
-          <a:lstStyle/>
-          <a:p>
-            <a:pPr algn="ctr"/>
-            <a:r>
-              <a:rPr sz="750" b="0" i="0">
+            <a:off x="8532005" y="5739384"/>
+            <a:ext cx="1573813" cy="530352"/>
+          </a:xfrm>
+          <a:prstGeom prst="rect">
+            <a:avLst/>
+          </a:prstGeom>
+          <a:noFill/>
+        </p:spPr>
+        <p:txBody>
+          <a:bodyPr wrap="square">
+            <a:spAutoFit/>
+          </a:bodyPr>
+          <a:lstStyle/>
+          <a:p>
+            <a:pPr algn="ctr"/>
+            <a:r>
+              <a:rPr sz="800" b="0" i="0">
                 <a:solidFill>
                   <a:srgbClr val="5A6380"/>
                 </a:solidFill>
@@ -40840,8 +41170,8 @@
         </p:nvSpPr>
         <p:spPr>
           <a:xfrm>
-            <a:off x="4201058" y="5143500"/>
-            <a:ext cx="1844497" cy="1051560"/>
+            <a:off x="10156110" y="4879848"/>
+            <a:ext cx="1573813" cy="1475232"/>
           </a:xfrm>
           <a:prstGeom prst="rect">
             <a:avLst/>
@@ -40885,23 +41215,23 @@
         </p:nvSpPr>
         <p:spPr>
           <a:xfrm>
-            <a:off x="4201058" y="5198364"/>
-            <a:ext cx="1844497" cy="292608"/>
-          </a:xfrm>
-          <a:prstGeom prst="rect">
-            <a:avLst/>
-          </a:prstGeom>
-          <a:noFill/>
-        </p:spPr>
-        <p:txBody>
-          <a:bodyPr wrap="square">
-            <a:spAutoFit/>
-          </a:bodyPr>
-          <a:lstStyle/>
-          <a:p>
-            <a:pPr algn="ctr"/>
-            <a:r>
-              <a:rPr sz="1300" b="0" i="0">
+            <a:off x="10156110" y="5044440"/>
+            <a:ext cx="1573813" cy="365760"/>
+          </a:xfrm>
+          <a:prstGeom prst="rect">
+            <a:avLst/>
+          </a:prstGeom>
+          <a:noFill/>
+        </p:spPr>
+        <p:txBody>
+          <a:bodyPr wrap="square">
+            <a:spAutoFit/>
+          </a:bodyPr>
+          <a:lstStyle/>
+          <a:p>
+            <a:pPr algn="ctr"/>
+            <a:r>
+              <a:rPr sz="1700" b="0" i="0">
                 <a:solidFill>
                   <a:srgbClr val="F0F2F8"/>
                 </a:solidFill>
@@ -40920,23 +41250,23 @@
         </p:nvSpPr>
         <p:spPr>
           <a:xfrm>
-            <a:off x="4201058" y="5454396"/>
-            <a:ext cx="1844497" cy="201168"/>
-          </a:xfrm>
-          <a:prstGeom prst="rect">
-            <a:avLst/>
-          </a:prstGeom>
-          <a:noFill/>
-        </p:spPr>
-        <p:txBody>
-          <a:bodyPr wrap="square">
-            <a:spAutoFit/>
-          </a:bodyPr>
-          <a:lstStyle/>
-          <a:p>
-            <a:pPr algn="ctr"/>
-            <a:r>
-              <a:rPr sz="800" b="1" i="0">
+            <a:off x="10156110" y="5465064"/>
+            <a:ext cx="1573813" cy="237744"/>
+          </a:xfrm>
+          <a:prstGeom prst="rect">
+            <a:avLst/>
+          </a:prstGeom>
+          <a:noFill/>
+        </p:spPr>
+        <p:txBody>
+          <a:bodyPr wrap="square">
+            <a:spAutoFit/>
+          </a:bodyPr>
+          <a:lstStyle/>
+          <a:p>
+            <a:pPr algn="ctr"/>
+            <a:r>
+              <a:rPr sz="900" b="1" i="0">
                 <a:solidFill>
                   <a:srgbClr val="F0F2F8"/>
                 </a:solidFill>
@@ -40954,23 +41284,23 @@
         </p:nvSpPr>
         <p:spPr>
           <a:xfrm>
-            <a:off x="4201058" y="5655564"/>
-            <a:ext cx="1844497" cy="457200"/>
-          </a:xfrm>
-          <a:prstGeom prst="rect">
-            <a:avLst/>
-          </a:prstGeom>
-          <a:noFill/>
-        </p:spPr>
-        <p:txBody>
-          <a:bodyPr wrap="square">
-            <a:spAutoFit/>
-          </a:bodyPr>
-          <a:lstStyle/>
-          <a:p>
-            <a:pPr algn="ctr"/>
-            <a:r>
-              <a:rPr sz="750" b="0" i="0">
+            <a:off x="10156110" y="5739384"/>
+            <a:ext cx="1573813" cy="530352"/>
+          </a:xfrm>
+          <a:prstGeom prst="rect">
+            <a:avLst/>
+          </a:prstGeom>
+          <a:noFill/>
+        </p:spPr>
+        <p:txBody>
+          <a:bodyPr wrap="square">
+            <a:spAutoFit/>
+          </a:bodyPr>
+          <a:lstStyle/>
+          <a:p>
+            <a:pPr algn="ctr"/>
+            <a:r>
+              <a:rPr sz="800" b="0" i="0">
                 <a:solidFill>
                   <a:srgbClr val="5A6380"/>
                 </a:solidFill>

--- a/CostVision-Executive-Presentation.pptx
+++ b/CostVision-Executive-Presentation.pptx
@@ -6135,7 +6135,7 @@
                 </a:solidFill>
                 <a:latin typeface="Cambria"/>
               </a:rPr>
-              <a:t>Should-Cost Model Architecture</a:t>
+              <a:t>What Sits Behind Every Number</a:t>
             </a:r>
           </a:p>
         </p:txBody>
@@ -6169,7 +6169,7 @@
                   <a:srgbClr val="3A4356"/>
                 </a:solidFill>
               </a:rPr>
-              <a:t>Built on aPriori-calibrated benchmarks, IPC standards, and first-principles manufacturing engineering.</a:t>
+              <a:t>Twelve layers, all of them arithmetic you can follow. Nothing is estimated by feel.</a:t>
             </a:r>
           </a:p>
         </p:txBody>
@@ -6377,7 +6377,7 @@
                   <a:srgbClr val="16325C"/>
                 </a:solidFill>
               </a:rPr>
-              <a:t> Material Database</a:t>
+              <a:t> Materials</a:t>
             </a:r>
           </a:p>
         </p:txBody>
@@ -6411,7 +6411,7 @@
                   <a:srgbClr val="3A4356"/>
                 </a:solidFill>
               </a:rPr>
-              <a:t>30+ materials: alloy steels, aluminium grades, engineering plastics, elastomers, composites, PCB laminates, copper alloys. FX-adjusted per region.</a:t>
+              <a:t>30+ grades — steels, aluminium, plastics, rubber, composites, board laminates. Priced in the local currency.</a:t>
             </a:r>
           </a:p>
         </p:txBody>
@@ -6542,7 +6542,7 @@
                   <a:srgbClr val="16325C"/>
                 </a:solidFill>
               </a:rPr>
-              <a:t> Machine &amp; Rate Library</a:t>
+              <a:t> Machines &amp; Rates</a:t>
             </a:r>
           </a:p>
         </p:txBody>
@@ -6576,7 +6576,7 @@
                   <a:srgbClr val="3A4356"/>
                 </a:solidFill>
               </a:rPr>
-              <a:t>50+ machine types: CNC centres, presses, moulding machines, SMT lines, reflow ovens, test equipment. Hourly rates editable per project and region.</a:t>
+              <a:t>50+ machine types with an hourly rate you can edit per project and per region.</a:t>
             </a:r>
           </a:p>
         </p:txBody>
@@ -6707,7 +6707,7 @@
                   <a:srgbClr val="16325C"/>
                 </a:solidFill>
               </a:rPr>
-              <a:t> Routing &amp; Process Logic</a:t>
+              <a:t> Process Routing</a:t>
             </a:r>
           </a:p>
         </p:txBody>
@@ -6741,7 +6741,7 @@
                   <a:srgbClr val="3A4356"/>
                 </a:solidFill>
               </a:rPr>
-              <a:t>AI-driven operation sequencing. Each operation: machine ID, cycle time (hr), OEE, setup time, labour grade, overhead allocation.</a:t>
+              <a:t>The order of operations, and for each one: which machine, how long, who runs it.</a:t>
             </a:r>
           </a:p>
         </p:txBody>
@@ -6872,7 +6872,7 @@
                   <a:srgbClr val="16325C"/>
                 </a:solidFill>
               </a:rPr>
-              <a:t> Tooling &amp; NRE Amortisation</a:t>
+              <a:t> Tooling &amp; NRE</a:t>
             </a:r>
           </a:p>
         </p:txBody>
@@ -6906,7 +6906,7 @@
                   <a:srgbClr val="3A4356"/>
                 </a:solidFill>
               </a:rPr>
-              <a:t>Dies, moulds, fixtures, PCB NRE — amortised over annual volume with tool life curves for press tools and EDM electrodes.</a:t>
+              <a:t>Dies, moulds and fixtures spread over the year's volume, with tool life accounted for.</a:t>
             </a:r>
           </a:p>
         </p:txBody>
@@ -7037,7 +7037,7 @@
                   <a:srgbClr val="16325C"/>
                 </a:solidFill>
               </a:rPr>
-              <a:t> Yield &amp; Scrap Models</a:t>
+              <a:t> Yield &amp; Scrap</a:t>
             </a:r>
           </a:p>
         </p:txBody>
@@ -7071,7 +7071,7 @@
                   <a:srgbClr val="3A4356"/>
                 </a:solidFill>
               </a:rPr>
-              <a:t>First-pass yield from 10 penalty factors: layer count, trace width, via type, HDI structure, impedance control, BGA pitch, alloy grade, section thickness.</a:t>
+              <a:t>What actually comes out good first time, driven by the features that make a part hard to build.</a:t>
             </a:r>
           </a:p>
         </p:txBody>
@@ -7202,7 +7202,7 @@
                   <a:srgbClr val="16325C"/>
                 </a:solidFill>
               </a:rPr>
-              <a:t> Regional Cost Multipliers</a:t>
+              <a:t> Regional Rates</a:t>
             </a:r>
           </a:p>
         </p:txBody>
@@ -7236,7 +7236,7 @@
                   <a:srgbClr val="3A4356"/>
                 </a:solidFill>
               </a:rPr>
-              <a:t>20 regions — each with calibrated labour tiers (skilled/semi-skilled/engineer/inspector), energy costs, and machine hour rates.</a:t>
+              <a:t>20 regions, each with its own labour, energy and machine rates.</a:t>
             </a:r>
           </a:p>
         </p:txBody>
@@ -7401,7 +7401,7 @@
                   <a:srgbClr val="3A4356"/>
                 </a:solidFill>
               </a:rPr>
-              <a:t>Every cost element benchmarked vs aPriori/Cleansheet ranges. Tornado chart shows top 10 cost drivers at ±10%. Scenario A/B/C comparison.</a:t>
+              <a:t>Checked against published cost ranges, and ranked by which inputs move the number most.</a:t>
             </a:r>
           </a:p>
         </p:txBody>
@@ -7566,7 +7566,7 @@
                   <a:srgbClr val="3A4356"/>
                 </a:solidFill>
               </a:rPr>
-              <a:t>Wright's Law: configure an 85% (or custom) curve to project volume-driven cost reduction. Essential for programme pricing and LTA negotiations.</a:t>
+              <a:t>What the part costs as volume builds — the figure you need for a long-term agreement.</a:t>
             </a:r>
           </a:p>
         </p:txBody>
@@ -7697,7 +7697,7 @@
                   <a:srgbClr val="16325C"/>
                 </a:solidFill>
               </a:rPr>
-              <a:t> Supplier Quote Comparison</a:t>
+              <a:t> Quote Comparison</a:t>
             </a:r>
           </a:p>
         </p:txBody>
@@ -7731,7 +7731,7 @@
                   <a:srgbClr val="3A4356"/>
                 </a:solidFill>
               </a:rPr>
-              <a:t>Log supplier quotes (name, date, price, currency). Compare vs should-cost instantly — identify margin gaps and overhead inflation.</a:t>
+              <a:t>Put the supplier's quote next to ours and see the gap, in their currency or yours.</a:t>
             </a:r>
           </a:p>
         </p:txBody>
@@ -7862,7 +7862,7 @@
                   <a:srgbClr val="16325C"/>
                 </a:solidFill>
               </a:rPr>
-              <a:t> AI-Driven Assumptions</a:t>
+              <a:t> Stated Assumptions</a:t>
             </a:r>
           </a:p>
         </p:txBody>
@@ -7896,7 +7896,7 @@
                   <a:srgbClr val="3A4356"/>
                 </a:solidFill>
               </a:rPr>
-              <a:t>Where geometry is unknown, Claude AI fills assumptions transparently — material, complexity, process, geometry — with explanation of every decision.</a:t>
+              <a:t>Where something isn't known, the AI fills it in and says so — every assumption is on the page.</a:t>
             </a:r>
           </a:p>
         </p:txBody>
@@ -8027,7 +8027,7 @@
                   <a:srgbClr val="16325C"/>
                 </a:solidFill>
               </a:rPr>
-              <a:t> Gear Cutting Kinematics</a:t>
+              <a:t> Gear Cutting</a:t>
             </a:r>
           </a:p>
         </p:txBody>
@@ -8061,7 +8061,7 @@
                   <a:srgbClr val="3A4356"/>
                 </a:solidFill>
               </a:rPr>
-              <a:t>Hobbing, shaping, power-skiving and grinding cycles derived from gear-train arithmetic rather than rules of thumb. Machine sized on module × diameter × face width.</a:t>
+              <a:t>Hobbing, shaping, skiving and grinding times worked out from the gear itself, not a rule of thumb.</a:t>
             </a:r>
           </a:p>
         </p:txBody>
@@ -8192,7 +8192,7 @@
                   <a:srgbClr val="16325C"/>
                 </a:solidFill>
               </a:rPr>
-              <a:t> Landed Cost &amp; Customs</a:t>
+              <a:t> Landed Cost</a:t>
             </a:r>
           </a:p>
         </p:txBody>
@@ -8226,7 +8226,7 @@
                   <a:srgbClr val="3A4356"/>
                 </a:solidFill>
               </a:rPr>
-              <a:t>Duty on customs value, CBAM carbon border levy, rules of origin and incoterms — the cost at our door, not at the supplier's gate.</a:t>
+              <a:t>Duty, carbon levy and shipping terms — the cost at our door, not at the supplier's gate.</a:t>
             </a:r>
           </a:p>
         </p:txBody>
@@ -8475,7 +8475,7 @@
                 </a:solidFill>
                 <a:latin typeface="Cambria"/>
               </a:rPr>
-              <a:t>Advanced Cost Modelling &amp; Intelligence Features</a:t>
+              <a:t>Beyond a Cost Number</a:t>
             </a:r>
           </a:p>
         </p:txBody>
@@ -8509,7 +8509,7 @@
                   <a:srgbClr val="3A4356"/>
                 </a:solidFill>
               </a:rPr>
-              <a:t>CostVision goes beyond basic costing — it models commercial reality with precision.</a:t>
+              <a:t>Five tools that turn the estimate into something you can negotiate with.</a:t>
             </a:r>
           </a:p>
         </p:txBody>
@@ -8717,7 +8717,7 @@
                   <a:srgbClr val="16325C"/>
                 </a:solidFill>
               </a:rPr>
-              <a:t> Wright's Law Learning Curve</a:t>
+              <a:t> Learning Curve</a:t>
             </a:r>
           </a:p>
         </p:txBody>
@@ -8751,10 +8751,9 @@
                   <a:srgbClr val="3A4356"/>
                 </a:solidFill>
               </a:rPr>
-              <a:t>Configure any learning curve % (default 85%). As volume doubles, cost reduces by the curve %.
-• Model programme cost at any volume milestone
-• Critical for LTA negotiations and make-vs-buy decisions
-• Visualise break-even volume vs manual costing cost</a:t>
+              <a:t>Cost falls as volume builds. Set the curve, read the cost at any year.
+• Quote year-three cost, not prototype cost
+• Built for long-term agreements and make-vs-buy</a:t>
             </a:r>
           </a:p>
         </p:txBody>
@@ -8877,7 +8876,7 @@
                 </a:solidFill>
                 <a:latin typeface="Segoe UI Emoji"/>
               </a:rPr>
-              <a:t>🔗</a:t>
+              <a:t>🧩</a:t>
             </a:r>
             <a:r>
               <a:rPr sz="1000" b="1" i="0">
@@ -8885,7 +8884,7 @@
                   <a:srgbClr val="16325C"/>
                 </a:solidFill>
               </a:rPr>
-              <a:t> Assembly BOM Rollup</a:t>
+              <a:t> Assembly Roll-Up</a:t>
             </a:r>
           </a:p>
         </p:txBody>
@@ -8919,11 +8918,10 @@
                   <a:srgbClr val="3A4356"/>
                 </a:solidFill>
               </a:rPr>
-              <a:t>Build multi-level assemblies from any combination of 21 commodities:
-• Add components one-by-one with commodity type, weight, volume
-• Each component costed using its own should-cost model
-• Roll up to a total assembly cost with full per-component breakdown
-• Example: BIW + Painting + Harness + PCBA = full module should-cost</a:t>
+              <a:t>Cost a whole module, not just one part.
+• Mix any of the 21 commodities in one build
+• Every component keeps its own cost model
+• Body + paint + harness + PCBA = one total</a:t>
             </a:r>
           </a:p>
         </p:txBody>
@@ -9054,7 +9052,7 @@
                   <a:srgbClr val="16325C"/>
                 </a:solidFill>
               </a:rPr>
-              <a:t> Supplier Quote Comparison</a:t>
+              <a:t> Quote Comparison</a:t>
             </a:r>
           </a:p>
         </p:txBody>
@@ -9088,11 +9086,9 @@
                   <a:srgbClr val="3A4356"/>
                 </a:solidFill>
               </a:rPr>
-              <a:t>• Enter supplier name, quote date, price, currency, and FX rate
-• CostVision converts to GBP and compares vs should-cost
-• Calculates margin gap: 'Supplier is 18% above should-cost'
-• Generates data-driven negotiation talking points
-• Track multiple suppliers per part for competitive benchmarking</a:t>
+              <a:t>Log the supplier's quote. Any currency, converted for you.
+• Tells you the gap in words: "18% above should-cost"
+• Gives you the talking points to open with</a:t>
             </a:r>
           </a:p>
         </p:txBody>
@@ -9223,7 +9219,7 @@
                   <a:srgbClr val="16325C"/>
                 </a:solidFill>
               </a:rPr>
-              <a:t> Sensitivity Analysis (Tornado Chart)</a:t>
+              <a:t> What Moves the Number</a:t>
             </a:r>
           </a:p>
         </p:txBody>
@@ -9257,10 +9253,9 @@
                   <a:srgbClr val="3A4356"/>
                 </a:solidFill>
               </a:rPr>
-              <a:t>• ±10% variation applied to each cost driver independently
-• Top 10 drivers ranked by impact (tornado chart)
-• Identify which inputs most need validation before negotiation
-• Export the chart to include in supplier presentations</a:t>
+              <a:t>Every driver flexed ±10%, ranked by impact.
+• Shows the few inputs worth checking before you negotiate
+• Chart exports straight into your supplier pack</a:t>
             </a:r>
           </a:p>
         </p:txBody>
@@ -9391,7 +9386,7 @@
                   <a:srgbClr val="16325C"/>
                 </a:solidFill>
               </a:rPr>
-              <a:t> Scenario A/B/C Comparison</a:t>
+              <a:t> Scenarios Side by Side</a:t>
             </a:r>
           </a:p>
         </p:txBody>
@@ -9425,10 +9420,9 @@
                   <a:srgbClr val="3A4356"/>
                 </a:solidFill>
               </a:rPr>
-              <a:t>• Save any configuration as a named scenario
-• Compare baseline vs target vs stretch cost side-by-side
-• Delta view shows where costs increased or decreased
-• Export all scenarios to JSON for team sharing</a:t>
+              <a:t>Baseline, target and stretch on one screen.
+• See exactly where the money moved
+• Save and share with the team</a:t>
             </a:r>
           </a:p>
         </p:txBody>
@@ -9677,7 +9671,7 @@
                 </a:solidFill>
                 <a:latin typeface="Cambria"/>
               </a:rPr>
-              <a:t>DFM / DFA — Design for Manufacture &amp; Assembly</a:t>
+              <a:t>DFM / DFA — How to Make the Part Cheaper</a:t>
             </a:r>
           </a:p>
         </p:txBody>
@@ -9711,7 +9705,7 @@
                   <a:srgbClr val="3A4356"/>
                 </a:solidFill>
               </a:rPr>
-              <a:t>A bolt-on AI intelligence layer that runs AFTER the should-cost, without modifying any calculation logic.</a:t>
+              <a:t>Runs after the cost is settled. It reads the result and advises — it never changes the price.</a:t>
             </a:r>
           </a:p>
         </p:txBody>
@@ -10071,7 +10065,7 @@
                   <a:srgbClr val="6B7280"/>
                 </a:solidFill>
               </a:rPr>
-              <a:t>All scores are 1–10 (10 = perfect)  |  Savings are RSS-combined from top 3 issues</a:t>
+              <a:t>Scored out of 10  ·  saving is the top three fixes combined</a:t>
             </a:r>
           </a:p>
         </p:txBody>
@@ -10085,7 +10079,7 @@
         <p:spPr>
           <a:xfrm>
             <a:off x="411480" y="2743200"/>
-            <a:ext cx="5486400" cy="1828800"/>
+            <a:ext cx="5486400" cy="1751076"/>
           </a:xfrm>
           <a:prstGeom prst="rect">
             <a:avLst/>
@@ -10130,7 +10124,7 @@
         <p:spPr>
           <a:xfrm>
             <a:off x="411480" y="2743200"/>
-            <a:ext cx="54864" cy="1828800"/>
+            <a:ext cx="54864" cy="1751076"/>
           </a:xfrm>
           <a:prstGeom prst="rect">
             <a:avLst/>
@@ -10188,12 +10182,21 @@
           <a:p>
             <a:pPr algn="l"/>
             <a:r>
-              <a:rPr sz="950" b="1" i="0">
+              <a:rPr sz="1050" b="1" i="0">
                 <a:solidFill>
                   <a:srgbClr val="16325C"/>
                 </a:solidFill>
-              </a:rPr>
-              <a:t>DFM Issues — What It Finds</a:t>
+                <a:latin typeface="Segoe UI Emoji"/>
+              </a:rPr>
+              <a:t>🔧</a:t>
+            </a:r>
+            <a:r>
+              <a:rPr sz="1050" b="1" i="0">
+                <a:solidFill>
+                  <a:srgbClr val="16325C"/>
+                </a:solidFill>
+              </a:rPr>
+              <a:t> What It Finds — Making the Part</a:t>
             </a:r>
           </a:p>
         </p:txBody>
@@ -10207,7 +10210,7 @@
         <p:spPr>
           <a:xfrm>
             <a:off x="539496" y="3127248"/>
-            <a:ext cx="5303520" cy="1335024"/>
+            <a:ext cx="5303520" cy="1257300"/>
           </a:xfrm>
           <a:prstGeom prst="rect">
             <a:avLst/>
@@ -10222,15 +10225,15 @@
           <a:p>
             <a:pPr algn="l"/>
             <a:r>
-              <a:rPr sz="850" b="0" i="0">
+              <a:rPr sz="950" b="0" i="0">
                 <a:solidFill>
                   <a:srgbClr val="3A4356"/>
                 </a:solidFill>
               </a:rPr>
-              <a:t>Critical: Low material utilisation (&lt;60%), OEE &lt;70%, die cost &gt;18%
-Major: Below-benchmark OEE (70–80%), high operation count, process cost dominant
-Minor: Elevated tooling %, overhead burden &gt;18%, supplier margin &gt;18%
-Opportunity: Near-net-shape conversion, volume increase, multi-cavity tooling</a:t>
+              <a:t>Too much material going to scrap.
+Machines running well below what they should.
+Tooling, overhead or supplier margin out of line.
+Each issue graded critical, major or minor.</a:t>
             </a:r>
           </a:p>
         </p:txBody>
@@ -10244,7 +10247,7 @@
         <p:spPr>
           <a:xfrm>
             <a:off x="6007608" y="2743200"/>
-            <a:ext cx="5486400" cy="1828800"/>
+            <a:ext cx="5486400" cy="1751076"/>
           </a:xfrm>
           <a:prstGeom prst="rect">
             <a:avLst/>
@@ -10289,7 +10292,7 @@
         <p:spPr>
           <a:xfrm>
             <a:off x="6007608" y="2743200"/>
-            <a:ext cx="54864" cy="1828800"/>
+            <a:ext cx="54864" cy="1751076"/>
           </a:xfrm>
           <a:prstGeom prst="rect">
             <a:avLst/>
@@ -10347,12 +10350,21 @@
           <a:p>
             <a:pPr algn="l"/>
             <a:r>
-              <a:rPr sz="950" b="1" i="0">
+              <a:rPr sz="1050" b="1" i="0">
                 <a:solidFill>
                   <a:srgbClr val="16325C"/>
                 </a:solidFill>
-              </a:rPr>
-              <a:t>DFA Issues — Assembly Intelligence</a:t>
+                <a:latin typeface="Segoe UI Emoji"/>
+              </a:rPr>
+              <a:t>🧩</a:t>
+            </a:r>
+            <a:r>
+              <a:rPr sz="1050" b="1" i="0">
+                <a:solidFill>
+                  <a:srgbClr val="16325C"/>
+                </a:solidFill>
+              </a:rPr>
+              <a:t> What It Finds — Building It</a:t>
             </a:r>
           </a:p>
         </p:txBody>
@@ -10366,7 +10378,7 @@
         <p:spPr>
           <a:xfrm>
             <a:off x="6135624" y="3127248"/>
-            <a:ext cx="5303520" cy="1335024"/>
+            <a:ext cx="5303520" cy="1257300"/>
           </a:xfrm>
           <a:prstGeom prst="rect">
             <a:avLst/>
@@ -10381,15 +10393,14 @@
           <a:p>
             <a:pPr algn="l"/>
             <a:r>
-              <a:rPr sz="850" b="0" i="0">
+              <a:rPr sz="950" b="0" i="0">
                 <a:solidFill>
                   <a:srgbClr val="3A4356"/>
                 </a:solidFill>
               </a:rPr>
-              <a:t>Automation feasibility: labour-dominated assemblies flagged for robot/cobot study
-Operation count: multiple setups imply fixturing cost and dimensional variation risk
-OEE pacing: low OEE in assembly indicates manual pacing or changeover inefficiency
-Fastener standardisation: variety in fastener drives assembly time and tool changes</a:t>
+              <a:t>Assemblies done by hand that a robot could do.
+Too many setups — every one adds cost and variation.
+Too many different fasteners, so tools keep changing.</a:t>
             </a:r>
           </a:p>
         </p:txBody>
@@ -10402,8 +10413,8 @@
         </p:nvSpPr>
         <p:spPr>
           <a:xfrm>
-            <a:off x="411480" y="4663440"/>
-            <a:ext cx="5486400" cy="1828800"/>
+            <a:off x="411480" y="4604004"/>
+            <a:ext cx="5486400" cy="1751076"/>
           </a:xfrm>
           <a:prstGeom prst="rect">
             <a:avLst/>
@@ -10447,8 +10458,8 @@
         </p:nvSpPr>
         <p:spPr>
           <a:xfrm>
-            <a:off x="411480" y="4663440"/>
-            <a:ext cx="54864" cy="1828800"/>
+            <a:off x="411480" y="4604004"/>
+            <a:ext cx="54864" cy="1751076"/>
           </a:xfrm>
           <a:prstGeom prst="rect">
             <a:avLst/>
@@ -10490,7 +10501,7 @@
         </p:nvSpPr>
         <p:spPr>
           <a:xfrm>
-            <a:off x="539496" y="4754880"/>
+            <a:off x="539496" y="4695444"/>
             <a:ext cx="5303520" cy="310896"/>
           </a:xfrm>
           <a:prstGeom prst="rect">
@@ -10506,12 +10517,21 @@
           <a:p>
             <a:pPr algn="l"/>
             <a:r>
-              <a:rPr sz="950" b="1" i="0">
+              <a:rPr sz="1050" b="1" i="0">
                 <a:solidFill>
                   <a:srgbClr val="16325C"/>
                 </a:solidFill>
-              </a:rPr>
-              <a:t>Cost Optimisation Levers (6–8 per part)</a:t>
+                <a:latin typeface="Segoe UI Emoji"/>
+              </a:rPr>
+              <a:t>💡</a:t>
+            </a:r>
+            <a:r>
+              <a:rPr sz="1050" b="1" i="0">
+                <a:solidFill>
+                  <a:srgbClr val="16325C"/>
+                </a:solidFill>
+              </a:rPr>
+              <a:t> What to Do About It</a:t>
             </a:r>
           </a:p>
         </p:txBody>
@@ -10524,8 +10544,8 @@
         </p:nvSpPr>
         <p:spPr>
           <a:xfrm>
-            <a:off x="539496" y="5047488"/>
-            <a:ext cx="5303520" cy="1335024"/>
+            <a:off x="539496" y="4988052"/>
+            <a:ext cx="5303520" cy="1257300"/>
           </a:xfrm>
           <a:prstGeom prst="rect">
             <a:avLst/>
@@ -10540,17 +10560,16 @@
           <a:p>
             <a:pPr algn="l"/>
             <a:r>
-              <a:rPr sz="850" b="0" i="0">
+              <a:rPr sz="950" b="0" i="0">
                 <a:solidFill>
                   <a:srgbClr val="3A4356"/>
                 </a:solidFill>
               </a:rPr>
-              <a:t>Automate High-Labour Operations — typically 5–20% saving
-Near-Net-Shape Material Improvement — 5–15% material cost saving
-OEE Improvement (TPM programme) — 5–12% machine cost reduction
-Volume Increase to Dilute Tooling NRE — Quick Win, Low Risk
-Overhead Rate Negotiation via Open-Book Costing — Quick Win
-Competitive RFQ to Reduce Supplier Margin — Quick Win</a:t>
+              <a:t>Six to eight actions per part, with the saving on each:
+Automate the manual operations   5–20%
+Move to a near-net shape   5–15%
+Raise machine uptime   5–12%
+Plus quick wins: more volume, open-book overhead, re-bid.</a:t>
             </a:r>
           </a:p>
         </p:txBody>
@@ -10563,8 +10582,8 @@
         </p:nvSpPr>
         <p:spPr>
           <a:xfrm>
-            <a:off x="6007608" y="4663440"/>
-            <a:ext cx="5486400" cy="1828800"/>
+            <a:off x="6007608" y="4604004"/>
+            <a:ext cx="5486400" cy="1751076"/>
           </a:xfrm>
           <a:prstGeom prst="rect">
             <a:avLst/>
@@ -10608,8 +10627,8 @@
         </p:nvSpPr>
         <p:spPr>
           <a:xfrm>
-            <a:off x="6007608" y="4663440"/>
-            <a:ext cx="54864" cy="1828800"/>
+            <a:off x="6007608" y="4604004"/>
+            <a:ext cx="54864" cy="1751076"/>
           </a:xfrm>
           <a:prstGeom prst="rect">
             <a:avLst/>
@@ -10651,7 +10670,7 @@
         </p:nvSpPr>
         <p:spPr>
           <a:xfrm>
-            <a:off x="6135624" y="4754880"/>
+            <a:off x="6135624" y="4695444"/>
             <a:ext cx="5303520" cy="310896"/>
           </a:xfrm>
           <a:prstGeom prst="rect">
@@ -10667,12 +10686,21 @@
           <a:p>
             <a:pPr algn="l"/>
             <a:r>
-              <a:rPr sz="950" b="1" i="0">
+              <a:rPr sz="1050" b="1" i="0">
                 <a:solidFill>
                   <a:srgbClr val="16325C"/>
                 </a:solidFill>
-              </a:rPr>
-              <a:t>AI Deep Analysis (Claude AI)</a:t>
+                <a:latin typeface="Segoe UI Emoji"/>
+              </a:rPr>
+              <a:t>🤖</a:t>
+            </a:r>
+            <a:r>
+              <a:rPr sz="1050" b="1" i="0">
+                <a:solidFill>
+                  <a:srgbClr val="16325C"/>
+                </a:solidFill>
+              </a:rPr>
+              <a:t> Ask the AI to Go Deeper</a:t>
             </a:r>
           </a:p>
         </p:txBody>
@@ -10685,8 +10713,8 @@
         </p:nvSpPr>
         <p:spPr>
           <a:xfrm>
-            <a:off x="6135624" y="5047488"/>
-            <a:ext cx="5303520" cy="1335024"/>
+            <a:off x="6135624" y="4988052"/>
+            <a:ext cx="5303520" cy="1257300"/>
           </a:xfrm>
           <a:prstGeom prst="rect">
             <a:avLst/>
@@ -10701,16 +10729,15 @@
           <a:p>
             <a:pPr algn="l"/>
             <a:r>
-              <a:rPr sz="850" b="0" i="0">
+              <a:rPr sz="950" b="0" i="0">
                 <a:solidFill>
                   <a:srgbClr val="3A4356"/>
                 </a:solidFill>
               </a:rPr>
-              <a:t>Click 'Run AI Deep Analysis' after rule-based results are shown
-Claude provides: Root cause commentary, Priority top-3 actions
-Supplier negotiation strategy with specific talking points
-Alternative process recommendations (e.g. casting → HPDC)
-Risk assessment: red flags in cost structure needing investigation</a:t>
+              <a:t>One click, after the rule-based findings are on screen.
+Why the cost sits where it does.
+The three things to fix first.
+What to say to the supplier, and a different process to consider.</a:t>
             </a:r>
           </a:p>
         </p:txBody>
@@ -15253,7 +15280,7 @@
                   <a:srgbClr val="3A4356"/>
                 </a:solidFill>
               </a:rPr>
-              <a:t>A deterministic self-audit re-checks every estimate, calibration learns from real quotes, and it is proven on real parts.</a:t>
+              <a:t>It re-checks every estimate before you see it, and it learns from the quotes you have already had.</a:t>
             </a:r>
           </a:p>
         </p:txBody>
@@ -15461,7 +15488,7 @@
                   <a:srgbClr val="16325C"/>
                 </a:solidFill>
               </a:rPr>
-              <a:t> Self-Audit — it checks its own homework</a:t>
+              <a:t> It checks its own homework</a:t>
             </a:r>
           </a:p>
         </p:txBody>
@@ -15495,7 +15522,7 @@
                   <a:srgbClr val="3A4356"/>
                 </a:solidFill>
               </a:rPr>
-              <a:t>A deterministic layer re-runs every estimate looking for known mistakes: a part classed as the wrong process, machining time over the physical finish envelope, a wall thinner than the geometry allows, weight that disagrees with the CAD. It applies bounded corrections and shows its working — the AI never overrules the measured geometry.</a:t>
+              <a:t>Every estimate is re-checked against the mistakes this tool has actually made before — wrong process, impossible machining time, a weight that disagrees with the CAD. It corrects them and shows its working. The measured geometry always wins over the AI.</a:t>
             </a:r>
           </a:p>
         </p:txBody>
@@ -15626,7 +15653,7 @@
                   <a:srgbClr val="16325C"/>
                 </a:solidFill>
               </a:rPr>
-              <a:t> Calibration &amp; Drift — learns from actuals</a:t>
+              <a:t> It learns from your quotes</a:t>
             </a:r>
           </a:p>
         </p:txBody>
@@ -15660,7 +15687,7 @@
                   <a:srgbClr val="3A4356"/>
                 </a:solidFill>
               </a:rPr>
-              <a:t>Bulk-import real supplier quotes as a CSV. The engine learns per-segment correction factors, carries a conformal confidence band, and watches for drift — so the estimate tightens as your own history grows. Calibration status now rides on every single estimate, not a hidden report.</a:t>
+              <a:t>Load the supplier quotes you already have. The engine corrects itself against them, and the estimate gets tighter as your history grows. Every estimate now says how well calibrated it is.</a:t>
             </a:r>
           </a:p>
         </p:txBody>
@@ -15791,7 +15818,7 @@
                   <a:srgbClr val="16325C"/>
                 </a:solidFill>
               </a:rPr>
-              <a:t> Universal Machine-Sizing — right press, any commodity</a:t>
+              <a:t> It picks the right machine</a:t>
             </a:r>
           </a:p>
         </p:txBody>
@@ -15825,7 +15852,7 @@
                   <a:srgbClr val="3A4356"/>
                 </a:solidFill>
               </a:rPr>
-              <a:t>One dispatcher now sizes the machine for the part across commodities — forging presses, stamping presses, HPDC and moulding tonnage, extrusion and more — instead of a single hard-coded tier. Tooling amortises over annual volume everywhere by one universal rule.</a:t>
+              <a:t>One rule now sizes the machine for the part on every commodity — presses, die-casting, moulding, extrusion — instead of a fixed guess per commodity.</a:t>
             </a:r>
           </a:p>
         </p:txBody>
@@ -16360,7 +16387,7 @@
                             <a:srgbClr val="3A4356"/>
                           </a:solidFill>
                         </a:rPr>
-                        <a:t>mis-class</a:t>
+                        <a:t>no result</a:t>
                       </a:r>
                     </a:p>
                   </a:txBody>
@@ -16382,7 +16409,7 @@
                             <a:srgbClr val="3A4356"/>
                           </a:solidFill>
                         </a:rPr>
-                        <a:t>Wrong process/weight</a:t>
+                        <a:t>Classed as the wrong process</a:t>
                       </a:r>
                     </a:p>
                   </a:txBody>
@@ -16450,7 +16477,7 @@
                             <a:srgbClr val="3A4356"/>
                           </a:solidFill>
                         </a:rPr>
-                        <a:t>engine crash</a:t>
+                        <a:t>no result</a:t>
                       </a:r>
                     </a:p>
                   </a:txBody>
@@ -16472,7 +16499,7 @@
                             <a:srgbClr val="3A4356"/>
                           </a:solidFill>
                         </a:rPr>
-                        <a:t>Sizing gap</a:t>
+                        <a:t>Machine sizing gap</a:t>
                       </a:r>
                     </a:p>
                   </a:txBody>
@@ -16703,7 +16730,7 @@
                   <a:srgbClr val="3A4356"/>
                 </a:solidFill>
               </a:rPr>
-              <a:t>1,777 automated tests across 136 suites — a logic regression fails the build, not the demo</a:t>
+              <a:t>1,777 automated tests — if the logic breaks, the build fails, not the demo</a:t>
             </a:r>
           </a:p>
         </p:txBody>
@@ -16780,7 +16807,7 @@
                   <a:srgbClr val="3A4356"/>
                 </a:solidFill>
               </a:rPr>
-              <a:t>The self-audit re-checks every estimate before you ever see the number</a:t>
+              <a:t>Every estimate is re-checked before you ever see the number</a:t>
             </a:r>
           </a:p>
         </p:txBody>
@@ -16857,7 +16884,7 @@
                   <a:srgbClr val="3A4356"/>
                 </a:solidFill>
               </a:rPr>
-              <a:t>The CAD geometry engine ships inside a container whose build is verified in CI</a:t>
+              <a:t>The CAD engine is tested in the same container we deploy</a:t>
             </a:r>
           </a:p>
         </p:txBody>
@@ -19049,7 +19076,7 @@
                 </a:solidFill>
                 <a:latin typeface="Cambria"/>
               </a:rPr>
-              <a:t>Export, Share &amp; Collaborate — Enterprise Ready</a:t>
+              <a:t>Getting the Number Out of the Room</a:t>
             </a:r>
           </a:p>
         </p:txBody>
@@ -19083,7 +19110,7 @@
                   <a:srgbClr val="3A4356"/>
                 </a:solidFill>
               </a:rPr>
-              <a:t>From individual engineer to global team — CostVision scales to any organisation size.</a:t>
+              <a:t>Reports people can act on, and one shared baseline for the whole team.</a:t>
             </a:r>
           </a:p>
         </p:txBody>
@@ -19291,7 +19318,7 @@
                   <a:srgbClr val="16325C"/>
                 </a:solidFill>
               </a:rPr>
-              <a:t> 6-Sheet Excel Export</a:t>
+              <a:t> Excel — Six Sheets</a:t>
             </a:r>
           </a:p>
         </p:txBody>
@@ -19325,12 +19352,10 @@
                   <a:srgbClr val="3A4356"/>
                 </a:solidFill>
               </a:rPr>
-              <a:t>Sheet 1: Summary (total cost, breakdown %, region, commodity)
-Sheet 2: Material (alloy, weight, utilisation, price)
-Sheet 3: Operations (machine, labour, cycle time, OEE per step)
-Sheet 4: Machine Rates (rate library snapshot)
-Sheet 5: Labour Rates (regional labour tiers)
-Sheet 6: Traceability (assumptions, AI notes, version, date)</a:t>
+              <a:t>The whole build-up, not just the total.
+Summary · material · every operation ·
+machine rates · labour rates ·
+and a sheet recording every assumption.</a:t>
             </a:r>
           </a:p>
         </p:txBody>
@@ -19461,7 +19486,7 @@
                   <a:srgbClr val="16325C"/>
                 </a:solidFill>
               </a:rPr>
-              <a:t> Professional PDF Report</a:t>
+              <a:t> PDF Report</a:t>
             </a:r>
           </a:p>
         </p:txBody>
@@ -19495,12 +19520,10 @@
                   <a:srgbClr val="3A4356"/>
                 </a:solidFill>
               </a:rPr>
-              <a:t>Section 1: Cover page with part photo &amp; programme details
-Section 2: Cost summary and 8-bucket breakdown chart
-Section 3: Detailed operation-by-operation cost build
-Section 4: Machine and labour rate build-up table
-Section 5: AI insights and saving opportunities
-Section 6: DFM/DFA scores, issues and recommendations</a:t>
+              <a:t>The version you send out.
+Cover with the part photo, the cost summary,
+the operation-by-operation build,
+and the savings and DFM findings.</a:t>
             </a:r>
           </a:p>
         </p:txBody>
@@ -19631,7 +19654,7 @@
                   <a:srgbClr val="16325C"/>
                 </a:solidFill>
               </a:rPr>
-              <a:t> Cloud Team Sync</a:t>
+              <a:t> One Shared Baseline</a:t>
             </a:r>
           </a:p>
         </p:txBody>
@@ -19665,11 +19688,9 @@
                   <a:srgbClr val="3A4356"/>
                 </a:solidFill>
               </a:rPr>
-              <a:t>Scenarios saved to cloud database (SQLite / PostgreSQL)
-All team members see the same cost baseline
-Secure JWT authentication + OTP email verification
-Full multi-user access — no spreadsheet version conflicts
-Import/export scenarios as JSON for offline sharing</a:t>
+              <a:t>Everyone works from the same numbers.
+Saved centrally, not on a laptop.
+No arguing over which spreadsheet is current.</a:t>
             </a:r>
           </a:p>
         </p:txBody>
@@ -19800,7 +19821,7 @@
                   <a:srgbClr val="16325C"/>
                 </a:solidFill>
               </a:rPr>
-              <a:t> Part Photo &amp; Visual Docs</a:t>
+              <a:t> Part Photos</a:t>
             </a:r>
           </a:p>
         </p:txBody>
@@ -19834,10 +19855,9 @@
                   <a:srgbClr val="3A4356"/>
                 </a:solidFill>
               </a:rPr>
-              <a:t>Upload part photo (JPG / PNG / HEIC) with any calculation
-Photo appears on the PDF report cover page
-AI Agent accepts photos as input for visual cost estimation
-Drag-and-drop or file picker supported</a:t>
+              <a:t>Attach a photo to any calculation.
+It appears on the report cover — and the
+AI can cost from the photo itself.</a:t>
             </a:r>
           </a:p>
         </p:txBody>
@@ -19968,7 +19988,7 @@
                   <a:srgbClr val="16325C"/>
                 </a:solidFill>
               </a:rPr>
-              <a:t> Enterprise Authentication</a:t>
+              <a:t> Secure Access</a:t>
             </a:r>
           </a:p>
         </p:txBody>
@@ -20002,10 +20022,9 @@
                   <a:srgbClr val="3A4356"/>
                 </a:solidFill>
               </a:rPr>
-              <a:t>JWT token-based authentication with 24hr expiry
-OTP email verification for account security
-Password reset flow with secure email delivery
-Rate limiting: 10 sign-in attempts / 15 min window</a:t>
+              <a:t>Enterprise sign-in, as you would expect.
+Email verification, password reset,
+and sign-in attempts capped.</a:t>
             </a:r>
           </a:p>
         </p:txBody>
@@ -20136,7 +20155,7 @@
                   <a:srgbClr val="16325C"/>
                 </a:solidFill>
               </a:rPr>
-              <a:t> Help Centre &amp; Support</a:t>
+              <a:t> Built-In Help</a:t>
             </a:r>
           </a:p>
         </p:txBody>
@@ -20170,10 +20189,9 @@
                   <a:srgbClr val="3A4356"/>
                 </a:solidFill>
               </a:rPr>
-              <a:t>7-tab Help Centre: Getting Started, AI Agent, CAD &amp; Photo,
-Commodities, FAQ (6 items), Glossary (12 terms),
-Troubleshooting (5 common issues)
-Contact support form built-in to the application</a:t>
+              <a:t>Nobody needs training to start.
+Getting started, the AI agent, CAD and photo,
+a glossary and troubleshooting — all in the app.</a:t>
             </a:r>
           </a:p>
         </p:txBody>
@@ -20422,7 +20440,7 @@
                 </a:solidFill>
                 <a:latin typeface="Cambria"/>
               </a:rPr>
-              <a:t>Business Impact &amp; Measurable ROI</a:t>
+              <a:t>What This Is Worth</a:t>
             </a:r>
           </a:p>
         </p:txBody>
@@ -20456,7 +20474,7 @@
                   <a:srgbClr val="3A4356"/>
                 </a:solidFill>
               </a:rPr>
-              <a:t>Quantified improvements across speed, accuracy, and cost reduction that directly impact the bottom line.</a:t>
+              <a:t>The same claims, in numbers a finance team recognises.</a:t>
             </a:r>
           </a:p>
         </p:txBody>
@@ -20872,7 +20890,7 @@
                   <a:srgbClr val="3A4356"/>
                 </a:solidFill>
               </a:rPr>
-              <a:t>Supplier price reduction via should-cost intel</a:t>
+              <a:t>Typical supplier price reduction</a:t>
             </a:r>
           </a:p>
         </p:txBody>
@@ -21098,7 +21116,7 @@
                   <a:srgbClr val="3A4356"/>
                 </a:solidFill>
               </a:rPr>
-              <a:t>Saving on £500M spend at 3% improvement</a:t>
+              <a:t>On £500M of spend, a 3% improvement</a:t>
             </a:r>
           </a:p>
         </p:txBody>
@@ -21112,7 +21130,7 @@
         <p:spPr>
           <a:xfrm>
             <a:off x="411480" y="2971800"/>
-            <a:ext cx="2743200" cy="1188720"/>
+            <a:ext cx="2773603" cy="1645920"/>
           </a:xfrm>
           <a:prstGeom prst="rect">
             <a:avLst/>
@@ -21157,7 +21175,7 @@
         <p:spPr>
           <a:xfrm>
             <a:off x="411480" y="2971800"/>
-            <a:ext cx="54864" cy="1188720"/>
+            <a:ext cx="54864" cy="1645920"/>
           </a:xfrm>
           <a:prstGeom prst="rect">
             <a:avLst/>
@@ -21200,7 +21218,7 @@
         <p:spPr>
           <a:xfrm>
             <a:off x="539496" y="3063240"/>
-            <a:ext cx="2560320" cy="310896"/>
+            <a:ext cx="2590723" cy="310896"/>
           </a:xfrm>
           <a:prstGeom prst="rect">
             <a:avLst/>
@@ -21215,7 +21233,7 @@
           <a:p>
             <a:pPr algn="l"/>
             <a:r>
-              <a:rPr sz="950" b="1" i="0">
+              <a:rPr sz="1050" b="1" i="0">
                 <a:solidFill>
                   <a:srgbClr val="16325C"/>
                 </a:solidFill>
@@ -21224,12 +21242,12 @@
               <a:t>⚡</a:t>
             </a:r>
             <a:r>
-              <a:rPr sz="950" b="1" i="0">
+              <a:rPr sz="1050" b="1" i="0">
                 <a:solidFill>
                   <a:srgbClr val="16325C"/>
                 </a:solidFill>
               </a:rPr>
-              <a:t> Speed — 10× Faster</a:t>
+              <a:t> Speed</a:t>
             </a:r>
           </a:p>
         </p:txBody>
@@ -21243,7 +21261,7 @@
         <p:spPr>
           <a:xfrm>
             <a:off x="539496" y="3355848"/>
-            <a:ext cx="2560320" cy="694944"/>
+            <a:ext cx="2590723" cy="1152144"/>
           </a:xfrm>
           <a:prstGeom prst="rect">
             <a:avLst/>
@@ -21258,12 +21276,12 @@
           <a:p>
             <a:pPr algn="l"/>
             <a:r>
-              <a:rPr sz="850" b="0" i="0">
+              <a:rPr sz="950" b="0" i="0">
                 <a:solidFill>
                   <a:srgbClr val="3A4356"/>
                 </a:solidFill>
               </a:rPr>
-              <a:t>What took 2–4 weeks now takes 5–10 minutes. Engineers spend time on decisions, not spreadsheets. Faster RFQ responses, faster programme decisions.</a:t>
+              <a:t>Two to four weeks becomes ten minutes. Engineers spend the day deciding, not building spreadsheets.</a:t>
             </a:r>
           </a:p>
         </p:txBody>
@@ -21276,8 +21294,8 @@
         </p:nvSpPr>
         <p:spPr>
           <a:xfrm>
-            <a:off x="3246120" y="2971800"/>
-            <a:ext cx="2743200" cy="1188720"/>
+            <a:off x="3276523" y="2971800"/>
+            <a:ext cx="2773603" cy="1645920"/>
           </a:xfrm>
           <a:prstGeom prst="rect">
             <a:avLst/>
@@ -21321,8 +21339,8 @@
         </p:nvSpPr>
         <p:spPr>
           <a:xfrm>
-            <a:off x="3246120" y="2971800"/>
-            <a:ext cx="54864" cy="1188720"/>
+            <a:off x="3276523" y="2971800"/>
+            <a:ext cx="54864" cy="1645920"/>
           </a:xfrm>
           <a:prstGeom prst="rect">
             <a:avLst/>
@@ -21364,8 +21382,8 @@
         </p:nvSpPr>
         <p:spPr>
           <a:xfrm>
-            <a:off x="3374136" y="3063240"/>
-            <a:ext cx="2560320" cy="310896"/>
+            <a:off x="3404539" y="3063240"/>
+            <a:ext cx="2590723" cy="310896"/>
           </a:xfrm>
           <a:prstGeom prst="rect">
             <a:avLst/>
@@ -21380,7 +21398,7 @@
           <a:p>
             <a:pPr algn="l"/>
             <a:r>
-              <a:rPr sz="950" b="1" i="0">
+              <a:rPr sz="1050" b="1" i="0">
                 <a:solidFill>
                   <a:srgbClr val="16325C"/>
                 </a:solidFill>
@@ -21389,12 +21407,12 @@
               <a:t>🎯</a:t>
             </a:r>
             <a:r>
-              <a:rPr sz="950" b="1" i="0">
+              <a:rPr sz="1050" b="1" i="0">
                 <a:solidFill>
                   <a:srgbClr val="16325C"/>
                 </a:solidFill>
               </a:rPr>
-              <a:t> Accuracy — Not Estimates</a:t>
+              <a:t> Accuracy</a:t>
             </a:r>
           </a:p>
         </p:txBody>
@@ -21407,8 +21425,8 @@
         </p:nvSpPr>
         <p:spPr>
           <a:xfrm>
-            <a:off x="3374136" y="3355848"/>
-            <a:ext cx="2560320" cy="694944"/>
+            <a:off x="3404539" y="3355848"/>
+            <a:ext cx="2590723" cy="1152144"/>
           </a:xfrm>
           <a:prstGeom prst="rect">
             <a:avLst/>
@@ -21423,12 +21441,12 @@
           <a:p>
             <a:pPr algn="l"/>
             <a:r>
-              <a:rPr sz="850" b="0" i="0">
+              <a:rPr sz="950" b="0" i="0">
                 <a:solidFill>
                   <a:srgbClr val="3A4356"/>
                 </a:solidFill>
               </a:rPr>
-              <a:t>Physics-based models calibrated to actual shop floor data. ±8% typical accuracy vs actual. Dramatically better than rule-of-thumb or parametric estimates.</a:t>
+              <a:t>Built from the physics of the process and checked against real shop-floor data — not a rule of thumb.</a:t>
             </a:r>
           </a:p>
         </p:txBody>
@@ -21441,8 +21459,8 @@
         </p:nvSpPr>
         <p:spPr>
           <a:xfrm>
-            <a:off x="6080760" y="2971800"/>
-            <a:ext cx="2743200" cy="1188720"/>
+            <a:off x="6141567" y="2971800"/>
+            <a:ext cx="2773603" cy="1645920"/>
           </a:xfrm>
           <a:prstGeom prst="rect">
             <a:avLst/>
@@ -21486,8 +21504,8 @@
         </p:nvSpPr>
         <p:spPr>
           <a:xfrm>
-            <a:off x="6080760" y="2971800"/>
-            <a:ext cx="54864" cy="1188720"/>
+            <a:off x="6141567" y="2971800"/>
+            <a:ext cx="54864" cy="1645920"/>
           </a:xfrm>
           <a:prstGeom prst="rect">
             <a:avLst/>
@@ -21529,8 +21547,8 @@
         </p:nvSpPr>
         <p:spPr>
           <a:xfrm>
-            <a:off x="6208776" y="3063240"/>
-            <a:ext cx="2560320" cy="310896"/>
+            <a:off x="6269583" y="3063240"/>
+            <a:ext cx="2590723" cy="310896"/>
           </a:xfrm>
           <a:prstGeom prst="rect">
             <a:avLst/>
@@ -21545,7 +21563,7 @@
           <a:p>
             <a:pPr algn="l"/>
             <a:r>
-              <a:rPr sz="950" b="1" i="0">
+              <a:rPr sz="1050" b="1" i="0">
                 <a:solidFill>
                   <a:srgbClr val="16325C"/>
                 </a:solidFill>
@@ -21554,12 +21572,12 @@
               <a:t>💰</a:t>
             </a:r>
             <a:r>
-              <a:rPr sz="950" b="1" i="0">
+              <a:rPr sz="1050" b="1" i="0">
                 <a:solidFill>
                   <a:srgbClr val="16325C"/>
                 </a:solidFill>
               </a:rPr>
-              <a:t> Negotiation Power</a:t>
+              <a:t> Negotiation</a:t>
             </a:r>
           </a:p>
         </p:txBody>
@@ -21572,8 +21590,8 @@
         </p:nvSpPr>
         <p:spPr>
           <a:xfrm>
-            <a:off x="6208776" y="3355848"/>
-            <a:ext cx="2560320" cy="694944"/>
+            <a:off x="6269583" y="3355848"/>
+            <a:ext cx="2590723" cy="1152144"/>
           </a:xfrm>
           <a:prstGeom prst="rect">
             <a:avLst/>
@@ -21588,12 +21606,12 @@
           <a:p>
             <a:pPr algn="l"/>
             <a:r>
-              <a:rPr sz="850" b="0" i="0">
+              <a:rPr sz="950" b="0" i="0">
                 <a:solidFill>
                   <a:srgbClr val="3A4356"/>
                 </a:solidFill>
               </a:rPr>
-              <a:t>Should-cost models give buyers a defensible floor price for every part. Supplier margins become visible and challengeable with engineering data, not opinion.</a:t>
+              <a:t>A floor price you can defend, part by part. Supplier margin becomes visible instead of assumed.</a:t>
             </a:r>
           </a:p>
         </p:txBody>
@@ -21606,8 +21624,8 @@
         </p:nvSpPr>
         <p:spPr>
           <a:xfrm>
-            <a:off x="8915400" y="2971800"/>
-            <a:ext cx="2743200" cy="1188720"/>
+            <a:off x="9006611" y="2971800"/>
+            <a:ext cx="2773603" cy="1645920"/>
           </a:xfrm>
           <a:prstGeom prst="rect">
             <a:avLst/>
@@ -21651,8 +21669,8 @@
         </p:nvSpPr>
         <p:spPr>
           <a:xfrm>
-            <a:off x="8915400" y="2971800"/>
-            <a:ext cx="54864" cy="1188720"/>
+            <a:off x="9006611" y="2971800"/>
+            <a:ext cx="54864" cy="1645920"/>
           </a:xfrm>
           <a:prstGeom prst="rect">
             <a:avLst/>
@@ -21694,8 +21712,8 @@
         </p:nvSpPr>
         <p:spPr>
           <a:xfrm>
-            <a:off x="9043416" y="3063240"/>
-            <a:ext cx="2560320" cy="310896"/>
+            <a:off x="9134627" y="3063240"/>
+            <a:ext cx="2590723" cy="310896"/>
           </a:xfrm>
           <a:prstGeom prst="rect">
             <a:avLst/>
@@ -21710,7 +21728,7 @@
           <a:p>
             <a:pPr algn="l"/>
             <a:r>
-              <a:rPr sz="950" b="1" i="0">
+              <a:rPr sz="1050" b="1" i="0">
                 <a:solidFill>
                   <a:srgbClr val="16325C"/>
                 </a:solidFill>
@@ -21719,12 +21737,12 @@
               <a:t>📐</a:t>
             </a:r>
             <a:r>
-              <a:rPr sz="950" b="1" i="0">
+              <a:rPr sz="1050" b="1" i="0">
                 <a:solidFill>
                   <a:srgbClr val="16325C"/>
                 </a:solidFill>
               </a:rPr>
-              <a:t> DFM at Concept Stage</a:t>
+              <a:t> Early Warning</a:t>
             </a:r>
           </a:p>
         </p:txBody>
@@ -21737,8 +21755,8 @@
         </p:nvSpPr>
         <p:spPr>
           <a:xfrm>
-            <a:off x="9043416" y="3355848"/>
-            <a:ext cx="2560320" cy="694944"/>
+            <a:off x="9134627" y="3355848"/>
+            <a:ext cx="2590723" cy="1152144"/>
           </a:xfrm>
           <a:prstGeom prst="rect">
             <a:avLst/>
@@ -21753,12 +21771,12 @@
           <a:p>
             <a:pPr algn="l"/>
             <a:r>
-              <a:rPr sz="850" b="0" i="0">
+              <a:rPr sz="950" b="0" i="0">
                 <a:solidFill>
                   <a:srgbClr val="3A4356"/>
                 </a:solidFill>
               </a:rPr>
-              <a:t>80% of cost is locked at design. DFM/DFA analysis at concept prevents expensive late-stage redesigns. Engineering issues caught when change is free.</a:t>
+              <a:t>Most of the cost is fixed at design. Problems surface while changing them is still free.</a:t>
             </a:r>
           </a:p>
         </p:txBody>
@@ -21771,8 +21789,8 @@
         </p:nvSpPr>
         <p:spPr>
           <a:xfrm>
-            <a:off x="411480" y="4251960"/>
-            <a:ext cx="2743200" cy="1188720"/>
+            <a:off x="411480" y="4709160"/>
+            <a:ext cx="2773603" cy="1645920"/>
           </a:xfrm>
           <a:prstGeom prst="rect">
             <a:avLst/>
@@ -21816,8 +21834,8 @@
         </p:nvSpPr>
         <p:spPr>
           <a:xfrm>
-            <a:off x="411480" y="4251960"/>
-            <a:ext cx="54864" cy="1188720"/>
+            <a:off x="411480" y="4709160"/>
+            <a:ext cx="54864" cy="1645920"/>
           </a:xfrm>
           <a:prstGeom prst="rect">
             <a:avLst/>
@@ -21859,8 +21877,8 @@
         </p:nvSpPr>
         <p:spPr>
           <a:xfrm>
-            <a:off x="539496" y="4343400"/>
-            <a:ext cx="2560320" cy="310896"/>
+            <a:off x="539496" y="4800600"/>
+            <a:ext cx="2590723" cy="310896"/>
           </a:xfrm>
           <a:prstGeom prst="rect">
             <a:avLst/>
@@ -21875,7 +21893,7 @@
           <a:p>
             <a:pPr algn="l"/>
             <a:r>
-              <a:rPr sz="950" b="1" i="0">
+              <a:rPr sz="1050" b="1" i="0">
                 <a:solidFill>
                   <a:srgbClr val="16325C"/>
                 </a:solidFill>
@@ -21884,12 +21902,12 @@
               <a:t>🌍</a:t>
             </a:r>
             <a:r>
-              <a:rPr sz="950" b="1" i="0">
+              <a:rPr sz="1050" b="1" i="0">
                 <a:solidFill>
                   <a:srgbClr val="16325C"/>
                 </a:solidFill>
               </a:rPr>
-              <a:t> Regional Arbitrage</a:t>
+              <a:t> Where to Build It</a:t>
             </a:r>
           </a:p>
         </p:txBody>
@@ -21902,8 +21920,8 @@
         </p:nvSpPr>
         <p:spPr>
           <a:xfrm>
-            <a:off x="539496" y="4636008"/>
-            <a:ext cx="2560320" cy="694944"/>
+            <a:off x="539496" y="5093208"/>
+            <a:ext cx="2590723" cy="1152144"/>
           </a:xfrm>
           <a:prstGeom prst="rect">
             <a:avLst/>
@@ -21918,12 +21936,12 @@
           <a:p>
             <a:pPr algn="l"/>
             <a:r>
-              <a:rPr sz="850" b="0" i="0">
+              <a:rPr sz="950" b="0" i="0">
                 <a:solidFill>
                   <a:srgbClr val="3A4356"/>
                 </a:solidFill>
               </a:rPr>
-              <a:t>Instantly compare cost across 20 regions. Identify LCC sourcing opportunities. Quantify make-vs-buy with real data — not assumptions.</a:t>
+              <a:t>Compare 20 regions in one click. Make-vs-buy answered with real rates.</a:t>
             </a:r>
           </a:p>
         </p:txBody>
@@ -21936,8 +21954,8 @@
         </p:nvSpPr>
         <p:spPr>
           <a:xfrm>
-            <a:off x="3246120" y="4251960"/>
-            <a:ext cx="2743200" cy="1188720"/>
+            <a:off x="3276523" y="4709160"/>
+            <a:ext cx="2773603" cy="1645920"/>
           </a:xfrm>
           <a:prstGeom prst="rect">
             <a:avLst/>
@@ -21981,8 +21999,8 @@
         </p:nvSpPr>
         <p:spPr>
           <a:xfrm>
-            <a:off x="3246120" y="4251960"/>
-            <a:ext cx="54864" cy="1188720"/>
+            <a:off x="3276523" y="4709160"/>
+            <a:ext cx="54864" cy="1645920"/>
           </a:xfrm>
           <a:prstGeom prst="rect">
             <a:avLst/>
@@ -22024,8 +22042,8 @@
         </p:nvSpPr>
         <p:spPr>
           <a:xfrm>
-            <a:off x="3374136" y="4343400"/>
-            <a:ext cx="2560320" cy="310896"/>
+            <a:off x="3404539" y="4800600"/>
+            <a:ext cx="2590723" cy="310896"/>
           </a:xfrm>
           <a:prstGeom prst="rect">
             <a:avLst/>
@@ -22040,7 +22058,7 @@
           <a:p>
             <a:pPr algn="l"/>
             <a:r>
-              <a:rPr sz="950" b="1" i="0">
+              <a:rPr sz="1050" b="1" i="0">
                 <a:solidFill>
                   <a:srgbClr val="16325C"/>
                 </a:solidFill>
@@ -22049,12 +22067,12 @@
               <a:t>📊</a:t>
             </a:r>
             <a:r>
-              <a:rPr sz="950" b="1" i="0">
+              <a:rPr sz="1050" b="1" i="0">
                 <a:solidFill>
                   <a:srgbClr val="16325C"/>
                 </a:solidFill>
               </a:rPr>
-              <a:t> Standardised Methodology</a:t>
+              <a:t> One Method</a:t>
             </a:r>
           </a:p>
         </p:txBody>
@@ -22067,8 +22085,8 @@
         </p:nvSpPr>
         <p:spPr>
           <a:xfrm>
-            <a:off x="3374136" y="4636008"/>
-            <a:ext cx="2560320" cy="694944"/>
+            <a:off x="3404539" y="5093208"/>
+            <a:ext cx="2590723" cy="1152144"/>
           </a:xfrm>
           <a:prstGeom prst="rect">
             <a:avLst/>
@@ -22083,12 +22101,12 @@
           <a:p>
             <a:pPr algn="l"/>
             <a:r>
-              <a:rPr sz="850" b="0" i="0">
+              <a:rPr sz="950" b="0" i="0">
                 <a:solidFill>
                   <a:srgbClr val="3A4356"/>
                 </a:solidFill>
               </a:rPr>
-              <a:t>One consistent cost model across all teams, programmes, and regions. Full audit trail for every assumption. Leadership gets a single source of truth.</a:t>
+              <a:t>The same model everywhere, with every assumption on record. Leadership sees one set of numbers.</a:t>
             </a:r>
           </a:p>
         </p:txBody>
@@ -22101,8 +22119,8 @@
         </p:nvSpPr>
         <p:spPr>
           <a:xfrm>
-            <a:off x="6080760" y="4251960"/>
-            <a:ext cx="2743200" cy="1188720"/>
+            <a:off x="6141567" y="4709160"/>
+            <a:ext cx="2773603" cy="1645920"/>
           </a:xfrm>
           <a:prstGeom prst="rect">
             <a:avLst/>
@@ -22146,8 +22164,8 @@
         </p:nvSpPr>
         <p:spPr>
           <a:xfrm>
-            <a:off x="6080760" y="4251960"/>
-            <a:ext cx="54864" cy="1188720"/>
+            <a:off x="6141567" y="4709160"/>
+            <a:ext cx="54864" cy="1645920"/>
           </a:xfrm>
           <a:prstGeom prst="rect">
             <a:avLst/>
@@ -22189,8 +22207,8 @@
         </p:nvSpPr>
         <p:spPr>
           <a:xfrm>
-            <a:off x="6208776" y="4343400"/>
-            <a:ext cx="2560320" cy="310896"/>
+            <a:off x="6269583" y="4800600"/>
+            <a:ext cx="2590723" cy="310896"/>
           </a:xfrm>
           <a:prstGeom prst="rect">
             <a:avLst/>
@@ -22205,7 +22223,7 @@
           <a:p>
             <a:pPr algn="l"/>
             <a:r>
-              <a:rPr sz="950" b="1" i="0">
+              <a:rPr sz="1050" b="1" i="0">
                 <a:solidFill>
                   <a:srgbClr val="16325C"/>
                 </a:solidFill>
@@ -22214,12 +22232,12 @@
               <a:t>📉</a:t>
             </a:r>
             <a:r>
-              <a:rPr sz="950" b="1" i="0">
+              <a:rPr sz="1050" b="1" i="0">
                 <a:solidFill>
                   <a:srgbClr val="16325C"/>
                 </a:solidFill>
               </a:rPr>
-              <a:t> Volume Optimisation</a:t>
+              <a:t> The Right Volume</a:t>
             </a:r>
           </a:p>
         </p:txBody>
@@ -22232,8 +22250,8 @@
         </p:nvSpPr>
         <p:spPr>
           <a:xfrm>
-            <a:off x="6208776" y="4636008"/>
-            <a:ext cx="2560320" cy="694944"/>
+            <a:off x="6269583" y="5093208"/>
+            <a:ext cx="2590723" cy="1152144"/>
           </a:xfrm>
           <a:prstGeom prst="rect">
             <a:avLst/>
@@ -22248,12 +22266,12 @@
           <a:p>
             <a:pPr algn="l"/>
             <a:r>
-              <a:rPr sz="850" b="0" i="0">
+              <a:rPr sz="950" b="0" i="0">
                 <a:solidFill>
                   <a:srgbClr val="3A4356"/>
                 </a:solidFill>
               </a:rPr>
-              <a:t>Learning curve modelling shows cost reduction with volume. Identify the volume at which a new process becomes cost-competitive.</a:t>
+              <a:t>See what the part costs as volume grows, and when a new process starts to pay.</a:t>
             </a:r>
           </a:p>
         </p:txBody>
@@ -22266,8 +22284,8 @@
         </p:nvSpPr>
         <p:spPr>
           <a:xfrm>
-            <a:off x="8915400" y="4251960"/>
-            <a:ext cx="2743200" cy="1188720"/>
+            <a:off x="9006611" y="4709160"/>
+            <a:ext cx="2773603" cy="1645920"/>
           </a:xfrm>
           <a:prstGeom prst="rect">
             <a:avLst/>
@@ -22311,8 +22329,8 @@
         </p:nvSpPr>
         <p:spPr>
           <a:xfrm>
-            <a:off x="8915400" y="4251960"/>
-            <a:ext cx="54864" cy="1188720"/>
+            <a:off x="9006611" y="4709160"/>
+            <a:ext cx="54864" cy="1645920"/>
           </a:xfrm>
           <a:prstGeom prst="rect">
             <a:avLst/>
@@ -22354,8 +22372,8 @@
         </p:nvSpPr>
         <p:spPr>
           <a:xfrm>
-            <a:off x="9043416" y="4343400"/>
-            <a:ext cx="2560320" cy="310896"/>
+            <a:off x="9134627" y="4800600"/>
+            <a:ext cx="2590723" cy="310896"/>
           </a:xfrm>
           <a:prstGeom prst="rect">
             <a:avLst/>
@@ -22370,7 +22388,7 @@
           <a:p>
             <a:pPr algn="l"/>
             <a:r>
-              <a:rPr sz="950" b="1" i="0">
+              <a:rPr sz="1050" b="1" i="0">
                 <a:solidFill>
                   <a:srgbClr val="16325C"/>
                 </a:solidFill>
@@ -22379,12 +22397,12 @@
               <a:t>☁️</a:t>
             </a:r>
             <a:r>
-              <a:rPr sz="950" b="1" i="0">
+              <a:rPr sz="1050" b="1" i="0">
                 <a:solidFill>
                   <a:srgbClr val="16325C"/>
                 </a:solidFill>
               </a:rPr>
-              <a:t> Team Collaboration</a:t>
+              <a:t> Shared Knowledge</a:t>
             </a:r>
           </a:p>
         </p:txBody>
@@ -22397,8 +22415,8 @@
         </p:nvSpPr>
         <p:spPr>
           <a:xfrm>
-            <a:off x="9043416" y="4636008"/>
-            <a:ext cx="2560320" cy="694944"/>
+            <a:off x="9134627" y="5093208"/>
+            <a:ext cx="2590723" cy="1152144"/>
           </a:xfrm>
           <a:prstGeom prst="rect">
             <a:avLst/>
@@ -22413,12 +22431,12 @@
           <a:p>
             <a:pPr algn="l"/>
             <a:r>
-              <a:rPr sz="850" b="0" i="0">
+              <a:rPr sz="950" b="0" i="0">
                 <a:solidFill>
                   <a:srgbClr val="3A4356"/>
                 </a:solidFill>
               </a:rPr>
-              <a:t>Cloud sync means all engineers share the same cost baseline. No more conflicting spreadsheets. Cost knowledge is captured, not locked in individuals.</a:t>
+              <a:t>One baseline the whole team works from. Cost know-how stays with the business, not one engineer.</a:t>
             </a:r>
           </a:p>
         </p:txBody>
@@ -22922,7 +22940,7 @@
         </p:nvSpPr>
         <p:spPr>
           <a:xfrm>
-            <a:off x="594360" y="2350008"/>
+            <a:off x="594360" y="2368296"/>
             <a:ext cx="54864" cy="54864"/>
           </a:xfrm>
           <a:prstGeom prst="rect">
@@ -22981,12 +22999,12 @@
           <a:p>
             <a:pPr algn="l"/>
             <a:r>
-              <a:rPr sz="800" b="0" i="0">
+              <a:rPr sz="900" b="0" i="0">
                 <a:solidFill>
                   <a:srgbClr val="3A4356"/>
                 </a:solidFill>
               </a:rPr>
-              <a:t>21 commodity should-cost models — fully parametric, engineering-grade</a:t>
+              <a:t>21 commodities costed to engineering depth</a:t>
             </a:r>
           </a:p>
         </p:txBody>
@@ -22999,7 +23017,7 @@
         </p:nvSpPr>
         <p:spPr>
           <a:xfrm>
-            <a:off x="594360" y="2660904"/>
+            <a:off x="594360" y="2811272"/>
             <a:ext cx="54864" cy="54864"/>
           </a:xfrm>
           <a:prstGeom prst="rect">
@@ -23042,7 +23060,7 @@
         </p:nvSpPr>
         <p:spPr>
           <a:xfrm>
-            <a:off x="768096" y="2542032"/>
+            <a:off x="768096" y="2674112"/>
             <a:ext cx="4846320" cy="274320"/>
           </a:xfrm>
           <a:prstGeom prst="rect">
@@ -23058,12 +23076,12 @@
           <a:p>
             <a:pPr algn="l"/>
             <a:r>
-              <a:rPr sz="800" b="0" i="0">
+              <a:rPr sz="900" b="0" i="0">
                 <a:solidFill>
                   <a:srgbClr val="3A4356"/>
                 </a:solidFill>
               </a:rPr>
-              <a:t>AI Agent — describe a part in plain English, AI builds the cost model</a:t>
+              <a:t>Describe a part in plain English — the model builds itself</a:t>
             </a:r>
           </a:p>
         </p:txBody>
@@ -23076,7 +23094,7 @@
         </p:nvSpPr>
         <p:spPr>
           <a:xfrm>
-            <a:off x="594360" y="2971800"/>
+            <a:off x="594360" y="3254248"/>
             <a:ext cx="54864" cy="54864"/>
           </a:xfrm>
           <a:prstGeom prst="rect">
@@ -23119,7 +23137,7 @@
         </p:nvSpPr>
         <p:spPr>
           <a:xfrm>
-            <a:off x="768096" y="2852928"/>
+            <a:off x="768096" y="3117088"/>
             <a:ext cx="4846320" cy="274320"/>
           </a:xfrm>
           <a:prstGeom prst="rect">
@@ -23135,12 +23153,12 @@
           <a:p>
             <a:pPr algn="l"/>
             <a:r>
-              <a:rPr sz="800" b="0" i="0">
+              <a:rPr sz="900" b="0" i="0">
                 <a:solidFill>
                   <a:srgbClr val="3A4356"/>
                 </a:solidFill>
               </a:rPr>
-              <a:t>AI CAD Analysis — STEP / photo → geometry → cost in minutes</a:t>
+              <a:t>Upload a CAD file or a photo, get a cost in minutes</a:t>
             </a:r>
           </a:p>
         </p:txBody>
@@ -23153,7 +23171,7 @@
         </p:nvSpPr>
         <p:spPr>
           <a:xfrm>
-            <a:off x="594360" y="3282696"/>
+            <a:off x="594360" y="3697224"/>
             <a:ext cx="54864" cy="54864"/>
           </a:xfrm>
           <a:prstGeom prst="rect">
@@ -23196,7 +23214,7 @@
         </p:nvSpPr>
         <p:spPr>
           <a:xfrm>
-            <a:off x="768096" y="3163824"/>
+            <a:off x="768096" y="3560064"/>
             <a:ext cx="4846320" cy="274320"/>
           </a:xfrm>
           <a:prstGeom prst="rect">
@@ -23212,12 +23230,12 @@
           <a:p>
             <a:pPr algn="l"/>
             <a:r>
-              <a:rPr sz="800" b="0" i="0">
+              <a:rPr sz="900" b="0" i="0">
                 <a:solidFill>
                   <a:srgbClr val="3A4356"/>
                 </a:solidFill>
               </a:rPr>
-              <a:t>Self-audit — re-checks every estimate, corrects known errors, geometry stays truth</a:t>
+              <a:t>Every estimate re-checked, and corrected, before you see it</a:t>
             </a:r>
           </a:p>
         </p:txBody>
@@ -23230,7 +23248,7 @@
         </p:nvSpPr>
         <p:spPr>
           <a:xfrm>
-            <a:off x="594360" y="3593592"/>
+            <a:off x="594360" y="4140200"/>
             <a:ext cx="54864" cy="54864"/>
           </a:xfrm>
           <a:prstGeom prst="rect">
@@ -23273,7 +23291,7 @@
         </p:nvSpPr>
         <p:spPr>
           <a:xfrm>
-            <a:off x="768096" y="3474720"/>
+            <a:off x="768096" y="4003040"/>
             <a:ext cx="4846320" cy="274320"/>
           </a:xfrm>
           <a:prstGeom prst="rect">
@@ -23289,12 +23307,12 @@
           <a:p>
             <a:pPr algn="l"/>
             <a:r>
-              <a:rPr sz="800" b="0" i="0">
+              <a:rPr sz="900" b="0" i="0">
                 <a:solidFill>
                   <a:srgbClr val="3A4356"/>
                 </a:solidFill>
               </a:rPr>
-              <a:t>Learns from actuals — bulk-import quotes, per-segment calibration + drift watch</a:t>
+              <a:t>Learns from the supplier quotes you already have</a:t>
             </a:r>
           </a:p>
         </p:txBody>
@@ -23307,7 +23325,7 @@
         </p:nvSpPr>
         <p:spPr>
           <a:xfrm>
-            <a:off x="594360" y="3904488"/>
+            <a:off x="594360" y="4583176"/>
             <a:ext cx="54864" cy="54864"/>
           </a:xfrm>
           <a:prstGeom prst="rect">
@@ -23350,7 +23368,7 @@
         </p:nvSpPr>
         <p:spPr>
           <a:xfrm>
-            <a:off x="768096" y="3785616"/>
+            <a:off x="768096" y="4446016"/>
             <a:ext cx="4846320" cy="274320"/>
           </a:xfrm>
           <a:prstGeom prst="rect">
@@ -23366,12 +23384,12 @@
           <a:p>
             <a:pPr algn="l"/>
             <a:r>
-              <a:rPr sz="800" b="0" i="0">
+              <a:rPr sz="900" b="0" i="0">
                 <a:solidFill>
                   <a:srgbClr val="3A4356"/>
                 </a:solidFill>
               </a:rPr>
-              <a:t>Universal machine-sizing — right press / tonnage picked across all commodities</a:t>
+              <a:t>Whole assemblies, not just single parts</a:t>
             </a:r>
           </a:p>
         </p:txBody>
@@ -23384,7 +23402,7 @@
         </p:nvSpPr>
         <p:spPr>
           <a:xfrm>
-            <a:off x="594360" y="4215384"/>
+            <a:off x="594360" y="5026152"/>
             <a:ext cx="54864" cy="54864"/>
           </a:xfrm>
           <a:prstGeom prst="rect">
@@ -23427,7 +23445,7 @@
         </p:nvSpPr>
         <p:spPr>
           <a:xfrm>
-            <a:off x="768096" y="4096512"/>
+            <a:off x="768096" y="4888992"/>
             <a:ext cx="4846320" cy="274320"/>
           </a:xfrm>
           <a:prstGeom prst="rect">
@@ -23443,12 +23461,12 @@
           <a:p>
             <a:pPr algn="l"/>
             <a:r>
-              <a:rPr sz="800" b="0" i="0">
+              <a:rPr sz="900" b="0" i="0">
                 <a:solidFill>
                   <a:srgbClr val="3A4356"/>
                 </a:solidFill>
               </a:rPr>
-              <a:t>Assembly BOM Rollup — multi-part, multi-commodity assemblies</a:t>
+              <a:t>Learning curve, quote comparison and scenarios</a:t>
             </a:r>
           </a:p>
         </p:txBody>
@@ -23461,7 +23479,7 @@
         </p:nvSpPr>
         <p:spPr>
           <a:xfrm>
-            <a:off x="594360" y="4526280"/>
+            <a:off x="594360" y="5469128"/>
             <a:ext cx="54864" cy="54864"/>
           </a:xfrm>
           <a:prstGeom prst="rect">
@@ -23504,7 +23522,7 @@
         </p:nvSpPr>
         <p:spPr>
           <a:xfrm>
-            <a:off x="768096" y="4407408"/>
+            <a:off x="768096" y="5331968"/>
             <a:ext cx="4846320" cy="274320"/>
           </a:xfrm>
           <a:prstGeom prst="rect">
@@ -23520,12 +23538,12 @@
           <a:p>
             <a:pPr algn="l"/>
             <a:r>
-              <a:rPr sz="800" b="0" i="0">
+              <a:rPr sz="900" b="0" i="0">
                 <a:solidFill>
                   <a:srgbClr val="3A4356"/>
                 </a:solidFill>
               </a:rPr>
-              <a:t>Learning Curve (Wright's Law) + Supplier Quote Comparison + A/B/C scenarios</a:t>
+              <a:t>20 regions and 10 currencies, switched automatically</a:t>
             </a:r>
           </a:p>
         </p:txBody>
@@ -23538,7 +23556,7 @@
         </p:nvSpPr>
         <p:spPr>
           <a:xfrm>
-            <a:off x="594360" y="4837176"/>
+            <a:off x="594360" y="5912104"/>
             <a:ext cx="54864" cy="54864"/>
           </a:xfrm>
           <a:prstGeom prst="rect">
@@ -23581,7 +23599,7 @@
         </p:nvSpPr>
         <p:spPr>
           <a:xfrm>
-            <a:off x="768096" y="4718304"/>
+            <a:off x="768096" y="5774944"/>
             <a:ext cx="4846320" cy="274320"/>
           </a:xfrm>
           <a:prstGeom prst="rect">
@@ -23597,12 +23615,12 @@
           <a:p>
             <a:pPr algn="l"/>
             <a:r>
-              <a:rPr sz="800" b="0" i="0">
+              <a:rPr sz="900" b="0" i="0">
                 <a:solidFill>
                   <a:srgbClr val="3A4356"/>
                 </a:solidFill>
               </a:rPr>
-              <a:t>DFM / DFA Intelligence — bolt-on AI layer, 1–10 scores</a:t>
+              <a:t>Excel and PDF reports, shared across the team</a:t>
             </a:r>
           </a:p>
         </p:txBody>
@@ -23610,314 +23628,6 @@
       <p:sp>
         <p:nvSpPr>
           <p:cNvPr id="32" name="Rectangle 31"/>
-          <p:cNvSpPr/>
-          <p:nvPr/>
-        </p:nvSpPr>
-        <p:spPr>
-          <a:xfrm>
-            <a:off x="594360" y="5148072"/>
-            <a:ext cx="54864" cy="54864"/>
-          </a:xfrm>
-          <a:prstGeom prst="rect">
-            <a:avLst/>
-          </a:prstGeom>
-          <a:solidFill>
-            <a:srgbClr val="2E8B57"/>
-          </a:solidFill>
-          <a:ln>
-            <a:noFill/>
-          </a:ln>
-        </p:spPr>
-        <p:style>
-          <a:lnRef idx="1">
-            <a:schemeClr val="accent1"/>
-          </a:lnRef>
-          <a:fillRef idx="3">
-            <a:schemeClr val="accent1"/>
-          </a:fillRef>
-          <a:effectRef idx="2">
-            <a:schemeClr val="accent1"/>
-          </a:effectRef>
-          <a:fontRef idx="minor">
-            <a:schemeClr val="lt1"/>
-          </a:fontRef>
-        </p:style>
-        <p:txBody>
-          <a:bodyPr rtlCol="0" anchor="ctr"/>
-          <a:lstStyle/>
-          <a:p>
-            <a:pPr algn="ctr"/>
-          </a:p>
-        </p:txBody>
-      </p:sp>
-      <p:sp>
-        <p:nvSpPr>
-          <p:cNvPr id="33" name="TextBox 32"/>
-          <p:cNvSpPr txBox="1"/>
-          <p:nvPr/>
-        </p:nvSpPr>
-        <p:spPr>
-          <a:xfrm>
-            <a:off x="768096" y="5029200"/>
-            <a:ext cx="4846320" cy="274320"/>
-          </a:xfrm>
-          <a:prstGeom prst="rect">
-            <a:avLst/>
-          </a:prstGeom>
-          <a:noFill/>
-        </p:spPr>
-        <p:txBody>
-          <a:bodyPr wrap="square">
-            <a:spAutoFit/>
-          </a:bodyPr>
-          <a:lstStyle/>
-          <a:p>
-            <a:pPr algn="l"/>
-            <a:r>
-              <a:rPr sz="800" b="0" i="0">
-                <a:solidFill>
-                  <a:srgbClr val="3A4356"/>
-                </a:solidFill>
-              </a:rPr>
-              <a:t>20 global regions · 10 currencies with live auto-switching</a:t>
-            </a:r>
-          </a:p>
-        </p:txBody>
-      </p:sp>
-      <p:sp>
-        <p:nvSpPr>
-          <p:cNvPr id="34" name="Rectangle 33"/>
-          <p:cNvSpPr/>
-          <p:nvPr/>
-        </p:nvSpPr>
-        <p:spPr>
-          <a:xfrm>
-            <a:off x="594360" y="5458968"/>
-            <a:ext cx="54864" cy="54864"/>
-          </a:xfrm>
-          <a:prstGeom prst="rect">
-            <a:avLst/>
-          </a:prstGeom>
-          <a:solidFill>
-            <a:srgbClr val="2E8B57"/>
-          </a:solidFill>
-          <a:ln>
-            <a:noFill/>
-          </a:ln>
-        </p:spPr>
-        <p:style>
-          <a:lnRef idx="1">
-            <a:schemeClr val="accent1"/>
-          </a:lnRef>
-          <a:fillRef idx="3">
-            <a:schemeClr val="accent1"/>
-          </a:fillRef>
-          <a:effectRef idx="2">
-            <a:schemeClr val="accent1"/>
-          </a:effectRef>
-          <a:fontRef idx="minor">
-            <a:schemeClr val="lt1"/>
-          </a:fontRef>
-        </p:style>
-        <p:txBody>
-          <a:bodyPr rtlCol="0" anchor="ctr"/>
-          <a:lstStyle/>
-          <a:p>
-            <a:pPr algn="ctr"/>
-          </a:p>
-        </p:txBody>
-      </p:sp>
-      <p:sp>
-        <p:nvSpPr>
-          <p:cNvPr id="35" name="TextBox 34"/>
-          <p:cNvSpPr txBox="1"/>
-          <p:nvPr/>
-        </p:nvSpPr>
-        <p:spPr>
-          <a:xfrm>
-            <a:off x="768096" y="5340096"/>
-            <a:ext cx="4846320" cy="274320"/>
-          </a:xfrm>
-          <a:prstGeom prst="rect">
-            <a:avLst/>
-          </a:prstGeom>
-          <a:noFill/>
-        </p:spPr>
-        <p:txBody>
-          <a:bodyPr wrap="square">
-            <a:spAutoFit/>
-          </a:bodyPr>
-          <a:lstStyle/>
-          <a:p>
-            <a:pPr algn="l"/>
-            <a:r>
-              <a:rPr sz="800" b="0" i="0">
-                <a:solidFill>
-                  <a:srgbClr val="3A4356"/>
-                </a:solidFill>
-              </a:rPr>
-              <a:t>6-sheet Excel + professional PDF report with part photo</a:t>
-            </a:r>
-          </a:p>
-        </p:txBody>
-      </p:sp>
-      <p:sp>
-        <p:nvSpPr>
-          <p:cNvPr id="36" name="Rectangle 35"/>
-          <p:cNvSpPr/>
-          <p:nvPr/>
-        </p:nvSpPr>
-        <p:spPr>
-          <a:xfrm>
-            <a:off x="594360" y="5769864"/>
-            <a:ext cx="54864" cy="54864"/>
-          </a:xfrm>
-          <a:prstGeom prst="rect">
-            <a:avLst/>
-          </a:prstGeom>
-          <a:solidFill>
-            <a:srgbClr val="2E8B57"/>
-          </a:solidFill>
-          <a:ln>
-            <a:noFill/>
-          </a:ln>
-        </p:spPr>
-        <p:style>
-          <a:lnRef idx="1">
-            <a:schemeClr val="accent1"/>
-          </a:lnRef>
-          <a:fillRef idx="3">
-            <a:schemeClr val="accent1"/>
-          </a:fillRef>
-          <a:effectRef idx="2">
-            <a:schemeClr val="accent1"/>
-          </a:effectRef>
-          <a:fontRef idx="minor">
-            <a:schemeClr val="lt1"/>
-          </a:fontRef>
-        </p:style>
-        <p:txBody>
-          <a:bodyPr rtlCol="0" anchor="ctr"/>
-          <a:lstStyle/>
-          <a:p>
-            <a:pPr algn="ctr"/>
-          </a:p>
-        </p:txBody>
-      </p:sp>
-      <p:sp>
-        <p:nvSpPr>
-          <p:cNvPr id="37" name="TextBox 36"/>
-          <p:cNvSpPr txBox="1"/>
-          <p:nvPr/>
-        </p:nvSpPr>
-        <p:spPr>
-          <a:xfrm>
-            <a:off x="768096" y="5650992"/>
-            <a:ext cx="4846320" cy="274320"/>
-          </a:xfrm>
-          <a:prstGeom prst="rect">
-            <a:avLst/>
-          </a:prstGeom>
-          <a:noFill/>
-        </p:spPr>
-        <p:txBody>
-          <a:bodyPr wrap="square">
-            <a:spAutoFit/>
-          </a:bodyPr>
-          <a:lstStyle/>
-          <a:p>
-            <a:pPr algn="l"/>
-            <a:r>
-              <a:rPr sz="800" b="0" i="0">
-                <a:solidFill>
-                  <a:srgbClr val="3A4356"/>
-                </a:solidFill>
-              </a:rPr>
-              <a:t>Cloud sync, team sharing &amp; secure JWT authentication</a:t>
-            </a:r>
-          </a:p>
-        </p:txBody>
-      </p:sp>
-      <p:sp>
-        <p:nvSpPr>
-          <p:cNvPr id="38" name="Rectangle 37"/>
-          <p:cNvSpPr/>
-          <p:nvPr/>
-        </p:nvSpPr>
-        <p:spPr>
-          <a:xfrm>
-            <a:off x="594360" y="6080760"/>
-            <a:ext cx="54864" cy="54864"/>
-          </a:xfrm>
-          <a:prstGeom prst="rect">
-            <a:avLst/>
-          </a:prstGeom>
-          <a:solidFill>
-            <a:srgbClr val="2E8B57"/>
-          </a:solidFill>
-          <a:ln>
-            <a:noFill/>
-          </a:ln>
-        </p:spPr>
-        <p:style>
-          <a:lnRef idx="1">
-            <a:schemeClr val="accent1"/>
-          </a:lnRef>
-          <a:fillRef idx="3">
-            <a:schemeClr val="accent1"/>
-          </a:fillRef>
-          <a:effectRef idx="2">
-            <a:schemeClr val="accent1"/>
-          </a:effectRef>
-          <a:fontRef idx="minor">
-            <a:schemeClr val="lt1"/>
-          </a:fontRef>
-        </p:style>
-        <p:txBody>
-          <a:bodyPr rtlCol="0" anchor="ctr"/>
-          <a:lstStyle/>
-          <a:p>
-            <a:pPr algn="ctr"/>
-          </a:p>
-        </p:txBody>
-      </p:sp>
-      <p:sp>
-        <p:nvSpPr>
-          <p:cNvPr id="39" name="TextBox 38"/>
-          <p:cNvSpPr txBox="1"/>
-          <p:nvPr/>
-        </p:nvSpPr>
-        <p:spPr>
-          <a:xfrm>
-            <a:off x="768096" y="5961888"/>
-            <a:ext cx="4846320" cy="274320"/>
-          </a:xfrm>
-          <a:prstGeom prst="rect">
-            <a:avLst/>
-          </a:prstGeom>
-          <a:noFill/>
-        </p:spPr>
-        <p:txBody>
-          <a:bodyPr wrap="square">
-            <a:spAutoFit/>
-          </a:bodyPr>
-          <a:lstStyle/>
-          <a:p>
-            <a:pPr algn="l"/>
-            <a:r>
-              <a:rPr sz="800" b="0" i="0">
-                <a:solidFill>
-                  <a:srgbClr val="3A4356"/>
-                </a:solidFill>
-              </a:rPr>
-              <a:t>1,777 automated tests · CAD engine ships in a CI-verified container</a:t>
-            </a:r>
-          </a:p>
-        </p:txBody>
-      </p:sp>
-      <p:sp>
-        <p:nvSpPr>
-          <p:cNvPr id="40" name="Rectangle 39"/>
           <p:cNvSpPr/>
           <p:nvPr/>
         </p:nvSpPr>
@@ -23962,7 +23672,7 @@
       </p:sp>
       <p:sp>
         <p:nvSpPr>
-          <p:cNvPr id="41" name="Rectangle 40"/>
+          <p:cNvPr id="33" name="Rectangle 32"/>
           <p:cNvSpPr/>
           <p:nvPr/>
         </p:nvSpPr>
@@ -24005,7 +23715,7 @@
       </p:sp>
       <p:sp>
         <p:nvSpPr>
-          <p:cNvPr id="42" name="TextBox 41"/>
+          <p:cNvPr id="34" name="TextBox 33"/>
           <p:cNvSpPr txBox="1"/>
           <p:nvPr/>
         </p:nvSpPr>
@@ -24039,7 +23749,7 @@
       </p:sp>
       <p:sp>
         <p:nvSpPr>
-          <p:cNvPr id="43" name="TextBox 42"/>
+          <p:cNvPr id="35" name="TextBox 34"/>
           <p:cNvSpPr txBox="1"/>
           <p:nvPr/>
         </p:nvSpPr>
@@ -24066,17 +23776,16 @@
                   <a:srgbClr val="3A4356"/>
                 </a:solidFill>
               </a:rPr>
-              <a:t>PLM/ERP integration connectors (Teamcenter, SAP)
-Cost-target waterfall dashboard for programme teams
-Multi-supplier quotation comparison matrix
-Harden the Fly.io cloud deploy to multi-tenant</a:t>
-            </a:r>
-          </a:p>
-        </p:txBody>
-      </p:sp>
-      <p:sp>
-        <p:nvSpPr>
-          <p:cNvPr id="44" name="Rectangle 43"/>
+              <a:t>Connect to Teamcenter and SAP
+Cost-target dashboard for programme teams
+Compare several suppliers side by side</a:t>
+            </a:r>
+          </a:p>
+        </p:txBody>
+      </p:sp>
+      <p:sp>
+        <p:nvSpPr>
+          <p:cNvPr id="36" name="Rectangle 35"/>
           <p:cNvSpPr/>
           <p:nvPr/>
         </p:nvSpPr>
@@ -24121,7 +23830,7 @@
       </p:sp>
       <p:sp>
         <p:nvSpPr>
-          <p:cNvPr id="45" name="Rectangle 44"/>
+          <p:cNvPr id="37" name="Rectangle 36"/>
           <p:cNvSpPr/>
           <p:nvPr/>
         </p:nvSpPr>
@@ -24164,7 +23873,7 @@
       </p:sp>
       <p:sp>
         <p:nvSpPr>
-          <p:cNvPr id="46" name="TextBox 45"/>
+          <p:cNvPr id="38" name="TextBox 37"/>
           <p:cNvSpPr txBox="1"/>
           <p:nvPr/>
         </p:nvSpPr>
@@ -24198,7 +23907,7 @@
       </p:sp>
       <p:sp>
         <p:nvSpPr>
-          <p:cNvPr id="47" name="TextBox 46"/>
+          <p:cNvPr id="39" name="TextBox 38"/>
           <p:cNvSpPr txBox="1"/>
           <p:nvPr/>
         </p:nvSpPr>
@@ -24225,17 +23934,16 @@
                   <a:srgbClr val="3A4356"/>
                 </a:solidFill>
               </a:rPr>
-              <a:t>Auto-tune calibration from a live ERP actuals feed
-Autonomous sourcing RFQ generation from should-cost output
-Executive portfolio analytics dashboard
-Wider CAD coverage — assemblies and IGES edge cases</a:t>
-            </a:r>
-          </a:p>
-        </p:txBody>
-      </p:sp>
-      <p:sp>
-        <p:nvSpPr>
-          <p:cNvPr id="48" name="Rectangle 47"/>
+              <a:t>Calibrate itself from live ERP actuals
+Draft the RFQ straight from the should-cost
+Portfolio view for the leadership team</a:t>
+            </a:r>
+          </a:p>
+        </p:txBody>
+      </p:sp>
+      <p:sp>
+        <p:nvSpPr>
+          <p:cNvPr id="40" name="Rectangle 39"/>
           <p:cNvSpPr/>
           <p:nvPr/>
         </p:nvSpPr>
@@ -24280,7 +23988,7 @@
       </p:sp>
       <p:sp>
         <p:nvSpPr>
-          <p:cNvPr id="49" name="Rectangle 48"/>
+          <p:cNvPr id="41" name="Rectangle 40"/>
           <p:cNvSpPr/>
           <p:nvPr/>
         </p:nvSpPr>
@@ -24323,7 +24031,7 @@
       </p:sp>
       <p:sp>
         <p:nvSpPr>
-          <p:cNvPr id="50" name="TextBox 49"/>
+          <p:cNvPr id="42" name="TextBox 41"/>
           <p:cNvSpPr txBox="1"/>
           <p:nvPr/>
         </p:nvSpPr>
@@ -24357,7 +24065,7 @@
       </p:sp>
       <p:sp>
         <p:nvSpPr>
-          <p:cNvPr id="51" name="TextBox 50"/>
+          <p:cNvPr id="43" name="TextBox 42"/>
           <p:cNvSpPr txBox="1"/>
           <p:nvPr/>
         </p:nvSpPr>
@@ -24384,17 +24092,16 @@
                   <a:srgbClr val="3A4356"/>
                 </a:solidFill>
               </a:rPr>
-              <a:t>Digital Twin cost model (live update as the design changes)
-Generative AI component redesign suggestions
-Supplier risk scoring + supply-chain resilience index
-Mobile app for shop-floor and supplier visits</a:t>
-            </a:r>
-          </a:p>
-        </p:txBody>
-      </p:sp>
-      <p:sp>
-        <p:nvSpPr>
-          <p:cNvPr id="52" name="Rectangle 51"/>
+              <a:t>Cost that updates as the design changes
+AI suggestions for redesigning the part
+Supplier risk scoring · mobile app for plant visits</a:t>
+            </a:r>
+          </a:p>
+        </p:txBody>
+      </p:sp>
+      <p:sp>
+        <p:nvSpPr>
+          <p:cNvPr id="44" name="Rectangle 43"/>
           <p:cNvSpPr/>
           <p:nvPr/>
         </p:nvSpPr>
@@ -24439,7 +24146,7 @@
       </p:sp>
       <p:sp>
         <p:nvSpPr>
-          <p:cNvPr id="53" name="Rectangle 52"/>
+          <p:cNvPr id="45" name="Rectangle 44"/>
           <p:cNvSpPr/>
           <p:nvPr/>
         </p:nvSpPr>
@@ -24482,7 +24189,7 @@
       </p:sp>
       <p:sp>
         <p:nvSpPr>
-          <p:cNvPr id="54" name="TextBox 53"/>
+          <p:cNvPr id="46" name="TextBox 45"/>
           <p:cNvSpPr txBox="1"/>
           <p:nvPr/>
         </p:nvSpPr>
@@ -24525,7 +24232,7 @@
       </p:sp>
       <p:sp>
         <p:nvSpPr>
-          <p:cNvPr id="55" name="TextBox 54"/>
+          <p:cNvPr id="47" name="TextBox 46"/>
           <p:cNvSpPr txBox="1"/>
           <p:nvPr/>
         </p:nvSpPr>
@@ -24547,22 +24254,22 @@
           <a:p>
             <a:pPr algn="l"/>
             <a:r>
-              <a:rPr sz="800" b="0" i="0">
+              <a:rPr sz="850" b="0" i="0">
                 <a:solidFill>
                   <a:srgbClr val="3A4356"/>
                 </a:solidFill>
               </a:rPr>
-              <a:t>• Pilot scope: 2–3 commodity families, one programme team
-• Duration: 4–6 weeks with real parts vs supplier quotes
-• Success metric: ≥15% supplier price reduction identified per part
-• Contact: Avinash Bhosale — Cost Engineering &amp; Digital Innovation</a:t>
-            </a:r>
-          </a:p>
-        </p:txBody>
-      </p:sp>
-      <p:sp>
-        <p:nvSpPr>
-          <p:cNvPr id="56" name="Rectangle 55"/>
+              <a:t>• Two or three commodities, one programme team
+• Four to six weeks, on real parts against real quotes
+• We call it a success at 15% price reduction found per part
+• Avinash Bhosale — Cost Engineering &amp; Digital Innovation</a:t>
+            </a:r>
+          </a:p>
+        </p:txBody>
+      </p:sp>
+      <p:sp>
+        <p:nvSpPr>
+          <p:cNvPr id="48" name="Rectangle 47"/>
           <p:cNvSpPr/>
           <p:nvPr/>
         </p:nvSpPr>
@@ -24607,7 +24314,7 @@
       </p:sp>
       <p:sp>
         <p:nvSpPr>
-          <p:cNvPr id="57" name="TextBox 56"/>
+          <p:cNvPr id="49" name="TextBox 48"/>
           <p:cNvSpPr txBox="1"/>
           <p:nvPr/>
         </p:nvSpPr>

--- a/CostVision-Executive-Presentation.pptx
+++ b/CostVision-Executive-Presentation.pptx
@@ -4,6 +4,9 @@
   <p:sldMasterIdLst>
     <p:sldMasterId id="2147483648" r:id="rId1"/>
   </p:sldMasterIdLst>
+  <p:notesMasterIdLst>
+    <p:notesMasterId r:id="rId8"/>
+  </p:notesMasterIdLst>
   <p:sldIdLst>
     <p:sldId id="256" r:id="rId7"/>
     <p:sldId id="257" r:id="rId9"/>
@@ -25,7 +28,7 @@
     <p:sldId id="273" r:id="rId25"/>
     <p:sldId id="274" r:id="rId26"/>
   </p:sldIdLst>
-  <p:sldSz cx="12191695" cy="6858000" type="screen4x3"/>
+  <p:sldSz cx="12191695" cy="6858000"/>
   <p:notesSz cx="6858000" cy="9144000"/>
   <p:defaultTextStyle>
     <a:defPPr>
